--- a/2_database_design/2_database_design.pptx
+++ b/2_database_design/2_database_design.pptx
@@ -5,7 +5,7 @@
     <p:sldMasterId id="2147483648" r:id="rId1"/>
   </p:sldMasterIdLst>
   <p:notesMasterIdLst>
-    <p:notesMasterId r:id="rId62"/>
+    <p:notesMasterId r:id="rId63"/>
   </p:notesMasterIdLst>
   <p:sldIdLst>
     <p:sldId id="256" r:id="rId2"/>
@@ -32,42 +32,43 @@
     <p:sldId id="360" r:id="rId23"/>
     <p:sldId id="321" r:id="rId24"/>
     <p:sldId id="266" r:id="rId25"/>
-    <p:sldId id="316" r:id="rId26"/>
-    <p:sldId id="396" r:id="rId27"/>
-    <p:sldId id="401" r:id="rId28"/>
-    <p:sldId id="397" r:id="rId29"/>
-    <p:sldId id="357" r:id="rId30"/>
-    <p:sldId id="319" r:id="rId31"/>
-    <p:sldId id="323" r:id="rId32"/>
-    <p:sldId id="296" r:id="rId33"/>
-    <p:sldId id="335" r:id="rId34"/>
-    <p:sldId id="362" r:id="rId35"/>
-    <p:sldId id="337" r:id="rId36"/>
-    <p:sldId id="363" r:id="rId37"/>
-    <p:sldId id="364" r:id="rId38"/>
-    <p:sldId id="334" r:id="rId39"/>
-    <p:sldId id="365" r:id="rId40"/>
-    <p:sldId id="390" r:id="rId41"/>
-    <p:sldId id="366" r:id="rId42"/>
-    <p:sldId id="391" r:id="rId43"/>
-    <p:sldId id="393" r:id="rId44"/>
-    <p:sldId id="333" r:id="rId45"/>
-    <p:sldId id="392" r:id="rId46"/>
-    <p:sldId id="343" r:id="rId47"/>
-    <p:sldId id="377" r:id="rId48"/>
-    <p:sldId id="380" r:id="rId49"/>
-    <p:sldId id="378" r:id="rId50"/>
-    <p:sldId id="398" r:id="rId51"/>
-    <p:sldId id="394" r:id="rId52"/>
-    <p:sldId id="367" r:id="rId53"/>
-    <p:sldId id="372" r:id="rId54"/>
-    <p:sldId id="374" r:id="rId55"/>
-    <p:sldId id="373" r:id="rId56"/>
-    <p:sldId id="297" r:id="rId57"/>
-    <p:sldId id="376" r:id="rId58"/>
-    <p:sldId id="375" r:id="rId59"/>
-    <p:sldId id="341" r:id="rId60"/>
-    <p:sldId id="342" r:id="rId61"/>
+    <p:sldId id="404" r:id="rId26"/>
+    <p:sldId id="316" r:id="rId27"/>
+    <p:sldId id="396" r:id="rId28"/>
+    <p:sldId id="401" r:id="rId29"/>
+    <p:sldId id="397" r:id="rId30"/>
+    <p:sldId id="357" r:id="rId31"/>
+    <p:sldId id="319" r:id="rId32"/>
+    <p:sldId id="323" r:id="rId33"/>
+    <p:sldId id="296" r:id="rId34"/>
+    <p:sldId id="335" r:id="rId35"/>
+    <p:sldId id="362" r:id="rId36"/>
+    <p:sldId id="337" r:id="rId37"/>
+    <p:sldId id="363" r:id="rId38"/>
+    <p:sldId id="364" r:id="rId39"/>
+    <p:sldId id="334" r:id="rId40"/>
+    <p:sldId id="365" r:id="rId41"/>
+    <p:sldId id="390" r:id="rId42"/>
+    <p:sldId id="366" r:id="rId43"/>
+    <p:sldId id="391" r:id="rId44"/>
+    <p:sldId id="393" r:id="rId45"/>
+    <p:sldId id="333" r:id="rId46"/>
+    <p:sldId id="392" r:id="rId47"/>
+    <p:sldId id="343" r:id="rId48"/>
+    <p:sldId id="377" r:id="rId49"/>
+    <p:sldId id="380" r:id="rId50"/>
+    <p:sldId id="378" r:id="rId51"/>
+    <p:sldId id="398" r:id="rId52"/>
+    <p:sldId id="394" r:id="rId53"/>
+    <p:sldId id="367" r:id="rId54"/>
+    <p:sldId id="372" r:id="rId55"/>
+    <p:sldId id="374" r:id="rId56"/>
+    <p:sldId id="373" r:id="rId57"/>
+    <p:sldId id="297" r:id="rId58"/>
+    <p:sldId id="376" r:id="rId59"/>
+    <p:sldId id="375" r:id="rId60"/>
+    <p:sldId id="341" r:id="rId61"/>
+    <p:sldId id="342" r:id="rId62"/>
   </p:sldIdLst>
   <p:sldSz cx="12192000" cy="6858000"/>
   <p:notesSz cx="6858000" cy="9144000"/>
@@ -673,7 +674,7 @@
           <a:p>
             <a:fld id="{F847AAA1-0A2D-4E17-BD7E-ECD1F2F24FF1}" type="slidenum">
               <a:rPr lang="en-NL" smtClean="0"/>
-              <a:t>31</a:t>
+              <a:t>32</a:t>
             </a:fld>
             <a:endParaRPr lang="en-NL"/>
           </a:p>
@@ -757,7 +758,7 @@
           <a:p>
             <a:fld id="{F847AAA1-0A2D-4E17-BD7E-ECD1F2F24FF1}" type="slidenum">
               <a:rPr lang="en-NL" smtClean="0"/>
-              <a:t>32</a:t>
+              <a:t>33</a:t>
             </a:fld>
             <a:endParaRPr lang="en-NL"/>
           </a:p>
@@ -841,7 +842,7 @@
           <a:p>
             <a:fld id="{F847AAA1-0A2D-4E17-BD7E-ECD1F2F24FF1}" type="slidenum">
               <a:rPr lang="en-NL" smtClean="0"/>
-              <a:t>33</a:t>
+              <a:t>34</a:t>
             </a:fld>
             <a:endParaRPr lang="en-NL"/>
           </a:p>
@@ -949,7 +950,7 @@
           <a:p>
             <a:fld id="{F847AAA1-0A2D-4E17-BD7E-ECD1F2F24FF1}" type="slidenum">
               <a:rPr lang="en-NL" smtClean="0"/>
-              <a:t>34</a:t>
+              <a:t>35</a:t>
             </a:fld>
             <a:endParaRPr lang="en-NL"/>
           </a:p>
@@ -1037,7 +1038,7 @@
           <a:p>
             <a:fld id="{F847AAA1-0A2D-4E17-BD7E-ECD1F2F24FF1}" type="slidenum">
               <a:rPr lang="en-NL" smtClean="0"/>
-              <a:t>35</a:t>
+              <a:t>36</a:t>
             </a:fld>
             <a:endParaRPr lang="en-NL"/>
           </a:p>
@@ -1145,7 +1146,7 @@
           <a:p>
             <a:fld id="{F847AAA1-0A2D-4E17-BD7E-ECD1F2F24FF1}" type="slidenum">
               <a:rPr lang="en-NL" smtClean="0"/>
-              <a:t>36</a:t>
+              <a:t>37</a:t>
             </a:fld>
             <a:endParaRPr lang="en-NL"/>
           </a:p>
@@ -1253,7 +1254,7 @@
           <a:p>
             <a:fld id="{F847AAA1-0A2D-4E17-BD7E-ECD1F2F24FF1}" type="slidenum">
               <a:rPr lang="en-NL" smtClean="0"/>
-              <a:t>37</a:t>
+              <a:t>38</a:t>
             </a:fld>
             <a:endParaRPr lang="en-NL"/>
           </a:p>
@@ -1373,7 +1374,7 @@
           <a:p>
             <a:fld id="{F847AAA1-0A2D-4E17-BD7E-ECD1F2F24FF1}" type="slidenum">
               <a:rPr lang="en-NL" smtClean="0"/>
-              <a:t>38</a:t>
+              <a:t>39</a:t>
             </a:fld>
             <a:endParaRPr lang="en-NL"/>
           </a:p>
@@ -1481,7 +1482,7 @@
           <a:p>
             <a:fld id="{F847AAA1-0A2D-4E17-BD7E-ECD1F2F24FF1}" type="slidenum">
               <a:rPr lang="en-NL" smtClean="0"/>
-              <a:t>39</a:t>
+              <a:t>40</a:t>
             </a:fld>
             <a:endParaRPr lang="en-NL"/>
           </a:p>
@@ -1589,7 +1590,7 @@
           <a:p>
             <a:fld id="{F847AAA1-0A2D-4E17-BD7E-ECD1F2F24FF1}" type="slidenum">
               <a:rPr lang="en-NL" smtClean="0"/>
-              <a:t>40</a:t>
+              <a:t>41</a:t>
             </a:fld>
             <a:endParaRPr lang="en-NL"/>
           </a:p>
@@ -1781,7 +1782,7 @@
           <a:p>
             <a:fld id="{F847AAA1-0A2D-4E17-BD7E-ECD1F2F24FF1}" type="slidenum">
               <a:rPr lang="en-NL" smtClean="0"/>
-              <a:t>41</a:t>
+              <a:t>42</a:t>
             </a:fld>
             <a:endParaRPr lang="en-NL"/>
           </a:p>
@@ -1889,7 +1890,7 @@
           <a:p>
             <a:fld id="{F847AAA1-0A2D-4E17-BD7E-ECD1F2F24FF1}" type="slidenum">
               <a:rPr lang="en-NL" smtClean="0"/>
-              <a:t>42</a:t>
+              <a:t>43</a:t>
             </a:fld>
             <a:endParaRPr lang="en-NL"/>
           </a:p>
@@ -1997,7 +1998,7 @@
           <a:p>
             <a:fld id="{F847AAA1-0A2D-4E17-BD7E-ECD1F2F24FF1}" type="slidenum">
               <a:rPr lang="en-NL" smtClean="0"/>
-              <a:t>43</a:t>
+              <a:t>44</a:t>
             </a:fld>
             <a:endParaRPr lang="en-NL"/>
           </a:p>
@@ -2081,7 +2082,7 @@
           <a:p>
             <a:fld id="{F847AAA1-0A2D-4E17-BD7E-ECD1F2F24FF1}" type="slidenum">
               <a:rPr lang="en-NL" smtClean="0"/>
-              <a:t>44</a:t>
+              <a:t>45</a:t>
             </a:fld>
             <a:endParaRPr lang="en-NL"/>
           </a:p>
@@ -2189,7 +2190,7 @@
           <a:p>
             <a:fld id="{F847AAA1-0A2D-4E17-BD7E-ECD1F2F24FF1}" type="slidenum">
               <a:rPr lang="en-NL" smtClean="0"/>
-              <a:t>45</a:t>
+              <a:t>46</a:t>
             </a:fld>
             <a:endParaRPr lang="en-NL"/>
           </a:p>
@@ -2297,7 +2298,7 @@
           <a:p>
             <a:fld id="{F847AAA1-0A2D-4E17-BD7E-ECD1F2F24FF1}" type="slidenum">
               <a:rPr lang="en-NL" smtClean="0"/>
-              <a:t>52</a:t>
+              <a:t>53</a:t>
             </a:fld>
             <a:endParaRPr lang="en-NL"/>
           </a:p>
@@ -2405,7 +2406,7 @@
           <a:p>
             <a:fld id="{F847AAA1-0A2D-4E17-BD7E-ECD1F2F24FF1}" type="slidenum">
               <a:rPr lang="en-NL" smtClean="0"/>
-              <a:t>53</a:t>
+              <a:t>54</a:t>
             </a:fld>
             <a:endParaRPr lang="en-NL"/>
           </a:p>
@@ -2513,7 +2514,7 @@
           <a:p>
             <a:fld id="{F847AAA1-0A2D-4E17-BD7E-ECD1F2F24FF1}" type="slidenum">
               <a:rPr lang="en-NL" smtClean="0"/>
-              <a:t>54</a:t>
+              <a:t>55</a:t>
             </a:fld>
             <a:endParaRPr lang="en-NL"/>
           </a:p>
@@ -2621,7 +2622,7 @@
           <a:p>
             <a:fld id="{F847AAA1-0A2D-4E17-BD7E-ECD1F2F24FF1}" type="slidenum">
               <a:rPr lang="en-NL" smtClean="0"/>
-              <a:t>55</a:t>
+              <a:t>56</a:t>
             </a:fld>
             <a:endParaRPr lang="en-NL"/>
           </a:p>
@@ -2705,7 +2706,7 @@
           <a:p>
             <a:fld id="{F847AAA1-0A2D-4E17-BD7E-ECD1F2F24FF1}" type="slidenum">
               <a:rPr lang="en-NL" smtClean="0"/>
-              <a:t>56</a:t>
+              <a:t>57</a:t>
             </a:fld>
             <a:endParaRPr lang="en-NL"/>
           </a:p>
@@ -2921,7 +2922,7 @@
           <a:p>
             <a:fld id="{F847AAA1-0A2D-4E17-BD7E-ECD1F2F24FF1}" type="slidenum">
               <a:rPr lang="en-NL" smtClean="0"/>
-              <a:t>57</a:t>
+              <a:t>58</a:t>
             </a:fld>
             <a:endParaRPr lang="en-NL"/>
           </a:p>
@@ -3029,7 +3030,7 @@
           <a:p>
             <a:fld id="{F847AAA1-0A2D-4E17-BD7E-ECD1F2F24FF1}" type="slidenum">
               <a:rPr lang="en-NL" smtClean="0"/>
-              <a:t>58</a:t>
+              <a:t>59</a:t>
             </a:fld>
             <a:endParaRPr lang="en-NL"/>
           </a:p>
@@ -3113,7 +3114,7 @@
           <a:p>
             <a:fld id="{F847AAA1-0A2D-4E17-BD7E-ECD1F2F24FF1}" type="slidenum">
               <a:rPr lang="en-NL" smtClean="0"/>
-              <a:t>59</a:t>
+              <a:t>60</a:t>
             </a:fld>
             <a:endParaRPr lang="en-NL"/>
           </a:p>
@@ -3675,7 +3676,7 @@
           <a:p>
             <a:fld id="{F847AAA1-0A2D-4E17-BD7E-ECD1F2F24FF1}" type="slidenum">
               <a:rPr lang="en-NL" smtClean="0"/>
-              <a:t>30</a:t>
+              <a:t>31</a:t>
             </a:fld>
             <a:endParaRPr lang="en-NL"/>
           </a:p>
@@ -16652,159 +16653,6 @@
       </p:sp>
       <p:grpSp>
         <p:nvGrpSpPr>
-          <p:cNvPr id="14" name="Group 13">
-            <a:extLst>
-              <a:ext uri="{FF2B5EF4-FFF2-40B4-BE49-F238E27FC236}">
-                <a16:creationId xmlns:a16="http://schemas.microsoft.com/office/drawing/2014/main" id="{FE30041F-F723-BB97-F5D0-C73B7C3A15D3}"/>
-              </a:ext>
-            </a:extLst>
-          </p:cNvPr>
-          <p:cNvGrpSpPr/>
-          <p:nvPr/>
-        </p:nvGrpSpPr>
-        <p:grpSpPr>
-          <a:xfrm>
-            <a:off x="838200" y="3750063"/>
-            <a:ext cx="4943962" cy="400110"/>
-            <a:chOff x="838200" y="3796152"/>
-            <a:chExt cx="4943962" cy="400110"/>
-          </a:xfrm>
-        </p:grpSpPr>
-        <p:grpSp>
-          <p:nvGrpSpPr>
-            <p:cNvPr id="13" name="Group 12">
-              <a:extLst>
-                <a:ext uri="{FF2B5EF4-FFF2-40B4-BE49-F238E27FC236}">
-                  <a16:creationId xmlns:a16="http://schemas.microsoft.com/office/drawing/2014/main" id="{E2FC3DDE-3C5A-4B47-BEFA-0CA198BDC7AB}"/>
-                </a:ext>
-              </a:extLst>
-            </p:cNvPr>
-            <p:cNvGrpSpPr/>
-            <p:nvPr/>
-          </p:nvGrpSpPr>
-          <p:grpSpPr>
-            <a:xfrm>
-              <a:off x="838200" y="3888329"/>
-              <a:ext cx="1078787" cy="215757"/>
-              <a:chOff x="1068512" y="1952090"/>
-              <a:chExt cx="1078787" cy="215757"/>
-            </a:xfrm>
-          </p:grpSpPr>
-          <p:cxnSp>
-            <p:nvCxnSpPr>
-              <p:cNvPr id="6" name="Straight Connector 5">
-                <a:extLst>
-                  <a:ext uri="{FF2B5EF4-FFF2-40B4-BE49-F238E27FC236}">
-                    <a16:creationId xmlns:a16="http://schemas.microsoft.com/office/drawing/2014/main" id="{7898ECB2-442C-4C64-9B9D-53C36826F850}"/>
-                  </a:ext>
-                </a:extLst>
-              </p:cNvPr>
-              <p:cNvCxnSpPr>
-                <a:cxnSpLocks/>
-              </p:cNvCxnSpPr>
-              <p:nvPr/>
-            </p:nvCxnSpPr>
-            <p:spPr>
-              <a:xfrm>
-                <a:off x="1068512" y="2059968"/>
-                <a:ext cx="1078787" cy="0"/>
-              </a:xfrm>
-              <a:prstGeom prst="line">
-                <a:avLst/>
-              </a:prstGeom>
-            </p:spPr>
-            <p:style>
-              <a:lnRef idx="3">
-                <a:schemeClr val="dk1"/>
-              </a:lnRef>
-              <a:fillRef idx="0">
-                <a:schemeClr val="dk1"/>
-              </a:fillRef>
-              <a:effectRef idx="2">
-                <a:schemeClr val="dk1"/>
-              </a:effectRef>
-              <a:fontRef idx="minor">
-                <a:schemeClr val="tx1"/>
-              </a:fontRef>
-            </p:style>
-          </p:cxnSp>
-          <p:cxnSp>
-            <p:nvCxnSpPr>
-              <p:cNvPr id="9" name="Straight Connector 8">
-                <a:extLst>
-                  <a:ext uri="{FF2B5EF4-FFF2-40B4-BE49-F238E27FC236}">
-                    <a16:creationId xmlns:a16="http://schemas.microsoft.com/office/drawing/2014/main" id="{1DD361B0-171E-4CF6-B8A4-BD58667EF4B8}"/>
-                  </a:ext>
-                </a:extLst>
-              </p:cNvPr>
-              <p:cNvCxnSpPr>
-                <a:cxnSpLocks/>
-              </p:cNvCxnSpPr>
-              <p:nvPr/>
-            </p:nvCxnSpPr>
-            <p:spPr>
-              <a:xfrm>
-                <a:off x="1837362" y="1952090"/>
-                <a:ext cx="0" cy="215757"/>
-              </a:xfrm>
-              <a:prstGeom prst="line">
-                <a:avLst/>
-              </a:prstGeom>
-            </p:spPr>
-            <p:style>
-              <a:lnRef idx="3">
-                <a:schemeClr val="dk1"/>
-              </a:lnRef>
-              <a:fillRef idx="0">
-                <a:schemeClr val="dk1"/>
-              </a:fillRef>
-              <a:effectRef idx="2">
-                <a:schemeClr val="dk1"/>
-              </a:effectRef>
-              <a:fontRef idx="minor">
-                <a:schemeClr val="tx1"/>
-              </a:fontRef>
-            </p:style>
-          </p:cxnSp>
-        </p:grpSp>
-        <p:sp>
-          <p:nvSpPr>
-            <p:cNvPr id="41" name="TextBox 40">
-              <a:extLst>
-                <a:ext uri="{FF2B5EF4-FFF2-40B4-BE49-F238E27FC236}">
-                  <a16:creationId xmlns:a16="http://schemas.microsoft.com/office/drawing/2014/main" id="{36CEA403-EEB4-4692-85B8-10B739C666A4}"/>
-                </a:ext>
-              </a:extLst>
-            </p:cNvPr>
-            <p:cNvSpPr txBox="1"/>
-            <p:nvPr/>
-          </p:nvSpPr>
-          <p:spPr>
-            <a:xfrm>
-              <a:off x="3000054" y="3796152"/>
-              <a:ext cx="2782108" cy="400110"/>
-            </a:xfrm>
-            <a:prstGeom prst="rect">
-              <a:avLst/>
-            </a:prstGeom>
-            <a:noFill/>
-          </p:spPr>
-          <p:txBody>
-            <a:bodyPr wrap="none" rtlCol="0">
-              <a:spAutoFit/>
-            </a:bodyPr>
-            <a:lstStyle/>
-            <a:p>
-              <a:r>
-                <a:rPr lang="nl-NL" sz="2000" noProof="0" dirty="0"/>
-                <a:t>Koppelt precies 1 record.</a:t>
-              </a:r>
-            </a:p>
-          </p:txBody>
-        </p:sp>
-      </p:grpSp>
-      <p:grpSp>
-        <p:nvGrpSpPr>
           <p:cNvPr id="17" name="Group 16">
             <a:extLst>
               <a:ext uri="{FF2B5EF4-FFF2-40B4-BE49-F238E27FC236}">
@@ -16818,144 +16666,49 @@
         <p:grpSpPr>
           <a:xfrm>
             <a:off x="838200" y="5488374"/>
-            <a:ext cx="5300021" cy="400110"/>
+            <a:ext cx="4962814" cy="400110"/>
             <a:chOff x="838200" y="5488374"/>
-            <a:chExt cx="5300021" cy="400110"/>
+            <a:chExt cx="4962814" cy="400110"/>
           </a:xfrm>
         </p:grpSpPr>
-        <p:grpSp>
-          <p:nvGrpSpPr>
-            <p:cNvPr id="27" name="Group 26">
+        <p:cxnSp>
+          <p:nvCxnSpPr>
+            <p:cNvPr id="16" name="Straight Connector 15">
               <a:extLst>
                 <a:ext uri="{FF2B5EF4-FFF2-40B4-BE49-F238E27FC236}">
-                  <a16:creationId xmlns:a16="http://schemas.microsoft.com/office/drawing/2014/main" id="{6D0305F8-8D9A-47F3-BAAA-E662B0A13A3B}"/>
+                  <a16:creationId xmlns:a16="http://schemas.microsoft.com/office/drawing/2014/main" id="{6B4252F8-7AC7-4F56-8C2B-0A04D93245BA}"/>
                 </a:ext>
               </a:extLst>
             </p:cNvPr>
-            <p:cNvGrpSpPr/>
+            <p:cNvCxnSpPr>
+              <a:cxnSpLocks/>
+            </p:cNvCxnSpPr>
             <p:nvPr/>
-          </p:nvGrpSpPr>
-          <p:grpSpPr>
+          </p:nvCxnSpPr>
+          <p:spPr>
             <a:xfrm>
-              <a:off x="838200" y="5567720"/>
-              <a:ext cx="1078788" cy="234592"/>
-              <a:chOff x="1068510" y="2917861"/>
-              <a:chExt cx="1078788" cy="234592"/>
+              <a:off x="838200" y="5684696"/>
+              <a:ext cx="1078787" cy="0"/>
             </a:xfrm>
-          </p:grpSpPr>
-          <p:cxnSp>
-            <p:nvCxnSpPr>
-              <p:cNvPr id="16" name="Straight Connector 15">
-                <a:extLst>
-                  <a:ext uri="{FF2B5EF4-FFF2-40B4-BE49-F238E27FC236}">
-                    <a16:creationId xmlns:a16="http://schemas.microsoft.com/office/drawing/2014/main" id="{6B4252F8-7AC7-4F56-8C2B-0A04D93245BA}"/>
-                  </a:ext>
-                </a:extLst>
-              </p:cNvPr>
-              <p:cNvCxnSpPr>
-                <a:cxnSpLocks/>
-              </p:cNvCxnSpPr>
-              <p:nvPr/>
-            </p:nvCxnSpPr>
-            <p:spPr>
-              <a:xfrm>
-                <a:off x="1068510" y="3034837"/>
-                <a:ext cx="1078787" cy="0"/>
-              </a:xfrm>
-              <a:prstGeom prst="line">
-                <a:avLst/>
-              </a:prstGeom>
-            </p:spPr>
-            <p:style>
-              <a:lnRef idx="3">
-                <a:schemeClr val="dk1"/>
-              </a:lnRef>
-              <a:fillRef idx="0">
-                <a:schemeClr val="dk1"/>
-              </a:fillRef>
-              <a:effectRef idx="2">
-                <a:schemeClr val="dk1"/>
-              </a:effectRef>
-              <a:fontRef idx="minor">
-                <a:schemeClr val="tx1"/>
-              </a:fontRef>
-            </p:style>
-          </p:cxnSp>
-          <p:cxnSp>
-            <p:nvCxnSpPr>
-              <p:cNvPr id="19" name="Straight Connector 18">
-                <a:extLst>
-                  <a:ext uri="{FF2B5EF4-FFF2-40B4-BE49-F238E27FC236}">
-                    <a16:creationId xmlns:a16="http://schemas.microsoft.com/office/drawing/2014/main" id="{8EF0103A-F854-47C3-9295-C90F59395CF0}"/>
-                  </a:ext>
-                </a:extLst>
-              </p:cNvPr>
-              <p:cNvCxnSpPr/>
-              <p:nvPr/>
-            </p:nvCxnSpPr>
-            <p:spPr>
-              <a:xfrm flipV="1">
-                <a:off x="1837362" y="2917861"/>
-                <a:ext cx="309936" cy="113015"/>
-              </a:xfrm>
-              <a:prstGeom prst="line">
-                <a:avLst/>
-              </a:prstGeom>
-            </p:spPr>
-            <p:style>
-              <a:lnRef idx="3">
-                <a:schemeClr val="dk1"/>
-              </a:lnRef>
-              <a:fillRef idx="0">
-                <a:schemeClr val="dk1"/>
-              </a:fillRef>
-              <a:effectRef idx="2">
-                <a:schemeClr val="dk1"/>
-              </a:effectRef>
-              <a:fontRef idx="minor">
-                <a:schemeClr val="tx1"/>
-              </a:fontRef>
-            </p:style>
-          </p:cxnSp>
-          <p:cxnSp>
-            <p:nvCxnSpPr>
-              <p:cNvPr id="20" name="Straight Connector 19">
-                <a:extLst>
-                  <a:ext uri="{FF2B5EF4-FFF2-40B4-BE49-F238E27FC236}">
-                    <a16:creationId xmlns:a16="http://schemas.microsoft.com/office/drawing/2014/main" id="{1090A655-3065-429A-A9AE-B8E6432F5857}"/>
-                  </a:ext>
-                </a:extLst>
-              </p:cNvPr>
-              <p:cNvCxnSpPr>
-                <a:cxnSpLocks/>
-              </p:cNvCxnSpPr>
-              <p:nvPr/>
-            </p:nvCxnSpPr>
-            <p:spPr>
-              <a:xfrm flipH="1" flipV="1">
-                <a:off x="1835652" y="3039438"/>
-                <a:ext cx="309936" cy="113015"/>
-              </a:xfrm>
-              <a:prstGeom prst="line">
-                <a:avLst/>
-              </a:prstGeom>
-            </p:spPr>
-            <p:style>
-              <a:lnRef idx="3">
-                <a:schemeClr val="dk1"/>
-              </a:lnRef>
-              <a:fillRef idx="0">
-                <a:schemeClr val="dk1"/>
-              </a:fillRef>
-              <a:effectRef idx="2">
-                <a:schemeClr val="dk1"/>
-              </a:effectRef>
-              <a:fontRef idx="minor">
-                <a:schemeClr val="tx1"/>
-              </a:fontRef>
-            </p:style>
-          </p:cxnSp>
-        </p:grpSp>
+            <a:prstGeom prst="line">
+              <a:avLst/>
+            </a:prstGeom>
+          </p:spPr>
+          <p:style>
+            <a:lnRef idx="3">
+              <a:schemeClr val="dk1"/>
+            </a:lnRef>
+            <a:fillRef idx="0">
+              <a:schemeClr val="dk1"/>
+            </a:fillRef>
+            <a:effectRef idx="2">
+              <a:schemeClr val="dk1"/>
+            </a:effectRef>
+            <a:fontRef idx="minor">
+              <a:schemeClr val="tx1"/>
+            </a:fontRef>
+          </p:style>
+        </p:cxnSp>
         <p:sp>
           <p:nvSpPr>
             <p:cNvPr id="42" name="TextBox 41">
@@ -16971,7 +16724,7 @@
           <p:spPr>
             <a:xfrm>
               <a:off x="3000054" y="5488374"/>
-              <a:ext cx="3138167" cy="400110"/>
+              <a:ext cx="2800960" cy="400110"/>
             </a:xfrm>
             <a:prstGeom prst="rect">
               <a:avLst/>
@@ -16986,7 +16739,7 @@
             <a:p>
               <a:r>
                 <a:rPr lang="nl-NL" sz="2000" noProof="0" dirty="0"/>
-                <a:t>Koppelt meer dan 1 records.</a:t>
+                <a:t>Koppelt minimaal 0 rijen.</a:t>
               </a:r>
             </a:p>
           </p:txBody>
@@ -17007,9 +16760,9 @@
         <p:grpSpPr>
           <a:xfrm>
             <a:off x="838201" y="2011753"/>
-            <a:ext cx="4698895" cy="400110"/>
+            <a:ext cx="4737624" cy="400110"/>
             <a:chOff x="838201" y="2011753"/>
-            <a:chExt cx="4698895" cy="400110"/>
+            <a:chExt cx="4737624" cy="400110"/>
           </a:xfrm>
         </p:grpSpPr>
         <p:grpSp>
@@ -17026,10 +16779,10 @@
           </p:nvGrpSpPr>
           <p:grpSpPr>
             <a:xfrm>
-              <a:off x="838201" y="2101929"/>
-              <a:ext cx="1078787" cy="219758"/>
-              <a:chOff x="1075360" y="3951383"/>
-              <a:chExt cx="1078787" cy="219758"/>
+              <a:off x="838201" y="2103930"/>
+              <a:ext cx="1078787" cy="215757"/>
+              <a:chOff x="1075360" y="3953384"/>
+              <a:chExt cx="1078787" cy="215757"/>
             </a:xfrm>
           </p:grpSpPr>
           <p:cxnSp>
@@ -17108,54 +16861,6 @@
               </a:fontRef>
             </p:style>
           </p:cxnSp>
-          <p:sp>
-            <p:nvSpPr>
-              <p:cNvPr id="49" name="Oval 48">
-                <a:extLst>
-                  <a:ext uri="{FF2B5EF4-FFF2-40B4-BE49-F238E27FC236}">
-                    <a16:creationId xmlns:a16="http://schemas.microsoft.com/office/drawing/2014/main" id="{4DC67B4E-E5E1-45DF-AC52-663C84CB9EC4}"/>
-                  </a:ext>
-                </a:extLst>
-              </p:cNvPr>
-              <p:cNvSpPr/>
-              <p:nvPr/>
-            </p:nvSpPr>
-            <p:spPr>
-              <a:xfrm>
-                <a:off x="1632448" y="3951383"/>
-                <a:ext cx="219758" cy="219758"/>
-              </a:xfrm>
-              <a:prstGeom prst="ellipse">
-                <a:avLst/>
-              </a:prstGeom>
-              <a:solidFill>
-                <a:schemeClr val="bg1"/>
-              </a:solidFill>
-              <a:ln w="19050"/>
-            </p:spPr>
-            <p:style>
-              <a:lnRef idx="2">
-                <a:schemeClr val="dk1"/>
-              </a:lnRef>
-              <a:fillRef idx="1">
-                <a:schemeClr val="lt1"/>
-              </a:fillRef>
-              <a:effectRef idx="0">
-                <a:schemeClr val="dk1"/>
-              </a:effectRef>
-              <a:fontRef idx="minor">
-                <a:schemeClr val="dk1"/>
-              </a:fontRef>
-            </p:style>
-            <p:txBody>
-              <a:bodyPr rtlCol="0" anchor="ctr"/>
-              <a:lstStyle/>
-              <a:p>
-                <a:pPr algn="ctr"/>
-                <a:endParaRPr lang="nl-NL" noProof="0" dirty="0"/>
-              </a:p>
-            </p:txBody>
-          </p:sp>
         </p:grpSp>
         <p:sp>
           <p:nvSpPr>
@@ -17172,7 +16877,7 @@
           <p:spPr>
             <a:xfrm>
               <a:off x="3000055" y="2011753"/>
-              <a:ext cx="2537041" cy="400110"/>
+              <a:ext cx="2575770" cy="400110"/>
             </a:xfrm>
             <a:prstGeom prst="rect">
               <a:avLst/>
@@ -17187,7 +16892,7 @@
             <a:p>
               <a:r>
                 <a:rPr lang="nl-NL" sz="2000" noProof="0" dirty="0"/>
-                <a:t>Koppelt 0 of 1 records.</a:t>
+                <a:t>Koppelt maximaal 1 rij.</a:t>
               </a:r>
             </a:p>
           </p:txBody>
@@ -17208,17 +16913,17 @@
         <p:grpSpPr>
           <a:xfrm>
             <a:off x="838201" y="2880908"/>
-            <a:ext cx="5120483" cy="400110"/>
+            <a:ext cx="5896080" cy="400110"/>
             <a:chOff x="838201" y="2895535"/>
-            <a:chExt cx="5120483" cy="400110"/>
+            <a:chExt cx="5896080" cy="400110"/>
           </a:xfrm>
         </p:grpSpPr>
         <p:grpSp>
           <p:nvGrpSpPr>
-            <p:cNvPr id="50" name="Group 49">
+            <p:cNvPr id="51" name="Group 50">
               <a:extLst>
                 <a:ext uri="{FF2B5EF4-FFF2-40B4-BE49-F238E27FC236}">
-                  <a16:creationId xmlns:a16="http://schemas.microsoft.com/office/drawing/2014/main" id="{54836448-E895-4501-B341-594F158D1074}"/>
+                  <a16:creationId xmlns:a16="http://schemas.microsoft.com/office/drawing/2014/main" id="{B37AC42C-DD88-4E6F-9F5C-9AC299D7177F}"/>
                 </a:ext>
               </a:extLst>
             </p:cNvPr>
@@ -17228,192 +16933,123 @@
           <p:grpSpPr>
             <a:xfrm>
               <a:off x="838201" y="2982575"/>
-              <a:ext cx="1087352" cy="244866"/>
-              <a:chOff x="1075360" y="4636429"/>
-              <a:chExt cx="1087352" cy="244866"/>
+              <a:ext cx="1080821" cy="225273"/>
+              <a:chOff x="1068510" y="2917861"/>
+              <a:chExt cx="1080821" cy="225273"/>
             </a:xfrm>
           </p:grpSpPr>
-          <p:grpSp>
-            <p:nvGrpSpPr>
-              <p:cNvPr id="51" name="Group 50">
+          <p:cxnSp>
+            <p:nvCxnSpPr>
+              <p:cNvPr id="53" name="Straight Connector 52">
                 <a:extLst>
                   <a:ext uri="{FF2B5EF4-FFF2-40B4-BE49-F238E27FC236}">
-                    <a16:creationId xmlns:a16="http://schemas.microsoft.com/office/drawing/2014/main" id="{B37AC42C-DD88-4E6F-9F5C-9AC299D7177F}"/>
+                    <a16:creationId xmlns:a16="http://schemas.microsoft.com/office/drawing/2014/main" id="{4519A11E-4702-4131-A051-175AD50F8580}"/>
                   </a:ext>
                 </a:extLst>
               </p:cNvPr>
-              <p:cNvGrpSpPr/>
+              <p:cNvCxnSpPr>
+                <a:cxnSpLocks/>
+              </p:cNvCxnSpPr>
               <p:nvPr/>
-            </p:nvGrpSpPr>
-            <p:grpSpPr>
+            </p:nvCxnSpPr>
+            <p:spPr>
               <a:xfrm>
-                <a:off x="1075360" y="4636429"/>
-                <a:ext cx="1087352" cy="244866"/>
-                <a:chOff x="1068510" y="2917861"/>
-                <a:chExt cx="1087352" cy="244866"/>
+                <a:off x="1068510" y="3034837"/>
+                <a:ext cx="1078787" cy="0"/>
               </a:xfrm>
-            </p:grpSpPr>
-            <p:cxnSp>
-              <p:nvCxnSpPr>
-                <p:cNvPr id="53" name="Straight Connector 52">
-                  <a:extLst>
-                    <a:ext uri="{FF2B5EF4-FFF2-40B4-BE49-F238E27FC236}">
-                      <a16:creationId xmlns:a16="http://schemas.microsoft.com/office/drawing/2014/main" id="{4519A11E-4702-4131-A051-175AD50F8580}"/>
-                    </a:ext>
-                  </a:extLst>
-                </p:cNvPr>
-                <p:cNvCxnSpPr>
-                  <a:cxnSpLocks/>
-                </p:cNvCxnSpPr>
-                <p:nvPr/>
-              </p:nvCxnSpPr>
-              <p:spPr>
-                <a:xfrm>
-                  <a:off x="1068510" y="3034837"/>
-                  <a:ext cx="1078787" cy="0"/>
-                </a:xfrm>
-                <a:prstGeom prst="line">
-                  <a:avLst/>
-                </a:prstGeom>
-              </p:spPr>
-              <p:style>
-                <a:lnRef idx="3">
-                  <a:schemeClr val="dk1"/>
-                </a:lnRef>
-                <a:fillRef idx="0">
-                  <a:schemeClr val="dk1"/>
-                </a:fillRef>
-                <a:effectRef idx="2">
-                  <a:schemeClr val="dk1"/>
-                </a:effectRef>
-                <a:fontRef idx="minor">
-                  <a:schemeClr val="tx1"/>
-                </a:fontRef>
-              </p:style>
-            </p:cxnSp>
-            <p:cxnSp>
-              <p:nvCxnSpPr>
-                <p:cNvPr id="54" name="Straight Connector 53">
-                  <a:extLst>
-                    <a:ext uri="{FF2B5EF4-FFF2-40B4-BE49-F238E27FC236}">
-                      <a16:creationId xmlns:a16="http://schemas.microsoft.com/office/drawing/2014/main" id="{68C0F807-DA23-496A-82F5-4A3F438706FD}"/>
-                    </a:ext>
-                  </a:extLst>
-                </p:cNvPr>
-                <p:cNvCxnSpPr/>
-                <p:nvPr/>
-              </p:nvCxnSpPr>
-              <p:spPr>
-                <a:xfrm flipV="1">
-                  <a:off x="1837362" y="2917861"/>
-                  <a:ext cx="309936" cy="113015"/>
-                </a:xfrm>
-                <a:prstGeom prst="line">
-                  <a:avLst/>
-                </a:prstGeom>
-              </p:spPr>
-              <p:style>
-                <a:lnRef idx="3">
-                  <a:schemeClr val="dk1"/>
-                </a:lnRef>
-                <a:fillRef idx="0">
-                  <a:schemeClr val="dk1"/>
-                </a:fillRef>
-                <a:effectRef idx="2">
-                  <a:schemeClr val="dk1"/>
-                </a:effectRef>
-                <a:fontRef idx="minor">
-                  <a:schemeClr val="tx1"/>
-                </a:fontRef>
-              </p:style>
-            </p:cxnSp>
-            <p:cxnSp>
-              <p:nvCxnSpPr>
-                <p:cNvPr id="55" name="Straight Connector 54">
-                  <a:extLst>
-                    <a:ext uri="{FF2B5EF4-FFF2-40B4-BE49-F238E27FC236}">
-                      <a16:creationId xmlns:a16="http://schemas.microsoft.com/office/drawing/2014/main" id="{17473C12-0F05-43CD-B7AD-EF5D74FA664E}"/>
-                    </a:ext>
-                  </a:extLst>
-                </p:cNvPr>
-                <p:cNvCxnSpPr>
-                  <a:cxnSpLocks/>
-                </p:cNvCxnSpPr>
-                <p:nvPr/>
-              </p:nvCxnSpPr>
-              <p:spPr>
-                <a:xfrm flipH="1" flipV="1">
-                  <a:off x="1845926" y="3049712"/>
-                  <a:ext cx="309936" cy="113015"/>
-                </a:xfrm>
-                <a:prstGeom prst="line">
-                  <a:avLst/>
-                </a:prstGeom>
-              </p:spPr>
-              <p:style>
-                <a:lnRef idx="3">
-                  <a:schemeClr val="dk1"/>
-                </a:lnRef>
-                <a:fillRef idx="0">
-                  <a:schemeClr val="dk1"/>
-                </a:fillRef>
-                <a:effectRef idx="2">
-                  <a:schemeClr val="dk1"/>
-                </a:effectRef>
-                <a:fontRef idx="minor">
-                  <a:schemeClr val="tx1"/>
-                </a:fontRef>
-              </p:style>
-            </p:cxnSp>
-          </p:grpSp>
-          <p:sp>
-            <p:nvSpPr>
-              <p:cNvPr id="52" name="Oval 51">
+              <a:prstGeom prst="line">
+                <a:avLst/>
+              </a:prstGeom>
+            </p:spPr>
+            <p:style>
+              <a:lnRef idx="3">
+                <a:schemeClr val="dk1"/>
+              </a:lnRef>
+              <a:fillRef idx="0">
+                <a:schemeClr val="dk1"/>
+              </a:fillRef>
+              <a:effectRef idx="2">
+                <a:schemeClr val="dk1"/>
+              </a:effectRef>
+              <a:fontRef idx="minor">
+                <a:schemeClr val="tx1"/>
+              </a:fontRef>
+            </p:style>
+          </p:cxnSp>
+          <p:cxnSp>
+            <p:nvCxnSpPr>
+              <p:cNvPr id="54" name="Straight Connector 53">
                 <a:extLst>
                   <a:ext uri="{FF2B5EF4-FFF2-40B4-BE49-F238E27FC236}">
-                    <a16:creationId xmlns:a16="http://schemas.microsoft.com/office/drawing/2014/main" id="{CFD1571D-A8DF-4CAD-90F6-9E365C975931}"/>
+                    <a16:creationId xmlns:a16="http://schemas.microsoft.com/office/drawing/2014/main" id="{68C0F807-DA23-496A-82F5-4A3F438706FD}"/>
                   </a:ext>
                 </a:extLst>
               </p:cNvPr>
-              <p:cNvSpPr/>
+              <p:cNvCxnSpPr/>
               <p:nvPr/>
-            </p:nvSpPr>
+            </p:nvCxnSpPr>
             <p:spPr>
-              <a:xfrm>
-                <a:off x="1632448" y="4658400"/>
-                <a:ext cx="219758" cy="219758"/>
+              <a:xfrm flipV="1">
+                <a:off x="1837362" y="2917861"/>
+                <a:ext cx="309936" cy="113015"/>
               </a:xfrm>
-              <a:prstGeom prst="ellipse">
+              <a:prstGeom prst="line">
                 <a:avLst/>
               </a:prstGeom>
-              <a:solidFill>
-                <a:schemeClr val="bg1"/>
-              </a:solidFill>
-              <a:ln w="19050"/>
             </p:spPr>
             <p:style>
-              <a:lnRef idx="2">
+              <a:lnRef idx="3">
                 <a:schemeClr val="dk1"/>
               </a:lnRef>
-              <a:fillRef idx="1">
-                <a:schemeClr val="lt1"/>
+              <a:fillRef idx="0">
+                <a:schemeClr val="dk1"/>
               </a:fillRef>
-              <a:effectRef idx="0">
+              <a:effectRef idx="2">
                 <a:schemeClr val="dk1"/>
               </a:effectRef>
               <a:fontRef idx="minor">
-                <a:schemeClr val="dk1"/>
+                <a:schemeClr val="tx1"/>
               </a:fontRef>
             </p:style>
-            <p:txBody>
-              <a:bodyPr rtlCol="0" anchor="ctr"/>
-              <a:lstStyle/>
-              <a:p>
-                <a:pPr algn="ctr"/>
-                <a:endParaRPr lang="nl-NL" noProof="0" dirty="0"/>
-              </a:p>
-            </p:txBody>
-          </p:sp>
+          </p:cxnSp>
+          <p:cxnSp>
+            <p:nvCxnSpPr>
+              <p:cNvPr id="55" name="Straight Connector 54">
+                <a:extLst>
+                  <a:ext uri="{FF2B5EF4-FFF2-40B4-BE49-F238E27FC236}">
+                    <a16:creationId xmlns:a16="http://schemas.microsoft.com/office/drawing/2014/main" id="{17473C12-0F05-43CD-B7AD-EF5D74FA664E}"/>
+                  </a:ext>
+                </a:extLst>
+              </p:cNvPr>
+              <p:cNvCxnSpPr>
+                <a:cxnSpLocks/>
+              </p:cNvCxnSpPr>
+              <p:nvPr/>
+            </p:nvCxnSpPr>
+            <p:spPr>
+              <a:xfrm flipH="1" flipV="1">
+                <a:off x="1839395" y="3030119"/>
+                <a:ext cx="309936" cy="113015"/>
+              </a:xfrm>
+              <a:prstGeom prst="line">
+                <a:avLst/>
+              </a:prstGeom>
+            </p:spPr>
+            <p:style>
+              <a:lnRef idx="3">
+                <a:schemeClr val="dk1"/>
+              </a:lnRef>
+              <a:fillRef idx="0">
+                <a:schemeClr val="dk1"/>
+              </a:fillRef>
+              <a:effectRef idx="2">
+                <a:schemeClr val="dk1"/>
+              </a:effectRef>
+              <a:fontRef idx="minor">
+                <a:schemeClr val="tx1"/>
+              </a:fontRef>
+            </p:style>
+          </p:cxnSp>
         </p:grpSp>
         <p:sp>
           <p:nvSpPr>
@@ -17430,7 +17066,7 @@
           <p:spPr>
             <a:xfrm>
               <a:off x="3000054" y="2895535"/>
-              <a:ext cx="2958630" cy="400110"/>
+              <a:ext cx="3734227" cy="400110"/>
             </a:xfrm>
             <a:prstGeom prst="rect">
               <a:avLst/>
@@ -17445,7 +17081,7 @@
             <a:p>
               <a:r>
                 <a:rPr lang="nl-NL" sz="2000" noProof="0" dirty="0"/>
-                <a:t>Koppelt 0 of meer records.</a:t>
+                <a:t>Koppelt maximaal meerdere rijen.</a:t>
               </a:r>
             </a:p>
           </p:txBody>
@@ -17466,9 +17102,9 @@
         <p:grpSpPr>
           <a:xfrm>
             <a:off x="838200" y="4619218"/>
-            <a:ext cx="5120484" cy="400110"/>
+            <a:ext cx="4699921" cy="400110"/>
             <a:chOff x="838200" y="4587532"/>
-            <a:chExt cx="5120484" cy="400110"/>
+            <a:chExt cx="4699921" cy="400110"/>
           </a:xfrm>
         </p:grpSpPr>
         <p:grpSp>
@@ -17485,10 +17121,10 @@
           </p:nvGrpSpPr>
           <p:grpSpPr>
             <a:xfrm>
-              <a:off x="838200" y="4676284"/>
-              <a:ext cx="1078788" cy="224318"/>
-              <a:chOff x="1068510" y="2917861"/>
-              <a:chExt cx="1078788" cy="224318"/>
+              <a:off x="838200" y="4680244"/>
+              <a:ext cx="1078787" cy="215757"/>
+              <a:chOff x="1068510" y="2921821"/>
+              <a:chExt cx="1078787" cy="215757"/>
             </a:xfrm>
           </p:grpSpPr>
           <p:cxnSp>
@@ -17565,12 +17201,1124 @@
               </a:fontRef>
             </p:style>
           </p:cxnSp>
+        </p:grpSp>
+        <p:sp>
+          <p:nvSpPr>
+            <p:cNvPr id="10" name="TextBox 9">
+              <a:extLst>
+                <a:ext uri="{FF2B5EF4-FFF2-40B4-BE49-F238E27FC236}">
+                  <a16:creationId xmlns:a16="http://schemas.microsoft.com/office/drawing/2014/main" id="{AFA87921-06EB-488E-8B3F-0F359A4E4237}"/>
+                </a:ext>
+              </a:extLst>
+            </p:cNvPr>
+            <p:cNvSpPr txBox="1"/>
+            <p:nvPr/>
+          </p:nvSpPr>
+          <p:spPr>
+            <a:xfrm>
+              <a:off x="3000054" y="4587532"/>
+              <a:ext cx="2538067" cy="400110"/>
+            </a:xfrm>
+            <a:prstGeom prst="rect">
+              <a:avLst/>
+            </a:prstGeom>
+            <a:noFill/>
+          </p:spPr>
+          <p:txBody>
+            <a:bodyPr wrap="none" rtlCol="0">
+              <a:spAutoFit/>
+            </a:bodyPr>
+            <a:lstStyle/>
+            <a:p>
+              <a:r>
+                <a:rPr lang="nl-NL" sz="2000" noProof="0" dirty="0"/>
+                <a:t>Koppelt minimaal 1 rij.</a:t>
+              </a:r>
+            </a:p>
+          </p:txBody>
+        </p:sp>
+      </p:grpSp>
+      <p:sp>
+        <p:nvSpPr>
+          <p:cNvPr id="18" name="Oval 17">
+            <a:extLst>
+              <a:ext uri="{FF2B5EF4-FFF2-40B4-BE49-F238E27FC236}">
+                <a16:creationId xmlns:a16="http://schemas.microsoft.com/office/drawing/2014/main" id="{D0F48EE8-318D-C3C4-8F6E-1F9FBB19691C}"/>
+              </a:ext>
+            </a:extLst>
+          </p:cNvPr>
+          <p:cNvSpPr/>
+          <p:nvPr/>
+        </p:nvSpPr>
+        <p:spPr>
+          <a:xfrm>
+            <a:off x="1395289" y="5574817"/>
+            <a:ext cx="219758" cy="219758"/>
+          </a:xfrm>
+          <a:prstGeom prst="ellipse">
+            <a:avLst/>
+          </a:prstGeom>
+          <a:solidFill>
+            <a:schemeClr val="bg1"/>
+          </a:solidFill>
+          <a:ln w="19050"/>
+        </p:spPr>
+        <p:style>
+          <a:lnRef idx="2">
+            <a:schemeClr val="dk1"/>
+          </a:lnRef>
+          <a:fillRef idx="1">
+            <a:schemeClr val="lt1"/>
+          </a:fillRef>
+          <a:effectRef idx="0">
+            <a:schemeClr val="dk1"/>
+          </a:effectRef>
+          <a:fontRef idx="minor">
+            <a:schemeClr val="dk1"/>
+          </a:fontRef>
+        </p:style>
+        <p:txBody>
+          <a:bodyPr rtlCol="0" anchor="ctr"/>
+          <a:lstStyle/>
+          <a:p>
+            <a:pPr algn="ctr"/>
+            <a:endParaRPr lang="nl-NL" noProof="0" dirty="0"/>
+          </a:p>
+        </p:txBody>
+      </p:sp>
+    </p:spTree>
+    <p:extLst>
+      <p:ext uri="{BB962C8B-B14F-4D97-AF65-F5344CB8AC3E}">
+        <p14:creationId xmlns:p14="http://schemas.microsoft.com/office/powerpoint/2010/main" val="812638733"/>
+      </p:ext>
+    </p:extLst>
+  </p:cSld>
+  <p:clrMapOvr>
+    <a:masterClrMapping/>
+  </p:clrMapOvr>
+</p:sld>
+</file>
+
+<file path=ppt/slides/slide25.xml><?xml version="1.0" encoding="utf-8"?>
+<p:sld xmlns:a="http://schemas.openxmlformats.org/drawingml/2006/main" xmlns:r="http://schemas.openxmlformats.org/officeDocument/2006/relationships" xmlns:p="http://schemas.openxmlformats.org/presentationml/2006/main">
+  <p:cSld>
+    <p:spTree>
+      <p:nvGrpSpPr>
+        <p:cNvPr id="1" name="">
+          <a:extLst>
+            <a:ext uri="{FF2B5EF4-FFF2-40B4-BE49-F238E27FC236}">
+              <a16:creationId xmlns:a16="http://schemas.microsoft.com/office/drawing/2014/main" id="{4F629DCA-E02B-1923-6162-A2DA657A6029}"/>
+            </a:ext>
+          </a:extLst>
+        </p:cNvPr>
+        <p:cNvGrpSpPr/>
+        <p:nvPr/>
+      </p:nvGrpSpPr>
+      <p:grpSpPr>
+        <a:xfrm>
+          <a:off x="0" y="0"/>
+          <a:ext cx="0" cy="0"/>
+          <a:chOff x="0" y="0"/>
+          <a:chExt cx="0" cy="0"/>
+        </a:xfrm>
+      </p:grpSpPr>
+      <p:sp>
+        <p:nvSpPr>
+          <p:cNvPr id="2" name="Title 1">
+            <a:extLst>
+              <a:ext uri="{FF2B5EF4-FFF2-40B4-BE49-F238E27FC236}">
+                <a16:creationId xmlns:a16="http://schemas.microsoft.com/office/drawing/2014/main" id="{79058D6D-D80B-CFD6-6A04-B3AE336C07D9}"/>
+              </a:ext>
+            </a:extLst>
+          </p:cNvPr>
+          <p:cNvSpPr>
+            <a:spLocks noGrp="1"/>
+          </p:cNvSpPr>
+          <p:nvPr>
+            <p:ph type="title"/>
+          </p:nvPr>
+        </p:nvSpPr>
+        <p:spPr/>
+        <p:txBody>
+          <a:bodyPr>
+            <a:normAutofit/>
+          </a:bodyPr>
+          <a:lstStyle/>
+          <a:p>
+            <a:r>
+              <a:rPr lang="nl-NL" sz="3600" noProof="0" dirty="0" err="1"/>
+              <a:t>Entity</a:t>
+            </a:r>
+            <a:r>
+              <a:rPr lang="nl-NL" sz="3600" noProof="0" dirty="0"/>
+              <a:t> </a:t>
+            </a:r>
+            <a:r>
+              <a:rPr lang="nl-NL" sz="3600" noProof="0" dirty="0" err="1"/>
+              <a:t>Relationship</a:t>
+            </a:r>
+            <a:r>
+              <a:rPr lang="nl-NL" sz="3600" noProof="0" dirty="0"/>
+              <a:t> Diagram</a:t>
+            </a:r>
+          </a:p>
+        </p:txBody>
+      </p:sp>
+      <p:grpSp>
+        <p:nvGrpSpPr>
+          <p:cNvPr id="11" name="Group 10">
+            <a:extLst>
+              <a:ext uri="{FF2B5EF4-FFF2-40B4-BE49-F238E27FC236}">
+                <a16:creationId xmlns:a16="http://schemas.microsoft.com/office/drawing/2014/main" id="{3815F81B-674D-8D7C-AD56-5409D810762A}"/>
+              </a:ext>
+            </a:extLst>
+          </p:cNvPr>
+          <p:cNvGrpSpPr/>
+          <p:nvPr/>
+        </p:nvGrpSpPr>
+        <p:grpSpPr>
+          <a:xfrm>
+            <a:off x="838200" y="2011753"/>
+            <a:ext cx="5213972" cy="400110"/>
+            <a:chOff x="838201" y="2011753"/>
+            <a:chExt cx="5213972" cy="400110"/>
+          </a:xfrm>
+        </p:grpSpPr>
+        <p:grpSp>
+          <p:nvGrpSpPr>
+            <p:cNvPr id="46" name="Group 45">
+              <a:extLst>
+                <a:ext uri="{FF2B5EF4-FFF2-40B4-BE49-F238E27FC236}">
+                  <a16:creationId xmlns:a16="http://schemas.microsoft.com/office/drawing/2014/main" id="{08E9D982-9F29-B7CD-926D-C0F03C001E6F}"/>
+                </a:ext>
+              </a:extLst>
+            </p:cNvPr>
+            <p:cNvGrpSpPr/>
+            <p:nvPr/>
+          </p:nvGrpSpPr>
+          <p:grpSpPr>
+            <a:xfrm>
+              <a:off x="838201" y="2103930"/>
+              <a:ext cx="1078787" cy="215757"/>
+              <a:chOff x="1075360" y="3953384"/>
+              <a:chExt cx="1078787" cy="215757"/>
+            </a:xfrm>
+          </p:grpSpPr>
           <p:cxnSp>
             <p:nvCxnSpPr>
-              <p:cNvPr id="7" name="Straight Connector 6">
+              <p:cNvPr id="47" name="Straight Connector 46">
                 <a:extLst>
                   <a:ext uri="{FF2B5EF4-FFF2-40B4-BE49-F238E27FC236}">
-                    <a16:creationId xmlns:a16="http://schemas.microsoft.com/office/drawing/2014/main" id="{1F14863D-A478-4765-B688-13BD94D7A0EA}"/>
+                    <a16:creationId xmlns:a16="http://schemas.microsoft.com/office/drawing/2014/main" id="{1C2DDDD0-B6B5-7CEA-4E3E-A38095BAC669}"/>
+                  </a:ext>
+                </a:extLst>
+              </p:cNvPr>
+              <p:cNvCxnSpPr>
+                <a:cxnSpLocks/>
+              </p:cNvCxnSpPr>
+              <p:nvPr/>
+            </p:nvCxnSpPr>
+            <p:spPr>
+              <a:xfrm>
+                <a:off x="1075360" y="4061262"/>
+                <a:ext cx="1078787" cy="0"/>
+              </a:xfrm>
+              <a:prstGeom prst="line">
+                <a:avLst/>
+              </a:prstGeom>
+            </p:spPr>
+            <p:style>
+              <a:lnRef idx="3">
+                <a:schemeClr val="dk1"/>
+              </a:lnRef>
+              <a:fillRef idx="0">
+                <a:schemeClr val="dk1"/>
+              </a:fillRef>
+              <a:effectRef idx="2">
+                <a:schemeClr val="dk1"/>
+              </a:effectRef>
+              <a:fontRef idx="minor">
+                <a:schemeClr val="tx1"/>
+              </a:fontRef>
+            </p:style>
+          </p:cxnSp>
+          <p:cxnSp>
+            <p:nvCxnSpPr>
+              <p:cNvPr id="48" name="Straight Connector 47">
+                <a:extLst>
+                  <a:ext uri="{FF2B5EF4-FFF2-40B4-BE49-F238E27FC236}">
+                    <a16:creationId xmlns:a16="http://schemas.microsoft.com/office/drawing/2014/main" id="{18890CB1-A3AA-FBE2-2CF6-7CEAA203ABE4}"/>
+                  </a:ext>
+                </a:extLst>
+              </p:cNvPr>
+              <p:cNvCxnSpPr>
+                <a:cxnSpLocks/>
+              </p:cNvCxnSpPr>
+              <p:nvPr/>
+            </p:nvCxnSpPr>
+            <p:spPr>
+              <a:xfrm>
+                <a:off x="2000034" y="3953384"/>
+                <a:ext cx="0" cy="215757"/>
+              </a:xfrm>
+              <a:prstGeom prst="line">
+                <a:avLst/>
+              </a:prstGeom>
+            </p:spPr>
+            <p:style>
+              <a:lnRef idx="3">
+                <a:schemeClr val="dk1"/>
+              </a:lnRef>
+              <a:fillRef idx="0">
+                <a:schemeClr val="dk1"/>
+              </a:fillRef>
+              <a:effectRef idx="2">
+                <a:schemeClr val="dk1"/>
+              </a:effectRef>
+              <a:fontRef idx="minor">
+                <a:schemeClr val="tx1"/>
+              </a:fontRef>
+            </p:style>
+          </p:cxnSp>
+        </p:grpSp>
+        <p:sp>
+          <p:nvSpPr>
+            <p:cNvPr id="56" name="TextBox 55">
+              <a:extLst>
+                <a:ext uri="{FF2B5EF4-FFF2-40B4-BE49-F238E27FC236}">
+                  <a16:creationId xmlns:a16="http://schemas.microsoft.com/office/drawing/2014/main" id="{4C9C14AA-5A23-4147-0C5D-F00896DC5766}"/>
+                </a:ext>
+              </a:extLst>
+            </p:cNvPr>
+            <p:cNvSpPr txBox="1"/>
+            <p:nvPr/>
+          </p:nvSpPr>
+          <p:spPr>
+            <a:xfrm>
+              <a:off x="3000055" y="2011753"/>
+              <a:ext cx="3052118" cy="400110"/>
+            </a:xfrm>
+            <a:prstGeom prst="rect">
+              <a:avLst/>
+            </a:prstGeom>
+            <a:noFill/>
+          </p:spPr>
+          <p:txBody>
+            <a:bodyPr wrap="none" rtlCol="0">
+              <a:spAutoFit/>
+            </a:bodyPr>
+            <a:lstStyle/>
+            <a:p>
+              <a:r>
+                <a:rPr lang="nl-NL" sz="2000" noProof="0" dirty="0"/>
+                <a:t>Koppelt met maximaal 1 rij.</a:t>
+              </a:r>
+            </a:p>
+          </p:txBody>
+        </p:sp>
+      </p:grpSp>
+      <p:grpSp>
+        <p:nvGrpSpPr>
+          <p:cNvPr id="28" name="Group 27">
+            <a:extLst>
+              <a:ext uri="{FF2B5EF4-FFF2-40B4-BE49-F238E27FC236}">
+                <a16:creationId xmlns:a16="http://schemas.microsoft.com/office/drawing/2014/main" id="{2AE4B46B-4BF7-4163-B5D2-06173997045D}"/>
+              </a:ext>
+            </a:extLst>
+          </p:cNvPr>
+          <p:cNvGrpSpPr/>
+          <p:nvPr/>
+        </p:nvGrpSpPr>
+        <p:grpSpPr>
+          <a:xfrm>
+            <a:off x="838200" y="2525692"/>
+            <a:ext cx="5439354" cy="400110"/>
+            <a:chOff x="838200" y="2544636"/>
+            <a:chExt cx="5439354" cy="400110"/>
+          </a:xfrm>
+        </p:grpSpPr>
+        <p:sp>
+          <p:nvSpPr>
+            <p:cNvPr id="8" name="TextBox 7">
+              <a:extLst>
+                <a:ext uri="{FF2B5EF4-FFF2-40B4-BE49-F238E27FC236}">
+                  <a16:creationId xmlns:a16="http://schemas.microsoft.com/office/drawing/2014/main" id="{4E8D6A73-8C00-481B-00F3-89702959B16B}"/>
+                </a:ext>
+              </a:extLst>
+            </p:cNvPr>
+            <p:cNvSpPr txBox="1"/>
+            <p:nvPr/>
+          </p:nvSpPr>
+          <p:spPr>
+            <a:xfrm>
+              <a:off x="3000054" y="2544636"/>
+              <a:ext cx="3277500" cy="400110"/>
+            </a:xfrm>
+            <a:prstGeom prst="rect">
+              <a:avLst/>
+            </a:prstGeom>
+            <a:noFill/>
+          </p:spPr>
+          <p:txBody>
+            <a:bodyPr wrap="none" rtlCol="0">
+              <a:spAutoFit/>
+            </a:bodyPr>
+            <a:lstStyle/>
+            <a:p>
+              <a:r>
+                <a:rPr lang="nl-NL" sz="2000" noProof="0" dirty="0"/>
+                <a:t>Koppelt 0 of 1 rij  -  optioneel.</a:t>
+              </a:r>
+            </a:p>
+          </p:txBody>
+        </p:sp>
+        <p:grpSp>
+          <p:nvGrpSpPr>
+            <p:cNvPr id="25" name="Group 24">
+              <a:extLst>
+                <a:ext uri="{FF2B5EF4-FFF2-40B4-BE49-F238E27FC236}">
+                  <a16:creationId xmlns:a16="http://schemas.microsoft.com/office/drawing/2014/main" id="{180E096F-E2DF-DA66-77F0-F0378B624B9B}"/>
+                </a:ext>
+              </a:extLst>
+            </p:cNvPr>
+            <p:cNvGrpSpPr/>
+            <p:nvPr/>
+          </p:nvGrpSpPr>
+          <p:grpSpPr>
+            <a:xfrm>
+              <a:off x="838200" y="2623050"/>
+              <a:ext cx="1078787" cy="229520"/>
+              <a:chOff x="838200" y="2623050"/>
+              <a:chExt cx="1078787" cy="229520"/>
+            </a:xfrm>
+          </p:grpSpPr>
+          <p:grpSp>
+            <p:nvGrpSpPr>
+              <p:cNvPr id="7" name="Group 6">
+                <a:extLst>
+                  <a:ext uri="{FF2B5EF4-FFF2-40B4-BE49-F238E27FC236}">
+                    <a16:creationId xmlns:a16="http://schemas.microsoft.com/office/drawing/2014/main" id="{2D8F2B73-67C0-1871-67DD-7CDB13B0A8D9}"/>
+                  </a:ext>
+                </a:extLst>
+              </p:cNvPr>
+              <p:cNvGrpSpPr/>
+              <p:nvPr/>
+            </p:nvGrpSpPr>
+            <p:grpSpPr>
+              <a:xfrm>
+                <a:off x="838200" y="2636813"/>
+                <a:ext cx="1078787" cy="215757"/>
+                <a:chOff x="1075360" y="3953384"/>
+                <a:chExt cx="1078787" cy="215757"/>
+              </a:xfrm>
+            </p:grpSpPr>
+            <p:cxnSp>
+              <p:nvCxnSpPr>
+                <p:cNvPr id="9" name="Straight Connector 8">
+                  <a:extLst>
+                    <a:ext uri="{FF2B5EF4-FFF2-40B4-BE49-F238E27FC236}">
+                      <a16:creationId xmlns:a16="http://schemas.microsoft.com/office/drawing/2014/main" id="{5E278793-19B8-6D69-DCC5-FBE2ECFAF789}"/>
+                    </a:ext>
+                  </a:extLst>
+                </p:cNvPr>
+                <p:cNvCxnSpPr>
+                  <a:cxnSpLocks/>
+                </p:cNvCxnSpPr>
+                <p:nvPr/>
+              </p:nvCxnSpPr>
+              <p:spPr>
+                <a:xfrm>
+                  <a:off x="1075360" y="4061262"/>
+                  <a:ext cx="1078787" cy="0"/>
+                </a:xfrm>
+                <a:prstGeom prst="line">
+                  <a:avLst/>
+                </a:prstGeom>
+              </p:spPr>
+              <p:style>
+                <a:lnRef idx="3">
+                  <a:schemeClr val="dk1"/>
+                </a:lnRef>
+                <a:fillRef idx="0">
+                  <a:schemeClr val="dk1"/>
+                </a:fillRef>
+                <a:effectRef idx="2">
+                  <a:schemeClr val="dk1"/>
+                </a:effectRef>
+                <a:fontRef idx="minor">
+                  <a:schemeClr val="tx1"/>
+                </a:fontRef>
+              </p:style>
+            </p:cxnSp>
+            <p:cxnSp>
+              <p:nvCxnSpPr>
+                <p:cNvPr id="13" name="Straight Connector 12">
+                  <a:extLst>
+                    <a:ext uri="{FF2B5EF4-FFF2-40B4-BE49-F238E27FC236}">
+                      <a16:creationId xmlns:a16="http://schemas.microsoft.com/office/drawing/2014/main" id="{376C9FA0-1019-D396-DEA2-211C322C15F6}"/>
+                    </a:ext>
+                  </a:extLst>
+                </p:cNvPr>
+                <p:cNvCxnSpPr>
+                  <a:cxnSpLocks/>
+                </p:cNvCxnSpPr>
+                <p:nvPr/>
+              </p:nvCxnSpPr>
+              <p:spPr>
+                <a:xfrm>
+                  <a:off x="2000034" y="3953384"/>
+                  <a:ext cx="0" cy="215757"/>
+                </a:xfrm>
+                <a:prstGeom prst="line">
+                  <a:avLst/>
+                </a:prstGeom>
+              </p:spPr>
+              <p:style>
+                <a:lnRef idx="3">
+                  <a:schemeClr val="dk1"/>
+                </a:lnRef>
+                <a:fillRef idx="0">
+                  <a:schemeClr val="dk1"/>
+                </a:fillRef>
+                <a:effectRef idx="2">
+                  <a:schemeClr val="dk1"/>
+                </a:effectRef>
+                <a:fontRef idx="minor">
+                  <a:schemeClr val="tx1"/>
+                </a:fontRef>
+              </p:style>
+            </p:cxnSp>
+          </p:grpSp>
+          <p:sp>
+            <p:nvSpPr>
+              <p:cNvPr id="14" name="Oval 13">
+                <a:extLst>
+                  <a:ext uri="{FF2B5EF4-FFF2-40B4-BE49-F238E27FC236}">
+                    <a16:creationId xmlns:a16="http://schemas.microsoft.com/office/drawing/2014/main" id="{E30A26A8-B97F-4706-8A8D-2A5879200238}"/>
+                  </a:ext>
+                </a:extLst>
+              </p:cNvPr>
+              <p:cNvSpPr/>
+              <p:nvPr/>
+            </p:nvSpPr>
+            <p:spPr>
+              <a:xfrm>
+                <a:off x="1395289" y="2623050"/>
+                <a:ext cx="219758" cy="219758"/>
+              </a:xfrm>
+              <a:prstGeom prst="ellipse">
+                <a:avLst/>
+              </a:prstGeom>
+              <a:solidFill>
+                <a:schemeClr val="bg1"/>
+              </a:solidFill>
+              <a:ln w="19050"/>
+            </p:spPr>
+            <p:style>
+              <a:lnRef idx="2">
+                <a:schemeClr val="dk1"/>
+              </a:lnRef>
+              <a:fillRef idx="1">
+                <a:schemeClr val="lt1"/>
+              </a:fillRef>
+              <a:effectRef idx="0">
+                <a:schemeClr val="dk1"/>
+              </a:effectRef>
+              <a:fontRef idx="minor">
+                <a:schemeClr val="dk1"/>
+              </a:fontRef>
+            </p:style>
+            <p:txBody>
+              <a:bodyPr rtlCol="0" anchor="ctr"/>
+              <a:lstStyle/>
+              <a:p>
+                <a:pPr algn="ctr"/>
+                <a:endParaRPr lang="nl-NL" noProof="0" dirty="0"/>
+              </a:p>
+            </p:txBody>
+          </p:sp>
+        </p:grpSp>
+      </p:grpSp>
+      <p:grpSp>
+        <p:nvGrpSpPr>
+          <p:cNvPr id="27" name="Group 26">
+            <a:extLst>
+              <a:ext uri="{FF2B5EF4-FFF2-40B4-BE49-F238E27FC236}">
+                <a16:creationId xmlns:a16="http://schemas.microsoft.com/office/drawing/2014/main" id="{D8998830-094C-1908-5CBB-D30FA14F6776}"/>
+              </a:ext>
+            </a:extLst>
+          </p:cNvPr>
+          <p:cNvGrpSpPr/>
+          <p:nvPr/>
+        </p:nvGrpSpPr>
+        <p:grpSpPr>
+          <a:xfrm>
+            <a:off x="838200" y="3039631"/>
+            <a:ext cx="5385429" cy="400110"/>
+            <a:chOff x="844122" y="2985342"/>
+            <a:chExt cx="5385429" cy="400110"/>
+          </a:xfrm>
+        </p:grpSpPr>
+        <p:sp>
+          <p:nvSpPr>
+            <p:cNvPr id="21" name="TextBox 20">
+              <a:extLst>
+                <a:ext uri="{FF2B5EF4-FFF2-40B4-BE49-F238E27FC236}">
+                  <a16:creationId xmlns:a16="http://schemas.microsoft.com/office/drawing/2014/main" id="{3042E6BA-DF33-0A6F-9C71-36F58B6A52DA}"/>
+                </a:ext>
+              </a:extLst>
+            </p:cNvPr>
+            <p:cNvSpPr txBox="1"/>
+            <p:nvPr/>
+          </p:nvSpPr>
+          <p:spPr>
+            <a:xfrm>
+              <a:off x="3005976" y="2985342"/>
+              <a:ext cx="3223575" cy="400110"/>
+            </a:xfrm>
+            <a:prstGeom prst="rect">
+              <a:avLst/>
+            </a:prstGeom>
+            <a:noFill/>
+          </p:spPr>
+          <p:txBody>
+            <a:bodyPr wrap="none" rtlCol="0">
+              <a:spAutoFit/>
+            </a:bodyPr>
+            <a:lstStyle/>
+            <a:p>
+              <a:r>
+                <a:rPr lang="nl-NL" sz="2000" noProof="0" dirty="0"/>
+                <a:t>Koppelt exact 1 rij - verplicht.</a:t>
+              </a:r>
+            </a:p>
+          </p:txBody>
+        </p:sp>
+        <p:grpSp>
+          <p:nvGrpSpPr>
+            <p:cNvPr id="26" name="Group 25">
+              <a:extLst>
+                <a:ext uri="{FF2B5EF4-FFF2-40B4-BE49-F238E27FC236}">
+                  <a16:creationId xmlns:a16="http://schemas.microsoft.com/office/drawing/2014/main" id="{4C59BE87-777D-C5AB-88D3-C73DEB71EA58}"/>
+                </a:ext>
+              </a:extLst>
+            </p:cNvPr>
+            <p:cNvGrpSpPr/>
+            <p:nvPr/>
+          </p:nvGrpSpPr>
+          <p:grpSpPr>
+            <a:xfrm>
+              <a:off x="844122" y="3077519"/>
+              <a:ext cx="1078787" cy="215757"/>
+              <a:chOff x="844122" y="3077519"/>
+              <a:chExt cx="1078787" cy="215757"/>
+            </a:xfrm>
+          </p:grpSpPr>
+          <p:grpSp>
+            <p:nvGrpSpPr>
+              <p:cNvPr id="20" name="Group 19">
+                <a:extLst>
+                  <a:ext uri="{FF2B5EF4-FFF2-40B4-BE49-F238E27FC236}">
+                    <a16:creationId xmlns:a16="http://schemas.microsoft.com/office/drawing/2014/main" id="{FE9A4221-E1A8-182F-3C82-A7E7CB55FEC6}"/>
+                  </a:ext>
+                </a:extLst>
+              </p:cNvPr>
+              <p:cNvGrpSpPr/>
+              <p:nvPr/>
+            </p:nvGrpSpPr>
+            <p:grpSpPr>
+              <a:xfrm>
+                <a:off x="844122" y="3077519"/>
+                <a:ext cx="1078787" cy="215757"/>
+                <a:chOff x="1075360" y="3953384"/>
+                <a:chExt cx="1078787" cy="215757"/>
+              </a:xfrm>
+            </p:grpSpPr>
+            <p:cxnSp>
+              <p:nvCxnSpPr>
+                <p:cNvPr id="22" name="Straight Connector 21">
+                  <a:extLst>
+                    <a:ext uri="{FF2B5EF4-FFF2-40B4-BE49-F238E27FC236}">
+                      <a16:creationId xmlns:a16="http://schemas.microsoft.com/office/drawing/2014/main" id="{21B187D2-3B69-4F46-DE25-41ECA910A5DB}"/>
+                    </a:ext>
+                  </a:extLst>
+                </p:cNvPr>
+                <p:cNvCxnSpPr>
+                  <a:cxnSpLocks/>
+                </p:cNvCxnSpPr>
+                <p:nvPr/>
+              </p:nvCxnSpPr>
+              <p:spPr>
+                <a:xfrm>
+                  <a:off x="1075360" y="4061262"/>
+                  <a:ext cx="1078787" cy="0"/>
+                </a:xfrm>
+                <a:prstGeom prst="line">
+                  <a:avLst/>
+                </a:prstGeom>
+              </p:spPr>
+              <p:style>
+                <a:lnRef idx="3">
+                  <a:schemeClr val="dk1"/>
+                </a:lnRef>
+                <a:fillRef idx="0">
+                  <a:schemeClr val="dk1"/>
+                </a:fillRef>
+                <a:effectRef idx="2">
+                  <a:schemeClr val="dk1"/>
+                </a:effectRef>
+                <a:fontRef idx="minor">
+                  <a:schemeClr val="tx1"/>
+                </a:fontRef>
+              </p:style>
+            </p:cxnSp>
+            <p:cxnSp>
+              <p:nvCxnSpPr>
+                <p:cNvPr id="23" name="Straight Connector 22">
+                  <a:extLst>
+                    <a:ext uri="{FF2B5EF4-FFF2-40B4-BE49-F238E27FC236}">
+                      <a16:creationId xmlns:a16="http://schemas.microsoft.com/office/drawing/2014/main" id="{FCF2B2AB-7635-8E83-A477-3CCD498F8FFB}"/>
+                    </a:ext>
+                  </a:extLst>
+                </p:cNvPr>
+                <p:cNvCxnSpPr>
+                  <a:cxnSpLocks/>
+                </p:cNvCxnSpPr>
+                <p:nvPr/>
+              </p:nvCxnSpPr>
+              <p:spPr>
+                <a:xfrm>
+                  <a:off x="2000034" y="3953384"/>
+                  <a:ext cx="0" cy="215757"/>
+                </a:xfrm>
+                <a:prstGeom prst="line">
+                  <a:avLst/>
+                </a:prstGeom>
+              </p:spPr>
+              <p:style>
+                <a:lnRef idx="3">
+                  <a:schemeClr val="dk1"/>
+                </a:lnRef>
+                <a:fillRef idx="0">
+                  <a:schemeClr val="dk1"/>
+                </a:fillRef>
+                <a:effectRef idx="2">
+                  <a:schemeClr val="dk1"/>
+                </a:effectRef>
+                <a:fontRef idx="minor">
+                  <a:schemeClr val="tx1"/>
+                </a:fontRef>
+              </p:style>
+            </p:cxnSp>
+          </p:grpSp>
+          <p:cxnSp>
+            <p:nvCxnSpPr>
+              <p:cNvPr id="24" name="Straight Connector 23">
+                <a:extLst>
+                  <a:ext uri="{FF2B5EF4-FFF2-40B4-BE49-F238E27FC236}">
+                    <a16:creationId xmlns:a16="http://schemas.microsoft.com/office/drawing/2014/main" id="{182D6ED0-7A2E-B9D4-4E0C-A51A5819797E}"/>
+                  </a:ext>
+                </a:extLst>
+              </p:cNvPr>
+              <p:cNvCxnSpPr>
+                <a:cxnSpLocks/>
+              </p:cNvCxnSpPr>
+              <p:nvPr/>
+            </p:nvCxnSpPr>
+            <p:spPr>
+              <a:xfrm>
+                <a:off x="1625672" y="3077519"/>
+                <a:ext cx="0" cy="215757"/>
+              </a:xfrm>
+              <a:prstGeom prst="line">
+                <a:avLst/>
+              </a:prstGeom>
+            </p:spPr>
+            <p:style>
+              <a:lnRef idx="3">
+                <a:schemeClr val="dk1"/>
+              </a:lnRef>
+              <a:fillRef idx="0">
+                <a:schemeClr val="dk1"/>
+              </a:fillRef>
+              <a:effectRef idx="2">
+                <a:schemeClr val="dk1"/>
+              </a:effectRef>
+              <a:fontRef idx="minor">
+                <a:schemeClr val="tx1"/>
+              </a:fontRef>
+            </p:style>
+          </p:cxnSp>
+        </p:grpSp>
+      </p:grpSp>
+      <p:sp>
+        <p:nvSpPr>
+          <p:cNvPr id="31" name="TextBox 30">
+            <a:extLst>
+              <a:ext uri="{FF2B5EF4-FFF2-40B4-BE49-F238E27FC236}">
+                <a16:creationId xmlns:a16="http://schemas.microsoft.com/office/drawing/2014/main" id="{CA3C02A6-3678-6BF6-9F23-B11BB84E164D}"/>
+              </a:ext>
+            </a:extLst>
+          </p:cNvPr>
+          <p:cNvSpPr txBox="1"/>
+          <p:nvPr/>
+        </p:nvSpPr>
+        <p:spPr>
+          <a:xfrm>
+            <a:off x="2946129" y="4132253"/>
+            <a:ext cx="3145348" cy="400110"/>
+          </a:xfrm>
+          <a:prstGeom prst="rect">
+            <a:avLst/>
+          </a:prstGeom>
+          <a:noFill/>
+        </p:spPr>
+        <p:txBody>
+          <a:bodyPr wrap="none" rtlCol="0">
+            <a:spAutoFit/>
+          </a:bodyPr>
+          <a:lstStyle/>
+          <a:p>
+            <a:r>
+              <a:rPr lang="nl-NL" sz="2000" noProof="0" dirty="0"/>
+              <a:t>Koppelt met meerdere rijen.</a:t>
+            </a:r>
+          </a:p>
+        </p:txBody>
+      </p:sp>
+      <p:sp>
+        <p:nvSpPr>
+          <p:cNvPr id="35" name="TextBox 34">
+            <a:extLst>
+              <a:ext uri="{FF2B5EF4-FFF2-40B4-BE49-F238E27FC236}">
+                <a16:creationId xmlns:a16="http://schemas.microsoft.com/office/drawing/2014/main" id="{4F4746B3-5C06-F973-097D-F49DE581D4D5}"/>
+              </a:ext>
+            </a:extLst>
+          </p:cNvPr>
+          <p:cNvSpPr txBox="1"/>
+          <p:nvPr/>
+        </p:nvSpPr>
+        <p:spPr>
+          <a:xfrm>
+            <a:off x="2946129" y="4646192"/>
+            <a:ext cx="4435958" cy="400110"/>
+          </a:xfrm>
+          <a:prstGeom prst="rect">
+            <a:avLst/>
+          </a:prstGeom>
+          <a:noFill/>
+        </p:spPr>
+        <p:txBody>
+          <a:bodyPr wrap="none" rtlCol="0">
+            <a:spAutoFit/>
+          </a:bodyPr>
+          <a:lstStyle/>
+          <a:p>
+            <a:r>
+              <a:rPr lang="nl-NL" sz="2000" noProof="0" dirty="0"/>
+              <a:t>Koppelt 0 of </a:t>
+            </a:r>
+            <a:r>
+              <a:rPr lang="nl-NL" sz="2000" dirty="0"/>
+              <a:t>meerdere </a:t>
+            </a:r>
+            <a:r>
+              <a:rPr lang="nl-NL" sz="2000" noProof="0" dirty="0"/>
+              <a:t>rijen  -  optioneel.</a:t>
+            </a:r>
+          </a:p>
+        </p:txBody>
+      </p:sp>
+      <p:sp>
+        <p:nvSpPr>
+          <p:cNvPr id="43" name="TextBox 42">
+            <a:extLst>
+              <a:ext uri="{FF2B5EF4-FFF2-40B4-BE49-F238E27FC236}">
+                <a16:creationId xmlns:a16="http://schemas.microsoft.com/office/drawing/2014/main" id="{234D5304-AB8A-2C07-B65F-BFEDCE7FF2BD}"/>
+              </a:ext>
+            </a:extLst>
+          </p:cNvPr>
+          <p:cNvSpPr txBox="1"/>
+          <p:nvPr/>
+        </p:nvSpPr>
+        <p:spPr>
+          <a:xfrm>
+            <a:off x="2946129" y="5160131"/>
+            <a:ext cx="4291175" cy="400110"/>
+          </a:xfrm>
+          <a:prstGeom prst="rect">
+            <a:avLst/>
+          </a:prstGeom>
+          <a:noFill/>
+        </p:spPr>
+        <p:txBody>
+          <a:bodyPr wrap="none" rtlCol="0">
+            <a:spAutoFit/>
+          </a:bodyPr>
+          <a:lstStyle/>
+          <a:p>
+            <a:r>
+              <a:rPr lang="nl-NL" sz="2000" noProof="0" dirty="0"/>
+              <a:t>Koppelt 1 of meerdere rijen - verplicht.</a:t>
+            </a:r>
+          </a:p>
+        </p:txBody>
+      </p:sp>
+      <p:grpSp>
+        <p:nvGrpSpPr>
+          <p:cNvPr id="70" name="Group 69">
+            <a:extLst>
+              <a:ext uri="{FF2B5EF4-FFF2-40B4-BE49-F238E27FC236}">
+                <a16:creationId xmlns:a16="http://schemas.microsoft.com/office/drawing/2014/main" id="{F841ECEE-A2AD-FA04-DCA2-F274D2A17EAB}"/>
+              </a:ext>
+            </a:extLst>
+          </p:cNvPr>
+          <p:cNvGrpSpPr/>
+          <p:nvPr/>
+        </p:nvGrpSpPr>
+        <p:grpSpPr>
+          <a:xfrm>
+            <a:off x="835628" y="4219672"/>
+            <a:ext cx="1080821" cy="231804"/>
+            <a:chOff x="1068510" y="2917861"/>
+            <a:chExt cx="1080821" cy="231804"/>
+          </a:xfrm>
+        </p:grpSpPr>
+        <p:cxnSp>
+          <p:nvCxnSpPr>
+            <p:cNvPr id="71" name="Straight Connector 70">
+              <a:extLst>
+                <a:ext uri="{FF2B5EF4-FFF2-40B4-BE49-F238E27FC236}">
+                  <a16:creationId xmlns:a16="http://schemas.microsoft.com/office/drawing/2014/main" id="{83AD3324-9DE3-9808-355D-541F2E02613D}"/>
+                </a:ext>
+              </a:extLst>
+            </p:cNvPr>
+            <p:cNvCxnSpPr>
+              <a:cxnSpLocks/>
+            </p:cNvCxnSpPr>
+            <p:nvPr/>
+          </p:nvCxnSpPr>
+          <p:spPr>
+            <a:xfrm>
+              <a:off x="1068510" y="3034837"/>
+              <a:ext cx="1078787" cy="0"/>
+            </a:xfrm>
+            <a:prstGeom prst="line">
+              <a:avLst/>
+            </a:prstGeom>
+          </p:spPr>
+          <p:style>
+            <a:lnRef idx="3">
+              <a:schemeClr val="dk1"/>
+            </a:lnRef>
+            <a:fillRef idx="0">
+              <a:schemeClr val="dk1"/>
+            </a:fillRef>
+            <a:effectRef idx="2">
+              <a:schemeClr val="dk1"/>
+            </a:effectRef>
+            <a:fontRef idx="minor">
+              <a:schemeClr val="tx1"/>
+            </a:fontRef>
+          </p:style>
+        </p:cxnSp>
+        <p:cxnSp>
+          <p:nvCxnSpPr>
+            <p:cNvPr id="72" name="Straight Connector 71">
+              <a:extLst>
+                <a:ext uri="{FF2B5EF4-FFF2-40B4-BE49-F238E27FC236}">
+                  <a16:creationId xmlns:a16="http://schemas.microsoft.com/office/drawing/2014/main" id="{BC12D186-758C-5449-10A4-72D59497666A}"/>
+                </a:ext>
+              </a:extLst>
+            </p:cNvPr>
+            <p:cNvCxnSpPr/>
+            <p:nvPr/>
+          </p:nvCxnSpPr>
+          <p:spPr>
+            <a:xfrm flipV="1">
+              <a:off x="1837362" y="2917861"/>
+              <a:ext cx="309936" cy="113015"/>
+            </a:xfrm>
+            <a:prstGeom prst="line">
+              <a:avLst/>
+            </a:prstGeom>
+          </p:spPr>
+          <p:style>
+            <a:lnRef idx="3">
+              <a:schemeClr val="dk1"/>
+            </a:lnRef>
+            <a:fillRef idx="0">
+              <a:schemeClr val="dk1"/>
+            </a:fillRef>
+            <a:effectRef idx="2">
+              <a:schemeClr val="dk1"/>
+            </a:effectRef>
+            <a:fontRef idx="minor">
+              <a:schemeClr val="tx1"/>
+            </a:fontRef>
+          </p:style>
+        </p:cxnSp>
+        <p:cxnSp>
+          <p:nvCxnSpPr>
+            <p:cNvPr id="73" name="Straight Connector 72">
+              <a:extLst>
+                <a:ext uri="{FF2B5EF4-FFF2-40B4-BE49-F238E27FC236}">
+                  <a16:creationId xmlns:a16="http://schemas.microsoft.com/office/drawing/2014/main" id="{D33F8CC0-6B52-46A6-E4F2-F292EB80A1FA}"/>
+                </a:ext>
+              </a:extLst>
+            </p:cNvPr>
+            <p:cNvCxnSpPr>
+              <a:cxnSpLocks/>
+            </p:cNvCxnSpPr>
+            <p:nvPr/>
+          </p:nvCxnSpPr>
+          <p:spPr>
+            <a:xfrm flipH="1" flipV="1">
+              <a:off x="1839395" y="3036650"/>
+              <a:ext cx="309936" cy="113015"/>
+            </a:xfrm>
+            <a:prstGeom prst="line">
+              <a:avLst/>
+            </a:prstGeom>
+          </p:spPr>
+          <p:style>
+            <a:lnRef idx="3">
+              <a:schemeClr val="dk1"/>
+            </a:lnRef>
+            <a:fillRef idx="0">
+              <a:schemeClr val="dk1"/>
+            </a:fillRef>
+            <a:effectRef idx="2">
+              <a:schemeClr val="dk1"/>
+            </a:effectRef>
+            <a:fontRef idx="minor">
+              <a:schemeClr val="tx1"/>
+            </a:fontRef>
+          </p:style>
+        </p:cxnSp>
+      </p:grpSp>
+      <p:grpSp>
+        <p:nvGrpSpPr>
+          <p:cNvPr id="83" name="Group 82">
+            <a:extLst>
+              <a:ext uri="{FF2B5EF4-FFF2-40B4-BE49-F238E27FC236}">
+                <a16:creationId xmlns:a16="http://schemas.microsoft.com/office/drawing/2014/main" id="{BE14B8C7-6477-74CD-DF08-D5144495D201}"/>
+              </a:ext>
+            </a:extLst>
+          </p:cNvPr>
+          <p:cNvGrpSpPr/>
+          <p:nvPr/>
+        </p:nvGrpSpPr>
+        <p:grpSpPr>
+          <a:xfrm>
+            <a:off x="835628" y="5247550"/>
+            <a:ext cx="1080821" cy="225273"/>
+            <a:chOff x="835628" y="5242792"/>
+            <a:chExt cx="1080821" cy="225273"/>
+          </a:xfrm>
+        </p:grpSpPr>
+        <p:cxnSp>
+          <p:nvCxnSpPr>
+            <p:cNvPr id="49" name="Straight Connector 48">
+              <a:extLst>
+                <a:ext uri="{FF2B5EF4-FFF2-40B4-BE49-F238E27FC236}">
+                  <a16:creationId xmlns:a16="http://schemas.microsoft.com/office/drawing/2014/main" id="{E15FD825-301B-F744-C32E-C967EE268443}"/>
+                </a:ext>
+              </a:extLst>
+            </p:cNvPr>
+            <p:cNvCxnSpPr>
+              <a:cxnSpLocks/>
+            </p:cNvCxnSpPr>
+            <p:nvPr/>
+          </p:nvCxnSpPr>
+          <p:spPr>
+            <a:xfrm>
+              <a:off x="1591950" y="5252308"/>
+              <a:ext cx="0" cy="215757"/>
+            </a:xfrm>
+            <a:prstGeom prst="line">
+              <a:avLst/>
+            </a:prstGeom>
+          </p:spPr>
+          <p:style>
+            <a:lnRef idx="3">
+              <a:schemeClr val="dk1"/>
+            </a:lnRef>
+            <a:fillRef idx="0">
+              <a:schemeClr val="dk1"/>
+            </a:fillRef>
+            <a:effectRef idx="2">
+              <a:schemeClr val="dk1"/>
+            </a:effectRef>
+            <a:fontRef idx="minor">
+              <a:schemeClr val="tx1"/>
+            </a:fontRef>
+          </p:style>
+        </p:cxnSp>
+        <p:grpSp>
+          <p:nvGrpSpPr>
+            <p:cNvPr id="78" name="Group 77">
+              <a:extLst>
+                <a:ext uri="{FF2B5EF4-FFF2-40B4-BE49-F238E27FC236}">
+                  <a16:creationId xmlns:a16="http://schemas.microsoft.com/office/drawing/2014/main" id="{59613A2C-CD30-5DF6-8DD0-C620E1A763B3}"/>
+                </a:ext>
+              </a:extLst>
+            </p:cNvPr>
+            <p:cNvGrpSpPr/>
+            <p:nvPr/>
+          </p:nvGrpSpPr>
+          <p:grpSpPr>
+            <a:xfrm>
+              <a:off x="835628" y="5242792"/>
+              <a:ext cx="1080821" cy="225273"/>
+              <a:chOff x="1068510" y="2917861"/>
+              <a:chExt cx="1080821" cy="225273"/>
+            </a:xfrm>
+          </p:grpSpPr>
+          <p:cxnSp>
+            <p:nvCxnSpPr>
+              <p:cNvPr id="79" name="Straight Connector 78">
+                <a:extLst>
+                  <a:ext uri="{FF2B5EF4-FFF2-40B4-BE49-F238E27FC236}">
+                    <a16:creationId xmlns:a16="http://schemas.microsoft.com/office/drawing/2014/main" id="{4C235641-97AE-9484-BE2B-C8884807DC47}"/>
+                  </a:ext>
+                </a:extLst>
+              </p:cNvPr>
+              <p:cNvCxnSpPr>
+                <a:cxnSpLocks/>
+              </p:cNvCxnSpPr>
+              <p:nvPr/>
+            </p:nvCxnSpPr>
+            <p:spPr>
+              <a:xfrm>
+                <a:off x="1068510" y="3034837"/>
+                <a:ext cx="1078787" cy="0"/>
+              </a:xfrm>
+              <a:prstGeom prst="line">
+                <a:avLst/>
+              </a:prstGeom>
+            </p:spPr>
+            <p:style>
+              <a:lnRef idx="3">
+                <a:schemeClr val="dk1"/>
+              </a:lnRef>
+              <a:fillRef idx="0">
+                <a:schemeClr val="dk1"/>
+              </a:fillRef>
+              <a:effectRef idx="2">
+                <a:schemeClr val="dk1"/>
+              </a:effectRef>
+              <a:fontRef idx="minor">
+                <a:schemeClr val="tx1"/>
+              </a:fontRef>
+            </p:style>
+          </p:cxnSp>
+          <p:cxnSp>
+            <p:nvCxnSpPr>
+              <p:cNvPr id="80" name="Straight Connector 79">
+                <a:extLst>
+                  <a:ext uri="{FF2B5EF4-FFF2-40B4-BE49-F238E27FC236}">
+                    <a16:creationId xmlns:a16="http://schemas.microsoft.com/office/drawing/2014/main" id="{033842E4-6459-6F92-7942-09D572E54775}"/>
                   </a:ext>
                 </a:extLst>
               </p:cNvPr>
@@ -17603,10 +18351,10 @@
           </p:cxnSp>
           <p:cxnSp>
             <p:nvCxnSpPr>
-              <p:cNvPr id="8" name="Straight Connector 7">
+              <p:cNvPr id="81" name="Straight Connector 80">
                 <a:extLst>
                   <a:ext uri="{FF2B5EF4-FFF2-40B4-BE49-F238E27FC236}">
-                    <a16:creationId xmlns:a16="http://schemas.microsoft.com/office/drawing/2014/main" id="{52D891C9-20CB-4323-86D0-F1AAEA173217}"/>
+                    <a16:creationId xmlns:a16="http://schemas.microsoft.com/office/drawing/2014/main" id="{0B45F8BA-A6CE-9C47-E8C0-9939239E93C6}"/>
                   </a:ext>
                 </a:extLst>
               </p:cNvPr>
@@ -17617,7 +18365,161 @@
             </p:nvCxnSpPr>
             <p:spPr>
               <a:xfrm flipH="1" flipV="1">
-                <a:off x="1825378" y="3029164"/>
+                <a:off x="1839395" y="3030119"/>
+                <a:ext cx="309936" cy="113015"/>
+              </a:xfrm>
+              <a:prstGeom prst="line">
+                <a:avLst/>
+              </a:prstGeom>
+            </p:spPr>
+            <p:style>
+              <a:lnRef idx="3">
+                <a:schemeClr val="dk1"/>
+              </a:lnRef>
+              <a:fillRef idx="0">
+                <a:schemeClr val="dk1"/>
+              </a:fillRef>
+              <a:effectRef idx="2">
+                <a:schemeClr val="dk1"/>
+              </a:effectRef>
+              <a:fontRef idx="minor">
+                <a:schemeClr val="tx1"/>
+              </a:fontRef>
+            </p:style>
+          </p:cxnSp>
+        </p:grpSp>
+      </p:grpSp>
+      <p:grpSp>
+        <p:nvGrpSpPr>
+          <p:cNvPr id="82" name="Group 81">
+            <a:extLst>
+              <a:ext uri="{FF2B5EF4-FFF2-40B4-BE49-F238E27FC236}">
+                <a16:creationId xmlns:a16="http://schemas.microsoft.com/office/drawing/2014/main" id="{ED7D9082-EE6C-D87B-1807-66E9D7902E53}"/>
+              </a:ext>
+            </a:extLst>
+          </p:cNvPr>
+          <p:cNvGrpSpPr/>
+          <p:nvPr/>
+        </p:nvGrpSpPr>
+        <p:grpSpPr>
+          <a:xfrm>
+            <a:off x="835628" y="4733611"/>
+            <a:ext cx="1080821" cy="231804"/>
+            <a:chOff x="835628" y="4719091"/>
+            <a:chExt cx="1080821" cy="231804"/>
+          </a:xfrm>
+        </p:grpSpPr>
+        <p:grpSp>
+          <p:nvGrpSpPr>
+            <p:cNvPr id="74" name="Group 73">
+              <a:extLst>
+                <a:ext uri="{FF2B5EF4-FFF2-40B4-BE49-F238E27FC236}">
+                  <a16:creationId xmlns:a16="http://schemas.microsoft.com/office/drawing/2014/main" id="{7783C02A-8F03-EF2B-FF86-00B7B20C0E4E}"/>
+                </a:ext>
+              </a:extLst>
+            </p:cNvPr>
+            <p:cNvGrpSpPr/>
+            <p:nvPr/>
+          </p:nvGrpSpPr>
+          <p:grpSpPr>
+            <a:xfrm>
+              <a:off x="835628" y="4719091"/>
+              <a:ext cx="1080821" cy="231804"/>
+              <a:chOff x="1068510" y="2917861"/>
+              <a:chExt cx="1080821" cy="231804"/>
+            </a:xfrm>
+          </p:grpSpPr>
+          <p:cxnSp>
+            <p:nvCxnSpPr>
+              <p:cNvPr id="75" name="Straight Connector 74">
+                <a:extLst>
+                  <a:ext uri="{FF2B5EF4-FFF2-40B4-BE49-F238E27FC236}">
+                    <a16:creationId xmlns:a16="http://schemas.microsoft.com/office/drawing/2014/main" id="{D2E78841-1CDB-5957-3CCF-0D7C25C891E1}"/>
+                  </a:ext>
+                </a:extLst>
+              </p:cNvPr>
+              <p:cNvCxnSpPr>
+                <a:cxnSpLocks/>
+              </p:cNvCxnSpPr>
+              <p:nvPr/>
+            </p:nvCxnSpPr>
+            <p:spPr>
+              <a:xfrm>
+                <a:off x="1068510" y="3034837"/>
+                <a:ext cx="1078787" cy="0"/>
+              </a:xfrm>
+              <a:prstGeom prst="line">
+                <a:avLst/>
+              </a:prstGeom>
+            </p:spPr>
+            <p:style>
+              <a:lnRef idx="3">
+                <a:schemeClr val="dk1"/>
+              </a:lnRef>
+              <a:fillRef idx="0">
+                <a:schemeClr val="dk1"/>
+              </a:fillRef>
+              <a:effectRef idx="2">
+                <a:schemeClr val="dk1"/>
+              </a:effectRef>
+              <a:fontRef idx="minor">
+                <a:schemeClr val="tx1"/>
+              </a:fontRef>
+            </p:style>
+          </p:cxnSp>
+          <p:cxnSp>
+            <p:nvCxnSpPr>
+              <p:cNvPr id="76" name="Straight Connector 75">
+                <a:extLst>
+                  <a:ext uri="{FF2B5EF4-FFF2-40B4-BE49-F238E27FC236}">
+                    <a16:creationId xmlns:a16="http://schemas.microsoft.com/office/drawing/2014/main" id="{FAA6EAA2-E8F7-9A83-5E7D-B8D866501215}"/>
+                  </a:ext>
+                </a:extLst>
+              </p:cNvPr>
+              <p:cNvCxnSpPr/>
+              <p:nvPr/>
+            </p:nvCxnSpPr>
+            <p:spPr>
+              <a:xfrm flipV="1">
+                <a:off x="1837362" y="2917861"/>
+                <a:ext cx="309936" cy="113015"/>
+              </a:xfrm>
+              <a:prstGeom prst="line">
+                <a:avLst/>
+              </a:prstGeom>
+            </p:spPr>
+            <p:style>
+              <a:lnRef idx="3">
+                <a:schemeClr val="dk1"/>
+              </a:lnRef>
+              <a:fillRef idx="0">
+                <a:schemeClr val="dk1"/>
+              </a:fillRef>
+              <a:effectRef idx="2">
+                <a:schemeClr val="dk1"/>
+              </a:effectRef>
+              <a:fontRef idx="minor">
+                <a:schemeClr val="tx1"/>
+              </a:fontRef>
+            </p:style>
+          </p:cxnSp>
+          <p:cxnSp>
+            <p:nvCxnSpPr>
+              <p:cNvPr id="77" name="Straight Connector 76">
+                <a:extLst>
+                  <a:ext uri="{FF2B5EF4-FFF2-40B4-BE49-F238E27FC236}">
+                    <a16:creationId xmlns:a16="http://schemas.microsoft.com/office/drawing/2014/main" id="{5C483F5F-CAA3-ED03-8DC6-2358FB9FD863}"/>
+                  </a:ext>
+                </a:extLst>
+              </p:cNvPr>
+              <p:cNvCxnSpPr>
+                <a:cxnSpLocks/>
+              </p:cNvCxnSpPr>
+              <p:nvPr/>
+            </p:nvCxnSpPr>
+            <p:spPr>
+              <a:xfrm flipH="1" flipV="1">
+                <a:off x="1839395" y="3036650"/>
                 <a:ext cx="309936" cy="113015"/>
               </a:xfrm>
               <a:prstGeom prst="line">
@@ -17642,36 +18544,49 @@
         </p:grpSp>
         <p:sp>
           <p:nvSpPr>
-            <p:cNvPr id="10" name="TextBox 9">
+            <p:cNvPr id="38" name="Oval 37">
               <a:extLst>
                 <a:ext uri="{FF2B5EF4-FFF2-40B4-BE49-F238E27FC236}">
-                  <a16:creationId xmlns:a16="http://schemas.microsoft.com/office/drawing/2014/main" id="{AFA87921-06EB-488E-8B3F-0F359A4E4237}"/>
+                  <a16:creationId xmlns:a16="http://schemas.microsoft.com/office/drawing/2014/main" id="{7112AC6F-021A-99BE-4E52-A7B6E2466A6E}"/>
                 </a:ext>
               </a:extLst>
             </p:cNvPr>
-            <p:cNvSpPr txBox="1"/>
+            <p:cNvSpPr/>
             <p:nvPr/>
           </p:nvSpPr>
           <p:spPr>
             <a:xfrm>
-              <a:off x="3000054" y="4587532"/>
-              <a:ext cx="2958630" cy="400110"/>
+              <a:off x="1341364" y="4724606"/>
+              <a:ext cx="219758" cy="219758"/>
             </a:xfrm>
-            <a:prstGeom prst="rect">
+            <a:prstGeom prst="ellipse">
               <a:avLst/>
             </a:prstGeom>
-            <a:noFill/>
+            <a:solidFill>
+              <a:schemeClr val="bg1"/>
+            </a:solidFill>
+            <a:ln w="19050"/>
           </p:spPr>
+          <p:style>
+            <a:lnRef idx="2">
+              <a:schemeClr val="dk1"/>
+            </a:lnRef>
+            <a:fillRef idx="1">
+              <a:schemeClr val="lt1"/>
+            </a:fillRef>
+            <a:effectRef idx="0">
+              <a:schemeClr val="dk1"/>
+            </a:effectRef>
+            <a:fontRef idx="minor">
+              <a:schemeClr val="dk1"/>
+            </a:fontRef>
+          </p:style>
           <p:txBody>
-            <a:bodyPr wrap="none" rtlCol="0">
-              <a:spAutoFit/>
-            </a:bodyPr>
+            <a:bodyPr rtlCol="0" anchor="ctr"/>
             <a:lstStyle/>
             <a:p>
-              <a:r>
-                <a:rPr lang="nl-NL" sz="2000" noProof="0" dirty="0"/>
-                <a:t>Koppelt 1 of meer records.</a:t>
-              </a:r>
+              <a:pPr algn="ctr"/>
+              <a:endParaRPr lang="nl-NL" noProof="0" dirty="0"/>
             </a:p>
           </p:txBody>
         </p:sp>
@@ -17679,7 +18594,7 @@
     </p:spTree>
     <p:extLst>
       <p:ext uri="{BB962C8B-B14F-4D97-AF65-F5344CB8AC3E}">
-        <p14:creationId xmlns:p14="http://schemas.microsoft.com/office/powerpoint/2010/main" val="812638733"/>
+        <p14:creationId xmlns:p14="http://schemas.microsoft.com/office/powerpoint/2010/main" val="1644197683"/>
       </p:ext>
     </p:extLst>
   </p:cSld>
@@ -17689,7 +18604,7 @@
 </p:sld>
 </file>
 
-<file path=ppt/slides/slide25.xml><?xml version="1.0" encoding="utf-8"?>
+<file path=ppt/slides/slide26.xml><?xml version="1.0" encoding="utf-8"?>
 <p:sld xmlns:a="http://schemas.openxmlformats.org/drawingml/2006/main" xmlns:r="http://schemas.openxmlformats.org/officeDocument/2006/relationships" xmlns:p="http://schemas.openxmlformats.org/presentationml/2006/main">
   <p:cSld>
     <p:spTree>
@@ -17879,7 +18794,7 @@
 </p:sld>
 </file>
 
-<file path=ppt/slides/slide26.xml><?xml version="1.0" encoding="utf-8"?>
+<file path=ppt/slides/slide27.xml><?xml version="1.0" encoding="utf-8"?>
 <p:sld xmlns:a="http://schemas.openxmlformats.org/drawingml/2006/main" xmlns:r="http://schemas.openxmlformats.org/officeDocument/2006/relationships" xmlns:p="http://schemas.openxmlformats.org/presentationml/2006/main">
   <p:cSld>
     <p:spTree>
@@ -18064,7 +18979,7 @@
 </p:sld>
 </file>
 
-<file path=ppt/slides/slide27.xml><?xml version="1.0" encoding="utf-8"?>
+<file path=ppt/slides/slide28.xml><?xml version="1.0" encoding="utf-8"?>
 <p:sld xmlns:a="http://schemas.openxmlformats.org/drawingml/2006/main" xmlns:r="http://schemas.openxmlformats.org/officeDocument/2006/relationships" xmlns:p="http://schemas.openxmlformats.org/presentationml/2006/main">
   <p:cSld>
     <p:spTree>
@@ -18570,7 +19485,7 @@
 </p:sld>
 </file>
 
-<file path=ppt/slides/slide28.xml><?xml version="1.0" encoding="utf-8"?>
+<file path=ppt/slides/slide29.xml><?xml version="1.0" encoding="utf-8"?>
 <p:sld xmlns:a="http://schemas.openxmlformats.org/drawingml/2006/main" xmlns:r="http://schemas.openxmlformats.org/officeDocument/2006/relationships" xmlns:p="http://schemas.openxmlformats.org/presentationml/2006/main">
   <p:cSld>
     <p:spTree>
@@ -18636,91 +19551,6 @@
 </p:sld>
 </file>
 
-<file path=ppt/slides/slide29.xml><?xml version="1.0" encoding="utf-8"?>
-<p:sld xmlns:a="http://schemas.openxmlformats.org/drawingml/2006/main" xmlns:r="http://schemas.openxmlformats.org/officeDocument/2006/relationships" xmlns:p="http://schemas.openxmlformats.org/presentationml/2006/main">
-  <p:cSld>
-    <p:spTree>
-      <p:nvGrpSpPr>
-        <p:cNvPr id="1" name=""/>
-        <p:cNvGrpSpPr/>
-        <p:nvPr/>
-      </p:nvGrpSpPr>
-      <p:grpSpPr>
-        <a:xfrm>
-          <a:off x="0" y="0"/>
-          <a:ext cx="0" cy="0"/>
-          <a:chOff x="0" y="0"/>
-          <a:chExt cx="0" cy="0"/>
-        </a:xfrm>
-      </p:grpSpPr>
-      <p:sp>
-        <p:nvSpPr>
-          <p:cNvPr id="4" name="Title 3">
-            <a:extLst>
-              <a:ext uri="{FF2B5EF4-FFF2-40B4-BE49-F238E27FC236}">
-                <a16:creationId xmlns:a16="http://schemas.microsoft.com/office/drawing/2014/main" id="{B021A23A-264E-4F48-8D91-52361A48531C}"/>
-              </a:ext>
-            </a:extLst>
-          </p:cNvPr>
-          <p:cNvSpPr>
-            <a:spLocks noGrp="1"/>
-          </p:cNvSpPr>
-          <p:nvPr>
-            <p:ph type="title"/>
-          </p:nvPr>
-        </p:nvSpPr>
-        <p:spPr/>
-        <p:txBody>
-          <a:bodyPr>
-            <a:normAutofit/>
-          </a:bodyPr>
-          <a:lstStyle/>
-          <a:p>
-            <a:r>
-              <a:rPr lang="nl-NL" sz="4400" noProof="0" dirty="0"/>
-              <a:t>Tabellen en relaties in SQL</a:t>
-            </a:r>
-          </a:p>
-        </p:txBody>
-      </p:sp>
-      <p:sp>
-        <p:nvSpPr>
-          <p:cNvPr id="5" name="Text Placeholder 4">
-            <a:extLst>
-              <a:ext uri="{FF2B5EF4-FFF2-40B4-BE49-F238E27FC236}">
-                <a16:creationId xmlns:a16="http://schemas.microsoft.com/office/drawing/2014/main" id="{8B343CC5-EAA5-4394-8782-3BBA201EEC8C}"/>
-              </a:ext>
-            </a:extLst>
-          </p:cNvPr>
-          <p:cNvSpPr>
-            <a:spLocks noGrp="1"/>
-          </p:cNvSpPr>
-          <p:nvPr>
-            <p:ph type="body" idx="1"/>
-          </p:nvPr>
-        </p:nvSpPr>
-        <p:spPr/>
-        <p:txBody>
-          <a:bodyPr/>
-          <a:lstStyle/>
-          <a:p>
-            <a:endParaRPr lang="nl-NL" noProof="0" dirty="0"/>
-          </a:p>
-        </p:txBody>
-      </p:sp>
-    </p:spTree>
-    <p:extLst>
-      <p:ext uri="{BB962C8B-B14F-4D97-AF65-F5344CB8AC3E}">
-        <p14:creationId xmlns:p14="http://schemas.microsoft.com/office/powerpoint/2010/main" val="2875298684"/>
-      </p:ext>
-    </p:extLst>
-  </p:cSld>
-  <p:clrMapOvr>
-    <a:masterClrMapping/>
-  </p:clrMapOvr>
-</p:sld>
-</file>
-
 <file path=ppt/slides/slide3.xml><?xml version="1.0" encoding="utf-8"?>
 <p:sld xmlns:a="http://schemas.openxmlformats.org/drawingml/2006/main" xmlns:r="http://schemas.openxmlformats.org/officeDocument/2006/relationships" xmlns:p="http://schemas.openxmlformats.org/presentationml/2006/main">
   <p:cSld>
@@ -18807,6 +19637,91 @@
 </file>
 
 <file path=ppt/slides/slide30.xml><?xml version="1.0" encoding="utf-8"?>
+<p:sld xmlns:a="http://schemas.openxmlformats.org/drawingml/2006/main" xmlns:r="http://schemas.openxmlformats.org/officeDocument/2006/relationships" xmlns:p="http://schemas.openxmlformats.org/presentationml/2006/main">
+  <p:cSld>
+    <p:spTree>
+      <p:nvGrpSpPr>
+        <p:cNvPr id="1" name=""/>
+        <p:cNvGrpSpPr/>
+        <p:nvPr/>
+      </p:nvGrpSpPr>
+      <p:grpSpPr>
+        <a:xfrm>
+          <a:off x="0" y="0"/>
+          <a:ext cx="0" cy="0"/>
+          <a:chOff x="0" y="0"/>
+          <a:chExt cx="0" cy="0"/>
+        </a:xfrm>
+      </p:grpSpPr>
+      <p:sp>
+        <p:nvSpPr>
+          <p:cNvPr id="4" name="Title 3">
+            <a:extLst>
+              <a:ext uri="{FF2B5EF4-FFF2-40B4-BE49-F238E27FC236}">
+                <a16:creationId xmlns:a16="http://schemas.microsoft.com/office/drawing/2014/main" id="{B021A23A-264E-4F48-8D91-52361A48531C}"/>
+              </a:ext>
+            </a:extLst>
+          </p:cNvPr>
+          <p:cNvSpPr>
+            <a:spLocks noGrp="1"/>
+          </p:cNvSpPr>
+          <p:nvPr>
+            <p:ph type="title"/>
+          </p:nvPr>
+        </p:nvSpPr>
+        <p:spPr/>
+        <p:txBody>
+          <a:bodyPr>
+            <a:normAutofit/>
+          </a:bodyPr>
+          <a:lstStyle/>
+          <a:p>
+            <a:r>
+              <a:rPr lang="nl-NL" sz="4400" noProof="0" dirty="0"/>
+              <a:t>Tabellen en relaties in SQL</a:t>
+            </a:r>
+          </a:p>
+        </p:txBody>
+      </p:sp>
+      <p:sp>
+        <p:nvSpPr>
+          <p:cNvPr id="5" name="Text Placeholder 4">
+            <a:extLst>
+              <a:ext uri="{FF2B5EF4-FFF2-40B4-BE49-F238E27FC236}">
+                <a16:creationId xmlns:a16="http://schemas.microsoft.com/office/drawing/2014/main" id="{8B343CC5-EAA5-4394-8782-3BBA201EEC8C}"/>
+              </a:ext>
+            </a:extLst>
+          </p:cNvPr>
+          <p:cNvSpPr>
+            <a:spLocks noGrp="1"/>
+          </p:cNvSpPr>
+          <p:nvPr>
+            <p:ph type="body" idx="1"/>
+          </p:nvPr>
+        </p:nvSpPr>
+        <p:spPr/>
+        <p:txBody>
+          <a:bodyPr/>
+          <a:lstStyle/>
+          <a:p>
+            <a:endParaRPr lang="nl-NL" noProof="0" dirty="0"/>
+          </a:p>
+        </p:txBody>
+      </p:sp>
+    </p:spTree>
+    <p:extLst>
+      <p:ext uri="{BB962C8B-B14F-4D97-AF65-F5344CB8AC3E}">
+        <p14:creationId xmlns:p14="http://schemas.microsoft.com/office/powerpoint/2010/main" val="2875298684"/>
+      </p:ext>
+    </p:extLst>
+  </p:cSld>
+  <p:clrMapOvr>
+    <a:masterClrMapping/>
+  </p:clrMapOvr>
+</p:sld>
+</file>
+
+<file path=ppt/slides/slide31.xml><?xml version="1.0" encoding="utf-8"?>
 <p:sld xmlns:a="http://schemas.openxmlformats.org/drawingml/2006/main" xmlns:r="http://schemas.openxmlformats.org/officeDocument/2006/relationships" xmlns:p="http://schemas.openxmlformats.org/presentationml/2006/main">
   <p:cSld>
     <p:spTree>
@@ -19306,7 +20221,7 @@
 </p:sld>
 </file>
 
-<file path=ppt/slides/slide31.xml><?xml version="1.0" encoding="utf-8"?>
+<file path=ppt/slides/slide32.xml><?xml version="1.0" encoding="utf-8"?>
 <p:sld xmlns:a="http://schemas.openxmlformats.org/drawingml/2006/main" xmlns:r="http://schemas.openxmlformats.org/officeDocument/2006/relationships" xmlns:p="http://schemas.openxmlformats.org/presentationml/2006/main">
   <p:cSld>
     <p:spTree>
@@ -19671,7 +20586,7 @@
 </p:sld>
 </file>
 
-<file path=ppt/slides/slide32.xml><?xml version="1.0" encoding="utf-8"?>
+<file path=ppt/slides/slide33.xml><?xml version="1.0" encoding="utf-8"?>
 <p:sld xmlns:a="http://schemas.openxmlformats.org/drawingml/2006/main" xmlns:r="http://schemas.openxmlformats.org/officeDocument/2006/relationships" xmlns:p="http://schemas.openxmlformats.org/presentationml/2006/main">
   <p:cSld>
     <p:spTree>
@@ -20344,7 +21259,7 @@
 </p:sld>
 </file>
 
-<file path=ppt/slides/slide33.xml><?xml version="1.0" encoding="utf-8"?>
+<file path=ppt/slides/slide34.xml><?xml version="1.0" encoding="utf-8"?>
 <p:sld xmlns:a="http://schemas.openxmlformats.org/drawingml/2006/main" xmlns:r="http://schemas.openxmlformats.org/officeDocument/2006/relationships" xmlns:p="http://schemas.openxmlformats.org/presentationml/2006/main">
   <p:cSld>
     <p:spTree>
@@ -20903,7 +21818,7 @@
 </p:sld>
 </file>
 
-<file path=ppt/slides/slide34.xml><?xml version="1.0" encoding="utf-8"?>
+<file path=ppt/slides/slide35.xml><?xml version="1.0" encoding="utf-8"?>
 <p:sld xmlns:a="http://schemas.openxmlformats.org/drawingml/2006/main" xmlns:r="http://schemas.openxmlformats.org/officeDocument/2006/relationships" xmlns:p="http://schemas.openxmlformats.org/presentationml/2006/main">
   <p:cSld>
     <p:spTree>
@@ -21521,7 +22436,7 @@
 </p:sld>
 </file>
 
-<file path=ppt/slides/slide35.xml><?xml version="1.0" encoding="utf-8"?>
+<file path=ppt/slides/slide36.xml><?xml version="1.0" encoding="utf-8"?>
 <p:sld xmlns:a="http://schemas.openxmlformats.org/drawingml/2006/main" xmlns:r="http://schemas.openxmlformats.org/officeDocument/2006/relationships" xmlns:p="http://schemas.openxmlformats.org/presentationml/2006/main">
   <p:cSld>
     <p:spTree>
@@ -22304,7 +23219,7 @@
 </p:sld>
 </file>
 
-<file path=ppt/slides/slide36.xml><?xml version="1.0" encoding="utf-8"?>
+<file path=ppt/slides/slide37.xml><?xml version="1.0" encoding="utf-8"?>
 <p:sld xmlns:a="http://schemas.openxmlformats.org/drawingml/2006/main" xmlns:r="http://schemas.openxmlformats.org/officeDocument/2006/relationships" xmlns:p="http://schemas.openxmlformats.org/presentationml/2006/main">
   <p:cSld>
     <p:spTree>
@@ -22812,7 +23727,7 @@
 </p:sld>
 </file>
 
-<file path=ppt/slides/slide37.xml><?xml version="1.0" encoding="utf-8"?>
+<file path=ppt/slides/slide38.xml><?xml version="1.0" encoding="utf-8"?>
 <p:sld xmlns:a="http://schemas.openxmlformats.org/drawingml/2006/main" xmlns:r="http://schemas.openxmlformats.org/officeDocument/2006/relationships" xmlns:p="http://schemas.openxmlformats.org/presentationml/2006/main">
   <p:cSld>
     <p:spTree>
@@ -23353,7 +24268,7 @@
 </p:sld>
 </file>
 
-<file path=ppt/slides/slide38.xml><?xml version="1.0" encoding="utf-8"?>
+<file path=ppt/slides/slide39.xml><?xml version="1.0" encoding="utf-8"?>
 <p:sld xmlns:a="http://schemas.openxmlformats.org/drawingml/2006/main" xmlns:r="http://schemas.openxmlformats.org/officeDocument/2006/relationships" xmlns:p="http://schemas.openxmlformats.org/presentationml/2006/main">
   <p:cSld>
     <p:spTree>
@@ -23951,772 +24866,6 @@
     <p:extLst>
       <p:ext uri="{BB962C8B-B14F-4D97-AF65-F5344CB8AC3E}">
         <p14:creationId xmlns:p14="http://schemas.microsoft.com/office/powerpoint/2010/main" val="1409386572"/>
-      </p:ext>
-    </p:extLst>
-  </p:cSld>
-  <p:clrMapOvr>
-    <a:masterClrMapping/>
-  </p:clrMapOvr>
-</p:sld>
-</file>
-
-<file path=ppt/slides/slide39.xml><?xml version="1.0" encoding="utf-8"?>
-<p:sld xmlns:a="http://schemas.openxmlformats.org/drawingml/2006/main" xmlns:r="http://schemas.openxmlformats.org/officeDocument/2006/relationships" xmlns:p="http://schemas.openxmlformats.org/presentationml/2006/main">
-  <p:cSld>
-    <p:spTree>
-      <p:nvGrpSpPr>
-        <p:cNvPr id="1" name="">
-          <a:extLst>
-            <a:ext uri="{FF2B5EF4-FFF2-40B4-BE49-F238E27FC236}">
-              <a16:creationId xmlns:a16="http://schemas.microsoft.com/office/drawing/2014/main" id="{3C4E01D9-4E80-079C-F5DC-729D580CEDE0}"/>
-            </a:ext>
-          </a:extLst>
-        </p:cNvPr>
-        <p:cNvGrpSpPr/>
-        <p:nvPr/>
-      </p:nvGrpSpPr>
-      <p:grpSpPr>
-        <a:xfrm>
-          <a:off x="0" y="0"/>
-          <a:ext cx="0" cy="0"/>
-          <a:chOff x="0" y="0"/>
-          <a:chExt cx="0" cy="0"/>
-        </a:xfrm>
-      </p:grpSpPr>
-      <p:sp>
-        <p:nvSpPr>
-          <p:cNvPr id="2" name="Title 1">
-            <a:extLst>
-              <a:ext uri="{FF2B5EF4-FFF2-40B4-BE49-F238E27FC236}">
-                <a16:creationId xmlns:a16="http://schemas.microsoft.com/office/drawing/2014/main" id="{995042DA-BDBA-7DE1-926F-8868915E277A}"/>
-              </a:ext>
-            </a:extLst>
-          </p:cNvPr>
-          <p:cNvSpPr>
-            <a:spLocks noGrp="1"/>
-          </p:cNvSpPr>
-          <p:nvPr>
-            <p:ph type="title"/>
-          </p:nvPr>
-        </p:nvSpPr>
-        <p:spPr/>
-        <p:txBody>
-          <a:bodyPr>
-            <a:normAutofit/>
-          </a:bodyPr>
-          <a:lstStyle/>
-          <a:p>
-            <a:r>
-              <a:rPr lang="nl-NL" sz="3600" noProof="0" dirty="0"/>
-              <a:t>Controles een naam geven</a:t>
-            </a:r>
-          </a:p>
-        </p:txBody>
-      </p:sp>
-      <p:sp>
-        <p:nvSpPr>
-          <p:cNvPr id="3" name="Content Placeholder 2">
-            <a:extLst>
-              <a:ext uri="{FF2B5EF4-FFF2-40B4-BE49-F238E27FC236}">
-                <a16:creationId xmlns:a16="http://schemas.microsoft.com/office/drawing/2014/main" id="{C35FF3E5-F8A1-35B6-59A8-EA7783237BE9}"/>
-              </a:ext>
-            </a:extLst>
-          </p:cNvPr>
-          <p:cNvSpPr>
-            <a:spLocks noGrp="1"/>
-          </p:cNvSpPr>
-          <p:nvPr>
-            <p:ph idx="1"/>
-          </p:nvPr>
-        </p:nvSpPr>
-        <p:spPr>
-          <a:xfrm>
-            <a:off x="838200" y="1825625"/>
-            <a:ext cx="5994115" cy="4351338"/>
-          </a:xfrm>
-        </p:spPr>
-        <p:txBody>
-          <a:bodyPr>
-            <a:normAutofit fontScale="92500" lnSpcReduction="10000"/>
-          </a:bodyPr>
-          <a:lstStyle/>
-          <a:p>
-            <a:pPr marL="0" indent="0">
-              <a:buNone/>
-            </a:pPr>
-            <a:r>
-              <a:rPr lang="nl-NL" sz="2000" noProof="0" dirty="0">
-                <a:solidFill>
-                  <a:schemeClr val="accent5">
-                    <a:lumMod val="75000"/>
-                  </a:schemeClr>
-                </a:solidFill>
-                <a:latin typeface="Courier New" panose="02070309020205020404" pitchFamily="49" charset="0"/>
-                <a:cs typeface="Courier New" panose="02070309020205020404" pitchFamily="49" charset="0"/>
-              </a:rPr>
-              <a:t>CREATE TABLE</a:t>
-            </a:r>
-            <a:r>
-              <a:rPr lang="nl-NL" sz="2000" noProof="0" dirty="0">
-                <a:latin typeface="Courier New" panose="02070309020205020404" pitchFamily="49" charset="0"/>
-                <a:cs typeface="Courier New" panose="02070309020205020404" pitchFamily="49" charset="0"/>
-              </a:rPr>
-              <a:t> Klanten (</a:t>
-            </a:r>
-          </a:p>
-          <a:p>
-            <a:pPr marL="0" indent="0">
-              <a:buNone/>
-            </a:pPr>
-            <a:r>
-              <a:rPr lang="nl-NL" sz="2000" noProof="0" dirty="0">
-                <a:latin typeface="Courier New" panose="02070309020205020404" pitchFamily="49" charset="0"/>
-                <a:cs typeface="Courier New" panose="02070309020205020404" pitchFamily="49" charset="0"/>
-              </a:rPr>
-              <a:t>  </a:t>
-            </a:r>
-            <a:r>
-              <a:rPr lang="nl-NL" sz="2000" noProof="0" dirty="0" err="1">
-                <a:latin typeface="Courier New" panose="02070309020205020404" pitchFamily="49" charset="0"/>
-                <a:cs typeface="Courier New" panose="02070309020205020404" pitchFamily="49" charset="0"/>
-              </a:rPr>
-              <a:t>KlantId</a:t>
-            </a:r>
-            <a:r>
-              <a:rPr lang="nl-NL" sz="2000" noProof="0" dirty="0">
-                <a:latin typeface="Courier New" panose="02070309020205020404" pitchFamily="49" charset="0"/>
-                <a:cs typeface="Courier New" panose="02070309020205020404" pitchFamily="49" charset="0"/>
-              </a:rPr>
-              <a:t>      INTEGER,</a:t>
-            </a:r>
-          </a:p>
-          <a:p>
-            <a:pPr marL="0" indent="0">
-              <a:buNone/>
-            </a:pPr>
-            <a:r>
-              <a:rPr lang="nl-NL" sz="2000" noProof="0" dirty="0">
-                <a:latin typeface="Courier New" panose="02070309020205020404" pitchFamily="49" charset="0"/>
-                <a:cs typeface="Courier New" panose="02070309020205020404" pitchFamily="49" charset="0"/>
-              </a:rPr>
-              <a:t>  Naam         </a:t>
-            </a:r>
-            <a:r>
-              <a:rPr lang="nl-NL" sz="2000" noProof="0" dirty="0">
-                <a:solidFill>
-                  <a:schemeClr val="accent5">
-                    <a:lumMod val="75000"/>
-                  </a:schemeClr>
-                </a:solidFill>
-                <a:latin typeface="Courier New" panose="02070309020205020404" pitchFamily="49" charset="0"/>
-                <a:cs typeface="Courier New" panose="02070309020205020404" pitchFamily="49" charset="0"/>
-              </a:rPr>
-              <a:t>TEXT</a:t>
-            </a:r>
-            <a:r>
-              <a:rPr lang="nl-NL" sz="2000" noProof="0" dirty="0">
-                <a:latin typeface="Courier New" panose="02070309020205020404" pitchFamily="49" charset="0"/>
-                <a:cs typeface="Courier New" panose="02070309020205020404" pitchFamily="49" charset="0"/>
-              </a:rPr>
-              <a:t>,</a:t>
-            </a:r>
-          </a:p>
-          <a:p>
-            <a:pPr marL="0" indent="0">
-              <a:buNone/>
-            </a:pPr>
-            <a:r>
-              <a:rPr lang="nl-NL" sz="2000" noProof="0" dirty="0">
-                <a:latin typeface="Courier New" panose="02070309020205020404" pitchFamily="49" charset="0"/>
-                <a:cs typeface="Courier New" panose="02070309020205020404" pitchFamily="49" charset="0"/>
-              </a:rPr>
-              <a:t>  Achternaam   </a:t>
-            </a:r>
-            <a:r>
-              <a:rPr lang="nl-NL" sz="2000" noProof="0" dirty="0">
-                <a:solidFill>
-                  <a:schemeClr val="accent5">
-                    <a:lumMod val="75000"/>
-                  </a:schemeClr>
-                </a:solidFill>
-                <a:latin typeface="Courier New" panose="02070309020205020404" pitchFamily="49" charset="0"/>
-                <a:cs typeface="Courier New" panose="02070309020205020404" pitchFamily="49" charset="0"/>
-              </a:rPr>
-              <a:t>TEXT</a:t>
-            </a:r>
-            <a:r>
-              <a:rPr lang="nl-NL" sz="2000" noProof="0" dirty="0">
-                <a:latin typeface="Courier New" panose="02070309020205020404" pitchFamily="49" charset="0"/>
-                <a:cs typeface="Courier New" panose="02070309020205020404" pitchFamily="49" charset="0"/>
-              </a:rPr>
-              <a:t>,</a:t>
-            </a:r>
-          </a:p>
-          <a:p>
-            <a:pPr marL="0" indent="0">
-              <a:buNone/>
-            </a:pPr>
-            <a:endParaRPr lang="nl-NL" sz="2000" b="1" noProof="0" dirty="0">
-              <a:latin typeface="Courier New" panose="02070309020205020404" pitchFamily="49" charset="0"/>
-              <a:cs typeface="Courier New" panose="02070309020205020404" pitchFamily="49" charset="0"/>
-            </a:endParaRPr>
-          </a:p>
-          <a:p>
-            <a:pPr marL="0" indent="0">
-              <a:buNone/>
-            </a:pPr>
-            <a:r>
-              <a:rPr lang="nl-NL" sz="2000" noProof="0" dirty="0">
-                <a:latin typeface="Courier New" panose="02070309020205020404" pitchFamily="49" charset="0"/>
-                <a:cs typeface="Courier New" panose="02070309020205020404" pitchFamily="49" charset="0"/>
-              </a:rPr>
-              <a:t>  </a:t>
-            </a:r>
-            <a:r>
-              <a:rPr lang="nl-NL" sz="2000" b="1" noProof="0" dirty="0">
-                <a:solidFill>
-                  <a:schemeClr val="accent5">
-                    <a:lumMod val="75000"/>
-                  </a:schemeClr>
-                </a:solidFill>
-                <a:latin typeface="Courier New" panose="02070309020205020404" pitchFamily="49" charset="0"/>
-                <a:cs typeface="Courier New" panose="02070309020205020404" pitchFamily="49" charset="0"/>
-              </a:rPr>
-              <a:t>CONSTRAINT</a:t>
-            </a:r>
-            <a:r>
-              <a:rPr lang="nl-NL" sz="2000" noProof="0" dirty="0">
-                <a:latin typeface="Courier New" panose="02070309020205020404" pitchFamily="49" charset="0"/>
-                <a:cs typeface="Courier New" panose="02070309020205020404" pitchFamily="49" charset="0"/>
-              </a:rPr>
-              <a:t> </a:t>
-            </a:r>
-            <a:r>
-              <a:rPr lang="nl-NL" sz="2000" noProof="0" dirty="0" err="1">
-                <a:latin typeface="Courier New" panose="02070309020205020404" pitchFamily="49" charset="0"/>
-                <a:cs typeface="Courier New" panose="02070309020205020404" pitchFamily="49" charset="0"/>
-              </a:rPr>
-              <a:t>PK_KlantId</a:t>
-            </a:r>
-            <a:endParaRPr lang="nl-NL" sz="2000" noProof="0" dirty="0">
-              <a:latin typeface="Courier New" panose="02070309020205020404" pitchFamily="49" charset="0"/>
-              <a:cs typeface="Courier New" panose="02070309020205020404" pitchFamily="49" charset="0"/>
-            </a:endParaRPr>
-          </a:p>
-          <a:p>
-            <a:pPr marL="0" indent="0">
-              <a:buNone/>
-            </a:pPr>
-            <a:r>
-              <a:rPr lang="nl-NL" sz="2000" noProof="0" dirty="0">
-                <a:latin typeface="Courier New" panose="02070309020205020404" pitchFamily="49" charset="0"/>
-                <a:cs typeface="Courier New" panose="02070309020205020404" pitchFamily="49" charset="0"/>
-              </a:rPr>
-              <a:t>   </a:t>
-            </a:r>
-            <a:r>
-              <a:rPr lang="nl-NL" sz="2000" noProof="0" dirty="0">
-                <a:solidFill>
-                  <a:schemeClr val="accent5">
-                    <a:lumMod val="75000"/>
-                  </a:schemeClr>
-                </a:solidFill>
-                <a:latin typeface="Courier New" panose="02070309020205020404" pitchFamily="49" charset="0"/>
-                <a:cs typeface="Courier New" panose="02070309020205020404" pitchFamily="49" charset="0"/>
-              </a:rPr>
-              <a:t>PRIMARY KEY</a:t>
-            </a:r>
-            <a:r>
-              <a:rPr lang="nl-NL" sz="2000" noProof="0" dirty="0">
-                <a:latin typeface="Courier New" panose="02070309020205020404" pitchFamily="49" charset="0"/>
-                <a:cs typeface="Courier New" panose="02070309020205020404" pitchFamily="49" charset="0"/>
-              </a:rPr>
-              <a:t>(</a:t>
-            </a:r>
-            <a:r>
-              <a:rPr lang="nl-NL" sz="2000" noProof="0" dirty="0" err="1">
-                <a:latin typeface="Courier New" panose="02070309020205020404" pitchFamily="49" charset="0"/>
-                <a:cs typeface="Courier New" panose="02070309020205020404" pitchFamily="49" charset="0"/>
-              </a:rPr>
-              <a:t>KlantId</a:t>
-            </a:r>
-            <a:r>
-              <a:rPr lang="nl-NL" sz="2000" noProof="0" dirty="0">
-                <a:latin typeface="Courier New" panose="02070309020205020404" pitchFamily="49" charset="0"/>
-                <a:cs typeface="Courier New" panose="02070309020205020404" pitchFamily="49" charset="0"/>
-              </a:rPr>
-              <a:t>)</a:t>
-            </a:r>
-          </a:p>
-          <a:p>
-            <a:pPr marL="0" indent="0">
-              <a:buNone/>
-            </a:pPr>
-            <a:endParaRPr lang="nl-NL" sz="2000" b="1" noProof="0" dirty="0">
-              <a:latin typeface="Courier New" panose="02070309020205020404" pitchFamily="49" charset="0"/>
-              <a:cs typeface="Courier New" panose="02070309020205020404" pitchFamily="49" charset="0"/>
-            </a:endParaRPr>
-          </a:p>
-          <a:p>
-            <a:pPr marL="0" indent="0">
-              <a:buNone/>
-            </a:pPr>
-            <a:r>
-              <a:rPr lang="nl-NL" sz="2000" b="1" noProof="0" dirty="0">
-                <a:latin typeface="Courier New" panose="02070309020205020404" pitchFamily="49" charset="0"/>
-                <a:cs typeface="Courier New" panose="02070309020205020404" pitchFamily="49" charset="0"/>
-              </a:rPr>
-              <a:t> </a:t>
-            </a:r>
-            <a:r>
-              <a:rPr lang="nl-NL" sz="2000" noProof="0" dirty="0">
-                <a:latin typeface="Courier New" panose="02070309020205020404" pitchFamily="49" charset="0"/>
-                <a:cs typeface="Courier New" panose="02070309020205020404" pitchFamily="49" charset="0"/>
-              </a:rPr>
-              <a:t> </a:t>
-            </a:r>
-            <a:r>
-              <a:rPr lang="nl-NL" sz="2000" b="1" noProof="0" dirty="0">
-                <a:solidFill>
-                  <a:schemeClr val="accent5">
-                    <a:lumMod val="75000"/>
-                  </a:schemeClr>
-                </a:solidFill>
-                <a:latin typeface="Courier New" panose="02070309020205020404" pitchFamily="49" charset="0"/>
-                <a:cs typeface="Courier New" panose="02070309020205020404" pitchFamily="49" charset="0"/>
-              </a:rPr>
-              <a:t>CONSTRAINT</a:t>
-            </a:r>
-            <a:r>
-              <a:rPr lang="nl-NL" sz="2000" noProof="0" dirty="0">
-                <a:latin typeface="Courier New" panose="02070309020205020404" pitchFamily="49" charset="0"/>
-                <a:cs typeface="Courier New" panose="02070309020205020404" pitchFamily="49" charset="0"/>
-              </a:rPr>
-              <a:t> </a:t>
-            </a:r>
-            <a:r>
-              <a:rPr lang="nl-NL" sz="2000" noProof="0" dirty="0" err="1">
-                <a:latin typeface="Courier New" panose="02070309020205020404" pitchFamily="49" charset="0"/>
-                <a:cs typeface="Courier New" panose="02070309020205020404" pitchFamily="49" charset="0"/>
-              </a:rPr>
-              <a:t>UQ_Naam_Achternaam</a:t>
-            </a:r>
-            <a:endParaRPr lang="nl-NL" sz="2000" noProof="0" dirty="0">
-              <a:latin typeface="Courier New" panose="02070309020205020404" pitchFamily="49" charset="0"/>
-              <a:cs typeface="Courier New" panose="02070309020205020404" pitchFamily="49" charset="0"/>
-            </a:endParaRPr>
-          </a:p>
-          <a:p>
-            <a:pPr marL="0" indent="0">
-              <a:buNone/>
-            </a:pPr>
-            <a:r>
-              <a:rPr lang="nl-NL" sz="2000" noProof="0" dirty="0">
-                <a:latin typeface="Courier New" panose="02070309020205020404" pitchFamily="49" charset="0"/>
-                <a:cs typeface="Courier New" panose="02070309020205020404" pitchFamily="49" charset="0"/>
-              </a:rPr>
-              <a:t>    </a:t>
-            </a:r>
-            <a:r>
-              <a:rPr lang="nl-NL" sz="2000" noProof="0" dirty="0">
-                <a:solidFill>
-                  <a:schemeClr val="accent5">
-                    <a:lumMod val="75000"/>
-                  </a:schemeClr>
-                </a:solidFill>
-                <a:latin typeface="Courier New" panose="02070309020205020404" pitchFamily="49" charset="0"/>
-                <a:cs typeface="Courier New" panose="02070309020205020404" pitchFamily="49" charset="0"/>
-              </a:rPr>
-              <a:t>UNIQUE</a:t>
-            </a:r>
-            <a:r>
-              <a:rPr lang="nl-NL" sz="2000" noProof="0" dirty="0">
-                <a:latin typeface="Courier New" panose="02070309020205020404" pitchFamily="49" charset="0"/>
-                <a:cs typeface="Courier New" panose="02070309020205020404" pitchFamily="49" charset="0"/>
-              </a:rPr>
-              <a:t>(Naam, Achternaam)</a:t>
-            </a:r>
-          </a:p>
-          <a:p>
-            <a:pPr marL="0" indent="0">
-              <a:buNone/>
-            </a:pPr>
-            <a:endParaRPr lang="nl-NL" sz="2000" noProof="0" dirty="0">
-              <a:latin typeface="Courier New" panose="02070309020205020404" pitchFamily="49" charset="0"/>
-              <a:cs typeface="Courier New" panose="02070309020205020404" pitchFamily="49" charset="0"/>
-            </a:endParaRPr>
-          </a:p>
-          <a:p>
-            <a:pPr marL="0" indent="0">
-              <a:buNone/>
-            </a:pPr>
-            <a:r>
-              <a:rPr lang="nl-NL" sz="2000" noProof="0" dirty="0">
-                <a:latin typeface="Courier New" panose="02070309020205020404" pitchFamily="49" charset="0"/>
-                <a:cs typeface="Courier New" panose="02070309020205020404" pitchFamily="49" charset="0"/>
-              </a:rPr>
-              <a:t>);</a:t>
-            </a:r>
-          </a:p>
-        </p:txBody>
-      </p:sp>
-      <p:sp>
-        <p:nvSpPr>
-          <p:cNvPr id="5" name="Content Placeholder 2">
-            <a:extLst>
-              <a:ext uri="{FF2B5EF4-FFF2-40B4-BE49-F238E27FC236}">
-                <a16:creationId xmlns:a16="http://schemas.microsoft.com/office/drawing/2014/main" id="{4B7F6534-8E96-1666-8498-2E50ED49EF18}"/>
-              </a:ext>
-            </a:extLst>
-          </p:cNvPr>
-          <p:cNvSpPr txBox="1">
-            <a:spLocks/>
-          </p:cNvSpPr>
-          <p:nvPr/>
-        </p:nvSpPr>
-        <p:spPr>
-          <a:xfrm>
-            <a:off x="7222732" y="1825625"/>
-            <a:ext cx="4131067" cy="4351338"/>
-          </a:xfrm>
-          <a:prstGeom prst="rect">
-            <a:avLst/>
-          </a:prstGeom>
-        </p:spPr>
-        <p:txBody>
-          <a:bodyPr vert="horz" lIns="91440" tIns="45720" rIns="91440" bIns="45720" rtlCol="0">
-            <a:normAutofit/>
-          </a:bodyPr>
-          <a:lstStyle>
-            <a:lvl1pPr marL="228600" indent="-228600" algn="l" defTabSz="914400" rtl="0" eaLnBrk="1" latinLnBrk="0" hangingPunct="1">
-              <a:lnSpc>
-                <a:spcPct val="90000"/>
-              </a:lnSpc>
-              <a:spcBef>
-                <a:spcPts val="1000"/>
-              </a:spcBef>
-              <a:buFont typeface="Arial" panose="020B0604020202020204" pitchFamily="34" charset="0"/>
-              <a:buChar char="•"/>
-              <a:defRPr sz="2800" kern="1200">
-                <a:solidFill>
-                  <a:schemeClr val="tx1"/>
-                </a:solidFill>
-                <a:latin typeface="+mn-lt"/>
-                <a:ea typeface="+mn-ea"/>
-                <a:cs typeface="+mn-cs"/>
-              </a:defRPr>
-            </a:lvl1pPr>
-            <a:lvl2pPr marL="685800" indent="-228600" algn="l" defTabSz="914400" rtl="0" eaLnBrk="1" latinLnBrk="0" hangingPunct="1">
-              <a:lnSpc>
-                <a:spcPct val="90000"/>
-              </a:lnSpc>
-              <a:spcBef>
-                <a:spcPts val="500"/>
-              </a:spcBef>
-              <a:buFont typeface="Arial" panose="020B0604020202020204" pitchFamily="34" charset="0"/>
-              <a:buChar char="•"/>
-              <a:defRPr sz="2400" kern="1200">
-                <a:solidFill>
-                  <a:schemeClr val="tx1"/>
-                </a:solidFill>
-                <a:latin typeface="+mn-lt"/>
-                <a:ea typeface="+mn-ea"/>
-                <a:cs typeface="+mn-cs"/>
-              </a:defRPr>
-            </a:lvl2pPr>
-            <a:lvl3pPr marL="1143000" indent="-228600" algn="l" defTabSz="914400" rtl="0" eaLnBrk="1" latinLnBrk="0" hangingPunct="1">
-              <a:lnSpc>
-                <a:spcPct val="90000"/>
-              </a:lnSpc>
-              <a:spcBef>
-                <a:spcPts val="500"/>
-              </a:spcBef>
-              <a:buFont typeface="Arial" panose="020B0604020202020204" pitchFamily="34" charset="0"/>
-              <a:buChar char="•"/>
-              <a:defRPr sz="2000" kern="1200">
-                <a:solidFill>
-                  <a:schemeClr val="tx1"/>
-                </a:solidFill>
-                <a:latin typeface="+mn-lt"/>
-                <a:ea typeface="+mn-ea"/>
-                <a:cs typeface="+mn-cs"/>
-              </a:defRPr>
-            </a:lvl3pPr>
-            <a:lvl4pPr marL="1600200" indent="-228600" algn="l" defTabSz="914400" rtl="0" eaLnBrk="1" latinLnBrk="0" hangingPunct="1">
-              <a:lnSpc>
-                <a:spcPct val="90000"/>
-              </a:lnSpc>
-              <a:spcBef>
-                <a:spcPts val="500"/>
-              </a:spcBef>
-              <a:buFont typeface="Arial" panose="020B0604020202020204" pitchFamily="34" charset="0"/>
-              <a:buChar char="•"/>
-              <a:defRPr sz="1800" kern="1200">
-                <a:solidFill>
-                  <a:schemeClr val="tx1"/>
-                </a:solidFill>
-                <a:latin typeface="+mn-lt"/>
-                <a:ea typeface="+mn-ea"/>
-                <a:cs typeface="+mn-cs"/>
-              </a:defRPr>
-            </a:lvl4pPr>
-            <a:lvl5pPr marL="2057400" indent="-228600" algn="l" defTabSz="914400" rtl="0" eaLnBrk="1" latinLnBrk="0" hangingPunct="1">
-              <a:lnSpc>
-                <a:spcPct val="90000"/>
-              </a:lnSpc>
-              <a:spcBef>
-                <a:spcPts val="500"/>
-              </a:spcBef>
-              <a:buFont typeface="Arial" panose="020B0604020202020204" pitchFamily="34" charset="0"/>
-              <a:buChar char="•"/>
-              <a:defRPr sz="1800" kern="1200">
-                <a:solidFill>
-                  <a:schemeClr val="tx1"/>
-                </a:solidFill>
-                <a:latin typeface="+mn-lt"/>
-                <a:ea typeface="+mn-ea"/>
-                <a:cs typeface="+mn-cs"/>
-              </a:defRPr>
-            </a:lvl5pPr>
-            <a:lvl6pPr marL="2514600" indent="-228600" algn="l" defTabSz="914400" rtl="0" eaLnBrk="1" latinLnBrk="0" hangingPunct="1">
-              <a:lnSpc>
-                <a:spcPct val="90000"/>
-              </a:lnSpc>
-              <a:spcBef>
-                <a:spcPts val="500"/>
-              </a:spcBef>
-              <a:buFont typeface="Arial" panose="020B0604020202020204" pitchFamily="34" charset="0"/>
-              <a:buChar char="•"/>
-              <a:defRPr sz="1800" kern="1200">
-                <a:solidFill>
-                  <a:schemeClr val="tx1"/>
-                </a:solidFill>
-                <a:latin typeface="+mn-lt"/>
-                <a:ea typeface="+mn-ea"/>
-                <a:cs typeface="+mn-cs"/>
-              </a:defRPr>
-            </a:lvl6pPr>
-            <a:lvl7pPr marL="2971800" indent="-228600" algn="l" defTabSz="914400" rtl="0" eaLnBrk="1" latinLnBrk="0" hangingPunct="1">
-              <a:lnSpc>
-                <a:spcPct val="90000"/>
-              </a:lnSpc>
-              <a:spcBef>
-                <a:spcPts val="500"/>
-              </a:spcBef>
-              <a:buFont typeface="Arial" panose="020B0604020202020204" pitchFamily="34" charset="0"/>
-              <a:buChar char="•"/>
-              <a:defRPr sz="1800" kern="1200">
-                <a:solidFill>
-                  <a:schemeClr val="tx1"/>
-                </a:solidFill>
-                <a:latin typeface="+mn-lt"/>
-                <a:ea typeface="+mn-ea"/>
-                <a:cs typeface="+mn-cs"/>
-              </a:defRPr>
-            </a:lvl7pPr>
-            <a:lvl8pPr marL="3429000" indent="-228600" algn="l" defTabSz="914400" rtl="0" eaLnBrk="1" latinLnBrk="0" hangingPunct="1">
-              <a:lnSpc>
-                <a:spcPct val="90000"/>
-              </a:lnSpc>
-              <a:spcBef>
-                <a:spcPts val="500"/>
-              </a:spcBef>
-              <a:buFont typeface="Arial" panose="020B0604020202020204" pitchFamily="34" charset="0"/>
-              <a:buChar char="•"/>
-              <a:defRPr sz="1800" kern="1200">
-                <a:solidFill>
-                  <a:schemeClr val="tx1"/>
-                </a:solidFill>
-                <a:latin typeface="+mn-lt"/>
-                <a:ea typeface="+mn-ea"/>
-                <a:cs typeface="+mn-cs"/>
-              </a:defRPr>
-            </a:lvl8pPr>
-            <a:lvl9pPr marL="3886200" indent="-228600" algn="l" defTabSz="914400" rtl="0" eaLnBrk="1" latinLnBrk="0" hangingPunct="1">
-              <a:lnSpc>
-                <a:spcPct val="90000"/>
-              </a:lnSpc>
-              <a:spcBef>
-                <a:spcPts val="500"/>
-              </a:spcBef>
-              <a:buFont typeface="Arial" panose="020B0604020202020204" pitchFamily="34" charset="0"/>
-              <a:buChar char="•"/>
-              <a:defRPr sz="1800" kern="1200">
-                <a:solidFill>
-                  <a:schemeClr val="tx1"/>
-                </a:solidFill>
-                <a:latin typeface="+mn-lt"/>
-                <a:ea typeface="+mn-ea"/>
-                <a:cs typeface="+mn-cs"/>
-              </a:defRPr>
-            </a:lvl9pPr>
-          </a:lstStyle>
-          <a:p>
-            <a:pPr marL="0" indent="0">
-              <a:buFont typeface="Arial" panose="020B0604020202020204" pitchFamily="34" charset="0"/>
-              <a:buNone/>
-            </a:pPr>
-            <a:r>
-              <a:rPr lang="nl-NL" sz="2000" noProof="0" dirty="0"/>
-              <a:t>Met </a:t>
-            </a:r>
-            <a:r>
-              <a:rPr lang="nl-NL" sz="2000" noProof="0" dirty="0">
-                <a:solidFill>
-                  <a:schemeClr val="accent5">
-                    <a:lumMod val="75000"/>
-                  </a:schemeClr>
-                </a:solidFill>
-                <a:latin typeface="Courier New" panose="02070309020205020404" pitchFamily="49" charset="0"/>
-                <a:cs typeface="Courier New" panose="02070309020205020404" pitchFamily="49" charset="0"/>
-              </a:rPr>
-              <a:t>CONSTRAINT</a:t>
-            </a:r>
-            <a:r>
-              <a:rPr lang="nl-NL" sz="2000" noProof="0" dirty="0"/>
-              <a:t> kun je een naam geven aan een controle.</a:t>
-            </a:r>
-          </a:p>
-          <a:p>
-            <a:pPr marL="0" indent="0">
-              <a:buFont typeface="Arial" panose="020B0604020202020204" pitchFamily="34" charset="0"/>
-              <a:buNone/>
-            </a:pPr>
-            <a:endParaRPr lang="nl-NL" sz="2000" noProof="0" dirty="0"/>
-          </a:p>
-          <a:p>
-            <a:pPr marL="0" indent="0">
-              <a:buFont typeface="Arial" panose="020B0604020202020204" pitchFamily="34" charset="0"/>
-              <a:buNone/>
-            </a:pPr>
-            <a:r>
-              <a:rPr lang="nl-NL" sz="2000" noProof="0" dirty="0"/>
-              <a:t>Controles zijn:</a:t>
-            </a:r>
-          </a:p>
-          <a:p>
-            <a:pPr marL="0" indent="0">
-              <a:buFont typeface="Arial" panose="020B0604020202020204" pitchFamily="34" charset="0"/>
-              <a:buNone/>
-            </a:pPr>
-            <a:endParaRPr lang="nl-NL" sz="2000" noProof="0" dirty="0"/>
-          </a:p>
-          <a:p>
-            <a:pPr>
-              <a:buFontTx/>
-              <a:buChar char="-"/>
-            </a:pPr>
-            <a:r>
-              <a:rPr lang="nl-NL" sz="2000" noProof="0" dirty="0">
-                <a:solidFill>
-                  <a:schemeClr val="accent5">
-                    <a:lumMod val="75000"/>
-                  </a:schemeClr>
-                </a:solidFill>
-                <a:latin typeface="Courier New" panose="02070309020205020404" pitchFamily="49" charset="0"/>
-                <a:cs typeface="Courier New" panose="02070309020205020404" pitchFamily="49" charset="0"/>
-              </a:rPr>
-              <a:t>PRIMARY KEY</a:t>
-            </a:r>
-          </a:p>
-          <a:p>
-            <a:pPr>
-              <a:buFontTx/>
-              <a:buChar char="-"/>
-            </a:pPr>
-            <a:r>
-              <a:rPr lang="nl-NL" sz="2000" noProof="0" dirty="0">
-                <a:solidFill>
-                  <a:schemeClr val="accent5">
-                    <a:lumMod val="75000"/>
-                  </a:schemeClr>
-                </a:solidFill>
-                <a:latin typeface="Courier New" panose="02070309020205020404" pitchFamily="49" charset="0"/>
-                <a:cs typeface="Courier New" panose="02070309020205020404" pitchFamily="49" charset="0"/>
-              </a:rPr>
-              <a:t>FOREIGN KEY</a:t>
-            </a:r>
-          </a:p>
-          <a:p>
-            <a:pPr>
-              <a:buFontTx/>
-              <a:buChar char="-"/>
-            </a:pPr>
-            <a:r>
-              <a:rPr lang="nl-NL" sz="2000" noProof="0" dirty="0">
-                <a:solidFill>
-                  <a:schemeClr val="accent5">
-                    <a:lumMod val="75000"/>
-                  </a:schemeClr>
-                </a:solidFill>
-                <a:latin typeface="Courier New" panose="02070309020205020404" pitchFamily="49" charset="0"/>
-                <a:cs typeface="Courier New" panose="02070309020205020404" pitchFamily="49" charset="0"/>
-              </a:rPr>
-              <a:t>UNIQUE</a:t>
-            </a:r>
-          </a:p>
-          <a:p>
-            <a:pPr>
-              <a:buFontTx/>
-              <a:buChar char="-"/>
-            </a:pPr>
-            <a:r>
-              <a:rPr lang="nl-NL" sz="2000" noProof="0" dirty="0">
-                <a:solidFill>
-                  <a:schemeClr val="accent5">
-                    <a:lumMod val="75000"/>
-                  </a:schemeClr>
-                </a:solidFill>
-                <a:latin typeface="Courier New" panose="02070309020205020404" pitchFamily="49" charset="0"/>
-                <a:cs typeface="Courier New" panose="02070309020205020404" pitchFamily="49" charset="0"/>
-              </a:rPr>
-              <a:t>CHECK</a:t>
-            </a:r>
-          </a:p>
-        </p:txBody>
-      </p:sp>
-      <p:cxnSp>
-        <p:nvCxnSpPr>
-          <p:cNvPr id="4" name="Straight Connector 3">
-            <a:extLst>
-              <a:ext uri="{FF2B5EF4-FFF2-40B4-BE49-F238E27FC236}">
-                <a16:creationId xmlns:a16="http://schemas.microsoft.com/office/drawing/2014/main" id="{CE96F5D3-09A8-02FC-9C4A-817C05484610}"/>
-              </a:ext>
-            </a:extLst>
-          </p:cNvPr>
-          <p:cNvCxnSpPr>
-            <a:cxnSpLocks/>
-          </p:cNvCxnSpPr>
-          <p:nvPr/>
-        </p:nvCxnSpPr>
-        <p:spPr>
-          <a:xfrm>
-            <a:off x="6794609" y="1555423"/>
-            <a:ext cx="0" cy="4621540"/>
-          </a:xfrm>
-          <a:prstGeom prst="line">
-            <a:avLst/>
-          </a:prstGeom>
-        </p:spPr>
-        <p:style>
-          <a:lnRef idx="1">
-            <a:schemeClr val="dk1"/>
-          </a:lnRef>
-          <a:fillRef idx="0">
-            <a:schemeClr val="dk1"/>
-          </a:fillRef>
-          <a:effectRef idx="0">
-            <a:schemeClr val="dk1"/>
-          </a:effectRef>
-          <a:fontRef idx="minor">
-            <a:schemeClr val="tx1"/>
-          </a:fontRef>
-        </p:style>
-      </p:cxnSp>
-    </p:spTree>
-    <p:extLst>
-      <p:ext uri="{BB962C8B-B14F-4D97-AF65-F5344CB8AC3E}">
-        <p14:creationId xmlns:p14="http://schemas.microsoft.com/office/powerpoint/2010/main" val="2905679708"/>
       </p:ext>
     </p:extLst>
   </p:cSld>
@@ -25277,6 +25426,772 @@
         <p:cNvPr id="1" name="">
           <a:extLst>
             <a:ext uri="{FF2B5EF4-FFF2-40B4-BE49-F238E27FC236}">
+              <a16:creationId xmlns:a16="http://schemas.microsoft.com/office/drawing/2014/main" id="{3C4E01D9-4E80-079C-F5DC-729D580CEDE0}"/>
+            </a:ext>
+          </a:extLst>
+        </p:cNvPr>
+        <p:cNvGrpSpPr/>
+        <p:nvPr/>
+      </p:nvGrpSpPr>
+      <p:grpSpPr>
+        <a:xfrm>
+          <a:off x="0" y="0"/>
+          <a:ext cx="0" cy="0"/>
+          <a:chOff x="0" y="0"/>
+          <a:chExt cx="0" cy="0"/>
+        </a:xfrm>
+      </p:grpSpPr>
+      <p:sp>
+        <p:nvSpPr>
+          <p:cNvPr id="2" name="Title 1">
+            <a:extLst>
+              <a:ext uri="{FF2B5EF4-FFF2-40B4-BE49-F238E27FC236}">
+                <a16:creationId xmlns:a16="http://schemas.microsoft.com/office/drawing/2014/main" id="{995042DA-BDBA-7DE1-926F-8868915E277A}"/>
+              </a:ext>
+            </a:extLst>
+          </p:cNvPr>
+          <p:cNvSpPr>
+            <a:spLocks noGrp="1"/>
+          </p:cNvSpPr>
+          <p:nvPr>
+            <p:ph type="title"/>
+          </p:nvPr>
+        </p:nvSpPr>
+        <p:spPr/>
+        <p:txBody>
+          <a:bodyPr>
+            <a:normAutofit/>
+          </a:bodyPr>
+          <a:lstStyle/>
+          <a:p>
+            <a:r>
+              <a:rPr lang="nl-NL" sz="3600" noProof="0" dirty="0"/>
+              <a:t>Controles een naam geven</a:t>
+            </a:r>
+          </a:p>
+        </p:txBody>
+      </p:sp>
+      <p:sp>
+        <p:nvSpPr>
+          <p:cNvPr id="3" name="Content Placeholder 2">
+            <a:extLst>
+              <a:ext uri="{FF2B5EF4-FFF2-40B4-BE49-F238E27FC236}">
+                <a16:creationId xmlns:a16="http://schemas.microsoft.com/office/drawing/2014/main" id="{C35FF3E5-F8A1-35B6-59A8-EA7783237BE9}"/>
+              </a:ext>
+            </a:extLst>
+          </p:cNvPr>
+          <p:cNvSpPr>
+            <a:spLocks noGrp="1"/>
+          </p:cNvSpPr>
+          <p:nvPr>
+            <p:ph idx="1"/>
+          </p:nvPr>
+        </p:nvSpPr>
+        <p:spPr>
+          <a:xfrm>
+            <a:off x="838200" y="1825625"/>
+            <a:ext cx="5994115" cy="4351338"/>
+          </a:xfrm>
+        </p:spPr>
+        <p:txBody>
+          <a:bodyPr>
+            <a:normAutofit fontScale="92500" lnSpcReduction="10000"/>
+          </a:bodyPr>
+          <a:lstStyle/>
+          <a:p>
+            <a:pPr marL="0" indent="0">
+              <a:buNone/>
+            </a:pPr>
+            <a:r>
+              <a:rPr lang="nl-NL" sz="2000" noProof="0" dirty="0">
+                <a:solidFill>
+                  <a:schemeClr val="accent5">
+                    <a:lumMod val="75000"/>
+                  </a:schemeClr>
+                </a:solidFill>
+                <a:latin typeface="Courier New" panose="02070309020205020404" pitchFamily="49" charset="0"/>
+                <a:cs typeface="Courier New" panose="02070309020205020404" pitchFamily="49" charset="0"/>
+              </a:rPr>
+              <a:t>CREATE TABLE</a:t>
+            </a:r>
+            <a:r>
+              <a:rPr lang="nl-NL" sz="2000" noProof="0" dirty="0">
+                <a:latin typeface="Courier New" panose="02070309020205020404" pitchFamily="49" charset="0"/>
+                <a:cs typeface="Courier New" panose="02070309020205020404" pitchFamily="49" charset="0"/>
+              </a:rPr>
+              <a:t> Klanten (</a:t>
+            </a:r>
+          </a:p>
+          <a:p>
+            <a:pPr marL="0" indent="0">
+              <a:buNone/>
+            </a:pPr>
+            <a:r>
+              <a:rPr lang="nl-NL" sz="2000" noProof="0" dirty="0">
+                <a:latin typeface="Courier New" panose="02070309020205020404" pitchFamily="49" charset="0"/>
+                <a:cs typeface="Courier New" panose="02070309020205020404" pitchFamily="49" charset="0"/>
+              </a:rPr>
+              <a:t>  </a:t>
+            </a:r>
+            <a:r>
+              <a:rPr lang="nl-NL" sz="2000" noProof="0" dirty="0" err="1">
+                <a:latin typeface="Courier New" panose="02070309020205020404" pitchFamily="49" charset="0"/>
+                <a:cs typeface="Courier New" panose="02070309020205020404" pitchFamily="49" charset="0"/>
+              </a:rPr>
+              <a:t>KlantId</a:t>
+            </a:r>
+            <a:r>
+              <a:rPr lang="nl-NL" sz="2000" noProof="0" dirty="0">
+                <a:latin typeface="Courier New" panose="02070309020205020404" pitchFamily="49" charset="0"/>
+                <a:cs typeface="Courier New" panose="02070309020205020404" pitchFamily="49" charset="0"/>
+              </a:rPr>
+              <a:t>      INTEGER,</a:t>
+            </a:r>
+          </a:p>
+          <a:p>
+            <a:pPr marL="0" indent="0">
+              <a:buNone/>
+            </a:pPr>
+            <a:r>
+              <a:rPr lang="nl-NL" sz="2000" noProof="0" dirty="0">
+                <a:latin typeface="Courier New" panose="02070309020205020404" pitchFamily="49" charset="0"/>
+                <a:cs typeface="Courier New" panose="02070309020205020404" pitchFamily="49" charset="0"/>
+              </a:rPr>
+              <a:t>  Naam         </a:t>
+            </a:r>
+            <a:r>
+              <a:rPr lang="nl-NL" sz="2000" noProof="0" dirty="0">
+                <a:solidFill>
+                  <a:schemeClr val="accent5">
+                    <a:lumMod val="75000"/>
+                  </a:schemeClr>
+                </a:solidFill>
+                <a:latin typeface="Courier New" panose="02070309020205020404" pitchFamily="49" charset="0"/>
+                <a:cs typeface="Courier New" panose="02070309020205020404" pitchFamily="49" charset="0"/>
+              </a:rPr>
+              <a:t>TEXT</a:t>
+            </a:r>
+            <a:r>
+              <a:rPr lang="nl-NL" sz="2000" noProof="0" dirty="0">
+                <a:latin typeface="Courier New" panose="02070309020205020404" pitchFamily="49" charset="0"/>
+                <a:cs typeface="Courier New" panose="02070309020205020404" pitchFamily="49" charset="0"/>
+              </a:rPr>
+              <a:t>,</a:t>
+            </a:r>
+          </a:p>
+          <a:p>
+            <a:pPr marL="0" indent="0">
+              <a:buNone/>
+            </a:pPr>
+            <a:r>
+              <a:rPr lang="nl-NL" sz="2000" noProof="0" dirty="0">
+                <a:latin typeface="Courier New" panose="02070309020205020404" pitchFamily="49" charset="0"/>
+                <a:cs typeface="Courier New" panose="02070309020205020404" pitchFamily="49" charset="0"/>
+              </a:rPr>
+              <a:t>  Achternaam   </a:t>
+            </a:r>
+            <a:r>
+              <a:rPr lang="nl-NL" sz="2000" noProof="0" dirty="0">
+                <a:solidFill>
+                  <a:schemeClr val="accent5">
+                    <a:lumMod val="75000"/>
+                  </a:schemeClr>
+                </a:solidFill>
+                <a:latin typeface="Courier New" panose="02070309020205020404" pitchFamily="49" charset="0"/>
+                <a:cs typeface="Courier New" panose="02070309020205020404" pitchFamily="49" charset="0"/>
+              </a:rPr>
+              <a:t>TEXT</a:t>
+            </a:r>
+            <a:r>
+              <a:rPr lang="nl-NL" sz="2000" noProof="0" dirty="0">
+                <a:latin typeface="Courier New" panose="02070309020205020404" pitchFamily="49" charset="0"/>
+                <a:cs typeface="Courier New" panose="02070309020205020404" pitchFamily="49" charset="0"/>
+              </a:rPr>
+              <a:t>,</a:t>
+            </a:r>
+          </a:p>
+          <a:p>
+            <a:pPr marL="0" indent="0">
+              <a:buNone/>
+            </a:pPr>
+            <a:endParaRPr lang="nl-NL" sz="2000" b="1" noProof="0" dirty="0">
+              <a:latin typeface="Courier New" panose="02070309020205020404" pitchFamily="49" charset="0"/>
+              <a:cs typeface="Courier New" panose="02070309020205020404" pitchFamily="49" charset="0"/>
+            </a:endParaRPr>
+          </a:p>
+          <a:p>
+            <a:pPr marL="0" indent="0">
+              <a:buNone/>
+            </a:pPr>
+            <a:r>
+              <a:rPr lang="nl-NL" sz="2000" noProof="0" dirty="0">
+                <a:latin typeface="Courier New" panose="02070309020205020404" pitchFamily="49" charset="0"/>
+                <a:cs typeface="Courier New" panose="02070309020205020404" pitchFamily="49" charset="0"/>
+              </a:rPr>
+              <a:t>  </a:t>
+            </a:r>
+            <a:r>
+              <a:rPr lang="nl-NL" sz="2000" b="1" noProof="0" dirty="0">
+                <a:solidFill>
+                  <a:schemeClr val="accent5">
+                    <a:lumMod val="75000"/>
+                  </a:schemeClr>
+                </a:solidFill>
+                <a:latin typeface="Courier New" panose="02070309020205020404" pitchFamily="49" charset="0"/>
+                <a:cs typeface="Courier New" panose="02070309020205020404" pitchFamily="49" charset="0"/>
+              </a:rPr>
+              <a:t>CONSTRAINT</a:t>
+            </a:r>
+            <a:r>
+              <a:rPr lang="nl-NL" sz="2000" noProof="0" dirty="0">
+                <a:latin typeface="Courier New" panose="02070309020205020404" pitchFamily="49" charset="0"/>
+                <a:cs typeface="Courier New" panose="02070309020205020404" pitchFamily="49" charset="0"/>
+              </a:rPr>
+              <a:t> </a:t>
+            </a:r>
+            <a:r>
+              <a:rPr lang="nl-NL" sz="2000" noProof="0" dirty="0" err="1">
+                <a:latin typeface="Courier New" panose="02070309020205020404" pitchFamily="49" charset="0"/>
+                <a:cs typeface="Courier New" panose="02070309020205020404" pitchFamily="49" charset="0"/>
+              </a:rPr>
+              <a:t>PK_KlantId</a:t>
+            </a:r>
+            <a:endParaRPr lang="nl-NL" sz="2000" noProof="0" dirty="0">
+              <a:latin typeface="Courier New" panose="02070309020205020404" pitchFamily="49" charset="0"/>
+              <a:cs typeface="Courier New" panose="02070309020205020404" pitchFamily="49" charset="0"/>
+            </a:endParaRPr>
+          </a:p>
+          <a:p>
+            <a:pPr marL="0" indent="0">
+              <a:buNone/>
+            </a:pPr>
+            <a:r>
+              <a:rPr lang="nl-NL" sz="2000" noProof="0" dirty="0">
+                <a:latin typeface="Courier New" panose="02070309020205020404" pitchFamily="49" charset="0"/>
+                <a:cs typeface="Courier New" panose="02070309020205020404" pitchFamily="49" charset="0"/>
+              </a:rPr>
+              <a:t>   </a:t>
+            </a:r>
+            <a:r>
+              <a:rPr lang="nl-NL" sz="2000" noProof="0" dirty="0">
+                <a:solidFill>
+                  <a:schemeClr val="accent5">
+                    <a:lumMod val="75000"/>
+                  </a:schemeClr>
+                </a:solidFill>
+                <a:latin typeface="Courier New" panose="02070309020205020404" pitchFamily="49" charset="0"/>
+                <a:cs typeface="Courier New" panose="02070309020205020404" pitchFamily="49" charset="0"/>
+              </a:rPr>
+              <a:t>PRIMARY KEY</a:t>
+            </a:r>
+            <a:r>
+              <a:rPr lang="nl-NL" sz="2000" noProof="0" dirty="0">
+                <a:latin typeface="Courier New" panose="02070309020205020404" pitchFamily="49" charset="0"/>
+                <a:cs typeface="Courier New" panose="02070309020205020404" pitchFamily="49" charset="0"/>
+              </a:rPr>
+              <a:t>(</a:t>
+            </a:r>
+            <a:r>
+              <a:rPr lang="nl-NL" sz="2000" noProof="0" dirty="0" err="1">
+                <a:latin typeface="Courier New" panose="02070309020205020404" pitchFamily="49" charset="0"/>
+                <a:cs typeface="Courier New" panose="02070309020205020404" pitchFamily="49" charset="0"/>
+              </a:rPr>
+              <a:t>KlantId</a:t>
+            </a:r>
+            <a:r>
+              <a:rPr lang="nl-NL" sz="2000" noProof="0" dirty="0">
+                <a:latin typeface="Courier New" panose="02070309020205020404" pitchFamily="49" charset="0"/>
+                <a:cs typeface="Courier New" panose="02070309020205020404" pitchFamily="49" charset="0"/>
+              </a:rPr>
+              <a:t>)</a:t>
+            </a:r>
+          </a:p>
+          <a:p>
+            <a:pPr marL="0" indent="0">
+              <a:buNone/>
+            </a:pPr>
+            <a:endParaRPr lang="nl-NL" sz="2000" b="1" noProof="0" dirty="0">
+              <a:latin typeface="Courier New" panose="02070309020205020404" pitchFamily="49" charset="0"/>
+              <a:cs typeface="Courier New" panose="02070309020205020404" pitchFamily="49" charset="0"/>
+            </a:endParaRPr>
+          </a:p>
+          <a:p>
+            <a:pPr marL="0" indent="0">
+              <a:buNone/>
+            </a:pPr>
+            <a:r>
+              <a:rPr lang="nl-NL" sz="2000" b="1" noProof="0" dirty="0">
+                <a:latin typeface="Courier New" panose="02070309020205020404" pitchFamily="49" charset="0"/>
+                <a:cs typeface="Courier New" panose="02070309020205020404" pitchFamily="49" charset="0"/>
+              </a:rPr>
+              <a:t> </a:t>
+            </a:r>
+            <a:r>
+              <a:rPr lang="nl-NL" sz="2000" noProof="0" dirty="0">
+                <a:latin typeface="Courier New" panose="02070309020205020404" pitchFamily="49" charset="0"/>
+                <a:cs typeface="Courier New" panose="02070309020205020404" pitchFamily="49" charset="0"/>
+              </a:rPr>
+              <a:t> </a:t>
+            </a:r>
+            <a:r>
+              <a:rPr lang="nl-NL" sz="2000" b="1" noProof="0" dirty="0">
+                <a:solidFill>
+                  <a:schemeClr val="accent5">
+                    <a:lumMod val="75000"/>
+                  </a:schemeClr>
+                </a:solidFill>
+                <a:latin typeface="Courier New" panose="02070309020205020404" pitchFamily="49" charset="0"/>
+                <a:cs typeface="Courier New" panose="02070309020205020404" pitchFamily="49" charset="0"/>
+              </a:rPr>
+              <a:t>CONSTRAINT</a:t>
+            </a:r>
+            <a:r>
+              <a:rPr lang="nl-NL" sz="2000" noProof="0" dirty="0">
+                <a:latin typeface="Courier New" panose="02070309020205020404" pitchFamily="49" charset="0"/>
+                <a:cs typeface="Courier New" panose="02070309020205020404" pitchFamily="49" charset="0"/>
+              </a:rPr>
+              <a:t> </a:t>
+            </a:r>
+            <a:r>
+              <a:rPr lang="nl-NL" sz="2000" noProof="0" dirty="0" err="1">
+                <a:latin typeface="Courier New" panose="02070309020205020404" pitchFamily="49" charset="0"/>
+                <a:cs typeface="Courier New" panose="02070309020205020404" pitchFamily="49" charset="0"/>
+              </a:rPr>
+              <a:t>UQ_Naam_Achternaam</a:t>
+            </a:r>
+            <a:endParaRPr lang="nl-NL" sz="2000" noProof="0" dirty="0">
+              <a:latin typeface="Courier New" panose="02070309020205020404" pitchFamily="49" charset="0"/>
+              <a:cs typeface="Courier New" panose="02070309020205020404" pitchFamily="49" charset="0"/>
+            </a:endParaRPr>
+          </a:p>
+          <a:p>
+            <a:pPr marL="0" indent="0">
+              <a:buNone/>
+            </a:pPr>
+            <a:r>
+              <a:rPr lang="nl-NL" sz="2000" noProof="0" dirty="0">
+                <a:latin typeface="Courier New" panose="02070309020205020404" pitchFamily="49" charset="0"/>
+                <a:cs typeface="Courier New" panose="02070309020205020404" pitchFamily="49" charset="0"/>
+              </a:rPr>
+              <a:t>    </a:t>
+            </a:r>
+            <a:r>
+              <a:rPr lang="nl-NL" sz="2000" noProof="0" dirty="0">
+                <a:solidFill>
+                  <a:schemeClr val="accent5">
+                    <a:lumMod val="75000"/>
+                  </a:schemeClr>
+                </a:solidFill>
+                <a:latin typeface="Courier New" panose="02070309020205020404" pitchFamily="49" charset="0"/>
+                <a:cs typeface="Courier New" panose="02070309020205020404" pitchFamily="49" charset="0"/>
+              </a:rPr>
+              <a:t>UNIQUE</a:t>
+            </a:r>
+            <a:r>
+              <a:rPr lang="nl-NL" sz="2000" noProof="0" dirty="0">
+                <a:latin typeface="Courier New" panose="02070309020205020404" pitchFamily="49" charset="0"/>
+                <a:cs typeface="Courier New" panose="02070309020205020404" pitchFamily="49" charset="0"/>
+              </a:rPr>
+              <a:t>(Naam, Achternaam)</a:t>
+            </a:r>
+          </a:p>
+          <a:p>
+            <a:pPr marL="0" indent="0">
+              <a:buNone/>
+            </a:pPr>
+            <a:endParaRPr lang="nl-NL" sz="2000" noProof="0" dirty="0">
+              <a:latin typeface="Courier New" panose="02070309020205020404" pitchFamily="49" charset="0"/>
+              <a:cs typeface="Courier New" panose="02070309020205020404" pitchFamily="49" charset="0"/>
+            </a:endParaRPr>
+          </a:p>
+          <a:p>
+            <a:pPr marL="0" indent="0">
+              <a:buNone/>
+            </a:pPr>
+            <a:r>
+              <a:rPr lang="nl-NL" sz="2000" noProof="0" dirty="0">
+                <a:latin typeface="Courier New" panose="02070309020205020404" pitchFamily="49" charset="0"/>
+                <a:cs typeface="Courier New" panose="02070309020205020404" pitchFamily="49" charset="0"/>
+              </a:rPr>
+              <a:t>);</a:t>
+            </a:r>
+          </a:p>
+        </p:txBody>
+      </p:sp>
+      <p:sp>
+        <p:nvSpPr>
+          <p:cNvPr id="5" name="Content Placeholder 2">
+            <a:extLst>
+              <a:ext uri="{FF2B5EF4-FFF2-40B4-BE49-F238E27FC236}">
+                <a16:creationId xmlns:a16="http://schemas.microsoft.com/office/drawing/2014/main" id="{4B7F6534-8E96-1666-8498-2E50ED49EF18}"/>
+              </a:ext>
+            </a:extLst>
+          </p:cNvPr>
+          <p:cNvSpPr txBox="1">
+            <a:spLocks/>
+          </p:cNvSpPr>
+          <p:nvPr/>
+        </p:nvSpPr>
+        <p:spPr>
+          <a:xfrm>
+            <a:off x="7222732" y="1825625"/>
+            <a:ext cx="4131067" cy="4351338"/>
+          </a:xfrm>
+          <a:prstGeom prst="rect">
+            <a:avLst/>
+          </a:prstGeom>
+        </p:spPr>
+        <p:txBody>
+          <a:bodyPr vert="horz" lIns="91440" tIns="45720" rIns="91440" bIns="45720" rtlCol="0">
+            <a:normAutofit/>
+          </a:bodyPr>
+          <a:lstStyle>
+            <a:lvl1pPr marL="228600" indent="-228600" algn="l" defTabSz="914400" rtl="0" eaLnBrk="1" latinLnBrk="0" hangingPunct="1">
+              <a:lnSpc>
+                <a:spcPct val="90000"/>
+              </a:lnSpc>
+              <a:spcBef>
+                <a:spcPts val="1000"/>
+              </a:spcBef>
+              <a:buFont typeface="Arial" panose="020B0604020202020204" pitchFamily="34" charset="0"/>
+              <a:buChar char="•"/>
+              <a:defRPr sz="2800" kern="1200">
+                <a:solidFill>
+                  <a:schemeClr val="tx1"/>
+                </a:solidFill>
+                <a:latin typeface="+mn-lt"/>
+                <a:ea typeface="+mn-ea"/>
+                <a:cs typeface="+mn-cs"/>
+              </a:defRPr>
+            </a:lvl1pPr>
+            <a:lvl2pPr marL="685800" indent="-228600" algn="l" defTabSz="914400" rtl="0" eaLnBrk="1" latinLnBrk="0" hangingPunct="1">
+              <a:lnSpc>
+                <a:spcPct val="90000"/>
+              </a:lnSpc>
+              <a:spcBef>
+                <a:spcPts val="500"/>
+              </a:spcBef>
+              <a:buFont typeface="Arial" panose="020B0604020202020204" pitchFamily="34" charset="0"/>
+              <a:buChar char="•"/>
+              <a:defRPr sz="2400" kern="1200">
+                <a:solidFill>
+                  <a:schemeClr val="tx1"/>
+                </a:solidFill>
+                <a:latin typeface="+mn-lt"/>
+                <a:ea typeface="+mn-ea"/>
+                <a:cs typeface="+mn-cs"/>
+              </a:defRPr>
+            </a:lvl2pPr>
+            <a:lvl3pPr marL="1143000" indent="-228600" algn="l" defTabSz="914400" rtl="0" eaLnBrk="1" latinLnBrk="0" hangingPunct="1">
+              <a:lnSpc>
+                <a:spcPct val="90000"/>
+              </a:lnSpc>
+              <a:spcBef>
+                <a:spcPts val="500"/>
+              </a:spcBef>
+              <a:buFont typeface="Arial" panose="020B0604020202020204" pitchFamily="34" charset="0"/>
+              <a:buChar char="•"/>
+              <a:defRPr sz="2000" kern="1200">
+                <a:solidFill>
+                  <a:schemeClr val="tx1"/>
+                </a:solidFill>
+                <a:latin typeface="+mn-lt"/>
+                <a:ea typeface="+mn-ea"/>
+                <a:cs typeface="+mn-cs"/>
+              </a:defRPr>
+            </a:lvl3pPr>
+            <a:lvl4pPr marL="1600200" indent="-228600" algn="l" defTabSz="914400" rtl="0" eaLnBrk="1" latinLnBrk="0" hangingPunct="1">
+              <a:lnSpc>
+                <a:spcPct val="90000"/>
+              </a:lnSpc>
+              <a:spcBef>
+                <a:spcPts val="500"/>
+              </a:spcBef>
+              <a:buFont typeface="Arial" panose="020B0604020202020204" pitchFamily="34" charset="0"/>
+              <a:buChar char="•"/>
+              <a:defRPr sz="1800" kern="1200">
+                <a:solidFill>
+                  <a:schemeClr val="tx1"/>
+                </a:solidFill>
+                <a:latin typeface="+mn-lt"/>
+                <a:ea typeface="+mn-ea"/>
+                <a:cs typeface="+mn-cs"/>
+              </a:defRPr>
+            </a:lvl4pPr>
+            <a:lvl5pPr marL="2057400" indent="-228600" algn="l" defTabSz="914400" rtl="0" eaLnBrk="1" latinLnBrk="0" hangingPunct="1">
+              <a:lnSpc>
+                <a:spcPct val="90000"/>
+              </a:lnSpc>
+              <a:spcBef>
+                <a:spcPts val="500"/>
+              </a:spcBef>
+              <a:buFont typeface="Arial" panose="020B0604020202020204" pitchFamily="34" charset="0"/>
+              <a:buChar char="•"/>
+              <a:defRPr sz="1800" kern="1200">
+                <a:solidFill>
+                  <a:schemeClr val="tx1"/>
+                </a:solidFill>
+                <a:latin typeface="+mn-lt"/>
+                <a:ea typeface="+mn-ea"/>
+                <a:cs typeface="+mn-cs"/>
+              </a:defRPr>
+            </a:lvl5pPr>
+            <a:lvl6pPr marL="2514600" indent="-228600" algn="l" defTabSz="914400" rtl="0" eaLnBrk="1" latinLnBrk="0" hangingPunct="1">
+              <a:lnSpc>
+                <a:spcPct val="90000"/>
+              </a:lnSpc>
+              <a:spcBef>
+                <a:spcPts val="500"/>
+              </a:spcBef>
+              <a:buFont typeface="Arial" panose="020B0604020202020204" pitchFamily="34" charset="0"/>
+              <a:buChar char="•"/>
+              <a:defRPr sz="1800" kern="1200">
+                <a:solidFill>
+                  <a:schemeClr val="tx1"/>
+                </a:solidFill>
+                <a:latin typeface="+mn-lt"/>
+                <a:ea typeface="+mn-ea"/>
+                <a:cs typeface="+mn-cs"/>
+              </a:defRPr>
+            </a:lvl6pPr>
+            <a:lvl7pPr marL="2971800" indent="-228600" algn="l" defTabSz="914400" rtl="0" eaLnBrk="1" latinLnBrk="0" hangingPunct="1">
+              <a:lnSpc>
+                <a:spcPct val="90000"/>
+              </a:lnSpc>
+              <a:spcBef>
+                <a:spcPts val="500"/>
+              </a:spcBef>
+              <a:buFont typeface="Arial" panose="020B0604020202020204" pitchFamily="34" charset="0"/>
+              <a:buChar char="•"/>
+              <a:defRPr sz="1800" kern="1200">
+                <a:solidFill>
+                  <a:schemeClr val="tx1"/>
+                </a:solidFill>
+                <a:latin typeface="+mn-lt"/>
+                <a:ea typeface="+mn-ea"/>
+                <a:cs typeface="+mn-cs"/>
+              </a:defRPr>
+            </a:lvl7pPr>
+            <a:lvl8pPr marL="3429000" indent="-228600" algn="l" defTabSz="914400" rtl="0" eaLnBrk="1" latinLnBrk="0" hangingPunct="1">
+              <a:lnSpc>
+                <a:spcPct val="90000"/>
+              </a:lnSpc>
+              <a:spcBef>
+                <a:spcPts val="500"/>
+              </a:spcBef>
+              <a:buFont typeface="Arial" panose="020B0604020202020204" pitchFamily="34" charset="0"/>
+              <a:buChar char="•"/>
+              <a:defRPr sz="1800" kern="1200">
+                <a:solidFill>
+                  <a:schemeClr val="tx1"/>
+                </a:solidFill>
+                <a:latin typeface="+mn-lt"/>
+                <a:ea typeface="+mn-ea"/>
+                <a:cs typeface="+mn-cs"/>
+              </a:defRPr>
+            </a:lvl8pPr>
+            <a:lvl9pPr marL="3886200" indent="-228600" algn="l" defTabSz="914400" rtl="0" eaLnBrk="1" latinLnBrk="0" hangingPunct="1">
+              <a:lnSpc>
+                <a:spcPct val="90000"/>
+              </a:lnSpc>
+              <a:spcBef>
+                <a:spcPts val="500"/>
+              </a:spcBef>
+              <a:buFont typeface="Arial" panose="020B0604020202020204" pitchFamily="34" charset="0"/>
+              <a:buChar char="•"/>
+              <a:defRPr sz="1800" kern="1200">
+                <a:solidFill>
+                  <a:schemeClr val="tx1"/>
+                </a:solidFill>
+                <a:latin typeface="+mn-lt"/>
+                <a:ea typeface="+mn-ea"/>
+                <a:cs typeface="+mn-cs"/>
+              </a:defRPr>
+            </a:lvl9pPr>
+          </a:lstStyle>
+          <a:p>
+            <a:pPr marL="0" indent="0">
+              <a:buFont typeface="Arial" panose="020B0604020202020204" pitchFamily="34" charset="0"/>
+              <a:buNone/>
+            </a:pPr>
+            <a:r>
+              <a:rPr lang="nl-NL" sz="2000" noProof="0" dirty="0"/>
+              <a:t>Met </a:t>
+            </a:r>
+            <a:r>
+              <a:rPr lang="nl-NL" sz="2000" noProof="0" dirty="0">
+                <a:solidFill>
+                  <a:schemeClr val="accent5">
+                    <a:lumMod val="75000"/>
+                  </a:schemeClr>
+                </a:solidFill>
+                <a:latin typeface="Courier New" panose="02070309020205020404" pitchFamily="49" charset="0"/>
+                <a:cs typeface="Courier New" panose="02070309020205020404" pitchFamily="49" charset="0"/>
+              </a:rPr>
+              <a:t>CONSTRAINT</a:t>
+            </a:r>
+            <a:r>
+              <a:rPr lang="nl-NL" sz="2000" noProof="0" dirty="0"/>
+              <a:t> kun je een naam geven aan een controle.</a:t>
+            </a:r>
+          </a:p>
+          <a:p>
+            <a:pPr marL="0" indent="0">
+              <a:buFont typeface="Arial" panose="020B0604020202020204" pitchFamily="34" charset="0"/>
+              <a:buNone/>
+            </a:pPr>
+            <a:endParaRPr lang="nl-NL" sz="2000" noProof="0" dirty="0"/>
+          </a:p>
+          <a:p>
+            <a:pPr marL="0" indent="0">
+              <a:buFont typeface="Arial" panose="020B0604020202020204" pitchFamily="34" charset="0"/>
+              <a:buNone/>
+            </a:pPr>
+            <a:r>
+              <a:rPr lang="nl-NL" sz="2000" noProof="0" dirty="0"/>
+              <a:t>Controles zijn:</a:t>
+            </a:r>
+          </a:p>
+          <a:p>
+            <a:pPr marL="0" indent="0">
+              <a:buFont typeface="Arial" panose="020B0604020202020204" pitchFamily="34" charset="0"/>
+              <a:buNone/>
+            </a:pPr>
+            <a:endParaRPr lang="nl-NL" sz="2000" noProof="0" dirty="0"/>
+          </a:p>
+          <a:p>
+            <a:pPr>
+              <a:buFontTx/>
+              <a:buChar char="-"/>
+            </a:pPr>
+            <a:r>
+              <a:rPr lang="nl-NL" sz="2000" noProof="0" dirty="0">
+                <a:solidFill>
+                  <a:schemeClr val="accent5">
+                    <a:lumMod val="75000"/>
+                  </a:schemeClr>
+                </a:solidFill>
+                <a:latin typeface="Courier New" panose="02070309020205020404" pitchFamily="49" charset="0"/>
+                <a:cs typeface="Courier New" panose="02070309020205020404" pitchFamily="49" charset="0"/>
+              </a:rPr>
+              <a:t>PRIMARY KEY</a:t>
+            </a:r>
+          </a:p>
+          <a:p>
+            <a:pPr>
+              <a:buFontTx/>
+              <a:buChar char="-"/>
+            </a:pPr>
+            <a:r>
+              <a:rPr lang="nl-NL" sz="2000" noProof="0" dirty="0">
+                <a:solidFill>
+                  <a:schemeClr val="accent5">
+                    <a:lumMod val="75000"/>
+                  </a:schemeClr>
+                </a:solidFill>
+                <a:latin typeface="Courier New" panose="02070309020205020404" pitchFamily="49" charset="0"/>
+                <a:cs typeface="Courier New" panose="02070309020205020404" pitchFamily="49" charset="0"/>
+              </a:rPr>
+              <a:t>FOREIGN KEY</a:t>
+            </a:r>
+          </a:p>
+          <a:p>
+            <a:pPr>
+              <a:buFontTx/>
+              <a:buChar char="-"/>
+            </a:pPr>
+            <a:r>
+              <a:rPr lang="nl-NL" sz="2000" noProof="0" dirty="0">
+                <a:solidFill>
+                  <a:schemeClr val="accent5">
+                    <a:lumMod val="75000"/>
+                  </a:schemeClr>
+                </a:solidFill>
+                <a:latin typeface="Courier New" panose="02070309020205020404" pitchFamily="49" charset="0"/>
+                <a:cs typeface="Courier New" panose="02070309020205020404" pitchFamily="49" charset="0"/>
+              </a:rPr>
+              <a:t>UNIQUE</a:t>
+            </a:r>
+          </a:p>
+          <a:p>
+            <a:pPr>
+              <a:buFontTx/>
+              <a:buChar char="-"/>
+            </a:pPr>
+            <a:r>
+              <a:rPr lang="nl-NL" sz="2000" noProof="0" dirty="0">
+                <a:solidFill>
+                  <a:schemeClr val="accent5">
+                    <a:lumMod val="75000"/>
+                  </a:schemeClr>
+                </a:solidFill>
+                <a:latin typeface="Courier New" panose="02070309020205020404" pitchFamily="49" charset="0"/>
+                <a:cs typeface="Courier New" panose="02070309020205020404" pitchFamily="49" charset="0"/>
+              </a:rPr>
+              <a:t>CHECK</a:t>
+            </a:r>
+          </a:p>
+        </p:txBody>
+      </p:sp>
+      <p:cxnSp>
+        <p:nvCxnSpPr>
+          <p:cNvPr id="4" name="Straight Connector 3">
+            <a:extLst>
+              <a:ext uri="{FF2B5EF4-FFF2-40B4-BE49-F238E27FC236}">
+                <a16:creationId xmlns:a16="http://schemas.microsoft.com/office/drawing/2014/main" id="{CE96F5D3-09A8-02FC-9C4A-817C05484610}"/>
+              </a:ext>
+            </a:extLst>
+          </p:cNvPr>
+          <p:cNvCxnSpPr>
+            <a:cxnSpLocks/>
+          </p:cNvCxnSpPr>
+          <p:nvPr/>
+        </p:nvCxnSpPr>
+        <p:spPr>
+          <a:xfrm>
+            <a:off x="6794609" y="1555423"/>
+            <a:ext cx="0" cy="4621540"/>
+          </a:xfrm>
+          <a:prstGeom prst="line">
+            <a:avLst/>
+          </a:prstGeom>
+        </p:spPr>
+        <p:style>
+          <a:lnRef idx="1">
+            <a:schemeClr val="dk1"/>
+          </a:lnRef>
+          <a:fillRef idx="0">
+            <a:schemeClr val="dk1"/>
+          </a:fillRef>
+          <a:effectRef idx="0">
+            <a:schemeClr val="dk1"/>
+          </a:effectRef>
+          <a:fontRef idx="minor">
+            <a:schemeClr val="tx1"/>
+          </a:fontRef>
+        </p:style>
+      </p:cxnSp>
+    </p:spTree>
+    <p:extLst>
+      <p:ext uri="{BB962C8B-B14F-4D97-AF65-F5344CB8AC3E}">
+        <p14:creationId xmlns:p14="http://schemas.microsoft.com/office/powerpoint/2010/main" val="2905679708"/>
+      </p:ext>
+    </p:extLst>
+  </p:cSld>
+  <p:clrMapOvr>
+    <a:masterClrMapping/>
+  </p:clrMapOvr>
+</p:sld>
+</file>
+
+<file path=ppt/slides/slide41.xml><?xml version="1.0" encoding="utf-8"?>
+<p:sld xmlns:a="http://schemas.openxmlformats.org/drawingml/2006/main" xmlns:r="http://schemas.openxmlformats.org/officeDocument/2006/relationships" xmlns:p="http://schemas.openxmlformats.org/presentationml/2006/main">
+  <p:cSld>
+    <p:spTree>
+      <p:nvGrpSpPr>
+        <p:cNvPr id="1" name="">
+          <a:extLst>
+            <a:ext uri="{FF2B5EF4-FFF2-40B4-BE49-F238E27FC236}">
               <a16:creationId xmlns:a16="http://schemas.microsoft.com/office/drawing/2014/main" id="{49556EF9-B4AB-F27C-D5A0-6A8BE90D271F}"/>
             </a:ext>
           </a:extLst>
@@ -25685,7 +26600,7 @@
 </p:sld>
 </file>
 
-<file path=ppt/slides/slide41.xml><?xml version="1.0" encoding="utf-8"?>
+<file path=ppt/slides/slide42.xml><?xml version="1.0" encoding="utf-8"?>
 <p:sld xmlns:a="http://schemas.openxmlformats.org/drawingml/2006/main" xmlns:r="http://schemas.openxmlformats.org/officeDocument/2006/relationships" xmlns:p="http://schemas.openxmlformats.org/presentationml/2006/main">
   <p:cSld>
     <p:spTree>
@@ -26211,7 +27126,7 @@
 </p:sld>
 </file>
 
-<file path=ppt/slides/slide42.xml><?xml version="1.0" encoding="utf-8"?>
+<file path=ppt/slides/slide43.xml><?xml version="1.0" encoding="utf-8"?>
 <p:sld xmlns:a="http://schemas.openxmlformats.org/drawingml/2006/main" xmlns:r="http://schemas.openxmlformats.org/officeDocument/2006/relationships" xmlns:p="http://schemas.openxmlformats.org/presentationml/2006/main">
   <p:cSld>
     <p:spTree>
@@ -26729,7 +27644,7 @@
 </p:sld>
 </file>
 
-<file path=ppt/slides/slide43.xml><?xml version="1.0" encoding="utf-8"?>
+<file path=ppt/slides/slide44.xml><?xml version="1.0" encoding="utf-8"?>
 <p:sld xmlns:a="http://schemas.openxmlformats.org/drawingml/2006/main" xmlns:r="http://schemas.openxmlformats.org/officeDocument/2006/relationships" xmlns:p="http://schemas.openxmlformats.org/presentationml/2006/main">
   <p:cSld>
     <p:spTree>
@@ -27234,7 +28149,7 @@
 </p:sld>
 </file>
 
-<file path=ppt/slides/slide44.xml><?xml version="1.0" encoding="utf-8"?>
+<file path=ppt/slides/slide45.xml><?xml version="1.0" encoding="utf-8"?>
 <p:sld xmlns:a="http://schemas.openxmlformats.org/drawingml/2006/main" xmlns:r="http://schemas.openxmlformats.org/officeDocument/2006/relationships" xmlns:p="http://schemas.openxmlformats.org/presentationml/2006/main">
   <p:cSld>
     <p:spTree>
@@ -27805,7 +28720,7 @@
 </p:sld>
 </file>
 
-<file path=ppt/slides/slide45.xml><?xml version="1.0" encoding="utf-8"?>
+<file path=ppt/slides/slide46.xml><?xml version="1.0" encoding="utf-8"?>
 <p:sld xmlns:a="http://schemas.openxmlformats.org/drawingml/2006/main" xmlns:r="http://schemas.openxmlformats.org/officeDocument/2006/relationships" xmlns:p="http://schemas.openxmlformats.org/presentationml/2006/main">
   <p:cSld>
     <p:spTree>
@@ -28383,7 +29298,7 @@
 </p:sld>
 </file>
 
-<file path=ppt/slides/slide46.xml><?xml version="1.0" encoding="utf-8"?>
+<file path=ppt/slides/slide47.xml><?xml version="1.0" encoding="utf-8"?>
 <p:sld xmlns:a="http://schemas.openxmlformats.org/drawingml/2006/main" xmlns:r="http://schemas.openxmlformats.org/officeDocument/2006/relationships" xmlns:p="http://schemas.openxmlformats.org/presentationml/2006/main">
   <p:cSld>
     <p:spTree>
@@ -28557,7 +29472,7 @@
 </p:sld>
 </file>
 
-<file path=ppt/slides/slide47.xml><?xml version="1.0" encoding="utf-8"?>
+<file path=ppt/slides/slide48.xml><?xml version="1.0" encoding="utf-8"?>
 <p:sld xmlns:a="http://schemas.openxmlformats.org/drawingml/2006/main" xmlns:r="http://schemas.openxmlformats.org/officeDocument/2006/relationships" xmlns:p="http://schemas.openxmlformats.org/presentationml/2006/main">
   <p:cSld>
     <p:spTree>
@@ -29922,7 +30837,7 @@
 </p:sld>
 </file>
 
-<file path=ppt/slides/slide48.xml><?xml version="1.0" encoding="utf-8"?>
+<file path=ppt/slides/slide49.xml><?xml version="1.0" encoding="utf-8"?>
 <p:sld xmlns:a="http://schemas.openxmlformats.org/drawingml/2006/main" xmlns:r="http://schemas.openxmlformats.org/officeDocument/2006/relationships" xmlns:p="http://schemas.openxmlformats.org/presentationml/2006/main">
   <p:cSld>
     <p:spTree>
@@ -30656,450 +31571,6 @@
     <p:extLst>
       <p:ext uri="{BB962C8B-B14F-4D97-AF65-F5344CB8AC3E}">
         <p14:creationId xmlns:p14="http://schemas.microsoft.com/office/powerpoint/2010/main" val="1834950027"/>
-      </p:ext>
-    </p:extLst>
-  </p:cSld>
-  <p:clrMapOvr>
-    <a:masterClrMapping/>
-  </p:clrMapOvr>
-</p:sld>
-</file>
-
-<file path=ppt/slides/slide49.xml><?xml version="1.0" encoding="utf-8"?>
-<p:sld xmlns:a="http://schemas.openxmlformats.org/drawingml/2006/main" xmlns:r="http://schemas.openxmlformats.org/officeDocument/2006/relationships" xmlns:p="http://schemas.openxmlformats.org/presentationml/2006/main">
-  <p:cSld>
-    <p:spTree>
-      <p:nvGrpSpPr>
-        <p:cNvPr id="1" name="">
-          <a:extLst>
-            <a:ext uri="{FF2B5EF4-FFF2-40B4-BE49-F238E27FC236}">
-              <a16:creationId xmlns:a16="http://schemas.microsoft.com/office/drawing/2014/main" id="{8B982936-65EB-3D2A-EAB6-9D280C62FB34}"/>
-            </a:ext>
-          </a:extLst>
-        </p:cNvPr>
-        <p:cNvGrpSpPr/>
-        <p:nvPr/>
-      </p:nvGrpSpPr>
-      <p:grpSpPr>
-        <a:xfrm>
-          <a:off x="0" y="0"/>
-          <a:ext cx="0" cy="0"/>
-          <a:chOff x="0" y="0"/>
-          <a:chExt cx="0" cy="0"/>
-        </a:xfrm>
-      </p:grpSpPr>
-      <p:sp>
-        <p:nvSpPr>
-          <p:cNvPr id="2" name="Title 1">
-            <a:extLst>
-              <a:ext uri="{FF2B5EF4-FFF2-40B4-BE49-F238E27FC236}">
-                <a16:creationId xmlns:a16="http://schemas.microsoft.com/office/drawing/2014/main" id="{7A7C61D9-DADB-92BD-4F86-675E0D974F64}"/>
-              </a:ext>
-            </a:extLst>
-          </p:cNvPr>
-          <p:cNvSpPr>
-            <a:spLocks noGrp="1"/>
-          </p:cNvSpPr>
-          <p:nvPr>
-            <p:ph type="title"/>
-          </p:nvPr>
-        </p:nvSpPr>
-        <p:spPr/>
-        <p:txBody>
-          <a:bodyPr>
-            <a:normAutofit/>
-          </a:bodyPr>
-          <a:lstStyle/>
-          <a:p>
-            <a:r>
-              <a:rPr lang="nl-NL" sz="3600" noProof="0" dirty="0"/>
-              <a:t>View versus tabel</a:t>
-            </a:r>
-          </a:p>
-        </p:txBody>
-      </p:sp>
-      <p:sp>
-        <p:nvSpPr>
-          <p:cNvPr id="3" name="Content Placeholder 2">
-            <a:extLst>
-              <a:ext uri="{FF2B5EF4-FFF2-40B4-BE49-F238E27FC236}">
-                <a16:creationId xmlns:a16="http://schemas.microsoft.com/office/drawing/2014/main" id="{750D79A6-BD03-275C-1F9E-0A3C7DA0D542}"/>
-              </a:ext>
-            </a:extLst>
-          </p:cNvPr>
-          <p:cNvSpPr>
-            <a:spLocks noGrp="1"/>
-          </p:cNvSpPr>
-          <p:nvPr>
-            <p:ph idx="1"/>
-          </p:nvPr>
-        </p:nvSpPr>
-        <p:spPr>
-          <a:xfrm>
-            <a:off x="838200" y="1825625"/>
-            <a:ext cx="5056163" cy="4351338"/>
-          </a:xfrm>
-        </p:spPr>
-        <p:txBody>
-          <a:bodyPr>
-            <a:normAutofit/>
-          </a:bodyPr>
-          <a:lstStyle/>
-          <a:p>
-            <a:pPr marL="0" indent="0">
-              <a:buFont typeface="Arial" panose="020B0604020202020204" pitchFamily="34" charset="0"/>
-              <a:buNone/>
-            </a:pPr>
-            <a:r>
-              <a:rPr lang="nl-NL" sz="2000" b="1" noProof="0" dirty="0"/>
-              <a:t>View</a:t>
-            </a:r>
-            <a:endParaRPr lang="nl-NL" sz="2000" noProof="0" dirty="0"/>
-          </a:p>
-          <a:p>
-            <a:pPr marL="0" indent="0">
-              <a:buFont typeface="Arial" panose="020B0604020202020204" pitchFamily="34" charset="0"/>
-              <a:buNone/>
-            </a:pPr>
-            <a:endParaRPr lang="nl-NL" sz="2000" noProof="0" dirty="0"/>
-          </a:p>
-          <a:p>
-            <a:r>
-              <a:rPr lang="nl-NL" sz="2000" noProof="0" dirty="0"/>
-              <a:t>Bevat zelf </a:t>
-            </a:r>
-            <a:r>
-              <a:rPr lang="nl-NL" sz="2000" u="sng" noProof="0" dirty="0"/>
-              <a:t>geen</a:t>
-            </a:r>
-            <a:r>
-              <a:rPr lang="nl-NL" sz="2000" noProof="0" dirty="0"/>
-              <a:t> data.</a:t>
-            </a:r>
-          </a:p>
-          <a:p>
-            <a:endParaRPr lang="nl-NL" sz="2000" noProof="0" dirty="0"/>
-          </a:p>
-          <a:p>
-            <a:r>
-              <a:rPr lang="nl-NL" sz="2000" noProof="0" dirty="0"/>
-              <a:t>Alleen </a:t>
-            </a:r>
-            <a:r>
-              <a:rPr lang="nl-NL" sz="2000" u="sng" noProof="0" dirty="0"/>
-              <a:t>lezen</a:t>
-            </a:r>
-            <a:r>
-              <a:rPr lang="nl-NL" sz="2000" noProof="0" dirty="0"/>
-              <a:t> van data.</a:t>
-            </a:r>
-          </a:p>
-          <a:p>
-            <a:endParaRPr lang="nl-NL" sz="2000" noProof="0" dirty="0"/>
-          </a:p>
-          <a:p>
-            <a:r>
-              <a:rPr lang="nl-NL" sz="2000" noProof="0" dirty="0"/>
-              <a:t>Geen eigen indexering.</a:t>
-            </a:r>
-          </a:p>
-        </p:txBody>
-      </p:sp>
-      <p:sp>
-        <p:nvSpPr>
-          <p:cNvPr id="4" name="Content Placeholder 2">
-            <a:extLst>
-              <a:ext uri="{FF2B5EF4-FFF2-40B4-BE49-F238E27FC236}">
-                <a16:creationId xmlns:a16="http://schemas.microsoft.com/office/drawing/2014/main" id="{6C6C6B10-821C-12DF-5F50-4567B8C7303E}"/>
-              </a:ext>
-            </a:extLst>
-          </p:cNvPr>
-          <p:cNvSpPr txBox="1">
-            <a:spLocks/>
-          </p:cNvSpPr>
-          <p:nvPr/>
-        </p:nvSpPr>
-        <p:spPr>
-          <a:xfrm>
-            <a:off x="6295292" y="1825625"/>
-            <a:ext cx="5056163" cy="4351338"/>
-          </a:xfrm>
-          <a:prstGeom prst="rect">
-            <a:avLst/>
-          </a:prstGeom>
-        </p:spPr>
-        <p:txBody>
-          <a:bodyPr vert="horz" lIns="91440" tIns="45720" rIns="91440" bIns="45720" rtlCol="0">
-            <a:normAutofit/>
-          </a:bodyPr>
-          <a:lstStyle>
-            <a:lvl1pPr marL="228600" indent="-228600" algn="l" defTabSz="914400" rtl="0" eaLnBrk="1" latinLnBrk="0" hangingPunct="1">
-              <a:lnSpc>
-                <a:spcPct val="90000"/>
-              </a:lnSpc>
-              <a:spcBef>
-                <a:spcPts val="1000"/>
-              </a:spcBef>
-              <a:buFont typeface="Arial" panose="020B0604020202020204" pitchFamily="34" charset="0"/>
-              <a:buChar char="•"/>
-              <a:defRPr sz="2800" kern="1200">
-                <a:solidFill>
-                  <a:schemeClr val="tx1"/>
-                </a:solidFill>
-                <a:latin typeface="+mn-lt"/>
-                <a:ea typeface="+mn-ea"/>
-                <a:cs typeface="+mn-cs"/>
-              </a:defRPr>
-            </a:lvl1pPr>
-            <a:lvl2pPr marL="685800" indent="-228600" algn="l" defTabSz="914400" rtl="0" eaLnBrk="1" latinLnBrk="0" hangingPunct="1">
-              <a:lnSpc>
-                <a:spcPct val="90000"/>
-              </a:lnSpc>
-              <a:spcBef>
-                <a:spcPts val="500"/>
-              </a:spcBef>
-              <a:buFont typeface="Arial" panose="020B0604020202020204" pitchFamily="34" charset="0"/>
-              <a:buChar char="•"/>
-              <a:defRPr sz="2400" kern="1200">
-                <a:solidFill>
-                  <a:schemeClr val="tx1"/>
-                </a:solidFill>
-                <a:latin typeface="+mn-lt"/>
-                <a:ea typeface="+mn-ea"/>
-                <a:cs typeface="+mn-cs"/>
-              </a:defRPr>
-            </a:lvl2pPr>
-            <a:lvl3pPr marL="1143000" indent="-228600" algn="l" defTabSz="914400" rtl="0" eaLnBrk="1" latinLnBrk="0" hangingPunct="1">
-              <a:lnSpc>
-                <a:spcPct val="90000"/>
-              </a:lnSpc>
-              <a:spcBef>
-                <a:spcPts val="500"/>
-              </a:spcBef>
-              <a:buFont typeface="Arial" panose="020B0604020202020204" pitchFamily="34" charset="0"/>
-              <a:buChar char="•"/>
-              <a:defRPr sz="2000" kern="1200">
-                <a:solidFill>
-                  <a:schemeClr val="tx1"/>
-                </a:solidFill>
-                <a:latin typeface="+mn-lt"/>
-                <a:ea typeface="+mn-ea"/>
-                <a:cs typeface="+mn-cs"/>
-              </a:defRPr>
-            </a:lvl3pPr>
-            <a:lvl4pPr marL="1600200" indent="-228600" algn="l" defTabSz="914400" rtl="0" eaLnBrk="1" latinLnBrk="0" hangingPunct="1">
-              <a:lnSpc>
-                <a:spcPct val="90000"/>
-              </a:lnSpc>
-              <a:spcBef>
-                <a:spcPts val="500"/>
-              </a:spcBef>
-              <a:buFont typeface="Arial" panose="020B0604020202020204" pitchFamily="34" charset="0"/>
-              <a:buChar char="•"/>
-              <a:defRPr sz="1800" kern="1200">
-                <a:solidFill>
-                  <a:schemeClr val="tx1"/>
-                </a:solidFill>
-                <a:latin typeface="+mn-lt"/>
-                <a:ea typeface="+mn-ea"/>
-                <a:cs typeface="+mn-cs"/>
-              </a:defRPr>
-            </a:lvl4pPr>
-            <a:lvl5pPr marL="2057400" indent="-228600" algn="l" defTabSz="914400" rtl="0" eaLnBrk="1" latinLnBrk="0" hangingPunct="1">
-              <a:lnSpc>
-                <a:spcPct val="90000"/>
-              </a:lnSpc>
-              <a:spcBef>
-                <a:spcPts val="500"/>
-              </a:spcBef>
-              <a:buFont typeface="Arial" panose="020B0604020202020204" pitchFamily="34" charset="0"/>
-              <a:buChar char="•"/>
-              <a:defRPr sz="1800" kern="1200">
-                <a:solidFill>
-                  <a:schemeClr val="tx1"/>
-                </a:solidFill>
-                <a:latin typeface="+mn-lt"/>
-                <a:ea typeface="+mn-ea"/>
-                <a:cs typeface="+mn-cs"/>
-              </a:defRPr>
-            </a:lvl5pPr>
-            <a:lvl6pPr marL="2514600" indent="-228600" algn="l" defTabSz="914400" rtl="0" eaLnBrk="1" latinLnBrk="0" hangingPunct="1">
-              <a:lnSpc>
-                <a:spcPct val="90000"/>
-              </a:lnSpc>
-              <a:spcBef>
-                <a:spcPts val="500"/>
-              </a:spcBef>
-              <a:buFont typeface="Arial" panose="020B0604020202020204" pitchFamily="34" charset="0"/>
-              <a:buChar char="•"/>
-              <a:defRPr sz="1800" kern="1200">
-                <a:solidFill>
-                  <a:schemeClr val="tx1"/>
-                </a:solidFill>
-                <a:latin typeface="+mn-lt"/>
-                <a:ea typeface="+mn-ea"/>
-                <a:cs typeface="+mn-cs"/>
-              </a:defRPr>
-            </a:lvl6pPr>
-            <a:lvl7pPr marL="2971800" indent="-228600" algn="l" defTabSz="914400" rtl="0" eaLnBrk="1" latinLnBrk="0" hangingPunct="1">
-              <a:lnSpc>
-                <a:spcPct val="90000"/>
-              </a:lnSpc>
-              <a:spcBef>
-                <a:spcPts val="500"/>
-              </a:spcBef>
-              <a:buFont typeface="Arial" panose="020B0604020202020204" pitchFamily="34" charset="0"/>
-              <a:buChar char="•"/>
-              <a:defRPr sz="1800" kern="1200">
-                <a:solidFill>
-                  <a:schemeClr val="tx1"/>
-                </a:solidFill>
-                <a:latin typeface="+mn-lt"/>
-                <a:ea typeface="+mn-ea"/>
-                <a:cs typeface="+mn-cs"/>
-              </a:defRPr>
-            </a:lvl7pPr>
-            <a:lvl8pPr marL="3429000" indent="-228600" algn="l" defTabSz="914400" rtl="0" eaLnBrk="1" latinLnBrk="0" hangingPunct="1">
-              <a:lnSpc>
-                <a:spcPct val="90000"/>
-              </a:lnSpc>
-              <a:spcBef>
-                <a:spcPts val="500"/>
-              </a:spcBef>
-              <a:buFont typeface="Arial" panose="020B0604020202020204" pitchFamily="34" charset="0"/>
-              <a:buChar char="•"/>
-              <a:defRPr sz="1800" kern="1200">
-                <a:solidFill>
-                  <a:schemeClr val="tx1"/>
-                </a:solidFill>
-                <a:latin typeface="+mn-lt"/>
-                <a:ea typeface="+mn-ea"/>
-                <a:cs typeface="+mn-cs"/>
-              </a:defRPr>
-            </a:lvl8pPr>
-            <a:lvl9pPr marL="3886200" indent="-228600" algn="l" defTabSz="914400" rtl="0" eaLnBrk="1" latinLnBrk="0" hangingPunct="1">
-              <a:lnSpc>
-                <a:spcPct val="90000"/>
-              </a:lnSpc>
-              <a:spcBef>
-                <a:spcPts val="500"/>
-              </a:spcBef>
-              <a:buFont typeface="Arial" panose="020B0604020202020204" pitchFamily="34" charset="0"/>
-              <a:buChar char="•"/>
-              <a:defRPr sz="1800" kern="1200">
-                <a:solidFill>
-                  <a:schemeClr val="tx1"/>
-                </a:solidFill>
-                <a:latin typeface="+mn-lt"/>
-                <a:ea typeface="+mn-ea"/>
-                <a:cs typeface="+mn-cs"/>
-              </a:defRPr>
-            </a:lvl9pPr>
-          </a:lstStyle>
-          <a:p>
-            <a:pPr marL="0" indent="0">
-              <a:buNone/>
-            </a:pPr>
-            <a:r>
-              <a:rPr lang="nl-NL" sz="2000" b="1" noProof="0" dirty="0"/>
-              <a:t>Tabel</a:t>
-            </a:r>
-            <a:endParaRPr lang="nl-NL" sz="2000" noProof="0" dirty="0"/>
-          </a:p>
-          <a:p>
-            <a:pPr marL="0" indent="0">
-              <a:buNone/>
-            </a:pPr>
-            <a:endParaRPr lang="nl-NL" sz="2000" b="1" noProof="0" dirty="0"/>
-          </a:p>
-          <a:p>
-            <a:r>
-              <a:rPr lang="nl-NL" sz="2000" noProof="0" dirty="0"/>
-              <a:t>Bevat daadwerkelijk </a:t>
-            </a:r>
-            <a:r>
-              <a:rPr lang="nl-NL" sz="2000" u="sng" noProof="0" dirty="0"/>
-              <a:t>data</a:t>
-            </a:r>
-            <a:r>
-              <a:rPr lang="nl-NL" sz="2000" noProof="0" dirty="0"/>
-              <a:t>.</a:t>
-            </a:r>
-          </a:p>
-          <a:p>
-            <a:endParaRPr lang="nl-NL" sz="2000" noProof="0" dirty="0"/>
-          </a:p>
-          <a:p>
-            <a:r>
-              <a:rPr lang="nl-NL" sz="2000" noProof="0" dirty="0"/>
-              <a:t>Ondersteunt </a:t>
-            </a:r>
-            <a:r>
-              <a:rPr lang="nl-NL" sz="2000" u="sng" noProof="0" dirty="0"/>
-              <a:t>wijzigen</a:t>
-            </a:r>
-            <a:r>
-              <a:rPr lang="nl-NL" sz="2000" noProof="0" dirty="0"/>
-              <a:t> van data.</a:t>
-            </a:r>
-          </a:p>
-          <a:p>
-            <a:endParaRPr lang="nl-NL" sz="2000" noProof="0" dirty="0"/>
-          </a:p>
-          <a:p>
-            <a:r>
-              <a:rPr lang="nl-NL" sz="2000" noProof="0" dirty="0"/>
-              <a:t>Ondersteunt indexering.</a:t>
-            </a:r>
-          </a:p>
-          <a:p>
-            <a:pPr marL="0" indent="0">
-              <a:buNone/>
-            </a:pPr>
-            <a:endParaRPr lang="nl-NL" sz="2000" noProof="0" dirty="0"/>
-          </a:p>
-        </p:txBody>
-      </p:sp>
-      <p:cxnSp>
-        <p:nvCxnSpPr>
-          <p:cNvPr id="12" name="Straight Connector 11">
-            <a:extLst>
-              <a:ext uri="{FF2B5EF4-FFF2-40B4-BE49-F238E27FC236}">
-                <a16:creationId xmlns:a16="http://schemas.microsoft.com/office/drawing/2014/main" id="{6AC741A9-E44A-3F96-63DD-0A56A0910BB4}"/>
-              </a:ext>
-            </a:extLst>
-          </p:cNvPr>
-          <p:cNvCxnSpPr/>
-          <p:nvPr/>
-        </p:nvCxnSpPr>
-        <p:spPr>
-          <a:xfrm>
-            <a:off x="6096000" y="1756533"/>
-            <a:ext cx="0" cy="4420430"/>
-          </a:xfrm>
-          <a:prstGeom prst="line">
-            <a:avLst/>
-          </a:prstGeom>
-        </p:spPr>
-        <p:style>
-          <a:lnRef idx="2">
-            <a:schemeClr val="dk1"/>
-          </a:lnRef>
-          <a:fillRef idx="0">
-            <a:schemeClr val="dk1"/>
-          </a:fillRef>
-          <a:effectRef idx="1">
-            <a:schemeClr val="dk1"/>
-          </a:effectRef>
-          <a:fontRef idx="minor">
-            <a:schemeClr val="tx1"/>
-          </a:fontRef>
-        </p:style>
-      </p:cxnSp>
-    </p:spTree>
-    <p:extLst>
-      <p:ext uri="{BB962C8B-B14F-4D97-AF65-F5344CB8AC3E}">
-        <p14:creationId xmlns:p14="http://schemas.microsoft.com/office/powerpoint/2010/main" val="2615268613"/>
       </p:ext>
     </p:extLst>
   </p:cSld>
@@ -31728,6 +32199,450 @@
         <p:cNvPr id="1" name="">
           <a:extLst>
             <a:ext uri="{FF2B5EF4-FFF2-40B4-BE49-F238E27FC236}">
+              <a16:creationId xmlns:a16="http://schemas.microsoft.com/office/drawing/2014/main" id="{8B982936-65EB-3D2A-EAB6-9D280C62FB34}"/>
+            </a:ext>
+          </a:extLst>
+        </p:cNvPr>
+        <p:cNvGrpSpPr/>
+        <p:nvPr/>
+      </p:nvGrpSpPr>
+      <p:grpSpPr>
+        <a:xfrm>
+          <a:off x="0" y="0"/>
+          <a:ext cx="0" cy="0"/>
+          <a:chOff x="0" y="0"/>
+          <a:chExt cx="0" cy="0"/>
+        </a:xfrm>
+      </p:grpSpPr>
+      <p:sp>
+        <p:nvSpPr>
+          <p:cNvPr id="2" name="Title 1">
+            <a:extLst>
+              <a:ext uri="{FF2B5EF4-FFF2-40B4-BE49-F238E27FC236}">
+                <a16:creationId xmlns:a16="http://schemas.microsoft.com/office/drawing/2014/main" id="{7A7C61D9-DADB-92BD-4F86-675E0D974F64}"/>
+              </a:ext>
+            </a:extLst>
+          </p:cNvPr>
+          <p:cNvSpPr>
+            <a:spLocks noGrp="1"/>
+          </p:cNvSpPr>
+          <p:nvPr>
+            <p:ph type="title"/>
+          </p:nvPr>
+        </p:nvSpPr>
+        <p:spPr/>
+        <p:txBody>
+          <a:bodyPr>
+            <a:normAutofit/>
+          </a:bodyPr>
+          <a:lstStyle/>
+          <a:p>
+            <a:r>
+              <a:rPr lang="nl-NL" sz="3600" noProof="0" dirty="0"/>
+              <a:t>View versus tabel</a:t>
+            </a:r>
+          </a:p>
+        </p:txBody>
+      </p:sp>
+      <p:sp>
+        <p:nvSpPr>
+          <p:cNvPr id="3" name="Content Placeholder 2">
+            <a:extLst>
+              <a:ext uri="{FF2B5EF4-FFF2-40B4-BE49-F238E27FC236}">
+                <a16:creationId xmlns:a16="http://schemas.microsoft.com/office/drawing/2014/main" id="{750D79A6-BD03-275C-1F9E-0A3C7DA0D542}"/>
+              </a:ext>
+            </a:extLst>
+          </p:cNvPr>
+          <p:cNvSpPr>
+            <a:spLocks noGrp="1"/>
+          </p:cNvSpPr>
+          <p:nvPr>
+            <p:ph idx="1"/>
+          </p:nvPr>
+        </p:nvSpPr>
+        <p:spPr>
+          <a:xfrm>
+            <a:off x="838200" y="1825625"/>
+            <a:ext cx="5056163" cy="4351338"/>
+          </a:xfrm>
+        </p:spPr>
+        <p:txBody>
+          <a:bodyPr>
+            <a:normAutofit/>
+          </a:bodyPr>
+          <a:lstStyle/>
+          <a:p>
+            <a:pPr marL="0" indent="0">
+              <a:buFont typeface="Arial" panose="020B0604020202020204" pitchFamily="34" charset="0"/>
+              <a:buNone/>
+            </a:pPr>
+            <a:r>
+              <a:rPr lang="nl-NL" sz="2000" b="1" noProof="0" dirty="0"/>
+              <a:t>View</a:t>
+            </a:r>
+            <a:endParaRPr lang="nl-NL" sz="2000" noProof="0" dirty="0"/>
+          </a:p>
+          <a:p>
+            <a:pPr marL="0" indent="0">
+              <a:buFont typeface="Arial" panose="020B0604020202020204" pitchFamily="34" charset="0"/>
+              <a:buNone/>
+            </a:pPr>
+            <a:endParaRPr lang="nl-NL" sz="2000" noProof="0" dirty="0"/>
+          </a:p>
+          <a:p>
+            <a:r>
+              <a:rPr lang="nl-NL" sz="2000" noProof="0" dirty="0"/>
+              <a:t>Bevat zelf </a:t>
+            </a:r>
+            <a:r>
+              <a:rPr lang="nl-NL" sz="2000" u="sng" noProof="0" dirty="0"/>
+              <a:t>geen</a:t>
+            </a:r>
+            <a:r>
+              <a:rPr lang="nl-NL" sz="2000" noProof="0" dirty="0"/>
+              <a:t> data.</a:t>
+            </a:r>
+          </a:p>
+          <a:p>
+            <a:endParaRPr lang="nl-NL" sz="2000" noProof="0" dirty="0"/>
+          </a:p>
+          <a:p>
+            <a:r>
+              <a:rPr lang="nl-NL" sz="2000" noProof="0" dirty="0"/>
+              <a:t>Alleen </a:t>
+            </a:r>
+            <a:r>
+              <a:rPr lang="nl-NL" sz="2000" u="sng" noProof="0" dirty="0"/>
+              <a:t>lezen</a:t>
+            </a:r>
+            <a:r>
+              <a:rPr lang="nl-NL" sz="2000" noProof="0" dirty="0"/>
+              <a:t> van data.</a:t>
+            </a:r>
+          </a:p>
+          <a:p>
+            <a:endParaRPr lang="nl-NL" sz="2000" noProof="0" dirty="0"/>
+          </a:p>
+          <a:p>
+            <a:r>
+              <a:rPr lang="nl-NL" sz="2000" noProof="0" dirty="0"/>
+              <a:t>Geen eigen indexering.</a:t>
+            </a:r>
+          </a:p>
+        </p:txBody>
+      </p:sp>
+      <p:sp>
+        <p:nvSpPr>
+          <p:cNvPr id="4" name="Content Placeholder 2">
+            <a:extLst>
+              <a:ext uri="{FF2B5EF4-FFF2-40B4-BE49-F238E27FC236}">
+                <a16:creationId xmlns:a16="http://schemas.microsoft.com/office/drawing/2014/main" id="{6C6C6B10-821C-12DF-5F50-4567B8C7303E}"/>
+              </a:ext>
+            </a:extLst>
+          </p:cNvPr>
+          <p:cNvSpPr txBox="1">
+            <a:spLocks/>
+          </p:cNvSpPr>
+          <p:nvPr/>
+        </p:nvSpPr>
+        <p:spPr>
+          <a:xfrm>
+            <a:off x="6295292" y="1825625"/>
+            <a:ext cx="5056163" cy="4351338"/>
+          </a:xfrm>
+          <a:prstGeom prst="rect">
+            <a:avLst/>
+          </a:prstGeom>
+        </p:spPr>
+        <p:txBody>
+          <a:bodyPr vert="horz" lIns="91440" tIns="45720" rIns="91440" bIns="45720" rtlCol="0">
+            <a:normAutofit/>
+          </a:bodyPr>
+          <a:lstStyle>
+            <a:lvl1pPr marL="228600" indent="-228600" algn="l" defTabSz="914400" rtl="0" eaLnBrk="1" latinLnBrk="0" hangingPunct="1">
+              <a:lnSpc>
+                <a:spcPct val="90000"/>
+              </a:lnSpc>
+              <a:spcBef>
+                <a:spcPts val="1000"/>
+              </a:spcBef>
+              <a:buFont typeface="Arial" panose="020B0604020202020204" pitchFamily="34" charset="0"/>
+              <a:buChar char="•"/>
+              <a:defRPr sz="2800" kern="1200">
+                <a:solidFill>
+                  <a:schemeClr val="tx1"/>
+                </a:solidFill>
+                <a:latin typeface="+mn-lt"/>
+                <a:ea typeface="+mn-ea"/>
+                <a:cs typeface="+mn-cs"/>
+              </a:defRPr>
+            </a:lvl1pPr>
+            <a:lvl2pPr marL="685800" indent="-228600" algn="l" defTabSz="914400" rtl="0" eaLnBrk="1" latinLnBrk="0" hangingPunct="1">
+              <a:lnSpc>
+                <a:spcPct val="90000"/>
+              </a:lnSpc>
+              <a:spcBef>
+                <a:spcPts val="500"/>
+              </a:spcBef>
+              <a:buFont typeface="Arial" panose="020B0604020202020204" pitchFamily="34" charset="0"/>
+              <a:buChar char="•"/>
+              <a:defRPr sz="2400" kern="1200">
+                <a:solidFill>
+                  <a:schemeClr val="tx1"/>
+                </a:solidFill>
+                <a:latin typeface="+mn-lt"/>
+                <a:ea typeface="+mn-ea"/>
+                <a:cs typeface="+mn-cs"/>
+              </a:defRPr>
+            </a:lvl2pPr>
+            <a:lvl3pPr marL="1143000" indent="-228600" algn="l" defTabSz="914400" rtl="0" eaLnBrk="1" latinLnBrk="0" hangingPunct="1">
+              <a:lnSpc>
+                <a:spcPct val="90000"/>
+              </a:lnSpc>
+              <a:spcBef>
+                <a:spcPts val="500"/>
+              </a:spcBef>
+              <a:buFont typeface="Arial" panose="020B0604020202020204" pitchFamily="34" charset="0"/>
+              <a:buChar char="•"/>
+              <a:defRPr sz="2000" kern="1200">
+                <a:solidFill>
+                  <a:schemeClr val="tx1"/>
+                </a:solidFill>
+                <a:latin typeface="+mn-lt"/>
+                <a:ea typeface="+mn-ea"/>
+                <a:cs typeface="+mn-cs"/>
+              </a:defRPr>
+            </a:lvl3pPr>
+            <a:lvl4pPr marL="1600200" indent="-228600" algn="l" defTabSz="914400" rtl="0" eaLnBrk="1" latinLnBrk="0" hangingPunct="1">
+              <a:lnSpc>
+                <a:spcPct val="90000"/>
+              </a:lnSpc>
+              <a:spcBef>
+                <a:spcPts val="500"/>
+              </a:spcBef>
+              <a:buFont typeface="Arial" panose="020B0604020202020204" pitchFamily="34" charset="0"/>
+              <a:buChar char="•"/>
+              <a:defRPr sz="1800" kern="1200">
+                <a:solidFill>
+                  <a:schemeClr val="tx1"/>
+                </a:solidFill>
+                <a:latin typeface="+mn-lt"/>
+                <a:ea typeface="+mn-ea"/>
+                <a:cs typeface="+mn-cs"/>
+              </a:defRPr>
+            </a:lvl4pPr>
+            <a:lvl5pPr marL="2057400" indent="-228600" algn="l" defTabSz="914400" rtl="0" eaLnBrk="1" latinLnBrk="0" hangingPunct="1">
+              <a:lnSpc>
+                <a:spcPct val="90000"/>
+              </a:lnSpc>
+              <a:spcBef>
+                <a:spcPts val="500"/>
+              </a:spcBef>
+              <a:buFont typeface="Arial" panose="020B0604020202020204" pitchFamily="34" charset="0"/>
+              <a:buChar char="•"/>
+              <a:defRPr sz="1800" kern="1200">
+                <a:solidFill>
+                  <a:schemeClr val="tx1"/>
+                </a:solidFill>
+                <a:latin typeface="+mn-lt"/>
+                <a:ea typeface="+mn-ea"/>
+                <a:cs typeface="+mn-cs"/>
+              </a:defRPr>
+            </a:lvl5pPr>
+            <a:lvl6pPr marL="2514600" indent="-228600" algn="l" defTabSz="914400" rtl="0" eaLnBrk="1" latinLnBrk="0" hangingPunct="1">
+              <a:lnSpc>
+                <a:spcPct val="90000"/>
+              </a:lnSpc>
+              <a:spcBef>
+                <a:spcPts val="500"/>
+              </a:spcBef>
+              <a:buFont typeface="Arial" panose="020B0604020202020204" pitchFamily="34" charset="0"/>
+              <a:buChar char="•"/>
+              <a:defRPr sz="1800" kern="1200">
+                <a:solidFill>
+                  <a:schemeClr val="tx1"/>
+                </a:solidFill>
+                <a:latin typeface="+mn-lt"/>
+                <a:ea typeface="+mn-ea"/>
+                <a:cs typeface="+mn-cs"/>
+              </a:defRPr>
+            </a:lvl6pPr>
+            <a:lvl7pPr marL="2971800" indent="-228600" algn="l" defTabSz="914400" rtl="0" eaLnBrk="1" latinLnBrk="0" hangingPunct="1">
+              <a:lnSpc>
+                <a:spcPct val="90000"/>
+              </a:lnSpc>
+              <a:spcBef>
+                <a:spcPts val="500"/>
+              </a:spcBef>
+              <a:buFont typeface="Arial" panose="020B0604020202020204" pitchFamily="34" charset="0"/>
+              <a:buChar char="•"/>
+              <a:defRPr sz="1800" kern="1200">
+                <a:solidFill>
+                  <a:schemeClr val="tx1"/>
+                </a:solidFill>
+                <a:latin typeface="+mn-lt"/>
+                <a:ea typeface="+mn-ea"/>
+                <a:cs typeface="+mn-cs"/>
+              </a:defRPr>
+            </a:lvl7pPr>
+            <a:lvl8pPr marL="3429000" indent="-228600" algn="l" defTabSz="914400" rtl="0" eaLnBrk="1" latinLnBrk="0" hangingPunct="1">
+              <a:lnSpc>
+                <a:spcPct val="90000"/>
+              </a:lnSpc>
+              <a:spcBef>
+                <a:spcPts val="500"/>
+              </a:spcBef>
+              <a:buFont typeface="Arial" panose="020B0604020202020204" pitchFamily="34" charset="0"/>
+              <a:buChar char="•"/>
+              <a:defRPr sz="1800" kern="1200">
+                <a:solidFill>
+                  <a:schemeClr val="tx1"/>
+                </a:solidFill>
+                <a:latin typeface="+mn-lt"/>
+                <a:ea typeface="+mn-ea"/>
+                <a:cs typeface="+mn-cs"/>
+              </a:defRPr>
+            </a:lvl8pPr>
+            <a:lvl9pPr marL="3886200" indent="-228600" algn="l" defTabSz="914400" rtl="0" eaLnBrk="1" latinLnBrk="0" hangingPunct="1">
+              <a:lnSpc>
+                <a:spcPct val="90000"/>
+              </a:lnSpc>
+              <a:spcBef>
+                <a:spcPts val="500"/>
+              </a:spcBef>
+              <a:buFont typeface="Arial" panose="020B0604020202020204" pitchFamily="34" charset="0"/>
+              <a:buChar char="•"/>
+              <a:defRPr sz="1800" kern="1200">
+                <a:solidFill>
+                  <a:schemeClr val="tx1"/>
+                </a:solidFill>
+                <a:latin typeface="+mn-lt"/>
+                <a:ea typeface="+mn-ea"/>
+                <a:cs typeface="+mn-cs"/>
+              </a:defRPr>
+            </a:lvl9pPr>
+          </a:lstStyle>
+          <a:p>
+            <a:pPr marL="0" indent="0">
+              <a:buNone/>
+            </a:pPr>
+            <a:r>
+              <a:rPr lang="nl-NL" sz="2000" b="1" noProof="0" dirty="0"/>
+              <a:t>Tabel</a:t>
+            </a:r>
+            <a:endParaRPr lang="nl-NL" sz="2000" noProof="0" dirty="0"/>
+          </a:p>
+          <a:p>
+            <a:pPr marL="0" indent="0">
+              <a:buNone/>
+            </a:pPr>
+            <a:endParaRPr lang="nl-NL" sz="2000" b="1" noProof="0" dirty="0"/>
+          </a:p>
+          <a:p>
+            <a:r>
+              <a:rPr lang="nl-NL" sz="2000" noProof="0" dirty="0"/>
+              <a:t>Bevat daadwerkelijk </a:t>
+            </a:r>
+            <a:r>
+              <a:rPr lang="nl-NL" sz="2000" u="sng" noProof="0" dirty="0"/>
+              <a:t>data</a:t>
+            </a:r>
+            <a:r>
+              <a:rPr lang="nl-NL" sz="2000" noProof="0" dirty="0"/>
+              <a:t>.</a:t>
+            </a:r>
+          </a:p>
+          <a:p>
+            <a:endParaRPr lang="nl-NL" sz="2000" noProof="0" dirty="0"/>
+          </a:p>
+          <a:p>
+            <a:r>
+              <a:rPr lang="nl-NL" sz="2000" noProof="0" dirty="0"/>
+              <a:t>Ondersteunt </a:t>
+            </a:r>
+            <a:r>
+              <a:rPr lang="nl-NL" sz="2000" u="sng" noProof="0" dirty="0"/>
+              <a:t>wijzigen</a:t>
+            </a:r>
+            <a:r>
+              <a:rPr lang="nl-NL" sz="2000" noProof="0" dirty="0"/>
+              <a:t> van data.</a:t>
+            </a:r>
+          </a:p>
+          <a:p>
+            <a:endParaRPr lang="nl-NL" sz="2000" noProof="0" dirty="0"/>
+          </a:p>
+          <a:p>
+            <a:r>
+              <a:rPr lang="nl-NL" sz="2000" noProof="0" dirty="0"/>
+              <a:t>Ondersteunt indexering.</a:t>
+            </a:r>
+          </a:p>
+          <a:p>
+            <a:pPr marL="0" indent="0">
+              <a:buNone/>
+            </a:pPr>
+            <a:endParaRPr lang="nl-NL" sz="2000" noProof="0" dirty="0"/>
+          </a:p>
+        </p:txBody>
+      </p:sp>
+      <p:cxnSp>
+        <p:nvCxnSpPr>
+          <p:cNvPr id="12" name="Straight Connector 11">
+            <a:extLst>
+              <a:ext uri="{FF2B5EF4-FFF2-40B4-BE49-F238E27FC236}">
+                <a16:creationId xmlns:a16="http://schemas.microsoft.com/office/drawing/2014/main" id="{6AC741A9-E44A-3F96-63DD-0A56A0910BB4}"/>
+              </a:ext>
+            </a:extLst>
+          </p:cNvPr>
+          <p:cNvCxnSpPr/>
+          <p:nvPr/>
+        </p:nvCxnSpPr>
+        <p:spPr>
+          <a:xfrm>
+            <a:off x="6096000" y="1756533"/>
+            <a:ext cx="0" cy="4420430"/>
+          </a:xfrm>
+          <a:prstGeom prst="line">
+            <a:avLst/>
+          </a:prstGeom>
+        </p:spPr>
+        <p:style>
+          <a:lnRef idx="2">
+            <a:schemeClr val="dk1"/>
+          </a:lnRef>
+          <a:fillRef idx="0">
+            <a:schemeClr val="dk1"/>
+          </a:fillRef>
+          <a:effectRef idx="1">
+            <a:schemeClr val="dk1"/>
+          </a:effectRef>
+          <a:fontRef idx="minor">
+            <a:schemeClr val="tx1"/>
+          </a:fontRef>
+        </p:style>
+      </p:cxnSp>
+    </p:spTree>
+    <p:extLst>
+      <p:ext uri="{BB962C8B-B14F-4D97-AF65-F5344CB8AC3E}">
+        <p14:creationId xmlns:p14="http://schemas.microsoft.com/office/powerpoint/2010/main" val="2615268613"/>
+      </p:ext>
+    </p:extLst>
+  </p:cSld>
+  <p:clrMapOvr>
+    <a:masterClrMapping/>
+  </p:clrMapOvr>
+</p:sld>
+</file>
+
+<file path=ppt/slides/slide51.xml><?xml version="1.0" encoding="utf-8"?>
+<p:sld xmlns:a="http://schemas.openxmlformats.org/drawingml/2006/main" xmlns:r="http://schemas.openxmlformats.org/officeDocument/2006/relationships" xmlns:p="http://schemas.openxmlformats.org/presentationml/2006/main">
+  <p:cSld>
+    <p:spTree>
+      <p:nvGrpSpPr>
+        <p:cNvPr id="1" name="">
+          <a:extLst>
+            <a:ext uri="{FF2B5EF4-FFF2-40B4-BE49-F238E27FC236}">
               <a16:creationId xmlns:a16="http://schemas.microsoft.com/office/drawing/2014/main" id="{19564467-1EE1-4316-7245-EFD687D29E19}"/>
             </a:ext>
           </a:extLst>
@@ -31851,11 +32766,7 @@
             </a:pPr>
             <a:r>
               <a:rPr lang="nl-NL" sz="2000" dirty="0"/>
-              <a:t>Het aantal verkochte producten en de omzet per transactie</a:t>
-            </a:r>
-            <a:r>
-              <a:rPr lang="nl-NL" sz="2000" noProof="0" dirty="0"/>
-              <a:t>.</a:t>
+              <a:t>De totale omzet per klant, aflopend gesorteerd op omzet.</a:t>
             </a:r>
           </a:p>
           <a:p>
@@ -31863,7 +32774,7 @@
               <a:buFontTx/>
               <a:buChar char="-"/>
             </a:pPr>
-            <a:endParaRPr lang="nl-NL" sz="2000" noProof="0" dirty="0"/>
+            <a:endParaRPr lang="nl-NL" sz="2000" dirty="0"/>
           </a:p>
           <a:p>
             <a:pPr>
@@ -31871,8 +32782,12 @@
               <a:buChar char="-"/>
             </a:pPr>
             <a:r>
+              <a:rPr lang="nl-NL" sz="2000" dirty="0"/>
+              <a:t>Het aantal verkochte producten en de omzet per transactie</a:t>
+            </a:r>
+            <a:r>
               <a:rPr lang="nl-NL" sz="2000" noProof="0" dirty="0"/>
-              <a:t>Het aantal transacties en de totale omzet per klant en per maand.</a:t>
+              <a:t>.</a:t>
             </a:r>
           </a:p>
           <a:p>
@@ -31880,7 +32795,7 @@
               <a:buFontTx/>
               <a:buChar char="-"/>
             </a:pPr>
-            <a:endParaRPr lang="nl-NL" sz="2000" dirty="0"/>
+            <a:endParaRPr lang="nl-NL" sz="2000" noProof="0" dirty="0"/>
           </a:p>
           <a:p>
             <a:pPr>
@@ -31888,9 +32803,10 @@
               <a:buChar char="-"/>
             </a:pPr>
             <a:r>
-              <a:rPr lang="nl-NL" sz="2000" dirty="0"/>
-              <a:t>De totale omzet per klant, aflopend gesorteerd op omzet.</a:t>
-            </a:r>
+              <a:rPr lang="nl-NL" sz="2000" noProof="0" dirty="0"/>
+              <a:t>Het aantal transacties en de omzet per klant en per maand.</a:t>
+            </a:r>
+            <a:endParaRPr lang="nl-NL" sz="2000" dirty="0"/>
           </a:p>
           <a:p>
             <a:pPr marL="0" indent="0">
@@ -31944,7 +32860,7 @@
 </p:sld>
 </file>
 
-<file path=ppt/slides/slide51.xml><?xml version="1.0" encoding="utf-8"?>
+<file path=ppt/slides/slide52.xml><?xml version="1.0" encoding="utf-8"?>
 <p:sld xmlns:a="http://schemas.openxmlformats.org/drawingml/2006/main" xmlns:r="http://schemas.openxmlformats.org/officeDocument/2006/relationships" xmlns:p="http://schemas.openxmlformats.org/presentationml/2006/main">
   <p:cSld>
     <p:spTree>
@@ -32035,7 +32951,7 @@
 </p:sld>
 </file>
 
-<file path=ppt/slides/slide52.xml><?xml version="1.0" encoding="utf-8"?>
+<file path=ppt/slides/slide53.xml><?xml version="1.0" encoding="utf-8"?>
 <p:sld xmlns:a="http://schemas.openxmlformats.org/drawingml/2006/main" xmlns:r="http://schemas.openxmlformats.org/officeDocument/2006/relationships" xmlns:p="http://schemas.openxmlformats.org/presentationml/2006/main">
   <p:cSld>
     <p:spTree>
@@ -33076,7 +33992,7 @@
 </p:sld>
 </file>
 
-<file path=ppt/slides/slide53.xml><?xml version="1.0" encoding="utf-8"?>
+<file path=ppt/slides/slide54.xml><?xml version="1.0" encoding="utf-8"?>
 <p:sld xmlns:a="http://schemas.openxmlformats.org/drawingml/2006/main" xmlns:r="http://schemas.openxmlformats.org/officeDocument/2006/relationships" xmlns:p="http://schemas.openxmlformats.org/presentationml/2006/main">
   <p:cSld>
     <p:spTree>
@@ -34092,7 +35008,7 @@
 </p:sld>
 </file>
 
-<file path=ppt/slides/slide54.xml><?xml version="1.0" encoding="utf-8"?>
+<file path=ppt/slides/slide55.xml><?xml version="1.0" encoding="utf-8"?>
 <p:sld xmlns:a="http://schemas.openxmlformats.org/drawingml/2006/main" xmlns:r="http://schemas.openxmlformats.org/officeDocument/2006/relationships" xmlns:p="http://schemas.openxmlformats.org/presentationml/2006/main">
   <p:cSld>
     <p:spTree>
@@ -35915,7 +36831,7 @@
 </p:sld>
 </file>
 
-<file path=ppt/slides/slide55.xml><?xml version="1.0" encoding="utf-8"?>
+<file path=ppt/slides/slide56.xml><?xml version="1.0" encoding="utf-8"?>
 <p:sld xmlns:a="http://schemas.openxmlformats.org/drawingml/2006/main" xmlns:r="http://schemas.openxmlformats.org/officeDocument/2006/relationships" xmlns:p="http://schemas.openxmlformats.org/presentationml/2006/main">
   <p:cSld>
     <p:spTree>
@@ -37918,7 +38834,7 @@
 </p:sld>
 </file>
 
-<file path=ppt/slides/slide56.xml><?xml version="1.0" encoding="utf-8"?>
+<file path=ppt/slides/slide57.xml><?xml version="1.0" encoding="utf-8"?>
 <p:sld xmlns:a="http://schemas.openxmlformats.org/drawingml/2006/main" xmlns:r="http://schemas.openxmlformats.org/officeDocument/2006/relationships" xmlns:p="http://schemas.openxmlformats.org/presentationml/2006/main">
   <p:cSld>
     <p:spTree>
@@ -38321,7 +39237,7 @@
 </p:sld>
 </file>
 
-<file path=ppt/slides/slide57.xml><?xml version="1.0" encoding="utf-8"?>
+<file path=ppt/slides/slide58.xml><?xml version="1.0" encoding="utf-8"?>
 <p:sld xmlns:a="http://schemas.openxmlformats.org/drawingml/2006/main" xmlns:r="http://schemas.openxmlformats.org/officeDocument/2006/relationships" xmlns:p="http://schemas.openxmlformats.org/presentationml/2006/main">
   <p:cSld>
     <p:spTree>
@@ -38847,7 +39763,7 @@
 </p:sld>
 </file>
 
-<file path=ppt/slides/slide58.xml><?xml version="1.0" encoding="utf-8"?>
+<file path=ppt/slides/slide59.xml><?xml version="1.0" encoding="utf-8"?>
 <p:sld xmlns:a="http://schemas.openxmlformats.org/drawingml/2006/main" xmlns:r="http://schemas.openxmlformats.org/officeDocument/2006/relationships" xmlns:p="http://schemas.openxmlformats.org/presentationml/2006/main">
   <p:cSld>
     <p:spTree>
@@ -39478,7 +40394,242 @@
 </p:sld>
 </file>
 
-<file path=ppt/slides/slide59.xml><?xml version="1.0" encoding="utf-8"?>
+<file path=ppt/slides/slide6.xml><?xml version="1.0" encoding="utf-8"?>
+<p:sld xmlns:a="http://schemas.openxmlformats.org/drawingml/2006/main" xmlns:r="http://schemas.openxmlformats.org/officeDocument/2006/relationships" xmlns:p="http://schemas.openxmlformats.org/presentationml/2006/main">
+  <p:cSld>
+    <p:spTree>
+      <p:nvGrpSpPr>
+        <p:cNvPr id="1" name=""/>
+        <p:cNvGrpSpPr/>
+        <p:nvPr/>
+      </p:nvGrpSpPr>
+      <p:grpSpPr>
+        <a:xfrm>
+          <a:off x="0" y="0"/>
+          <a:ext cx="0" cy="0"/>
+          <a:chOff x="0" y="0"/>
+          <a:chExt cx="0" cy="0"/>
+        </a:xfrm>
+      </p:grpSpPr>
+      <p:sp>
+        <p:nvSpPr>
+          <p:cNvPr id="2" name="Title 1">
+            <a:extLst>
+              <a:ext uri="{FF2B5EF4-FFF2-40B4-BE49-F238E27FC236}">
+                <a16:creationId xmlns:a16="http://schemas.microsoft.com/office/drawing/2014/main" id="{9BDFD261-0D2C-41B9-9E28-43DF575D40E0}"/>
+              </a:ext>
+            </a:extLst>
+          </p:cNvPr>
+          <p:cNvSpPr>
+            <a:spLocks noGrp="1"/>
+          </p:cNvSpPr>
+          <p:nvPr>
+            <p:ph type="title"/>
+          </p:nvPr>
+        </p:nvSpPr>
+        <p:spPr/>
+        <p:txBody>
+          <a:bodyPr>
+            <a:normAutofit/>
+          </a:bodyPr>
+          <a:lstStyle/>
+          <a:p>
+            <a:r>
+              <a:rPr lang="nl-NL" sz="3600" noProof="0" dirty="0"/>
+              <a:t>Drie soorten relaties</a:t>
+            </a:r>
+          </a:p>
+        </p:txBody>
+      </p:sp>
+      <p:graphicFrame>
+        <p:nvGraphicFramePr>
+          <p:cNvPr id="4" name="Table 6">
+            <a:extLst>
+              <a:ext uri="{FF2B5EF4-FFF2-40B4-BE49-F238E27FC236}">
+                <a16:creationId xmlns:a16="http://schemas.microsoft.com/office/drawing/2014/main" id="{03C5159B-CC96-B768-65C5-6D3F2D193877}"/>
+              </a:ext>
+            </a:extLst>
+          </p:cNvPr>
+          <p:cNvGraphicFramePr>
+            <a:graphicFrameLocks noGrp="1"/>
+          </p:cNvGraphicFramePr>
+          <p:nvPr>
+            <p:extLst>
+              <p:ext uri="{D42A27DB-BD31-4B8C-83A1-F6EECF244321}">
+                <p14:modId xmlns:p14="http://schemas.microsoft.com/office/powerpoint/2010/main" val="2438666545"/>
+              </p:ext>
+            </p:extLst>
+          </p:nvPr>
+        </p:nvGraphicFramePr>
+        <p:xfrm>
+          <a:off x="838200" y="1635709"/>
+          <a:ext cx="10442826" cy="1735556"/>
+        </p:xfrm>
+        <a:graphic>
+          <a:graphicData uri="http://schemas.openxmlformats.org/drawingml/2006/table">
+            <a:tbl>
+              <a:tblPr firstRow="1" bandRow="1">
+                <a:tableStyleId>{5C22544A-7EE6-4342-B048-85BDC9FD1C3A}</a:tableStyleId>
+              </a:tblPr>
+              <a:tblGrid>
+                <a:gridCol w="1461868">
+                  <a:extLst>
+                    <a:ext uri="{9D8B030D-6E8A-4147-A177-3AD203B41FA5}">
+                      <a16:colId xmlns:a16="http://schemas.microsoft.com/office/drawing/2014/main" val="2462131715"/>
+                    </a:ext>
+                  </a:extLst>
+                </a:gridCol>
+                <a:gridCol w="4424290">
+                  <a:extLst>
+                    <a:ext uri="{9D8B030D-6E8A-4147-A177-3AD203B41FA5}">
+                      <a16:colId xmlns:a16="http://schemas.microsoft.com/office/drawing/2014/main" val="2197458734"/>
+                    </a:ext>
+                  </a:extLst>
+                </a:gridCol>
+                <a:gridCol w="4556668">
+                  <a:extLst>
+                    <a:ext uri="{9D8B030D-6E8A-4147-A177-3AD203B41FA5}">
+                      <a16:colId xmlns:a16="http://schemas.microsoft.com/office/drawing/2014/main" val="1150342863"/>
+                    </a:ext>
+                  </a:extLst>
+                </a:gridCol>
+              </a:tblGrid>
+              <a:tr h="456205">
+                <a:tc>
+                  <a:txBody>
+                    <a:bodyPr/>
+                    <a:lstStyle/>
+                    <a:p>
+                      <a:r>
+                        <a:rPr lang="nl-NL" noProof="0" dirty="0"/>
+                        <a:t>Soort relatie</a:t>
+                      </a:r>
+                    </a:p>
+                  </a:txBody>
+                  <a:tcPr anchor="ctr"/>
+                </a:tc>
+                <a:tc>
+                  <a:txBody>
+                    <a:bodyPr/>
+                    <a:lstStyle/>
+                    <a:p>
+                      <a:r>
+                        <a:rPr lang="nl-NL" noProof="0" dirty="0"/>
+                        <a:t>Voorbeeld</a:t>
+                      </a:r>
+                    </a:p>
+                  </a:txBody>
+                  <a:tcPr anchor="ctr"/>
+                </a:tc>
+                <a:tc>
+                  <a:txBody>
+                    <a:bodyPr/>
+                    <a:lstStyle/>
+                    <a:p>
+                      <a:r>
+                        <a:rPr lang="nl-NL" noProof="0" dirty="0"/>
+                        <a:t>Structuur</a:t>
+                      </a:r>
+                    </a:p>
+                  </a:txBody>
+                  <a:tcPr anchor="ctr"/>
+                </a:tc>
+                <a:extLst>
+                  <a:ext uri="{0D108BD9-81ED-4DB2-BD59-A6C34878D82A}">
+                    <a16:rowId xmlns:a16="http://schemas.microsoft.com/office/drawing/2014/main" val="58239531"/>
+                  </a:ext>
+                </a:extLst>
+              </a:tr>
+              <a:tr h="1279351">
+                <a:tc>
+                  <a:txBody>
+                    <a:bodyPr/>
+                    <a:lstStyle/>
+                    <a:p>
+                      <a:r>
+                        <a:rPr lang="nl-NL" noProof="0" dirty="0"/>
+                        <a:t>één op één</a:t>
+                      </a:r>
+                    </a:p>
+                  </a:txBody>
+                  <a:tcPr anchor="ctr"/>
+                </a:tc>
+                <a:tc>
+                  <a:txBody>
+                    <a:bodyPr/>
+                    <a:lstStyle/>
+                    <a:p>
+                      <a:r>
+                        <a:rPr lang="nl-NL" noProof="0" dirty="0"/>
+                        <a:t>Een klant heeft één BSN.</a:t>
+                      </a:r>
+                    </a:p>
+                    <a:p>
+                      <a:endParaRPr lang="nl-NL" noProof="0" dirty="0"/>
+                    </a:p>
+                    <a:p>
+                      <a:r>
+                        <a:rPr lang="nl-NL" noProof="0" dirty="0"/>
+                        <a:t>Een BSN hoort bij één klant.</a:t>
+                      </a:r>
+                    </a:p>
+                  </a:txBody>
+                  <a:tcPr anchor="ctr"/>
+                </a:tc>
+                <a:tc>
+                  <a:txBody>
+                    <a:bodyPr/>
+                    <a:lstStyle/>
+                    <a:p>
+                      <a:r>
+                        <a:rPr lang="nl-NL" noProof="0" dirty="0"/>
+                        <a:t>Opnemen als attribuut in de tabel.</a:t>
+                      </a:r>
+                    </a:p>
+                    <a:p>
+                      <a:r>
+                        <a:rPr lang="nl-NL" noProof="0" dirty="0"/>
+                        <a:t>(</a:t>
+                      </a:r>
+                      <a:r>
+                        <a:rPr lang="nl-NL" noProof="0" dirty="0">
+                          <a:latin typeface="Courier New" panose="02070309020205020404" pitchFamily="49" charset="0"/>
+                          <a:cs typeface="Courier New" panose="02070309020205020404" pitchFamily="49" charset="0"/>
+                        </a:rPr>
+                        <a:t>Klanten</a:t>
+                      </a:r>
+                      <a:r>
+                        <a:rPr lang="nl-NL" noProof="0" dirty="0"/>
+                        <a:t>)</a:t>
+                      </a:r>
+                    </a:p>
+                  </a:txBody>
+                  <a:tcPr anchor="ctr"/>
+                </a:tc>
+                <a:extLst>
+                  <a:ext uri="{0D108BD9-81ED-4DB2-BD59-A6C34878D82A}">
+                    <a16:rowId xmlns:a16="http://schemas.microsoft.com/office/drawing/2014/main" val="2768827451"/>
+                  </a:ext>
+                </a:extLst>
+              </a:tr>
+            </a:tbl>
+          </a:graphicData>
+        </a:graphic>
+      </p:graphicFrame>
+    </p:spTree>
+    <p:extLst>
+      <p:ext uri="{BB962C8B-B14F-4D97-AF65-F5344CB8AC3E}">
+        <p14:creationId xmlns:p14="http://schemas.microsoft.com/office/powerpoint/2010/main" val="1796087029"/>
+      </p:ext>
+    </p:extLst>
+  </p:cSld>
+  <p:clrMapOvr>
+    <a:masterClrMapping/>
+  </p:clrMapOvr>
+</p:sld>
+</file>
+
+<file path=ppt/slides/slide60.xml><?xml version="1.0" encoding="utf-8"?>
 <p:sld xmlns:a="http://schemas.openxmlformats.org/drawingml/2006/main" xmlns:r="http://schemas.openxmlformats.org/officeDocument/2006/relationships" xmlns:p="http://schemas.openxmlformats.org/presentationml/2006/main">
   <p:cSld>
     <p:spTree>
@@ -40086,242 +41237,7 @@
 </p:sld>
 </file>
 
-<file path=ppt/slides/slide6.xml><?xml version="1.0" encoding="utf-8"?>
-<p:sld xmlns:a="http://schemas.openxmlformats.org/drawingml/2006/main" xmlns:r="http://schemas.openxmlformats.org/officeDocument/2006/relationships" xmlns:p="http://schemas.openxmlformats.org/presentationml/2006/main">
-  <p:cSld>
-    <p:spTree>
-      <p:nvGrpSpPr>
-        <p:cNvPr id="1" name=""/>
-        <p:cNvGrpSpPr/>
-        <p:nvPr/>
-      </p:nvGrpSpPr>
-      <p:grpSpPr>
-        <a:xfrm>
-          <a:off x="0" y="0"/>
-          <a:ext cx="0" cy="0"/>
-          <a:chOff x="0" y="0"/>
-          <a:chExt cx="0" cy="0"/>
-        </a:xfrm>
-      </p:grpSpPr>
-      <p:sp>
-        <p:nvSpPr>
-          <p:cNvPr id="2" name="Title 1">
-            <a:extLst>
-              <a:ext uri="{FF2B5EF4-FFF2-40B4-BE49-F238E27FC236}">
-                <a16:creationId xmlns:a16="http://schemas.microsoft.com/office/drawing/2014/main" id="{9BDFD261-0D2C-41B9-9E28-43DF575D40E0}"/>
-              </a:ext>
-            </a:extLst>
-          </p:cNvPr>
-          <p:cNvSpPr>
-            <a:spLocks noGrp="1"/>
-          </p:cNvSpPr>
-          <p:nvPr>
-            <p:ph type="title"/>
-          </p:nvPr>
-        </p:nvSpPr>
-        <p:spPr/>
-        <p:txBody>
-          <a:bodyPr>
-            <a:normAutofit/>
-          </a:bodyPr>
-          <a:lstStyle/>
-          <a:p>
-            <a:r>
-              <a:rPr lang="nl-NL" sz="3600" noProof="0" dirty="0"/>
-              <a:t>Drie soorten relaties</a:t>
-            </a:r>
-          </a:p>
-        </p:txBody>
-      </p:sp>
-      <p:graphicFrame>
-        <p:nvGraphicFramePr>
-          <p:cNvPr id="4" name="Table 6">
-            <a:extLst>
-              <a:ext uri="{FF2B5EF4-FFF2-40B4-BE49-F238E27FC236}">
-                <a16:creationId xmlns:a16="http://schemas.microsoft.com/office/drawing/2014/main" id="{03C5159B-CC96-B768-65C5-6D3F2D193877}"/>
-              </a:ext>
-            </a:extLst>
-          </p:cNvPr>
-          <p:cNvGraphicFramePr>
-            <a:graphicFrameLocks noGrp="1"/>
-          </p:cNvGraphicFramePr>
-          <p:nvPr>
-            <p:extLst>
-              <p:ext uri="{D42A27DB-BD31-4B8C-83A1-F6EECF244321}">
-                <p14:modId xmlns:p14="http://schemas.microsoft.com/office/powerpoint/2010/main" val="2438666545"/>
-              </p:ext>
-            </p:extLst>
-          </p:nvPr>
-        </p:nvGraphicFramePr>
-        <p:xfrm>
-          <a:off x="838200" y="1635709"/>
-          <a:ext cx="10442826" cy="1735556"/>
-        </p:xfrm>
-        <a:graphic>
-          <a:graphicData uri="http://schemas.openxmlformats.org/drawingml/2006/table">
-            <a:tbl>
-              <a:tblPr firstRow="1" bandRow="1">
-                <a:tableStyleId>{5C22544A-7EE6-4342-B048-85BDC9FD1C3A}</a:tableStyleId>
-              </a:tblPr>
-              <a:tblGrid>
-                <a:gridCol w="1461868">
-                  <a:extLst>
-                    <a:ext uri="{9D8B030D-6E8A-4147-A177-3AD203B41FA5}">
-                      <a16:colId xmlns:a16="http://schemas.microsoft.com/office/drawing/2014/main" val="2462131715"/>
-                    </a:ext>
-                  </a:extLst>
-                </a:gridCol>
-                <a:gridCol w="4424290">
-                  <a:extLst>
-                    <a:ext uri="{9D8B030D-6E8A-4147-A177-3AD203B41FA5}">
-                      <a16:colId xmlns:a16="http://schemas.microsoft.com/office/drawing/2014/main" val="2197458734"/>
-                    </a:ext>
-                  </a:extLst>
-                </a:gridCol>
-                <a:gridCol w="4556668">
-                  <a:extLst>
-                    <a:ext uri="{9D8B030D-6E8A-4147-A177-3AD203B41FA5}">
-                      <a16:colId xmlns:a16="http://schemas.microsoft.com/office/drawing/2014/main" val="1150342863"/>
-                    </a:ext>
-                  </a:extLst>
-                </a:gridCol>
-              </a:tblGrid>
-              <a:tr h="456205">
-                <a:tc>
-                  <a:txBody>
-                    <a:bodyPr/>
-                    <a:lstStyle/>
-                    <a:p>
-                      <a:r>
-                        <a:rPr lang="nl-NL" noProof="0" dirty="0"/>
-                        <a:t>Soort relatie</a:t>
-                      </a:r>
-                    </a:p>
-                  </a:txBody>
-                  <a:tcPr anchor="ctr"/>
-                </a:tc>
-                <a:tc>
-                  <a:txBody>
-                    <a:bodyPr/>
-                    <a:lstStyle/>
-                    <a:p>
-                      <a:r>
-                        <a:rPr lang="nl-NL" noProof="0" dirty="0"/>
-                        <a:t>Voorbeeld</a:t>
-                      </a:r>
-                    </a:p>
-                  </a:txBody>
-                  <a:tcPr anchor="ctr"/>
-                </a:tc>
-                <a:tc>
-                  <a:txBody>
-                    <a:bodyPr/>
-                    <a:lstStyle/>
-                    <a:p>
-                      <a:r>
-                        <a:rPr lang="nl-NL" noProof="0" dirty="0"/>
-                        <a:t>Structuur</a:t>
-                      </a:r>
-                    </a:p>
-                  </a:txBody>
-                  <a:tcPr anchor="ctr"/>
-                </a:tc>
-                <a:extLst>
-                  <a:ext uri="{0D108BD9-81ED-4DB2-BD59-A6C34878D82A}">
-                    <a16:rowId xmlns:a16="http://schemas.microsoft.com/office/drawing/2014/main" val="58239531"/>
-                  </a:ext>
-                </a:extLst>
-              </a:tr>
-              <a:tr h="1279351">
-                <a:tc>
-                  <a:txBody>
-                    <a:bodyPr/>
-                    <a:lstStyle/>
-                    <a:p>
-                      <a:r>
-                        <a:rPr lang="nl-NL" noProof="0" dirty="0"/>
-                        <a:t>één op één</a:t>
-                      </a:r>
-                    </a:p>
-                  </a:txBody>
-                  <a:tcPr anchor="ctr"/>
-                </a:tc>
-                <a:tc>
-                  <a:txBody>
-                    <a:bodyPr/>
-                    <a:lstStyle/>
-                    <a:p>
-                      <a:r>
-                        <a:rPr lang="nl-NL" noProof="0" dirty="0"/>
-                        <a:t>Een klant heeft één BSN.</a:t>
-                      </a:r>
-                    </a:p>
-                    <a:p>
-                      <a:endParaRPr lang="nl-NL" noProof="0" dirty="0"/>
-                    </a:p>
-                    <a:p>
-                      <a:r>
-                        <a:rPr lang="nl-NL" noProof="0" dirty="0"/>
-                        <a:t>Een BSN hoort bij één klant.</a:t>
-                      </a:r>
-                    </a:p>
-                  </a:txBody>
-                  <a:tcPr anchor="ctr"/>
-                </a:tc>
-                <a:tc>
-                  <a:txBody>
-                    <a:bodyPr/>
-                    <a:lstStyle/>
-                    <a:p>
-                      <a:r>
-                        <a:rPr lang="nl-NL" noProof="0" dirty="0"/>
-                        <a:t>Opnemen als attribuut in de tabel.</a:t>
-                      </a:r>
-                    </a:p>
-                    <a:p>
-                      <a:r>
-                        <a:rPr lang="nl-NL" noProof="0" dirty="0"/>
-                        <a:t>(</a:t>
-                      </a:r>
-                      <a:r>
-                        <a:rPr lang="nl-NL" noProof="0" dirty="0">
-                          <a:latin typeface="Courier New" panose="02070309020205020404" pitchFamily="49" charset="0"/>
-                          <a:cs typeface="Courier New" panose="02070309020205020404" pitchFamily="49" charset="0"/>
-                        </a:rPr>
-                        <a:t>Klanten</a:t>
-                      </a:r>
-                      <a:r>
-                        <a:rPr lang="nl-NL" noProof="0" dirty="0"/>
-                        <a:t>)</a:t>
-                      </a:r>
-                    </a:p>
-                  </a:txBody>
-                  <a:tcPr anchor="ctr"/>
-                </a:tc>
-                <a:extLst>
-                  <a:ext uri="{0D108BD9-81ED-4DB2-BD59-A6C34878D82A}">
-                    <a16:rowId xmlns:a16="http://schemas.microsoft.com/office/drawing/2014/main" val="2768827451"/>
-                  </a:ext>
-                </a:extLst>
-              </a:tr>
-            </a:tbl>
-          </a:graphicData>
-        </a:graphic>
-      </p:graphicFrame>
-    </p:spTree>
-    <p:extLst>
-      <p:ext uri="{BB962C8B-B14F-4D97-AF65-F5344CB8AC3E}">
-        <p14:creationId xmlns:p14="http://schemas.microsoft.com/office/powerpoint/2010/main" val="1796087029"/>
-      </p:ext>
-    </p:extLst>
-  </p:cSld>
-  <p:clrMapOvr>
-    <a:masterClrMapping/>
-  </p:clrMapOvr>
-</p:sld>
-</file>
-
-<file path=ppt/slides/slide60.xml><?xml version="1.0" encoding="utf-8"?>
+<file path=ppt/slides/slide61.xml><?xml version="1.0" encoding="utf-8"?>
 <p:sld xmlns:a="http://schemas.openxmlformats.org/drawingml/2006/main" xmlns:r="http://schemas.openxmlformats.org/officeDocument/2006/relationships" xmlns:p="http://schemas.openxmlformats.org/presentationml/2006/main">
   <p:cSld>
     <p:spTree>

--- a/2_database_design/2_database_design.pptx
+++ b/2_database_design/2_database_design.pptx
@@ -5,7 +5,7 @@
     <p:sldMasterId id="2147483648" r:id="rId1"/>
   </p:sldMasterIdLst>
   <p:notesMasterIdLst>
-    <p:notesMasterId r:id="rId63"/>
+    <p:notesMasterId r:id="rId65"/>
   </p:notesMasterIdLst>
   <p:sldIdLst>
     <p:sldId id="256" r:id="rId2"/>
@@ -30,45 +30,47 @@
     <p:sldId id="361" r:id="rId21"/>
     <p:sldId id="399" r:id="rId22"/>
     <p:sldId id="360" r:id="rId23"/>
-    <p:sldId id="321" r:id="rId24"/>
+    <p:sldId id="405" r:id="rId24"/>
     <p:sldId id="266" r:id="rId25"/>
     <p:sldId id="404" r:id="rId26"/>
-    <p:sldId id="316" r:id="rId27"/>
-    <p:sldId id="396" r:id="rId28"/>
-    <p:sldId id="401" r:id="rId29"/>
-    <p:sldId id="397" r:id="rId30"/>
-    <p:sldId id="357" r:id="rId31"/>
-    <p:sldId id="319" r:id="rId32"/>
-    <p:sldId id="323" r:id="rId33"/>
-    <p:sldId id="296" r:id="rId34"/>
-    <p:sldId id="335" r:id="rId35"/>
-    <p:sldId id="362" r:id="rId36"/>
-    <p:sldId id="337" r:id="rId37"/>
-    <p:sldId id="363" r:id="rId38"/>
-    <p:sldId id="364" r:id="rId39"/>
-    <p:sldId id="334" r:id="rId40"/>
-    <p:sldId id="365" r:id="rId41"/>
-    <p:sldId id="390" r:id="rId42"/>
-    <p:sldId id="366" r:id="rId43"/>
-    <p:sldId id="391" r:id="rId44"/>
-    <p:sldId id="393" r:id="rId45"/>
-    <p:sldId id="333" r:id="rId46"/>
-    <p:sldId id="392" r:id="rId47"/>
-    <p:sldId id="343" r:id="rId48"/>
-    <p:sldId id="377" r:id="rId49"/>
-    <p:sldId id="380" r:id="rId50"/>
-    <p:sldId id="378" r:id="rId51"/>
-    <p:sldId id="398" r:id="rId52"/>
-    <p:sldId id="394" r:id="rId53"/>
-    <p:sldId id="367" r:id="rId54"/>
-    <p:sldId id="372" r:id="rId55"/>
-    <p:sldId id="374" r:id="rId56"/>
-    <p:sldId id="373" r:id="rId57"/>
-    <p:sldId id="297" r:id="rId58"/>
-    <p:sldId id="376" r:id="rId59"/>
-    <p:sldId id="375" r:id="rId60"/>
-    <p:sldId id="341" r:id="rId61"/>
-    <p:sldId id="342" r:id="rId62"/>
+    <p:sldId id="406" r:id="rId27"/>
+    <p:sldId id="407" r:id="rId28"/>
+    <p:sldId id="316" r:id="rId29"/>
+    <p:sldId id="396" r:id="rId30"/>
+    <p:sldId id="401" r:id="rId31"/>
+    <p:sldId id="397" r:id="rId32"/>
+    <p:sldId id="357" r:id="rId33"/>
+    <p:sldId id="319" r:id="rId34"/>
+    <p:sldId id="323" r:id="rId35"/>
+    <p:sldId id="296" r:id="rId36"/>
+    <p:sldId id="335" r:id="rId37"/>
+    <p:sldId id="362" r:id="rId38"/>
+    <p:sldId id="337" r:id="rId39"/>
+    <p:sldId id="363" r:id="rId40"/>
+    <p:sldId id="364" r:id="rId41"/>
+    <p:sldId id="334" r:id="rId42"/>
+    <p:sldId id="365" r:id="rId43"/>
+    <p:sldId id="390" r:id="rId44"/>
+    <p:sldId id="366" r:id="rId45"/>
+    <p:sldId id="391" r:id="rId46"/>
+    <p:sldId id="393" r:id="rId47"/>
+    <p:sldId id="333" r:id="rId48"/>
+    <p:sldId id="392" r:id="rId49"/>
+    <p:sldId id="343" r:id="rId50"/>
+    <p:sldId id="377" r:id="rId51"/>
+    <p:sldId id="380" r:id="rId52"/>
+    <p:sldId id="378" r:id="rId53"/>
+    <p:sldId id="398" r:id="rId54"/>
+    <p:sldId id="394" r:id="rId55"/>
+    <p:sldId id="367" r:id="rId56"/>
+    <p:sldId id="372" r:id="rId57"/>
+    <p:sldId id="374" r:id="rId58"/>
+    <p:sldId id="373" r:id="rId59"/>
+    <p:sldId id="297" r:id="rId60"/>
+    <p:sldId id="376" r:id="rId61"/>
+    <p:sldId id="375" r:id="rId62"/>
+    <p:sldId id="341" r:id="rId63"/>
+    <p:sldId id="342" r:id="rId64"/>
   </p:sldIdLst>
   <p:sldSz cx="12192000" cy="6858000"/>
   <p:notesSz cx="6858000" cy="9144000"/>
@@ -257,7 +259,7 @@
           <a:p>
             <a:fld id="{61CE90D0-176A-4BE5-B54F-392F0A16E3B3}" type="datetimeFigureOut">
               <a:rPr lang="en-NL" smtClean="0"/>
-              <a:t>19/10/2026</a:t>
+              <a:t>20/10/2026</a:t>
             </a:fld>
             <a:endParaRPr lang="en-NL"/>
           </a:p>
@@ -674,7 +676,7 @@
           <a:p>
             <a:fld id="{F847AAA1-0A2D-4E17-BD7E-ECD1F2F24FF1}" type="slidenum">
               <a:rPr lang="en-NL" smtClean="0"/>
-              <a:t>32</a:t>
+              <a:t>34</a:t>
             </a:fld>
             <a:endParaRPr lang="en-NL"/>
           </a:p>
@@ -758,7 +760,7 @@
           <a:p>
             <a:fld id="{F847AAA1-0A2D-4E17-BD7E-ECD1F2F24FF1}" type="slidenum">
               <a:rPr lang="en-NL" smtClean="0"/>
-              <a:t>33</a:t>
+              <a:t>35</a:t>
             </a:fld>
             <a:endParaRPr lang="en-NL"/>
           </a:p>
@@ -842,7 +844,7 @@
           <a:p>
             <a:fld id="{F847AAA1-0A2D-4E17-BD7E-ECD1F2F24FF1}" type="slidenum">
               <a:rPr lang="en-NL" smtClean="0"/>
-              <a:t>34</a:t>
+              <a:t>36</a:t>
             </a:fld>
             <a:endParaRPr lang="en-NL"/>
           </a:p>
@@ -950,7 +952,7 @@
           <a:p>
             <a:fld id="{F847AAA1-0A2D-4E17-BD7E-ECD1F2F24FF1}" type="slidenum">
               <a:rPr lang="en-NL" smtClean="0"/>
-              <a:t>35</a:t>
+              <a:t>37</a:t>
             </a:fld>
             <a:endParaRPr lang="en-NL"/>
           </a:p>
@@ -1038,7 +1040,7 @@
           <a:p>
             <a:fld id="{F847AAA1-0A2D-4E17-BD7E-ECD1F2F24FF1}" type="slidenum">
               <a:rPr lang="en-NL" smtClean="0"/>
-              <a:t>36</a:t>
+              <a:t>38</a:t>
             </a:fld>
             <a:endParaRPr lang="en-NL"/>
           </a:p>
@@ -1146,7 +1148,7 @@
           <a:p>
             <a:fld id="{F847AAA1-0A2D-4E17-BD7E-ECD1F2F24FF1}" type="slidenum">
               <a:rPr lang="en-NL" smtClean="0"/>
-              <a:t>37</a:t>
+              <a:t>39</a:t>
             </a:fld>
             <a:endParaRPr lang="en-NL"/>
           </a:p>
@@ -1254,7 +1256,7 @@
           <a:p>
             <a:fld id="{F847AAA1-0A2D-4E17-BD7E-ECD1F2F24FF1}" type="slidenum">
               <a:rPr lang="en-NL" smtClean="0"/>
-              <a:t>38</a:t>
+              <a:t>40</a:t>
             </a:fld>
             <a:endParaRPr lang="en-NL"/>
           </a:p>
@@ -1374,7 +1376,7 @@
           <a:p>
             <a:fld id="{F847AAA1-0A2D-4E17-BD7E-ECD1F2F24FF1}" type="slidenum">
               <a:rPr lang="en-NL" smtClean="0"/>
-              <a:t>39</a:t>
+              <a:t>41</a:t>
             </a:fld>
             <a:endParaRPr lang="en-NL"/>
           </a:p>
@@ -1482,7 +1484,7 @@
           <a:p>
             <a:fld id="{F847AAA1-0A2D-4E17-BD7E-ECD1F2F24FF1}" type="slidenum">
               <a:rPr lang="en-NL" smtClean="0"/>
-              <a:t>40</a:t>
+              <a:t>42</a:t>
             </a:fld>
             <a:endParaRPr lang="en-NL"/>
           </a:p>
@@ -1590,7 +1592,7 @@
           <a:p>
             <a:fld id="{F847AAA1-0A2D-4E17-BD7E-ECD1F2F24FF1}" type="slidenum">
               <a:rPr lang="en-NL" smtClean="0"/>
-              <a:t>41</a:t>
+              <a:t>43</a:t>
             </a:fld>
             <a:endParaRPr lang="en-NL"/>
           </a:p>
@@ -1782,7 +1784,7 @@
           <a:p>
             <a:fld id="{F847AAA1-0A2D-4E17-BD7E-ECD1F2F24FF1}" type="slidenum">
               <a:rPr lang="en-NL" smtClean="0"/>
-              <a:t>42</a:t>
+              <a:t>44</a:t>
             </a:fld>
             <a:endParaRPr lang="en-NL"/>
           </a:p>
@@ -1890,7 +1892,7 @@
           <a:p>
             <a:fld id="{F847AAA1-0A2D-4E17-BD7E-ECD1F2F24FF1}" type="slidenum">
               <a:rPr lang="en-NL" smtClean="0"/>
-              <a:t>43</a:t>
+              <a:t>45</a:t>
             </a:fld>
             <a:endParaRPr lang="en-NL"/>
           </a:p>
@@ -1998,7 +2000,7 @@
           <a:p>
             <a:fld id="{F847AAA1-0A2D-4E17-BD7E-ECD1F2F24FF1}" type="slidenum">
               <a:rPr lang="en-NL" smtClean="0"/>
-              <a:t>44</a:t>
+              <a:t>46</a:t>
             </a:fld>
             <a:endParaRPr lang="en-NL"/>
           </a:p>
@@ -2082,7 +2084,7 @@
           <a:p>
             <a:fld id="{F847AAA1-0A2D-4E17-BD7E-ECD1F2F24FF1}" type="slidenum">
               <a:rPr lang="en-NL" smtClean="0"/>
-              <a:t>45</a:t>
+              <a:t>47</a:t>
             </a:fld>
             <a:endParaRPr lang="en-NL"/>
           </a:p>
@@ -2190,7 +2192,7 @@
           <a:p>
             <a:fld id="{F847AAA1-0A2D-4E17-BD7E-ECD1F2F24FF1}" type="slidenum">
               <a:rPr lang="en-NL" smtClean="0"/>
-              <a:t>46</a:t>
+              <a:t>48</a:t>
             </a:fld>
             <a:endParaRPr lang="en-NL"/>
           </a:p>
@@ -2298,7 +2300,7 @@
           <a:p>
             <a:fld id="{F847AAA1-0A2D-4E17-BD7E-ECD1F2F24FF1}" type="slidenum">
               <a:rPr lang="en-NL" smtClean="0"/>
-              <a:t>53</a:t>
+              <a:t>55</a:t>
             </a:fld>
             <a:endParaRPr lang="en-NL"/>
           </a:p>
@@ -2406,7 +2408,7 @@
           <a:p>
             <a:fld id="{F847AAA1-0A2D-4E17-BD7E-ECD1F2F24FF1}" type="slidenum">
               <a:rPr lang="en-NL" smtClean="0"/>
-              <a:t>54</a:t>
+              <a:t>56</a:t>
             </a:fld>
             <a:endParaRPr lang="en-NL"/>
           </a:p>
@@ -2514,7 +2516,7 @@
           <a:p>
             <a:fld id="{F847AAA1-0A2D-4E17-BD7E-ECD1F2F24FF1}" type="slidenum">
               <a:rPr lang="en-NL" smtClean="0"/>
-              <a:t>55</a:t>
+              <a:t>57</a:t>
             </a:fld>
             <a:endParaRPr lang="en-NL"/>
           </a:p>
@@ -2622,7 +2624,7 @@
           <a:p>
             <a:fld id="{F847AAA1-0A2D-4E17-BD7E-ECD1F2F24FF1}" type="slidenum">
               <a:rPr lang="en-NL" smtClean="0"/>
-              <a:t>56</a:t>
+              <a:t>58</a:t>
             </a:fld>
             <a:endParaRPr lang="en-NL"/>
           </a:p>
@@ -2706,7 +2708,7 @@
           <a:p>
             <a:fld id="{F847AAA1-0A2D-4E17-BD7E-ECD1F2F24FF1}" type="slidenum">
               <a:rPr lang="en-NL" smtClean="0"/>
-              <a:t>57</a:t>
+              <a:t>59</a:t>
             </a:fld>
             <a:endParaRPr lang="en-NL"/>
           </a:p>
@@ -2922,7 +2924,7 @@
           <a:p>
             <a:fld id="{F847AAA1-0A2D-4E17-BD7E-ECD1F2F24FF1}" type="slidenum">
               <a:rPr lang="en-NL" smtClean="0"/>
-              <a:t>58</a:t>
+              <a:t>60</a:t>
             </a:fld>
             <a:endParaRPr lang="en-NL"/>
           </a:p>
@@ -3030,7 +3032,7 @@
           <a:p>
             <a:fld id="{F847AAA1-0A2D-4E17-BD7E-ECD1F2F24FF1}" type="slidenum">
               <a:rPr lang="en-NL" smtClean="0"/>
-              <a:t>59</a:t>
+              <a:t>61</a:t>
             </a:fld>
             <a:endParaRPr lang="en-NL"/>
           </a:p>
@@ -3114,7 +3116,7 @@
           <a:p>
             <a:fld id="{F847AAA1-0A2D-4E17-BD7E-ECD1F2F24FF1}" type="slidenum">
               <a:rPr lang="en-NL" smtClean="0"/>
-              <a:t>60</a:t>
+              <a:t>62</a:t>
             </a:fld>
             <a:endParaRPr lang="en-NL"/>
           </a:p>
@@ -3676,7 +3678,7 @@
           <a:p>
             <a:fld id="{F847AAA1-0A2D-4E17-BD7E-ECD1F2F24FF1}" type="slidenum">
               <a:rPr lang="en-NL" smtClean="0"/>
-              <a:t>31</a:t>
+              <a:t>33</a:t>
             </a:fld>
             <a:endParaRPr lang="en-NL"/>
           </a:p>
@@ -3844,7 +3846,7 @@
           <a:p>
             <a:fld id="{7B15CBDA-B49C-4B0F-9869-5B15867EA611}" type="datetimeFigureOut">
               <a:rPr lang="en-NL" smtClean="0"/>
-              <a:t>19/10/2026</a:t>
+              <a:t>20/10/2026</a:t>
             </a:fld>
             <a:endParaRPr lang="en-NL"/>
           </a:p>
@@ -4044,7 +4046,7 @@
           <a:p>
             <a:fld id="{7B15CBDA-B49C-4B0F-9869-5B15867EA611}" type="datetimeFigureOut">
               <a:rPr lang="en-NL" smtClean="0"/>
-              <a:t>19/10/2026</a:t>
+              <a:t>20/10/2026</a:t>
             </a:fld>
             <a:endParaRPr lang="en-NL"/>
           </a:p>
@@ -4254,7 +4256,7 @@
           <a:p>
             <a:fld id="{7B15CBDA-B49C-4B0F-9869-5B15867EA611}" type="datetimeFigureOut">
               <a:rPr lang="en-NL" smtClean="0"/>
-              <a:t>19/10/2026</a:t>
+              <a:t>20/10/2026</a:t>
             </a:fld>
             <a:endParaRPr lang="en-NL"/>
           </a:p>
@@ -4454,7 +4456,7 @@
           <a:p>
             <a:fld id="{7B15CBDA-B49C-4B0F-9869-5B15867EA611}" type="datetimeFigureOut">
               <a:rPr lang="en-NL" smtClean="0"/>
-              <a:t>19/10/2026</a:t>
+              <a:t>20/10/2026</a:t>
             </a:fld>
             <a:endParaRPr lang="en-NL"/>
           </a:p>
@@ -4730,7 +4732,7 @@
           <a:p>
             <a:fld id="{7B15CBDA-B49C-4B0F-9869-5B15867EA611}" type="datetimeFigureOut">
               <a:rPr lang="en-NL" smtClean="0"/>
-              <a:t>19/10/2026</a:t>
+              <a:t>20/10/2026</a:t>
             </a:fld>
             <a:endParaRPr lang="en-NL"/>
           </a:p>
@@ -4998,7 +5000,7 @@
           <a:p>
             <a:fld id="{7B15CBDA-B49C-4B0F-9869-5B15867EA611}" type="datetimeFigureOut">
               <a:rPr lang="en-NL" smtClean="0"/>
-              <a:t>19/10/2026</a:t>
+              <a:t>20/10/2026</a:t>
             </a:fld>
             <a:endParaRPr lang="en-NL"/>
           </a:p>
@@ -5413,7 +5415,7 @@
           <a:p>
             <a:fld id="{7B15CBDA-B49C-4B0F-9869-5B15867EA611}" type="datetimeFigureOut">
               <a:rPr lang="en-NL" smtClean="0"/>
-              <a:t>19/10/2026</a:t>
+              <a:t>20/10/2026</a:t>
             </a:fld>
             <a:endParaRPr lang="en-NL"/>
           </a:p>
@@ -5555,7 +5557,7 @@
           <a:p>
             <a:fld id="{7B15CBDA-B49C-4B0F-9869-5B15867EA611}" type="datetimeFigureOut">
               <a:rPr lang="en-NL" smtClean="0"/>
-              <a:t>19/10/2026</a:t>
+              <a:t>20/10/2026</a:t>
             </a:fld>
             <a:endParaRPr lang="en-NL"/>
           </a:p>
@@ -5668,7 +5670,7 @@
           <a:p>
             <a:fld id="{7B15CBDA-B49C-4B0F-9869-5B15867EA611}" type="datetimeFigureOut">
               <a:rPr lang="en-NL" smtClean="0"/>
-              <a:t>19/10/2026</a:t>
+              <a:t>20/10/2026</a:t>
             </a:fld>
             <a:endParaRPr lang="en-NL"/>
           </a:p>
@@ -5981,7 +5983,7 @@
           <a:p>
             <a:fld id="{7B15CBDA-B49C-4B0F-9869-5B15867EA611}" type="datetimeFigureOut">
               <a:rPr lang="en-NL" smtClean="0"/>
-              <a:t>19/10/2026</a:t>
+              <a:t>20/10/2026</a:t>
             </a:fld>
             <a:endParaRPr lang="en-NL"/>
           </a:p>
@@ -6270,7 +6272,7 @@
           <a:p>
             <a:fld id="{7B15CBDA-B49C-4B0F-9869-5B15867EA611}" type="datetimeFigureOut">
               <a:rPr lang="en-NL" smtClean="0"/>
-              <a:t>19/10/2026</a:t>
+              <a:t>20/10/2026</a:t>
             </a:fld>
             <a:endParaRPr lang="en-NL"/>
           </a:p>
@@ -6513,7 +6515,7 @@
           <a:p>
             <a:fld id="{7B15CBDA-B49C-4B0F-9869-5B15867EA611}" type="datetimeFigureOut">
               <a:rPr lang="en-NL" smtClean="0"/>
-              <a:t>19/10/2026</a:t>
+              <a:t>20/10/2026</a:t>
             </a:fld>
             <a:endParaRPr lang="en-NL"/>
           </a:p>
@@ -16495,7 +16497,13 @@
   <p:cSld>
     <p:spTree>
       <p:nvGrpSpPr>
-        <p:cNvPr id="1" name=""/>
+        <p:cNvPr id="1" name="">
+          <a:extLst>
+            <a:ext uri="{FF2B5EF4-FFF2-40B4-BE49-F238E27FC236}">
+              <a16:creationId xmlns:a16="http://schemas.microsoft.com/office/drawing/2014/main" id="{812B7072-42E0-1C93-A111-AEEF56AD6302}"/>
+            </a:ext>
+          </a:extLst>
+        </p:cNvPr>
         <p:cNvGrpSpPr/>
         <p:nvPr/>
       </p:nvGrpSpPr>
@@ -16512,7 +16520,7 @@
           <p:cNvPr id="2" name="Title 1">
             <a:extLst>
               <a:ext uri="{FF2B5EF4-FFF2-40B4-BE49-F238E27FC236}">
-                <a16:creationId xmlns:a16="http://schemas.microsoft.com/office/drawing/2014/main" id="{9BDFD261-0D2C-41B9-9E28-43DF575D40E0}"/>
+                <a16:creationId xmlns:a16="http://schemas.microsoft.com/office/drawing/2014/main" id="{83A57E3C-6A73-6BCB-B89D-E7B6BFFCF015}"/>
               </a:ext>
             </a:extLst>
           </p:cNvPr>
@@ -16549,40 +16557,524 @@
           </a:p>
         </p:txBody>
       </p:sp>
-      <p:pic>
-        <p:nvPicPr>
-          <p:cNvPr id="3" name="Picture 2">
+      <p:graphicFrame>
+        <p:nvGraphicFramePr>
+          <p:cNvPr id="4" name="Table 5">
             <a:extLst>
               <a:ext uri="{FF2B5EF4-FFF2-40B4-BE49-F238E27FC236}">
-                <a16:creationId xmlns:a16="http://schemas.microsoft.com/office/drawing/2014/main" id="{9F7D6075-1C5C-4836-A0E8-6EFEAFDCF7CB}"/>
+                <a16:creationId xmlns:a16="http://schemas.microsoft.com/office/drawing/2014/main" id="{B4AFF9D1-BC48-C797-8DFB-5161A8EE2D7F}"/>
               </a:ext>
             </a:extLst>
           </p:cNvPr>
-          <p:cNvPicPr>
-            <a:picLocks noChangeAspect="1"/>
-          </p:cNvPicPr>
+          <p:cNvGraphicFramePr>
+            <a:graphicFrameLocks noGrp="1"/>
+          </p:cNvGraphicFramePr>
+          <p:nvPr>
+            <p:extLst>
+              <p:ext uri="{D42A27DB-BD31-4B8C-83A1-F6EECF244321}">
+                <p14:modId xmlns:p14="http://schemas.microsoft.com/office/powerpoint/2010/main" val="478916895"/>
+              </p:ext>
+            </p:extLst>
+          </p:nvPr>
+        </p:nvGraphicFramePr>
+        <p:xfrm>
+          <a:off x="1648701" y="2739310"/>
+          <a:ext cx="1820160" cy="1849120"/>
+        </p:xfrm>
+        <a:graphic>
+          <a:graphicData uri="http://schemas.openxmlformats.org/drawingml/2006/table">
+            <a:tbl>
+              <a:tblPr firstRow="1" bandRow="1">
+                <a:tableStyleId>{5C22544A-7EE6-4342-B048-85BDC9FD1C3A}</a:tableStyleId>
+              </a:tblPr>
+              <a:tblGrid>
+                <a:gridCol w="1820160">
+                  <a:extLst>
+                    <a:ext uri="{9D8B030D-6E8A-4147-A177-3AD203B41FA5}">
+                      <a16:colId xmlns:a16="http://schemas.microsoft.com/office/drawing/2014/main" val="2508677333"/>
+                    </a:ext>
+                  </a:extLst>
+                </a:gridCol>
+              </a:tblGrid>
+              <a:tr h="0">
+                <a:tc>
+                  <a:txBody>
+                    <a:bodyPr/>
+                    <a:lstStyle/>
+                    <a:p>
+                      <a:r>
+                        <a:rPr lang="nl-NL" noProof="0" dirty="0"/>
+                        <a:t>Klanten</a:t>
+                      </a:r>
+                    </a:p>
+                  </a:txBody>
+                  <a:tcPr/>
+                </a:tc>
+                <a:extLst>
+                  <a:ext uri="{0D108BD9-81ED-4DB2-BD59-A6C34878D82A}">
+                    <a16:rowId xmlns:a16="http://schemas.microsoft.com/office/drawing/2014/main" val="858791041"/>
+                  </a:ext>
+                </a:extLst>
+              </a:tr>
+              <a:tr h="370840">
+                <a:tc>
+                  <a:txBody>
+                    <a:bodyPr/>
+                    <a:lstStyle/>
+                    <a:p>
+                      <a:r>
+                        <a:rPr lang="nl-NL" b="1" noProof="0" dirty="0" err="1"/>
+                        <a:t>KlantID</a:t>
+                      </a:r>
+                      <a:endParaRPr lang="nl-NL" b="1" noProof="0" dirty="0"/>
+                    </a:p>
+                  </a:txBody>
+                  <a:tcPr/>
+                </a:tc>
+                <a:extLst>
+                  <a:ext uri="{0D108BD9-81ED-4DB2-BD59-A6C34878D82A}">
+                    <a16:rowId xmlns:a16="http://schemas.microsoft.com/office/drawing/2014/main" val="1538811982"/>
+                  </a:ext>
+                </a:extLst>
+              </a:tr>
+              <a:tr h="370840">
+                <a:tc>
+                  <a:txBody>
+                    <a:bodyPr/>
+                    <a:lstStyle/>
+                    <a:p>
+                      <a:r>
+                        <a:rPr lang="nl-NL" noProof="0" dirty="0"/>
+                        <a:t>Voornaam</a:t>
+                      </a:r>
+                    </a:p>
+                  </a:txBody>
+                  <a:tcPr/>
+                </a:tc>
+                <a:extLst>
+                  <a:ext uri="{0D108BD9-81ED-4DB2-BD59-A6C34878D82A}">
+                    <a16:rowId xmlns:a16="http://schemas.microsoft.com/office/drawing/2014/main" val="3674785774"/>
+                  </a:ext>
+                </a:extLst>
+              </a:tr>
+              <a:tr h="370840">
+                <a:tc>
+                  <a:txBody>
+                    <a:bodyPr/>
+                    <a:lstStyle/>
+                    <a:p>
+                      <a:r>
+                        <a:rPr lang="nl-NL" noProof="0" dirty="0"/>
+                        <a:t>Achternaam</a:t>
+                      </a:r>
+                    </a:p>
+                  </a:txBody>
+                  <a:tcPr/>
+                </a:tc>
+                <a:extLst>
+                  <a:ext uri="{0D108BD9-81ED-4DB2-BD59-A6C34878D82A}">
+                    <a16:rowId xmlns:a16="http://schemas.microsoft.com/office/drawing/2014/main" val="2335262126"/>
+                  </a:ext>
+                </a:extLst>
+              </a:tr>
+              <a:tr h="370840">
+                <a:tc>
+                  <a:txBody>
+                    <a:bodyPr/>
+                    <a:lstStyle/>
+                    <a:p>
+                      <a:r>
+                        <a:rPr lang="nl-NL" noProof="0" dirty="0"/>
+                        <a:t>…</a:t>
+                      </a:r>
+                    </a:p>
+                  </a:txBody>
+                  <a:tcPr/>
+                </a:tc>
+                <a:extLst>
+                  <a:ext uri="{0D108BD9-81ED-4DB2-BD59-A6C34878D82A}">
+                    <a16:rowId xmlns:a16="http://schemas.microsoft.com/office/drawing/2014/main" val="2163937255"/>
+                  </a:ext>
+                </a:extLst>
+              </a:tr>
+            </a:tbl>
+          </a:graphicData>
+        </a:graphic>
+      </p:graphicFrame>
+      <p:graphicFrame>
+        <p:nvGraphicFramePr>
+          <p:cNvPr id="5" name="Table 5">
+            <a:extLst>
+              <a:ext uri="{FF2B5EF4-FFF2-40B4-BE49-F238E27FC236}">
+                <a16:creationId xmlns:a16="http://schemas.microsoft.com/office/drawing/2014/main" id="{C2A55ACE-E5DB-A221-27A8-C3AB9CEFFF83}"/>
+              </a:ext>
+            </a:extLst>
+          </p:cNvPr>
+          <p:cNvGraphicFramePr>
+            <a:graphicFrameLocks noGrp="1"/>
+          </p:cNvGraphicFramePr>
+          <p:nvPr>
+            <p:extLst>
+              <p:ext uri="{D42A27DB-BD31-4B8C-83A1-F6EECF244321}">
+                <p14:modId xmlns:p14="http://schemas.microsoft.com/office/powerpoint/2010/main" val="3273823693"/>
+              </p:ext>
+            </p:extLst>
+          </p:nvPr>
+        </p:nvGraphicFramePr>
+        <p:xfrm>
+          <a:off x="4935513" y="2739310"/>
+          <a:ext cx="1820160" cy="1849120"/>
+        </p:xfrm>
+        <a:graphic>
+          <a:graphicData uri="http://schemas.openxmlformats.org/drawingml/2006/table">
+            <a:tbl>
+              <a:tblPr firstRow="1" bandRow="1">
+                <a:tableStyleId>{5C22544A-7EE6-4342-B048-85BDC9FD1C3A}</a:tableStyleId>
+              </a:tblPr>
+              <a:tblGrid>
+                <a:gridCol w="1820160">
+                  <a:extLst>
+                    <a:ext uri="{9D8B030D-6E8A-4147-A177-3AD203B41FA5}">
+                      <a16:colId xmlns:a16="http://schemas.microsoft.com/office/drawing/2014/main" val="2508677333"/>
+                    </a:ext>
+                  </a:extLst>
+                </a:gridCol>
+              </a:tblGrid>
+              <a:tr h="0">
+                <a:tc>
+                  <a:txBody>
+                    <a:bodyPr/>
+                    <a:lstStyle/>
+                    <a:p>
+                      <a:r>
+                        <a:rPr lang="nl-NL" noProof="0" dirty="0"/>
+                        <a:t>Transacties</a:t>
+                      </a:r>
+                    </a:p>
+                  </a:txBody>
+                  <a:tcPr/>
+                </a:tc>
+                <a:extLst>
+                  <a:ext uri="{0D108BD9-81ED-4DB2-BD59-A6C34878D82A}">
+                    <a16:rowId xmlns:a16="http://schemas.microsoft.com/office/drawing/2014/main" val="858791041"/>
+                  </a:ext>
+                </a:extLst>
+              </a:tr>
+              <a:tr h="370840">
+                <a:tc>
+                  <a:txBody>
+                    <a:bodyPr/>
+                    <a:lstStyle/>
+                    <a:p>
+                      <a:r>
+                        <a:rPr lang="nl-NL" b="1" noProof="0" dirty="0" err="1"/>
+                        <a:t>KlantID</a:t>
+                      </a:r>
+                      <a:endParaRPr lang="nl-NL" b="1" noProof="0" dirty="0"/>
+                    </a:p>
+                  </a:txBody>
+                  <a:tcPr/>
+                </a:tc>
+                <a:extLst>
+                  <a:ext uri="{0D108BD9-81ED-4DB2-BD59-A6C34878D82A}">
+                    <a16:rowId xmlns:a16="http://schemas.microsoft.com/office/drawing/2014/main" val="1538811982"/>
+                  </a:ext>
+                </a:extLst>
+              </a:tr>
+              <a:tr h="370840">
+                <a:tc>
+                  <a:txBody>
+                    <a:bodyPr/>
+                    <a:lstStyle/>
+                    <a:p>
+                      <a:r>
+                        <a:rPr lang="nl-NL" b="1" noProof="0" dirty="0" err="1"/>
+                        <a:t>ProductID</a:t>
+                      </a:r>
+                      <a:endParaRPr lang="nl-NL" b="1" noProof="0" dirty="0"/>
+                    </a:p>
+                  </a:txBody>
+                  <a:tcPr/>
+                </a:tc>
+                <a:extLst>
+                  <a:ext uri="{0D108BD9-81ED-4DB2-BD59-A6C34878D82A}">
+                    <a16:rowId xmlns:a16="http://schemas.microsoft.com/office/drawing/2014/main" val="3674785774"/>
+                  </a:ext>
+                </a:extLst>
+              </a:tr>
+              <a:tr h="370840">
+                <a:tc>
+                  <a:txBody>
+                    <a:bodyPr/>
+                    <a:lstStyle/>
+                    <a:p>
+                      <a:r>
+                        <a:rPr lang="nl-NL" noProof="0" dirty="0" err="1"/>
+                        <a:t>DatumTijd</a:t>
+                      </a:r>
+                      <a:endParaRPr lang="nl-NL" noProof="0" dirty="0"/>
+                    </a:p>
+                  </a:txBody>
+                  <a:tcPr/>
+                </a:tc>
+                <a:extLst>
+                  <a:ext uri="{0D108BD9-81ED-4DB2-BD59-A6C34878D82A}">
+                    <a16:rowId xmlns:a16="http://schemas.microsoft.com/office/drawing/2014/main" val="2335262126"/>
+                  </a:ext>
+                </a:extLst>
+              </a:tr>
+              <a:tr h="370840">
+                <a:tc>
+                  <a:txBody>
+                    <a:bodyPr/>
+                    <a:lstStyle/>
+                    <a:p>
+                      <a:r>
+                        <a:rPr lang="nl-NL" noProof="0" dirty="0"/>
+                        <a:t>…</a:t>
+                      </a:r>
+                    </a:p>
+                  </a:txBody>
+                  <a:tcPr/>
+                </a:tc>
+                <a:extLst>
+                  <a:ext uri="{0D108BD9-81ED-4DB2-BD59-A6C34878D82A}">
+                    <a16:rowId xmlns:a16="http://schemas.microsoft.com/office/drawing/2014/main" val="2163937255"/>
+                  </a:ext>
+                </a:extLst>
+              </a:tr>
+            </a:tbl>
+          </a:graphicData>
+        </a:graphic>
+      </p:graphicFrame>
+      <p:graphicFrame>
+        <p:nvGraphicFramePr>
+          <p:cNvPr id="6" name="Table 5">
+            <a:extLst>
+              <a:ext uri="{FF2B5EF4-FFF2-40B4-BE49-F238E27FC236}">
+                <a16:creationId xmlns:a16="http://schemas.microsoft.com/office/drawing/2014/main" id="{EB2F0FA9-DBA0-156B-765B-4D434E8F32A4}"/>
+              </a:ext>
+            </a:extLst>
+          </p:cNvPr>
+          <p:cNvGraphicFramePr>
+            <a:graphicFrameLocks noGrp="1"/>
+          </p:cNvGraphicFramePr>
+          <p:nvPr>
+            <p:extLst>
+              <p:ext uri="{D42A27DB-BD31-4B8C-83A1-F6EECF244321}">
+                <p14:modId xmlns:p14="http://schemas.microsoft.com/office/powerpoint/2010/main" val="149547547"/>
+              </p:ext>
+            </p:extLst>
+          </p:nvPr>
+        </p:nvGraphicFramePr>
+        <p:xfrm>
+          <a:off x="8222325" y="2739310"/>
+          <a:ext cx="1820160" cy="1849120"/>
+        </p:xfrm>
+        <a:graphic>
+          <a:graphicData uri="http://schemas.openxmlformats.org/drawingml/2006/table">
+            <a:tbl>
+              <a:tblPr firstRow="1" bandRow="1">
+                <a:tableStyleId>{5C22544A-7EE6-4342-B048-85BDC9FD1C3A}</a:tableStyleId>
+              </a:tblPr>
+              <a:tblGrid>
+                <a:gridCol w="1820160">
+                  <a:extLst>
+                    <a:ext uri="{9D8B030D-6E8A-4147-A177-3AD203B41FA5}">
+                      <a16:colId xmlns:a16="http://schemas.microsoft.com/office/drawing/2014/main" val="2508677333"/>
+                    </a:ext>
+                  </a:extLst>
+                </a:gridCol>
+              </a:tblGrid>
+              <a:tr h="0">
+                <a:tc>
+                  <a:txBody>
+                    <a:bodyPr/>
+                    <a:lstStyle/>
+                    <a:p>
+                      <a:r>
+                        <a:rPr lang="nl-NL" noProof="0" dirty="0"/>
+                        <a:t>Producten</a:t>
+                      </a:r>
+                    </a:p>
+                  </a:txBody>
+                  <a:tcPr/>
+                </a:tc>
+                <a:extLst>
+                  <a:ext uri="{0D108BD9-81ED-4DB2-BD59-A6C34878D82A}">
+                    <a16:rowId xmlns:a16="http://schemas.microsoft.com/office/drawing/2014/main" val="858791041"/>
+                  </a:ext>
+                </a:extLst>
+              </a:tr>
+              <a:tr h="370840">
+                <a:tc>
+                  <a:txBody>
+                    <a:bodyPr/>
+                    <a:lstStyle/>
+                    <a:p>
+                      <a:r>
+                        <a:rPr lang="nl-NL" b="1" noProof="0" dirty="0" err="1"/>
+                        <a:t>ProductID</a:t>
+                      </a:r>
+                      <a:endParaRPr lang="nl-NL" b="1" noProof="0" dirty="0"/>
+                    </a:p>
+                  </a:txBody>
+                  <a:tcPr/>
+                </a:tc>
+                <a:extLst>
+                  <a:ext uri="{0D108BD9-81ED-4DB2-BD59-A6C34878D82A}">
+                    <a16:rowId xmlns:a16="http://schemas.microsoft.com/office/drawing/2014/main" val="1538811982"/>
+                  </a:ext>
+                </a:extLst>
+              </a:tr>
+              <a:tr h="370840">
+                <a:tc>
+                  <a:txBody>
+                    <a:bodyPr/>
+                    <a:lstStyle/>
+                    <a:p>
+                      <a:r>
+                        <a:rPr lang="nl-NL" noProof="0" dirty="0"/>
+                        <a:t>Naam</a:t>
+                      </a:r>
+                    </a:p>
+                  </a:txBody>
+                  <a:tcPr/>
+                </a:tc>
+                <a:extLst>
+                  <a:ext uri="{0D108BD9-81ED-4DB2-BD59-A6C34878D82A}">
+                    <a16:rowId xmlns:a16="http://schemas.microsoft.com/office/drawing/2014/main" val="3674785774"/>
+                  </a:ext>
+                </a:extLst>
+              </a:tr>
+              <a:tr h="370840">
+                <a:tc>
+                  <a:txBody>
+                    <a:bodyPr/>
+                    <a:lstStyle/>
+                    <a:p>
+                      <a:r>
+                        <a:rPr lang="nl-NL" noProof="0" dirty="0"/>
+                        <a:t>Omschrijving</a:t>
+                      </a:r>
+                    </a:p>
+                  </a:txBody>
+                  <a:tcPr/>
+                </a:tc>
+                <a:extLst>
+                  <a:ext uri="{0D108BD9-81ED-4DB2-BD59-A6C34878D82A}">
+                    <a16:rowId xmlns:a16="http://schemas.microsoft.com/office/drawing/2014/main" val="2335262126"/>
+                  </a:ext>
+                </a:extLst>
+              </a:tr>
+              <a:tr h="370840">
+                <a:tc>
+                  <a:txBody>
+                    <a:bodyPr/>
+                    <a:lstStyle/>
+                    <a:p>
+                      <a:r>
+                        <a:rPr lang="nl-NL" noProof="0" dirty="0"/>
+                        <a:t>…</a:t>
+                      </a:r>
+                    </a:p>
+                  </a:txBody>
+                  <a:tcPr/>
+                </a:tc>
+                <a:extLst>
+                  <a:ext uri="{0D108BD9-81ED-4DB2-BD59-A6C34878D82A}">
+                    <a16:rowId xmlns:a16="http://schemas.microsoft.com/office/drawing/2014/main" val="2163937255"/>
+                  </a:ext>
+                </a:extLst>
+              </a:tr>
+            </a:tbl>
+          </a:graphicData>
+        </a:graphic>
+      </p:graphicFrame>
+      <p:cxnSp>
+        <p:nvCxnSpPr>
+          <p:cNvPr id="7" name="Straight Arrow Connector 6">
+            <a:extLst>
+              <a:ext uri="{FF2B5EF4-FFF2-40B4-BE49-F238E27FC236}">
+                <a16:creationId xmlns:a16="http://schemas.microsoft.com/office/drawing/2014/main" id="{D6BB5C44-277E-29D4-B822-09106ED59C30}"/>
+              </a:ext>
+            </a:extLst>
+          </p:cNvPr>
+          <p:cNvCxnSpPr/>
           <p:nvPr/>
-        </p:nvPicPr>
-        <p:blipFill>
-          <a:blip r:embed="rId2"/>
-          <a:stretch>
-            <a:fillRect/>
-          </a:stretch>
-        </p:blipFill>
+        </p:nvCxnSpPr>
         <p:spPr>
           <a:xfrm>
-            <a:off x="1801402" y="1407167"/>
-            <a:ext cx="8589196" cy="5085708"/>
+            <a:off x="3468861" y="3286724"/>
+            <a:ext cx="1466652" cy="0"/>
           </a:xfrm>
-          <a:prstGeom prst="rect">
+          <a:prstGeom prst="straightConnector1">
             <a:avLst/>
           </a:prstGeom>
+          <a:ln>
+            <a:headEnd type="triangle"/>
+            <a:tailEnd type="triangle"/>
+          </a:ln>
         </p:spPr>
-      </p:pic>
+        <p:style>
+          <a:lnRef idx="3">
+            <a:schemeClr val="dk1"/>
+          </a:lnRef>
+          <a:fillRef idx="0">
+            <a:schemeClr val="dk1"/>
+          </a:fillRef>
+          <a:effectRef idx="2">
+            <a:schemeClr val="dk1"/>
+          </a:effectRef>
+          <a:fontRef idx="minor">
+            <a:schemeClr val="tx1"/>
+          </a:fontRef>
+        </p:style>
+      </p:cxnSp>
+      <p:cxnSp>
+        <p:nvCxnSpPr>
+          <p:cNvPr id="8" name="Connector: Elbow 7">
+            <a:extLst>
+              <a:ext uri="{FF2B5EF4-FFF2-40B4-BE49-F238E27FC236}">
+                <a16:creationId xmlns:a16="http://schemas.microsoft.com/office/drawing/2014/main" id="{6CFA13DB-24FD-1986-BD94-8555CC25F067}"/>
+              </a:ext>
+            </a:extLst>
+          </p:cNvPr>
+          <p:cNvCxnSpPr/>
+          <p:nvPr/>
+        </p:nvCxnSpPr>
+        <p:spPr>
+          <a:xfrm flipV="1">
+            <a:off x="6755673" y="3286724"/>
+            <a:ext cx="1466652" cy="377146"/>
+          </a:xfrm>
+          <a:prstGeom prst="bentConnector3">
+            <a:avLst/>
+          </a:prstGeom>
+          <a:ln>
+            <a:headEnd type="triangle"/>
+            <a:tailEnd type="triangle"/>
+          </a:ln>
+        </p:spPr>
+        <p:style>
+          <a:lnRef idx="3">
+            <a:schemeClr val="dk1"/>
+          </a:lnRef>
+          <a:fillRef idx="0">
+            <a:schemeClr val="dk1"/>
+          </a:fillRef>
+          <a:effectRef idx="2">
+            <a:schemeClr val="dk1"/>
+          </a:effectRef>
+          <a:fontRef idx="minor">
+            <a:schemeClr val="tx1"/>
+          </a:fontRef>
+        </p:style>
+      </p:cxnSp>
     </p:spTree>
     <p:extLst>
       <p:ext uri="{BB962C8B-B14F-4D97-AF65-F5344CB8AC3E}">
-        <p14:creationId xmlns:p14="http://schemas.microsoft.com/office/powerpoint/2010/main" val="1728007162"/>
+        <p14:creationId xmlns:p14="http://schemas.microsoft.com/office/powerpoint/2010/main" val="3682652617"/>
       </p:ext>
     </p:extLst>
   </p:cSld>
@@ -18609,6 +19101,2392 @@
   <p:cSld>
     <p:spTree>
       <p:nvGrpSpPr>
+        <p:cNvPr id="1" name="">
+          <a:extLst>
+            <a:ext uri="{FF2B5EF4-FFF2-40B4-BE49-F238E27FC236}">
+              <a16:creationId xmlns:a16="http://schemas.microsoft.com/office/drawing/2014/main" id="{4F78D1E1-4A36-5CF2-891E-1A97033AC840}"/>
+            </a:ext>
+          </a:extLst>
+        </p:cNvPr>
+        <p:cNvGrpSpPr/>
+        <p:nvPr/>
+      </p:nvGrpSpPr>
+      <p:grpSpPr>
+        <a:xfrm>
+          <a:off x="0" y="0"/>
+          <a:ext cx="0" cy="0"/>
+          <a:chOff x="0" y="0"/>
+          <a:chExt cx="0" cy="0"/>
+        </a:xfrm>
+      </p:grpSpPr>
+      <p:sp>
+        <p:nvSpPr>
+          <p:cNvPr id="2" name="Title 1">
+            <a:extLst>
+              <a:ext uri="{FF2B5EF4-FFF2-40B4-BE49-F238E27FC236}">
+                <a16:creationId xmlns:a16="http://schemas.microsoft.com/office/drawing/2014/main" id="{6B1CC011-4611-DBC9-FA67-3919BE7265E0}"/>
+              </a:ext>
+            </a:extLst>
+          </p:cNvPr>
+          <p:cNvSpPr>
+            <a:spLocks noGrp="1"/>
+          </p:cNvSpPr>
+          <p:nvPr>
+            <p:ph type="title"/>
+          </p:nvPr>
+        </p:nvSpPr>
+        <p:spPr/>
+        <p:txBody>
+          <a:bodyPr>
+            <a:normAutofit/>
+          </a:bodyPr>
+          <a:lstStyle/>
+          <a:p>
+            <a:r>
+              <a:rPr lang="nl-NL" sz="3600" noProof="0" dirty="0" err="1"/>
+              <a:t>Entity</a:t>
+            </a:r>
+            <a:r>
+              <a:rPr lang="nl-NL" sz="3600" noProof="0" dirty="0"/>
+              <a:t> </a:t>
+            </a:r>
+            <a:r>
+              <a:rPr lang="nl-NL" sz="3600" noProof="0" dirty="0" err="1"/>
+              <a:t>Relationship</a:t>
+            </a:r>
+            <a:r>
+              <a:rPr lang="nl-NL" sz="3600" noProof="0" dirty="0"/>
+              <a:t> Diagram</a:t>
+            </a:r>
+          </a:p>
+        </p:txBody>
+      </p:sp>
+      <p:graphicFrame>
+        <p:nvGraphicFramePr>
+          <p:cNvPr id="4" name="Table 5">
+            <a:extLst>
+              <a:ext uri="{FF2B5EF4-FFF2-40B4-BE49-F238E27FC236}">
+                <a16:creationId xmlns:a16="http://schemas.microsoft.com/office/drawing/2014/main" id="{C0401C16-DFD8-1EB3-A1CE-2996673F487A}"/>
+              </a:ext>
+            </a:extLst>
+          </p:cNvPr>
+          <p:cNvGraphicFramePr>
+            <a:graphicFrameLocks noGrp="1"/>
+          </p:cNvGraphicFramePr>
+          <p:nvPr/>
+        </p:nvGraphicFramePr>
+        <p:xfrm>
+          <a:off x="1648701" y="2739310"/>
+          <a:ext cx="1820160" cy="1849120"/>
+        </p:xfrm>
+        <a:graphic>
+          <a:graphicData uri="http://schemas.openxmlformats.org/drawingml/2006/table">
+            <a:tbl>
+              <a:tblPr firstRow="1" bandRow="1">
+                <a:tableStyleId>{5C22544A-7EE6-4342-B048-85BDC9FD1C3A}</a:tableStyleId>
+              </a:tblPr>
+              <a:tblGrid>
+                <a:gridCol w="1820160">
+                  <a:extLst>
+                    <a:ext uri="{9D8B030D-6E8A-4147-A177-3AD203B41FA5}">
+                      <a16:colId xmlns:a16="http://schemas.microsoft.com/office/drawing/2014/main" val="2508677333"/>
+                    </a:ext>
+                  </a:extLst>
+                </a:gridCol>
+              </a:tblGrid>
+              <a:tr h="0">
+                <a:tc>
+                  <a:txBody>
+                    <a:bodyPr/>
+                    <a:lstStyle/>
+                    <a:p>
+                      <a:r>
+                        <a:rPr lang="nl-NL" noProof="0" dirty="0"/>
+                        <a:t>Klanten</a:t>
+                      </a:r>
+                    </a:p>
+                  </a:txBody>
+                  <a:tcPr/>
+                </a:tc>
+                <a:extLst>
+                  <a:ext uri="{0D108BD9-81ED-4DB2-BD59-A6C34878D82A}">
+                    <a16:rowId xmlns:a16="http://schemas.microsoft.com/office/drawing/2014/main" val="858791041"/>
+                  </a:ext>
+                </a:extLst>
+              </a:tr>
+              <a:tr h="370840">
+                <a:tc>
+                  <a:txBody>
+                    <a:bodyPr/>
+                    <a:lstStyle/>
+                    <a:p>
+                      <a:r>
+                        <a:rPr lang="nl-NL" b="1" noProof="0" dirty="0" err="1"/>
+                        <a:t>KlantID</a:t>
+                      </a:r>
+                      <a:endParaRPr lang="nl-NL" b="1" noProof="0" dirty="0"/>
+                    </a:p>
+                  </a:txBody>
+                  <a:tcPr/>
+                </a:tc>
+                <a:extLst>
+                  <a:ext uri="{0D108BD9-81ED-4DB2-BD59-A6C34878D82A}">
+                    <a16:rowId xmlns:a16="http://schemas.microsoft.com/office/drawing/2014/main" val="1538811982"/>
+                  </a:ext>
+                </a:extLst>
+              </a:tr>
+              <a:tr h="370840">
+                <a:tc>
+                  <a:txBody>
+                    <a:bodyPr/>
+                    <a:lstStyle/>
+                    <a:p>
+                      <a:r>
+                        <a:rPr lang="nl-NL" noProof="0" dirty="0"/>
+                        <a:t>Voornaam</a:t>
+                      </a:r>
+                    </a:p>
+                  </a:txBody>
+                  <a:tcPr/>
+                </a:tc>
+                <a:extLst>
+                  <a:ext uri="{0D108BD9-81ED-4DB2-BD59-A6C34878D82A}">
+                    <a16:rowId xmlns:a16="http://schemas.microsoft.com/office/drawing/2014/main" val="3674785774"/>
+                  </a:ext>
+                </a:extLst>
+              </a:tr>
+              <a:tr h="370840">
+                <a:tc>
+                  <a:txBody>
+                    <a:bodyPr/>
+                    <a:lstStyle/>
+                    <a:p>
+                      <a:r>
+                        <a:rPr lang="nl-NL" noProof="0" dirty="0"/>
+                        <a:t>Achternaam</a:t>
+                      </a:r>
+                    </a:p>
+                  </a:txBody>
+                  <a:tcPr/>
+                </a:tc>
+                <a:extLst>
+                  <a:ext uri="{0D108BD9-81ED-4DB2-BD59-A6C34878D82A}">
+                    <a16:rowId xmlns:a16="http://schemas.microsoft.com/office/drawing/2014/main" val="2335262126"/>
+                  </a:ext>
+                </a:extLst>
+              </a:tr>
+              <a:tr h="370840">
+                <a:tc>
+                  <a:txBody>
+                    <a:bodyPr/>
+                    <a:lstStyle/>
+                    <a:p>
+                      <a:r>
+                        <a:rPr lang="nl-NL" noProof="0" dirty="0"/>
+                        <a:t>…</a:t>
+                      </a:r>
+                    </a:p>
+                  </a:txBody>
+                  <a:tcPr/>
+                </a:tc>
+                <a:extLst>
+                  <a:ext uri="{0D108BD9-81ED-4DB2-BD59-A6C34878D82A}">
+                    <a16:rowId xmlns:a16="http://schemas.microsoft.com/office/drawing/2014/main" val="2163937255"/>
+                  </a:ext>
+                </a:extLst>
+              </a:tr>
+            </a:tbl>
+          </a:graphicData>
+        </a:graphic>
+      </p:graphicFrame>
+      <p:graphicFrame>
+        <p:nvGraphicFramePr>
+          <p:cNvPr id="5" name="Table 5">
+            <a:extLst>
+              <a:ext uri="{FF2B5EF4-FFF2-40B4-BE49-F238E27FC236}">
+                <a16:creationId xmlns:a16="http://schemas.microsoft.com/office/drawing/2014/main" id="{FF32D2C7-1CCB-74D4-B83B-30A7AFB97D2F}"/>
+              </a:ext>
+            </a:extLst>
+          </p:cNvPr>
+          <p:cNvGraphicFramePr>
+            <a:graphicFrameLocks noGrp="1"/>
+          </p:cNvGraphicFramePr>
+          <p:nvPr>
+            <p:extLst>
+              <p:ext uri="{D42A27DB-BD31-4B8C-83A1-F6EECF244321}">
+                <p14:modId xmlns:p14="http://schemas.microsoft.com/office/powerpoint/2010/main" val="3564013599"/>
+              </p:ext>
+            </p:extLst>
+          </p:nvPr>
+        </p:nvGraphicFramePr>
+        <p:xfrm>
+          <a:off x="4935513" y="2739310"/>
+          <a:ext cx="1820160" cy="1849120"/>
+        </p:xfrm>
+        <a:graphic>
+          <a:graphicData uri="http://schemas.openxmlformats.org/drawingml/2006/table">
+            <a:tbl>
+              <a:tblPr firstRow="1" bandRow="1">
+                <a:tableStyleId>{5C22544A-7EE6-4342-B048-85BDC9FD1C3A}</a:tableStyleId>
+              </a:tblPr>
+              <a:tblGrid>
+                <a:gridCol w="1820160">
+                  <a:extLst>
+                    <a:ext uri="{9D8B030D-6E8A-4147-A177-3AD203B41FA5}">
+                      <a16:colId xmlns:a16="http://schemas.microsoft.com/office/drawing/2014/main" val="2508677333"/>
+                    </a:ext>
+                  </a:extLst>
+                </a:gridCol>
+              </a:tblGrid>
+              <a:tr h="0">
+                <a:tc>
+                  <a:txBody>
+                    <a:bodyPr/>
+                    <a:lstStyle/>
+                    <a:p>
+                      <a:r>
+                        <a:rPr lang="nl-NL" noProof="0" dirty="0"/>
+                        <a:t>Transacties</a:t>
+                      </a:r>
+                    </a:p>
+                  </a:txBody>
+                  <a:tcPr/>
+                </a:tc>
+                <a:extLst>
+                  <a:ext uri="{0D108BD9-81ED-4DB2-BD59-A6C34878D82A}">
+                    <a16:rowId xmlns:a16="http://schemas.microsoft.com/office/drawing/2014/main" val="858791041"/>
+                  </a:ext>
+                </a:extLst>
+              </a:tr>
+              <a:tr h="370840">
+                <a:tc>
+                  <a:txBody>
+                    <a:bodyPr/>
+                    <a:lstStyle/>
+                    <a:p>
+                      <a:r>
+                        <a:rPr lang="nl-NL" b="1" noProof="0" dirty="0" err="1"/>
+                        <a:t>KlantID</a:t>
+                      </a:r>
+                      <a:endParaRPr lang="nl-NL" b="1" noProof="0" dirty="0"/>
+                    </a:p>
+                  </a:txBody>
+                  <a:tcPr/>
+                </a:tc>
+                <a:extLst>
+                  <a:ext uri="{0D108BD9-81ED-4DB2-BD59-A6C34878D82A}">
+                    <a16:rowId xmlns:a16="http://schemas.microsoft.com/office/drawing/2014/main" val="1538811982"/>
+                  </a:ext>
+                </a:extLst>
+              </a:tr>
+              <a:tr h="370840">
+                <a:tc>
+                  <a:txBody>
+                    <a:bodyPr/>
+                    <a:lstStyle/>
+                    <a:p>
+                      <a:r>
+                        <a:rPr lang="nl-NL" b="1" noProof="0" dirty="0" err="1"/>
+                        <a:t>ProductID</a:t>
+                      </a:r>
+                      <a:endParaRPr lang="nl-NL" b="1" noProof="0" dirty="0"/>
+                    </a:p>
+                  </a:txBody>
+                  <a:tcPr/>
+                </a:tc>
+                <a:extLst>
+                  <a:ext uri="{0D108BD9-81ED-4DB2-BD59-A6C34878D82A}">
+                    <a16:rowId xmlns:a16="http://schemas.microsoft.com/office/drawing/2014/main" val="3674785774"/>
+                  </a:ext>
+                </a:extLst>
+              </a:tr>
+              <a:tr h="370840">
+                <a:tc>
+                  <a:txBody>
+                    <a:bodyPr/>
+                    <a:lstStyle/>
+                    <a:p>
+                      <a:r>
+                        <a:rPr lang="nl-NL" noProof="0" dirty="0" err="1"/>
+                        <a:t>DatumTijd</a:t>
+                      </a:r>
+                      <a:endParaRPr lang="nl-NL" noProof="0" dirty="0"/>
+                    </a:p>
+                  </a:txBody>
+                  <a:tcPr/>
+                </a:tc>
+                <a:extLst>
+                  <a:ext uri="{0D108BD9-81ED-4DB2-BD59-A6C34878D82A}">
+                    <a16:rowId xmlns:a16="http://schemas.microsoft.com/office/drawing/2014/main" val="2335262126"/>
+                  </a:ext>
+                </a:extLst>
+              </a:tr>
+              <a:tr h="370840">
+                <a:tc>
+                  <a:txBody>
+                    <a:bodyPr/>
+                    <a:lstStyle/>
+                    <a:p>
+                      <a:r>
+                        <a:rPr lang="nl-NL" noProof="0" dirty="0"/>
+                        <a:t>…</a:t>
+                      </a:r>
+                    </a:p>
+                  </a:txBody>
+                  <a:tcPr/>
+                </a:tc>
+                <a:extLst>
+                  <a:ext uri="{0D108BD9-81ED-4DB2-BD59-A6C34878D82A}">
+                    <a16:rowId xmlns:a16="http://schemas.microsoft.com/office/drawing/2014/main" val="2163937255"/>
+                  </a:ext>
+                </a:extLst>
+              </a:tr>
+            </a:tbl>
+          </a:graphicData>
+        </a:graphic>
+      </p:graphicFrame>
+      <p:graphicFrame>
+        <p:nvGraphicFramePr>
+          <p:cNvPr id="6" name="Table 5">
+            <a:extLst>
+              <a:ext uri="{FF2B5EF4-FFF2-40B4-BE49-F238E27FC236}">
+                <a16:creationId xmlns:a16="http://schemas.microsoft.com/office/drawing/2014/main" id="{7770C52F-B3AC-5B9B-DB21-8A179A8AF5F5}"/>
+              </a:ext>
+            </a:extLst>
+          </p:cNvPr>
+          <p:cNvGraphicFramePr>
+            <a:graphicFrameLocks noGrp="1"/>
+          </p:cNvGraphicFramePr>
+          <p:nvPr/>
+        </p:nvGraphicFramePr>
+        <p:xfrm>
+          <a:off x="8222325" y="2739310"/>
+          <a:ext cx="1820160" cy="1849120"/>
+        </p:xfrm>
+        <a:graphic>
+          <a:graphicData uri="http://schemas.openxmlformats.org/drawingml/2006/table">
+            <a:tbl>
+              <a:tblPr firstRow="1" bandRow="1">
+                <a:tableStyleId>{5C22544A-7EE6-4342-B048-85BDC9FD1C3A}</a:tableStyleId>
+              </a:tblPr>
+              <a:tblGrid>
+                <a:gridCol w="1820160">
+                  <a:extLst>
+                    <a:ext uri="{9D8B030D-6E8A-4147-A177-3AD203B41FA5}">
+                      <a16:colId xmlns:a16="http://schemas.microsoft.com/office/drawing/2014/main" val="2508677333"/>
+                    </a:ext>
+                  </a:extLst>
+                </a:gridCol>
+              </a:tblGrid>
+              <a:tr h="0">
+                <a:tc>
+                  <a:txBody>
+                    <a:bodyPr/>
+                    <a:lstStyle/>
+                    <a:p>
+                      <a:r>
+                        <a:rPr lang="nl-NL" noProof="0" dirty="0"/>
+                        <a:t>Producten</a:t>
+                      </a:r>
+                    </a:p>
+                  </a:txBody>
+                  <a:tcPr/>
+                </a:tc>
+                <a:extLst>
+                  <a:ext uri="{0D108BD9-81ED-4DB2-BD59-A6C34878D82A}">
+                    <a16:rowId xmlns:a16="http://schemas.microsoft.com/office/drawing/2014/main" val="858791041"/>
+                  </a:ext>
+                </a:extLst>
+              </a:tr>
+              <a:tr h="370840">
+                <a:tc>
+                  <a:txBody>
+                    <a:bodyPr/>
+                    <a:lstStyle/>
+                    <a:p>
+                      <a:r>
+                        <a:rPr lang="nl-NL" b="1" noProof="0" dirty="0" err="1"/>
+                        <a:t>ProductID</a:t>
+                      </a:r>
+                      <a:endParaRPr lang="nl-NL" b="1" noProof="0" dirty="0"/>
+                    </a:p>
+                  </a:txBody>
+                  <a:tcPr/>
+                </a:tc>
+                <a:extLst>
+                  <a:ext uri="{0D108BD9-81ED-4DB2-BD59-A6C34878D82A}">
+                    <a16:rowId xmlns:a16="http://schemas.microsoft.com/office/drawing/2014/main" val="1538811982"/>
+                  </a:ext>
+                </a:extLst>
+              </a:tr>
+              <a:tr h="370840">
+                <a:tc>
+                  <a:txBody>
+                    <a:bodyPr/>
+                    <a:lstStyle/>
+                    <a:p>
+                      <a:r>
+                        <a:rPr lang="nl-NL" noProof="0" dirty="0"/>
+                        <a:t>Naam</a:t>
+                      </a:r>
+                    </a:p>
+                  </a:txBody>
+                  <a:tcPr/>
+                </a:tc>
+                <a:extLst>
+                  <a:ext uri="{0D108BD9-81ED-4DB2-BD59-A6C34878D82A}">
+                    <a16:rowId xmlns:a16="http://schemas.microsoft.com/office/drawing/2014/main" val="3674785774"/>
+                  </a:ext>
+                </a:extLst>
+              </a:tr>
+              <a:tr h="370840">
+                <a:tc>
+                  <a:txBody>
+                    <a:bodyPr/>
+                    <a:lstStyle/>
+                    <a:p>
+                      <a:r>
+                        <a:rPr lang="nl-NL" noProof="0" dirty="0"/>
+                        <a:t>Omschrijving</a:t>
+                      </a:r>
+                    </a:p>
+                  </a:txBody>
+                  <a:tcPr/>
+                </a:tc>
+                <a:extLst>
+                  <a:ext uri="{0D108BD9-81ED-4DB2-BD59-A6C34878D82A}">
+                    <a16:rowId xmlns:a16="http://schemas.microsoft.com/office/drawing/2014/main" val="2335262126"/>
+                  </a:ext>
+                </a:extLst>
+              </a:tr>
+              <a:tr h="370840">
+                <a:tc>
+                  <a:txBody>
+                    <a:bodyPr/>
+                    <a:lstStyle/>
+                    <a:p>
+                      <a:r>
+                        <a:rPr lang="nl-NL" noProof="0" dirty="0"/>
+                        <a:t>…</a:t>
+                      </a:r>
+                    </a:p>
+                  </a:txBody>
+                  <a:tcPr/>
+                </a:tc>
+                <a:extLst>
+                  <a:ext uri="{0D108BD9-81ED-4DB2-BD59-A6C34878D82A}">
+                    <a16:rowId xmlns:a16="http://schemas.microsoft.com/office/drawing/2014/main" val="2163937255"/>
+                  </a:ext>
+                </a:extLst>
+              </a:tr>
+            </a:tbl>
+          </a:graphicData>
+        </a:graphic>
+      </p:graphicFrame>
+      <p:cxnSp>
+        <p:nvCxnSpPr>
+          <p:cNvPr id="7" name="Straight Arrow Connector 6">
+            <a:extLst>
+              <a:ext uri="{FF2B5EF4-FFF2-40B4-BE49-F238E27FC236}">
+                <a16:creationId xmlns:a16="http://schemas.microsoft.com/office/drawing/2014/main" id="{CE917044-D04C-FD25-E334-CB3ED6E4ECA1}"/>
+              </a:ext>
+            </a:extLst>
+          </p:cNvPr>
+          <p:cNvCxnSpPr/>
+          <p:nvPr/>
+        </p:nvCxnSpPr>
+        <p:spPr>
+          <a:xfrm>
+            <a:off x="3468861" y="3286724"/>
+            <a:ext cx="1466652" cy="0"/>
+          </a:xfrm>
+          <a:prstGeom prst="straightConnector1">
+            <a:avLst/>
+          </a:prstGeom>
+          <a:ln>
+            <a:headEnd type="none"/>
+            <a:tailEnd type="none"/>
+          </a:ln>
+        </p:spPr>
+        <p:style>
+          <a:lnRef idx="3">
+            <a:schemeClr val="dk1"/>
+          </a:lnRef>
+          <a:fillRef idx="0">
+            <a:schemeClr val="dk1"/>
+          </a:fillRef>
+          <a:effectRef idx="2">
+            <a:schemeClr val="dk1"/>
+          </a:effectRef>
+          <a:fontRef idx="minor">
+            <a:schemeClr val="tx1"/>
+          </a:fontRef>
+        </p:style>
+      </p:cxnSp>
+      <p:cxnSp>
+        <p:nvCxnSpPr>
+          <p:cNvPr id="8" name="Connector: Elbow 7">
+            <a:extLst>
+              <a:ext uri="{FF2B5EF4-FFF2-40B4-BE49-F238E27FC236}">
+                <a16:creationId xmlns:a16="http://schemas.microsoft.com/office/drawing/2014/main" id="{9C94CDC4-19D1-F628-9E48-74A4F23687E3}"/>
+              </a:ext>
+            </a:extLst>
+          </p:cNvPr>
+          <p:cNvCxnSpPr/>
+          <p:nvPr/>
+        </p:nvCxnSpPr>
+        <p:spPr>
+          <a:xfrm flipV="1">
+            <a:off x="6755673" y="3286724"/>
+            <a:ext cx="1466652" cy="377146"/>
+          </a:xfrm>
+          <a:prstGeom prst="bentConnector3">
+            <a:avLst/>
+          </a:prstGeom>
+          <a:ln>
+            <a:headEnd type="none"/>
+            <a:tailEnd type="none"/>
+          </a:ln>
+        </p:spPr>
+        <p:style>
+          <a:lnRef idx="3">
+            <a:schemeClr val="dk1"/>
+          </a:lnRef>
+          <a:fillRef idx="0">
+            <a:schemeClr val="dk1"/>
+          </a:fillRef>
+          <a:effectRef idx="2">
+            <a:schemeClr val="dk1"/>
+          </a:effectRef>
+          <a:fontRef idx="minor">
+            <a:schemeClr val="tx1"/>
+          </a:fontRef>
+        </p:style>
+      </p:cxnSp>
+      <p:cxnSp>
+        <p:nvCxnSpPr>
+          <p:cNvPr id="9" name="Straight Connector 8">
+            <a:extLst>
+              <a:ext uri="{FF2B5EF4-FFF2-40B4-BE49-F238E27FC236}">
+                <a16:creationId xmlns:a16="http://schemas.microsoft.com/office/drawing/2014/main" id="{F31412D9-C418-9264-F5F8-0BB67AB81618}"/>
+              </a:ext>
+            </a:extLst>
+          </p:cNvPr>
+          <p:cNvCxnSpPr>
+            <a:cxnSpLocks/>
+          </p:cNvCxnSpPr>
+          <p:nvPr/>
+        </p:nvCxnSpPr>
+        <p:spPr>
+          <a:xfrm>
+            <a:off x="3562065" y="3179928"/>
+            <a:ext cx="0" cy="235424"/>
+          </a:xfrm>
+          <a:prstGeom prst="line">
+            <a:avLst/>
+          </a:prstGeom>
+        </p:spPr>
+        <p:style>
+          <a:lnRef idx="3">
+            <a:schemeClr val="dk1"/>
+          </a:lnRef>
+          <a:fillRef idx="0">
+            <a:schemeClr val="dk1"/>
+          </a:fillRef>
+          <a:effectRef idx="2">
+            <a:schemeClr val="dk1"/>
+          </a:effectRef>
+          <a:fontRef idx="minor">
+            <a:schemeClr val="tx1"/>
+          </a:fontRef>
+        </p:style>
+      </p:cxnSp>
+      <p:grpSp>
+        <p:nvGrpSpPr>
+          <p:cNvPr id="23" name="Group 22">
+            <a:extLst>
+              <a:ext uri="{FF2B5EF4-FFF2-40B4-BE49-F238E27FC236}">
+                <a16:creationId xmlns:a16="http://schemas.microsoft.com/office/drawing/2014/main" id="{E123ADF1-BFA0-6ED8-839B-DD5E444FDF92}"/>
+              </a:ext>
+            </a:extLst>
+          </p:cNvPr>
+          <p:cNvGrpSpPr/>
+          <p:nvPr/>
+        </p:nvGrpSpPr>
+        <p:grpSpPr>
+          <a:xfrm>
+            <a:off x="4517408" y="3179928"/>
+            <a:ext cx="420377" cy="218252"/>
+            <a:chOff x="4517408" y="3179928"/>
+            <a:chExt cx="420377" cy="218252"/>
+          </a:xfrm>
+        </p:grpSpPr>
+        <p:cxnSp>
+          <p:nvCxnSpPr>
+            <p:cNvPr id="12" name="Straight Connector 11">
+              <a:extLst>
+                <a:ext uri="{FF2B5EF4-FFF2-40B4-BE49-F238E27FC236}">
+                  <a16:creationId xmlns:a16="http://schemas.microsoft.com/office/drawing/2014/main" id="{6D47FCF8-8035-EB2C-2DA6-6C1FF4B99340}"/>
+                </a:ext>
+              </a:extLst>
+            </p:cNvPr>
+            <p:cNvCxnSpPr/>
+            <p:nvPr/>
+          </p:nvCxnSpPr>
+          <p:spPr>
+            <a:xfrm flipV="1">
+              <a:off x="4653887" y="3179928"/>
+              <a:ext cx="281626" cy="106796"/>
+            </a:xfrm>
+            <a:prstGeom prst="line">
+              <a:avLst/>
+            </a:prstGeom>
+          </p:spPr>
+          <p:style>
+            <a:lnRef idx="3">
+              <a:schemeClr val="dk1"/>
+            </a:lnRef>
+            <a:fillRef idx="0">
+              <a:schemeClr val="dk1"/>
+            </a:fillRef>
+            <a:effectRef idx="2">
+              <a:schemeClr val="dk1"/>
+            </a:effectRef>
+            <a:fontRef idx="minor">
+              <a:schemeClr val="tx1"/>
+            </a:fontRef>
+          </p:style>
+        </p:cxnSp>
+        <p:cxnSp>
+          <p:nvCxnSpPr>
+            <p:cNvPr id="13" name="Straight Connector 12">
+              <a:extLst>
+                <a:ext uri="{FF2B5EF4-FFF2-40B4-BE49-F238E27FC236}">
+                  <a16:creationId xmlns:a16="http://schemas.microsoft.com/office/drawing/2014/main" id="{3B050758-D83A-3A72-B42A-D562E3EE8B12}"/>
+                </a:ext>
+              </a:extLst>
+            </p:cNvPr>
+            <p:cNvCxnSpPr>
+              <a:cxnSpLocks/>
+            </p:cNvCxnSpPr>
+            <p:nvPr/>
+          </p:nvCxnSpPr>
+          <p:spPr>
+            <a:xfrm>
+              <a:off x="4656159" y="3291384"/>
+              <a:ext cx="281626" cy="106796"/>
+            </a:xfrm>
+            <a:prstGeom prst="line">
+              <a:avLst/>
+            </a:prstGeom>
+          </p:spPr>
+          <p:style>
+            <a:lnRef idx="3">
+              <a:schemeClr val="dk1"/>
+            </a:lnRef>
+            <a:fillRef idx="0">
+              <a:schemeClr val="dk1"/>
+            </a:fillRef>
+            <a:effectRef idx="2">
+              <a:schemeClr val="dk1"/>
+            </a:effectRef>
+            <a:fontRef idx="minor">
+              <a:schemeClr val="tx1"/>
+            </a:fontRef>
+          </p:style>
+        </p:cxnSp>
+        <p:sp>
+          <p:nvSpPr>
+            <p:cNvPr id="14" name="Oval 13">
+              <a:extLst>
+                <a:ext uri="{FF2B5EF4-FFF2-40B4-BE49-F238E27FC236}">
+                  <a16:creationId xmlns:a16="http://schemas.microsoft.com/office/drawing/2014/main" id="{9EE86F8E-A119-6347-CDB8-0B31BE75579E}"/>
+                </a:ext>
+              </a:extLst>
+            </p:cNvPr>
+            <p:cNvSpPr/>
+            <p:nvPr/>
+          </p:nvSpPr>
+          <p:spPr>
+            <a:xfrm>
+              <a:off x="4517408" y="3215073"/>
+              <a:ext cx="156950" cy="156950"/>
+            </a:xfrm>
+            <a:prstGeom prst="ellipse">
+              <a:avLst/>
+            </a:prstGeom>
+            <a:solidFill>
+              <a:schemeClr val="bg1"/>
+            </a:solidFill>
+            <a:ln>
+              <a:solidFill>
+                <a:schemeClr val="tx1"/>
+              </a:solidFill>
+            </a:ln>
+          </p:spPr>
+          <p:style>
+            <a:lnRef idx="2">
+              <a:schemeClr val="accent1">
+                <a:shade val="15000"/>
+              </a:schemeClr>
+            </a:lnRef>
+            <a:fillRef idx="1">
+              <a:schemeClr val="accent1"/>
+            </a:fillRef>
+            <a:effectRef idx="0">
+              <a:schemeClr val="accent1"/>
+            </a:effectRef>
+            <a:fontRef idx="minor">
+              <a:schemeClr val="lt1"/>
+            </a:fontRef>
+          </p:style>
+          <p:txBody>
+            <a:bodyPr rtlCol="0" anchor="ctr"/>
+            <a:lstStyle/>
+            <a:p>
+              <a:pPr algn="ctr"/>
+              <a:endParaRPr lang="en-US"/>
+            </a:p>
+          </p:txBody>
+        </p:sp>
+      </p:grpSp>
+      <p:grpSp>
+        <p:nvGrpSpPr>
+          <p:cNvPr id="19" name="Group 18">
+            <a:extLst>
+              <a:ext uri="{FF2B5EF4-FFF2-40B4-BE49-F238E27FC236}">
+                <a16:creationId xmlns:a16="http://schemas.microsoft.com/office/drawing/2014/main" id="{C7D83E8C-FA22-834C-14FB-D8B162A9CF4F}"/>
+              </a:ext>
+            </a:extLst>
+          </p:cNvPr>
+          <p:cNvGrpSpPr/>
+          <p:nvPr/>
+        </p:nvGrpSpPr>
+        <p:grpSpPr>
+          <a:xfrm>
+            <a:off x="6748849" y="3557519"/>
+            <a:ext cx="290297" cy="222798"/>
+            <a:chOff x="6748849" y="3557519"/>
+            <a:chExt cx="290297" cy="222798"/>
+          </a:xfrm>
+        </p:grpSpPr>
+        <p:cxnSp>
+          <p:nvCxnSpPr>
+            <p:cNvPr id="15" name="Straight Connector 14">
+              <a:extLst>
+                <a:ext uri="{FF2B5EF4-FFF2-40B4-BE49-F238E27FC236}">
+                  <a16:creationId xmlns:a16="http://schemas.microsoft.com/office/drawing/2014/main" id="{89B7704F-9796-3504-9DB3-E9D2E5600DBA}"/>
+                </a:ext>
+              </a:extLst>
+            </p:cNvPr>
+            <p:cNvCxnSpPr/>
+            <p:nvPr/>
+          </p:nvCxnSpPr>
+          <p:spPr>
+            <a:xfrm flipV="1">
+              <a:off x="6748849" y="3673521"/>
+              <a:ext cx="281626" cy="106796"/>
+            </a:xfrm>
+            <a:prstGeom prst="line">
+              <a:avLst/>
+            </a:prstGeom>
+          </p:spPr>
+          <p:style>
+            <a:lnRef idx="3">
+              <a:schemeClr val="dk1"/>
+            </a:lnRef>
+            <a:fillRef idx="0">
+              <a:schemeClr val="dk1"/>
+            </a:fillRef>
+            <a:effectRef idx="2">
+              <a:schemeClr val="dk1"/>
+            </a:effectRef>
+            <a:fontRef idx="minor">
+              <a:schemeClr val="tx1"/>
+            </a:fontRef>
+          </p:style>
+        </p:cxnSp>
+        <p:cxnSp>
+          <p:nvCxnSpPr>
+            <p:cNvPr id="18" name="Straight Connector 17">
+              <a:extLst>
+                <a:ext uri="{FF2B5EF4-FFF2-40B4-BE49-F238E27FC236}">
+                  <a16:creationId xmlns:a16="http://schemas.microsoft.com/office/drawing/2014/main" id="{A2B0BE99-6465-4333-BBAE-D85EA3AFC4CD}"/>
+                </a:ext>
+              </a:extLst>
+            </p:cNvPr>
+            <p:cNvCxnSpPr>
+              <a:cxnSpLocks/>
+            </p:cNvCxnSpPr>
+            <p:nvPr/>
+          </p:nvCxnSpPr>
+          <p:spPr>
+            <a:xfrm flipH="1" flipV="1">
+              <a:off x="6757520" y="3557519"/>
+              <a:ext cx="281626" cy="106796"/>
+            </a:xfrm>
+            <a:prstGeom prst="line">
+              <a:avLst/>
+            </a:prstGeom>
+          </p:spPr>
+          <p:style>
+            <a:lnRef idx="3">
+              <a:schemeClr val="dk1"/>
+            </a:lnRef>
+            <a:fillRef idx="0">
+              <a:schemeClr val="dk1"/>
+            </a:fillRef>
+            <a:effectRef idx="2">
+              <a:schemeClr val="dk1"/>
+            </a:effectRef>
+            <a:fontRef idx="minor">
+              <a:schemeClr val="tx1"/>
+            </a:fontRef>
+          </p:style>
+        </p:cxnSp>
+      </p:grpSp>
+      <p:grpSp>
+        <p:nvGrpSpPr>
+          <p:cNvPr id="20" name="Group 19">
+            <a:extLst>
+              <a:ext uri="{FF2B5EF4-FFF2-40B4-BE49-F238E27FC236}">
+                <a16:creationId xmlns:a16="http://schemas.microsoft.com/office/drawing/2014/main" id="{AF88DD12-4A25-9D0C-49F6-CFCD05184F97}"/>
+              </a:ext>
+            </a:extLst>
+          </p:cNvPr>
+          <p:cNvGrpSpPr/>
+          <p:nvPr/>
+        </p:nvGrpSpPr>
+        <p:grpSpPr>
+          <a:xfrm flipH="1">
+            <a:off x="7943829" y="3179928"/>
+            <a:ext cx="283473" cy="215974"/>
+            <a:chOff x="6755673" y="3557519"/>
+            <a:chExt cx="283473" cy="215974"/>
+          </a:xfrm>
+        </p:grpSpPr>
+        <p:cxnSp>
+          <p:nvCxnSpPr>
+            <p:cNvPr id="21" name="Straight Connector 20">
+              <a:extLst>
+                <a:ext uri="{FF2B5EF4-FFF2-40B4-BE49-F238E27FC236}">
+                  <a16:creationId xmlns:a16="http://schemas.microsoft.com/office/drawing/2014/main" id="{415CF515-ECE5-52B7-46C2-0523919B554F}"/>
+                </a:ext>
+              </a:extLst>
+            </p:cNvPr>
+            <p:cNvCxnSpPr/>
+            <p:nvPr/>
+          </p:nvCxnSpPr>
+          <p:spPr>
+            <a:xfrm flipV="1">
+              <a:off x="6755673" y="3666697"/>
+              <a:ext cx="281626" cy="106796"/>
+            </a:xfrm>
+            <a:prstGeom prst="line">
+              <a:avLst/>
+            </a:prstGeom>
+          </p:spPr>
+          <p:style>
+            <a:lnRef idx="3">
+              <a:schemeClr val="dk1"/>
+            </a:lnRef>
+            <a:fillRef idx="0">
+              <a:schemeClr val="dk1"/>
+            </a:fillRef>
+            <a:effectRef idx="2">
+              <a:schemeClr val="dk1"/>
+            </a:effectRef>
+            <a:fontRef idx="minor">
+              <a:schemeClr val="tx1"/>
+            </a:fontRef>
+          </p:style>
+        </p:cxnSp>
+        <p:cxnSp>
+          <p:nvCxnSpPr>
+            <p:cNvPr id="22" name="Straight Connector 21">
+              <a:extLst>
+                <a:ext uri="{FF2B5EF4-FFF2-40B4-BE49-F238E27FC236}">
+                  <a16:creationId xmlns:a16="http://schemas.microsoft.com/office/drawing/2014/main" id="{C294D05F-42D8-9C8B-C00D-98A67C41CDBD}"/>
+                </a:ext>
+              </a:extLst>
+            </p:cNvPr>
+            <p:cNvCxnSpPr>
+              <a:cxnSpLocks/>
+            </p:cNvCxnSpPr>
+            <p:nvPr/>
+          </p:nvCxnSpPr>
+          <p:spPr>
+            <a:xfrm flipH="1" flipV="1">
+              <a:off x="6757520" y="3557519"/>
+              <a:ext cx="281626" cy="106796"/>
+            </a:xfrm>
+            <a:prstGeom prst="line">
+              <a:avLst/>
+            </a:prstGeom>
+          </p:spPr>
+          <p:style>
+            <a:lnRef idx="3">
+              <a:schemeClr val="dk1"/>
+            </a:lnRef>
+            <a:fillRef idx="0">
+              <a:schemeClr val="dk1"/>
+            </a:fillRef>
+            <a:effectRef idx="2">
+              <a:schemeClr val="dk1"/>
+            </a:effectRef>
+            <a:fontRef idx="minor">
+              <a:schemeClr val="tx1"/>
+            </a:fontRef>
+          </p:style>
+        </p:cxnSp>
+      </p:grpSp>
+      <p:sp>
+        <p:nvSpPr>
+          <p:cNvPr id="24" name="Oval 23">
+            <a:extLst>
+              <a:ext uri="{FF2B5EF4-FFF2-40B4-BE49-F238E27FC236}">
+                <a16:creationId xmlns:a16="http://schemas.microsoft.com/office/drawing/2014/main" id="{ECBF176C-E856-2F5A-1286-B2DB9D7813A2}"/>
+              </a:ext>
+            </a:extLst>
+          </p:cNvPr>
+          <p:cNvSpPr/>
+          <p:nvPr/>
+        </p:nvSpPr>
+        <p:spPr>
+          <a:xfrm>
+            <a:off x="7037299" y="3585618"/>
+            <a:ext cx="156950" cy="156950"/>
+          </a:xfrm>
+          <a:prstGeom prst="ellipse">
+            <a:avLst/>
+          </a:prstGeom>
+          <a:solidFill>
+            <a:schemeClr val="bg1"/>
+          </a:solidFill>
+          <a:ln>
+            <a:solidFill>
+              <a:schemeClr val="tx1"/>
+            </a:solidFill>
+          </a:ln>
+        </p:spPr>
+        <p:style>
+          <a:lnRef idx="2">
+            <a:schemeClr val="accent1">
+              <a:shade val="15000"/>
+            </a:schemeClr>
+          </a:lnRef>
+          <a:fillRef idx="1">
+            <a:schemeClr val="accent1"/>
+          </a:fillRef>
+          <a:effectRef idx="0">
+            <a:schemeClr val="accent1"/>
+          </a:effectRef>
+          <a:fontRef idx="minor">
+            <a:schemeClr val="lt1"/>
+          </a:fontRef>
+        </p:style>
+        <p:txBody>
+          <a:bodyPr rtlCol="0" anchor="ctr"/>
+          <a:lstStyle/>
+          <a:p>
+            <a:pPr algn="ctr"/>
+            <a:endParaRPr lang="en-US"/>
+          </a:p>
+        </p:txBody>
+      </p:sp>
+      <p:cxnSp>
+        <p:nvCxnSpPr>
+          <p:cNvPr id="27" name="Straight Connector 26">
+            <a:extLst>
+              <a:ext uri="{FF2B5EF4-FFF2-40B4-BE49-F238E27FC236}">
+                <a16:creationId xmlns:a16="http://schemas.microsoft.com/office/drawing/2014/main" id="{DA179944-92BB-5F01-A959-455F43B48E6F}"/>
+              </a:ext>
+            </a:extLst>
+          </p:cNvPr>
+          <p:cNvCxnSpPr>
+            <a:cxnSpLocks/>
+          </p:cNvCxnSpPr>
+          <p:nvPr/>
+        </p:nvCxnSpPr>
+        <p:spPr>
+          <a:xfrm>
+            <a:off x="7932455" y="3179928"/>
+            <a:ext cx="0" cy="235424"/>
+          </a:xfrm>
+          <a:prstGeom prst="line">
+            <a:avLst/>
+          </a:prstGeom>
+        </p:spPr>
+        <p:style>
+          <a:lnRef idx="3">
+            <a:schemeClr val="dk1"/>
+          </a:lnRef>
+          <a:fillRef idx="0">
+            <a:schemeClr val="dk1"/>
+          </a:fillRef>
+          <a:effectRef idx="2">
+            <a:schemeClr val="dk1"/>
+          </a:effectRef>
+          <a:fontRef idx="minor">
+            <a:schemeClr val="tx1"/>
+          </a:fontRef>
+        </p:style>
+      </p:cxnSp>
+    </p:spTree>
+    <p:extLst>
+      <p:ext uri="{BB962C8B-B14F-4D97-AF65-F5344CB8AC3E}">
+        <p14:creationId xmlns:p14="http://schemas.microsoft.com/office/powerpoint/2010/main" val="3915194734"/>
+      </p:ext>
+    </p:extLst>
+  </p:cSld>
+  <p:clrMapOvr>
+    <a:masterClrMapping/>
+  </p:clrMapOvr>
+</p:sld>
+</file>
+
+<file path=ppt/slides/slide27.xml><?xml version="1.0" encoding="utf-8"?>
+<p:sld xmlns:a="http://schemas.openxmlformats.org/drawingml/2006/main" xmlns:r="http://schemas.openxmlformats.org/officeDocument/2006/relationships" xmlns:p="http://schemas.openxmlformats.org/presentationml/2006/main">
+  <p:cSld>
+    <p:spTree>
+      <p:nvGrpSpPr>
+        <p:cNvPr id="1" name="">
+          <a:extLst>
+            <a:ext uri="{FF2B5EF4-FFF2-40B4-BE49-F238E27FC236}">
+              <a16:creationId xmlns:a16="http://schemas.microsoft.com/office/drawing/2014/main" id="{4DDCF56A-3FA2-AC13-A186-38187B09A72B}"/>
+            </a:ext>
+          </a:extLst>
+        </p:cNvPr>
+        <p:cNvGrpSpPr/>
+        <p:nvPr/>
+      </p:nvGrpSpPr>
+      <p:grpSpPr>
+        <a:xfrm>
+          <a:off x="0" y="0"/>
+          <a:ext cx="0" cy="0"/>
+          <a:chOff x="0" y="0"/>
+          <a:chExt cx="0" cy="0"/>
+        </a:xfrm>
+      </p:grpSpPr>
+      <p:sp>
+        <p:nvSpPr>
+          <p:cNvPr id="2" name="Title 1">
+            <a:extLst>
+              <a:ext uri="{FF2B5EF4-FFF2-40B4-BE49-F238E27FC236}">
+                <a16:creationId xmlns:a16="http://schemas.microsoft.com/office/drawing/2014/main" id="{31AF6E31-125E-0D37-91E4-D6CA36646460}"/>
+              </a:ext>
+            </a:extLst>
+          </p:cNvPr>
+          <p:cNvSpPr>
+            <a:spLocks noGrp="1"/>
+          </p:cNvSpPr>
+          <p:nvPr>
+            <p:ph type="title"/>
+          </p:nvPr>
+        </p:nvSpPr>
+        <p:spPr/>
+        <p:txBody>
+          <a:bodyPr>
+            <a:normAutofit/>
+          </a:bodyPr>
+          <a:lstStyle/>
+          <a:p>
+            <a:r>
+              <a:rPr lang="nl-NL" sz="3600" noProof="0" dirty="0" err="1"/>
+              <a:t>Entity</a:t>
+            </a:r>
+            <a:r>
+              <a:rPr lang="nl-NL" sz="3600" noProof="0" dirty="0"/>
+              <a:t> </a:t>
+            </a:r>
+            <a:r>
+              <a:rPr lang="nl-NL" sz="3600" noProof="0" dirty="0" err="1"/>
+              <a:t>Relationship</a:t>
+            </a:r>
+            <a:r>
+              <a:rPr lang="nl-NL" sz="3600" noProof="0" dirty="0"/>
+              <a:t> Diagram</a:t>
+            </a:r>
+          </a:p>
+        </p:txBody>
+      </p:sp>
+      <p:graphicFrame>
+        <p:nvGraphicFramePr>
+          <p:cNvPr id="4" name="Table 5">
+            <a:extLst>
+              <a:ext uri="{FF2B5EF4-FFF2-40B4-BE49-F238E27FC236}">
+                <a16:creationId xmlns:a16="http://schemas.microsoft.com/office/drawing/2014/main" id="{AA8FEB27-9C7F-59D3-DA02-8E327FDFF56A}"/>
+              </a:ext>
+            </a:extLst>
+          </p:cNvPr>
+          <p:cNvGraphicFramePr>
+            <a:graphicFrameLocks noGrp="1"/>
+          </p:cNvGraphicFramePr>
+          <p:nvPr>
+            <p:extLst>
+              <p:ext uri="{D42A27DB-BD31-4B8C-83A1-F6EECF244321}">
+                <p14:modId xmlns:p14="http://schemas.microsoft.com/office/powerpoint/2010/main" val="638623466"/>
+              </p:ext>
+            </p:extLst>
+          </p:nvPr>
+        </p:nvGraphicFramePr>
+        <p:xfrm>
+          <a:off x="838200" y="2742244"/>
+          <a:ext cx="1820160" cy="1849120"/>
+        </p:xfrm>
+        <a:graphic>
+          <a:graphicData uri="http://schemas.openxmlformats.org/drawingml/2006/table">
+            <a:tbl>
+              <a:tblPr firstRow="1" bandRow="1">
+                <a:tableStyleId>{5C22544A-7EE6-4342-B048-85BDC9FD1C3A}</a:tableStyleId>
+              </a:tblPr>
+              <a:tblGrid>
+                <a:gridCol w="1820160">
+                  <a:extLst>
+                    <a:ext uri="{9D8B030D-6E8A-4147-A177-3AD203B41FA5}">
+                      <a16:colId xmlns:a16="http://schemas.microsoft.com/office/drawing/2014/main" val="2508677333"/>
+                    </a:ext>
+                  </a:extLst>
+                </a:gridCol>
+              </a:tblGrid>
+              <a:tr h="0">
+                <a:tc>
+                  <a:txBody>
+                    <a:bodyPr/>
+                    <a:lstStyle/>
+                    <a:p>
+                      <a:r>
+                        <a:rPr lang="nl-NL" noProof="0" dirty="0"/>
+                        <a:t>Klanten</a:t>
+                      </a:r>
+                    </a:p>
+                  </a:txBody>
+                  <a:tcPr/>
+                </a:tc>
+                <a:extLst>
+                  <a:ext uri="{0D108BD9-81ED-4DB2-BD59-A6C34878D82A}">
+                    <a16:rowId xmlns:a16="http://schemas.microsoft.com/office/drawing/2014/main" val="858791041"/>
+                  </a:ext>
+                </a:extLst>
+              </a:tr>
+              <a:tr h="370840">
+                <a:tc>
+                  <a:txBody>
+                    <a:bodyPr/>
+                    <a:lstStyle/>
+                    <a:p>
+                      <a:r>
+                        <a:rPr lang="nl-NL" b="1" noProof="0" dirty="0" err="1"/>
+                        <a:t>KlantID</a:t>
+                      </a:r>
+                      <a:endParaRPr lang="nl-NL" b="1" noProof="0" dirty="0"/>
+                    </a:p>
+                  </a:txBody>
+                  <a:tcPr/>
+                </a:tc>
+                <a:extLst>
+                  <a:ext uri="{0D108BD9-81ED-4DB2-BD59-A6C34878D82A}">
+                    <a16:rowId xmlns:a16="http://schemas.microsoft.com/office/drawing/2014/main" val="1538811982"/>
+                  </a:ext>
+                </a:extLst>
+              </a:tr>
+              <a:tr h="370840">
+                <a:tc>
+                  <a:txBody>
+                    <a:bodyPr/>
+                    <a:lstStyle/>
+                    <a:p>
+                      <a:r>
+                        <a:rPr lang="nl-NL" noProof="0" dirty="0"/>
+                        <a:t>Voornaam</a:t>
+                      </a:r>
+                    </a:p>
+                  </a:txBody>
+                  <a:tcPr/>
+                </a:tc>
+                <a:extLst>
+                  <a:ext uri="{0D108BD9-81ED-4DB2-BD59-A6C34878D82A}">
+                    <a16:rowId xmlns:a16="http://schemas.microsoft.com/office/drawing/2014/main" val="3674785774"/>
+                  </a:ext>
+                </a:extLst>
+              </a:tr>
+              <a:tr h="370840">
+                <a:tc>
+                  <a:txBody>
+                    <a:bodyPr/>
+                    <a:lstStyle/>
+                    <a:p>
+                      <a:r>
+                        <a:rPr lang="nl-NL" noProof="0" dirty="0"/>
+                        <a:t>Achternaam</a:t>
+                      </a:r>
+                    </a:p>
+                  </a:txBody>
+                  <a:tcPr/>
+                </a:tc>
+                <a:extLst>
+                  <a:ext uri="{0D108BD9-81ED-4DB2-BD59-A6C34878D82A}">
+                    <a16:rowId xmlns:a16="http://schemas.microsoft.com/office/drawing/2014/main" val="2335262126"/>
+                  </a:ext>
+                </a:extLst>
+              </a:tr>
+              <a:tr h="370840">
+                <a:tc>
+                  <a:txBody>
+                    <a:bodyPr/>
+                    <a:lstStyle/>
+                    <a:p>
+                      <a:r>
+                        <a:rPr lang="nl-NL" noProof="0" dirty="0"/>
+                        <a:t>…</a:t>
+                      </a:r>
+                    </a:p>
+                  </a:txBody>
+                  <a:tcPr/>
+                </a:tc>
+                <a:extLst>
+                  <a:ext uri="{0D108BD9-81ED-4DB2-BD59-A6C34878D82A}">
+                    <a16:rowId xmlns:a16="http://schemas.microsoft.com/office/drawing/2014/main" val="2163937255"/>
+                  </a:ext>
+                </a:extLst>
+              </a:tr>
+            </a:tbl>
+          </a:graphicData>
+        </a:graphic>
+      </p:graphicFrame>
+      <p:graphicFrame>
+        <p:nvGraphicFramePr>
+          <p:cNvPr id="5" name="Table 5">
+            <a:extLst>
+              <a:ext uri="{FF2B5EF4-FFF2-40B4-BE49-F238E27FC236}">
+                <a16:creationId xmlns:a16="http://schemas.microsoft.com/office/drawing/2014/main" id="{51A20DB0-CC71-AEF8-51FD-3A9809165636}"/>
+              </a:ext>
+            </a:extLst>
+          </p:cNvPr>
+          <p:cNvGraphicFramePr>
+            <a:graphicFrameLocks noGrp="1"/>
+          </p:cNvGraphicFramePr>
+          <p:nvPr>
+            <p:extLst>
+              <p:ext uri="{D42A27DB-BD31-4B8C-83A1-F6EECF244321}">
+                <p14:modId xmlns:p14="http://schemas.microsoft.com/office/powerpoint/2010/main" val="3259959082"/>
+              </p:ext>
+            </p:extLst>
+          </p:nvPr>
+        </p:nvGraphicFramePr>
+        <p:xfrm>
+          <a:off x="3736680" y="2739310"/>
+          <a:ext cx="1820160" cy="1849120"/>
+        </p:xfrm>
+        <a:graphic>
+          <a:graphicData uri="http://schemas.openxmlformats.org/drawingml/2006/table">
+            <a:tbl>
+              <a:tblPr firstRow="1" bandRow="1">
+                <a:tableStyleId>{5C22544A-7EE6-4342-B048-85BDC9FD1C3A}</a:tableStyleId>
+              </a:tblPr>
+              <a:tblGrid>
+                <a:gridCol w="1820160">
+                  <a:extLst>
+                    <a:ext uri="{9D8B030D-6E8A-4147-A177-3AD203B41FA5}">
+                      <a16:colId xmlns:a16="http://schemas.microsoft.com/office/drawing/2014/main" val="2508677333"/>
+                    </a:ext>
+                  </a:extLst>
+                </a:gridCol>
+              </a:tblGrid>
+              <a:tr h="0">
+                <a:tc>
+                  <a:txBody>
+                    <a:bodyPr/>
+                    <a:lstStyle/>
+                    <a:p>
+                      <a:r>
+                        <a:rPr lang="nl-NL" noProof="0" dirty="0"/>
+                        <a:t>Transacties</a:t>
+                      </a:r>
+                    </a:p>
+                  </a:txBody>
+                  <a:tcPr/>
+                </a:tc>
+                <a:extLst>
+                  <a:ext uri="{0D108BD9-81ED-4DB2-BD59-A6C34878D82A}">
+                    <a16:rowId xmlns:a16="http://schemas.microsoft.com/office/drawing/2014/main" val="858791041"/>
+                  </a:ext>
+                </a:extLst>
+              </a:tr>
+              <a:tr h="370840">
+                <a:tc>
+                  <a:txBody>
+                    <a:bodyPr/>
+                    <a:lstStyle/>
+                    <a:p>
+                      <a:r>
+                        <a:rPr lang="nl-NL" b="1" noProof="0" dirty="0" err="1"/>
+                        <a:t>TransactieID</a:t>
+                      </a:r>
+                      <a:endParaRPr lang="nl-NL" b="1" noProof="0" dirty="0"/>
+                    </a:p>
+                  </a:txBody>
+                  <a:tcPr/>
+                </a:tc>
+                <a:extLst>
+                  <a:ext uri="{0D108BD9-81ED-4DB2-BD59-A6C34878D82A}">
+                    <a16:rowId xmlns:a16="http://schemas.microsoft.com/office/drawing/2014/main" val="1538811982"/>
+                  </a:ext>
+                </a:extLst>
+              </a:tr>
+              <a:tr h="370840">
+                <a:tc>
+                  <a:txBody>
+                    <a:bodyPr/>
+                    <a:lstStyle/>
+                    <a:p>
+                      <a:r>
+                        <a:rPr lang="nl-NL" b="1" noProof="0" dirty="0" err="1"/>
+                        <a:t>KlantID</a:t>
+                      </a:r>
+                      <a:endParaRPr lang="nl-NL" b="1" noProof="0" dirty="0"/>
+                    </a:p>
+                  </a:txBody>
+                  <a:tcPr/>
+                </a:tc>
+                <a:extLst>
+                  <a:ext uri="{0D108BD9-81ED-4DB2-BD59-A6C34878D82A}">
+                    <a16:rowId xmlns:a16="http://schemas.microsoft.com/office/drawing/2014/main" val="3674785774"/>
+                  </a:ext>
+                </a:extLst>
+              </a:tr>
+              <a:tr h="370840">
+                <a:tc>
+                  <a:txBody>
+                    <a:bodyPr/>
+                    <a:lstStyle/>
+                    <a:p>
+                      <a:r>
+                        <a:rPr lang="nl-NL" noProof="0" dirty="0" err="1"/>
+                        <a:t>DatumTijd</a:t>
+                      </a:r>
+                      <a:endParaRPr lang="nl-NL" noProof="0" dirty="0"/>
+                    </a:p>
+                  </a:txBody>
+                  <a:tcPr/>
+                </a:tc>
+                <a:extLst>
+                  <a:ext uri="{0D108BD9-81ED-4DB2-BD59-A6C34878D82A}">
+                    <a16:rowId xmlns:a16="http://schemas.microsoft.com/office/drawing/2014/main" val="2335262126"/>
+                  </a:ext>
+                </a:extLst>
+              </a:tr>
+              <a:tr h="370840">
+                <a:tc>
+                  <a:txBody>
+                    <a:bodyPr/>
+                    <a:lstStyle/>
+                    <a:p>
+                      <a:r>
+                        <a:rPr lang="nl-NL" noProof="0" dirty="0"/>
+                        <a:t>…</a:t>
+                      </a:r>
+                    </a:p>
+                  </a:txBody>
+                  <a:tcPr/>
+                </a:tc>
+                <a:extLst>
+                  <a:ext uri="{0D108BD9-81ED-4DB2-BD59-A6C34878D82A}">
+                    <a16:rowId xmlns:a16="http://schemas.microsoft.com/office/drawing/2014/main" val="2163937255"/>
+                  </a:ext>
+                </a:extLst>
+              </a:tr>
+            </a:tbl>
+          </a:graphicData>
+        </a:graphic>
+      </p:graphicFrame>
+      <p:graphicFrame>
+        <p:nvGraphicFramePr>
+          <p:cNvPr id="6" name="Table 5">
+            <a:extLst>
+              <a:ext uri="{FF2B5EF4-FFF2-40B4-BE49-F238E27FC236}">
+                <a16:creationId xmlns:a16="http://schemas.microsoft.com/office/drawing/2014/main" id="{4EE3EF51-C571-2FC7-6AAB-F72BD92E2883}"/>
+              </a:ext>
+            </a:extLst>
+          </p:cNvPr>
+          <p:cNvGraphicFramePr>
+            <a:graphicFrameLocks noGrp="1"/>
+          </p:cNvGraphicFramePr>
+          <p:nvPr>
+            <p:extLst>
+              <p:ext uri="{D42A27DB-BD31-4B8C-83A1-F6EECF244321}">
+                <p14:modId xmlns:p14="http://schemas.microsoft.com/office/powerpoint/2010/main" val="63233839"/>
+              </p:ext>
+            </p:extLst>
+          </p:nvPr>
+        </p:nvGraphicFramePr>
+        <p:xfrm>
+          <a:off x="9533640" y="2739310"/>
+          <a:ext cx="1820160" cy="1849120"/>
+        </p:xfrm>
+        <a:graphic>
+          <a:graphicData uri="http://schemas.openxmlformats.org/drawingml/2006/table">
+            <a:tbl>
+              <a:tblPr firstRow="1" bandRow="1">
+                <a:tableStyleId>{5C22544A-7EE6-4342-B048-85BDC9FD1C3A}</a:tableStyleId>
+              </a:tblPr>
+              <a:tblGrid>
+                <a:gridCol w="1820160">
+                  <a:extLst>
+                    <a:ext uri="{9D8B030D-6E8A-4147-A177-3AD203B41FA5}">
+                      <a16:colId xmlns:a16="http://schemas.microsoft.com/office/drawing/2014/main" val="2508677333"/>
+                    </a:ext>
+                  </a:extLst>
+                </a:gridCol>
+              </a:tblGrid>
+              <a:tr h="0">
+                <a:tc>
+                  <a:txBody>
+                    <a:bodyPr/>
+                    <a:lstStyle/>
+                    <a:p>
+                      <a:r>
+                        <a:rPr lang="nl-NL" noProof="0" dirty="0"/>
+                        <a:t>Producten</a:t>
+                      </a:r>
+                    </a:p>
+                  </a:txBody>
+                  <a:tcPr/>
+                </a:tc>
+                <a:extLst>
+                  <a:ext uri="{0D108BD9-81ED-4DB2-BD59-A6C34878D82A}">
+                    <a16:rowId xmlns:a16="http://schemas.microsoft.com/office/drawing/2014/main" val="858791041"/>
+                  </a:ext>
+                </a:extLst>
+              </a:tr>
+              <a:tr h="370840">
+                <a:tc>
+                  <a:txBody>
+                    <a:bodyPr/>
+                    <a:lstStyle/>
+                    <a:p>
+                      <a:r>
+                        <a:rPr lang="nl-NL" b="1" noProof="0" dirty="0" err="1"/>
+                        <a:t>ProductID</a:t>
+                      </a:r>
+                      <a:endParaRPr lang="nl-NL" b="1" noProof="0" dirty="0"/>
+                    </a:p>
+                  </a:txBody>
+                  <a:tcPr/>
+                </a:tc>
+                <a:extLst>
+                  <a:ext uri="{0D108BD9-81ED-4DB2-BD59-A6C34878D82A}">
+                    <a16:rowId xmlns:a16="http://schemas.microsoft.com/office/drawing/2014/main" val="1538811982"/>
+                  </a:ext>
+                </a:extLst>
+              </a:tr>
+              <a:tr h="370840">
+                <a:tc>
+                  <a:txBody>
+                    <a:bodyPr/>
+                    <a:lstStyle/>
+                    <a:p>
+                      <a:r>
+                        <a:rPr lang="nl-NL" noProof="0" dirty="0"/>
+                        <a:t>Naam</a:t>
+                      </a:r>
+                    </a:p>
+                  </a:txBody>
+                  <a:tcPr/>
+                </a:tc>
+                <a:extLst>
+                  <a:ext uri="{0D108BD9-81ED-4DB2-BD59-A6C34878D82A}">
+                    <a16:rowId xmlns:a16="http://schemas.microsoft.com/office/drawing/2014/main" val="3674785774"/>
+                  </a:ext>
+                </a:extLst>
+              </a:tr>
+              <a:tr h="370840">
+                <a:tc>
+                  <a:txBody>
+                    <a:bodyPr/>
+                    <a:lstStyle/>
+                    <a:p>
+                      <a:r>
+                        <a:rPr lang="nl-NL" noProof="0" dirty="0"/>
+                        <a:t>Omschrijving</a:t>
+                      </a:r>
+                    </a:p>
+                  </a:txBody>
+                  <a:tcPr/>
+                </a:tc>
+                <a:extLst>
+                  <a:ext uri="{0D108BD9-81ED-4DB2-BD59-A6C34878D82A}">
+                    <a16:rowId xmlns:a16="http://schemas.microsoft.com/office/drawing/2014/main" val="2335262126"/>
+                  </a:ext>
+                </a:extLst>
+              </a:tr>
+              <a:tr h="370840">
+                <a:tc>
+                  <a:txBody>
+                    <a:bodyPr/>
+                    <a:lstStyle/>
+                    <a:p>
+                      <a:r>
+                        <a:rPr lang="nl-NL" noProof="0" dirty="0"/>
+                        <a:t>…</a:t>
+                      </a:r>
+                    </a:p>
+                  </a:txBody>
+                  <a:tcPr/>
+                </a:tc>
+                <a:extLst>
+                  <a:ext uri="{0D108BD9-81ED-4DB2-BD59-A6C34878D82A}">
+                    <a16:rowId xmlns:a16="http://schemas.microsoft.com/office/drawing/2014/main" val="2163937255"/>
+                  </a:ext>
+                </a:extLst>
+              </a:tr>
+            </a:tbl>
+          </a:graphicData>
+        </a:graphic>
+      </p:graphicFrame>
+      <p:cxnSp>
+        <p:nvCxnSpPr>
+          <p:cNvPr id="9" name="Straight Connector 8">
+            <a:extLst>
+              <a:ext uri="{FF2B5EF4-FFF2-40B4-BE49-F238E27FC236}">
+                <a16:creationId xmlns:a16="http://schemas.microsoft.com/office/drawing/2014/main" id="{B9605622-39D9-FB15-2956-D363D4FB9A9F}"/>
+              </a:ext>
+            </a:extLst>
+          </p:cNvPr>
+          <p:cNvCxnSpPr>
+            <a:cxnSpLocks/>
+          </p:cNvCxnSpPr>
+          <p:nvPr/>
+        </p:nvCxnSpPr>
+        <p:spPr>
+          <a:xfrm>
+            <a:off x="2806156" y="3182862"/>
+            <a:ext cx="0" cy="235424"/>
+          </a:xfrm>
+          <a:prstGeom prst="line">
+            <a:avLst/>
+          </a:prstGeom>
+        </p:spPr>
+        <p:style>
+          <a:lnRef idx="3">
+            <a:schemeClr val="dk1"/>
+          </a:lnRef>
+          <a:fillRef idx="0">
+            <a:schemeClr val="dk1"/>
+          </a:fillRef>
+          <a:effectRef idx="2">
+            <a:schemeClr val="dk1"/>
+          </a:effectRef>
+          <a:fontRef idx="minor">
+            <a:schemeClr val="tx1"/>
+          </a:fontRef>
+        </p:style>
+      </p:cxnSp>
+      <p:graphicFrame>
+        <p:nvGraphicFramePr>
+          <p:cNvPr id="3" name="Table 5">
+            <a:extLst>
+              <a:ext uri="{FF2B5EF4-FFF2-40B4-BE49-F238E27FC236}">
+                <a16:creationId xmlns:a16="http://schemas.microsoft.com/office/drawing/2014/main" id="{A4EB329D-ED8C-16E3-A335-5FBB5398EAB7}"/>
+              </a:ext>
+            </a:extLst>
+          </p:cNvPr>
+          <p:cNvGraphicFramePr>
+            <a:graphicFrameLocks noGrp="1"/>
+          </p:cNvGraphicFramePr>
+          <p:nvPr>
+            <p:extLst>
+              <p:ext uri="{D42A27DB-BD31-4B8C-83A1-F6EECF244321}">
+                <p14:modId xmlns:p14="http://schemas.microsoft.com/office/powerpoint/2010/main" val="1066306379"/>
+              </p:ext>
+            </p:extLst>
+          </p:nvPr>
+        </p:nvGraphicFramePr>
+        <p:xfrm>
+          <a:off x="6635160" y="2739310"/>
+          <a:ext cx="1820160" cy="1849120"/>
+        </p:xfrm>
+        <a:graphic>
+          <a:graphicData uri="http://schemas.openxmlformats.org/drawingml/2006/table">
+            <a:tbl>
+              <a:tblPr firstRow="1" bandRow="1">
+                <a:tableStyleId>{5C22544A-7EE6-4342-B048-85BDC9FD1C3A}</a:tableStyleId>
+              </a:tblPr>
+              <a:tblGrid>
+                <a:gridCol w="1820160">
+                  <a:extLst>
+                    <a:ext uri="{9D8B030D-6E8A-4147-A177-3AD203B41FA5}">
+                      <a16:colId xmlns:a16="http://schemas.microsoft.com/office/drawing/2014/main" val="2508677333"/>
+                    </a:ext>
+                  </a:extLst>
+                </a:gridCol>
+              </a:tblGrid>
+              <a:tr h="0">
+                <a:tc>
+                  <a:txBody>
+                    <a:bodyPr/>
+                    <a:lstStyle/>
+                    <a:p>
+                      <a:r>
+                        <a:rPr lang="nl-NL" noProof="0" dirty="0" err="1"/>
+                        <a:t>TransactieRegel</a:t>
+                      </a:r>
+                      <a:endParaRPr lang="nl-NL" noProof="0" dirty="0"/>
+                    </a:p>
+                  </a:txBody>
+                  <a:tcPr/>
+                </a:tc>
+                <a:extLst>
+                  <a:ext uri="{0D108BD9-81ED-4DB2-BD59-A6C34878D82A}">
+                    <a16:rowId xmlns:a16="http://schemas.microsoft.com/office/drawing/2014/main" val="858791041"/>
+                  </a:ext>
+                </a:extLst>
+              </a:tr>
+              <a:tr h="370840">
+                <a:tc>
+                  <a:txBody>
+                    <a:bodyPr/>
+                    <a:lstStyle/>
+                    <a:p>
+                      <a:r>
+                        <a:rPr lang="nl-NL" b="1" noProof="0" dirty="0" err="1"/>
+                        <a:t>TransactieID</a:t>
+                      </a:r>
+                      <a:endParaRPr lang="nl-NL" b="1" noProof="0" dirty="0"/>
+                    </a:p>
+                  </a:txBody>
+                  <a:tcPr/>
+                </a:tc>
+                <a:extLst>
+                  <a:ext uri="{0D108BD9-81ED-4DB2-BD59-A6C34878D82A}">
+                    <a16:rowId xmlns:a16="http://schemas.microsoft.com/office/drawing/2014/main" val="1538811982"/>
+                  </a:ext>
+                </a:extLst>
+              </a:tr>
+              <a:tr h="370840">
+                <a:tc>
+                  <a:txBody>
+                    <a:bodyPr/>
+                    <a:lstStyle/>
+                    <a:p>
+                      <a:r>
+                        <a:rPr lang="nl-NL" b="1" noProof="0" dirty="0" err="1"/>
+                        <a:t>ProductID</a:t>
+                      </a:r>
+                      <a:endParaRPr lang="nl-NL" b="1" noProof="0" dirty="0"/>
+                    </a:p>
+                  </a:txBody>
+                  <a:tcPr/>
+                </a:tc>
+                <a:extLst>
+                  <a:ext uri="{0D108BD9-81ED-4DB2-BD59-A6C34878D82A}">
+                    <a16:rowId xmlns:a16="http://schemas.microsoft.com/office/drawing/2014/main" val="3674785774"/>
+                  </a:ext>
+                </a:extLst>
+              </a:tr>
+              <a:tr h="370840">
+                <a:tc>
+                  <a:txBody>
+                    <a:bodyPr/>
+                    <a:lstStyle/>
+                    <a:p>
+                      <a:r>
+                        <a:rPr lang="nl-NL" noProof="0" dirty="0"/>
+                        <a:t>Aantal</a:t>
+                      </a:r>
+                    </a:p>
+                  </a:txBody>
+                  <a:tcPr/>
+                </a:tc>
+                <a:extLst>
+                  <a:ext uri="{0D108BD9-81ED-4DB2-BD59-A6C34878D82A}">
+                    <a16:rowId xmlns:a16="http://schemas.microsoft.com/office/drawing/2014/main" val="2335262126"/>
+                  </a:ext>
+                </a:extLst>
+              </a:tr>
+              <a:tr h="370840">
+                <a:tc>
+                  <a:txBody>
+                    <a:bodyPr/>
+                    <a:lstStyle/>
+                    <a:p>
+                      <a:r>
+                        <a:rPr lang="nl-NL" noProof="0" dirty="0"/>
+                        <a:t>…</a:t>
+                      </a:r>
+                    </a:p>
+                  </a:txBody>
+                  <a:tcPr/>
+                </a:tc>
+                <a:extLst>
+                  <a:ext uri="{0D108BD9-81ED-4DB2-BD59-A6C34878D82A}">
+                    <a16:rowId xmlns:a16="http://schemas.microsoft.com/office/drawing/2014/main" val="2163937255"/>
+                  </a:ext>
+                </a:extLst>
+              </a:tr>
+            </a:tbl>
+          </a:graphicData>
+        </a:graphic>
+      </p:graphicFrame>
+      <p:cxnSp>
+        <p:nvCxnSpPr>
+          <p:cNvPr id="16" name="Connector: Elbow 15">
+            <a:extLst>
+              <a:ext uri="{FF2B5EF4-FFF2-40B4-BE49-F238E27FC236}">
+                <a16:creationId xmlns:a16="http://schemas.microsoft.com/office/drawing/2014/main" id="{717D134E-2AD3-E7C9-4341-7559C8725F6B}"/>
+              </a:ext>
+            </a:extLst>
+          </p:cNvPr>
+          <p:cNvCxnSpPr>
+            <a:cxnSpLocks/>
+            <a:endCxn id="5" idx="1"/>
+          </p:cNvCxnSpPr>
+          <p:nvPr/>
+        </p:nvCxnSpPr>
+        <p:spPr>
+          <a:xfrm>
+            <a:off x="2658360" y="3287328"/>
+            <a:ext cx="1078320" cy="376542"/>
+          </a:xfrm>
+          <a:prstGeom prst="bentConnector3">
+            <a:avLst/>
+          </a:prstGeom>
+        </p:spPr>
+        <p:style>
+          <a:lnRef idx="3">
+            <a:schemeClr val="dk1"/>
+          </a:lnRef>
+          <a:fillRef idx="0">
+            <a:schemeClr val="dk1"/>
+          </a:fillRef>
+          <a:effectRef idx="2">
+            <a:schemeClr val="dk1"/>
+          </a:effectRef>
+          <a:fontRef idx="minor">
+            <a:schemeClr val="tx1"/>
+          </a:fontRef>
+        </p:style>
+      </p:cxnSp>
+      <p:grpSp>
+        <p:nvGrpSpPr>
+          <p:cNvPr id="23" name="Group 22">
+            <a:extLst>
+              <a:ext uri="{FF2B5EF4-FFF2-40B4-BE49-F238E27FC236}">
+                <a16:creationId xmlns:a16="http://schemas.microsoft.com/office/drawing/2014/main" id="{630D0D5A-4771-632C-0B86-FAB01AE832C2}"/>
+              </a:ext>
+            </a:extLst>
+          </p:cNvPr>
+          <p:cNvGrpSpPr/>
+          <p:nvPr/>
+        </p:nvGrpSpPr>
+        <p:grpSpPr>
+          <a:xfrm>
+            <a:off x="3316303" y="3554744"/>
+            <a:ext cx="420377" cy="218252"/>
+            <a:chOff x="4517408" y="3179928"/>
+            <a:chExt cx="420377" cy="218252"/>
+          </a:xfrm>
+        </p:grpSpPr>
+        <p:cxnSp>
+          <p:nvCxnSpPr>
+            <p:cNvPr id="12" name="Straight Connector 11">
+              <a:extLst>
+                <a:ext uri="{FF2B5EF4-FFF2-40B4-BE49-F238E27FC236}">
+                  <a16:creationId xmlns:a16="http://schemas.microsoft.com/office/drawing/2014/main" id="{147FF55E-BD00-7C06-2CC4-BEAC8C97904D}"/>
+                </a:ext>
+              </a:extLst>
+            </p:cNvPr>
+            <p:cNvCxnSpPr/>
+            <p:nvPr/>
+          </p:nvCxnSpPr>
+          <p:spPr>
+            <a:xfrm flipV="1">
+              <a:off x="4653887" y="3179928"/>
+              <a:ext cx="281626" cy="106796"/>
+            </a:xfrm>
+            <a:prstGeom prst="line">
+              <a:avLst/>
+            </a:prstGeom>
+          </p:spPr>
+          <p:style>
+            <a:lnRef idx="3">
+              <a:schemeClr val="dk1"/>
+            </a:lnRef>
+            <a:fillRef idx="0">
+              <a:schemeClr val="dk1"/>
+            </a:fillRef>
+            <a:effectRef idx="2">
+              <a:schemeClr val="dk1"/>
+            </a:effectRef>
+            <a:fontRef idx="minor">
+              <a:schemeClr val="tx1"/>
+            </a:fontRef>
+          </p:style>
+        </p:cxnSp>
+        <p:cxnSp>
+          <p:nvCxnSpPr>
+            <p:cNvPr id="13" name="Straight Connector 12">
+              <a:extLst>
+                <a:ext uri="{FF2B5EF4-FFF2-40B4-BE49-F238E27FC236}">
+                  <a16:creationId xmlns:a16="http://schemas.microsoft.com/office/drawing/2014/main" id="{8332148B-762B-2BFC-F0A3-D0163A705AE9}"/>
+                </a:ext>
+              </a:extLst>
+            </p:cNvPr>
+            <p:cNvCxnSpPr>
+              <a:cxnSpLocks/>
+            </p:cNvCxnSpPr>
+            <p:nvPr/>
+          </p:nvCxnSpPr>
+          <p:spPr>
+            <a:xfrm>
+              <a:off x="4656159" y="3291384"/>
+              <a:ext cx="281626" cy="106796"/>
+            </a:xfrm>
+            <a:prstGeom prst="line">
+              <a:avLst/>
+            </a:prstGeom>
+          </p:spPr>
+          <p:style>
+            <a:lnRef idx="3">
+              <a:schemeClr val="dk1"/>
+            </a:lnRef>
+            <a:fillRef idx="0">
+              <a:schemeClr val="dk1"/>
+            </a:fillRef>
+            <a:effectRef idx="2">
+              <a:schemeClr val="dk1"/>
+            </a:effectRef>
+            <a:fontRef idx="minor">
+              <a:schemeClr val="tx1"/>
+            </a:fontRef>
+          </p:style>
+        </p:cxnSp>
+        <p:sp>
+          <p:nvSpPr>
+            <p:cNvPr id="14" name="Oval 13">
+              <a:extLst>
+                <a:ext uri="{FF2B5EF4-FFF2-40B4-BE49-F238E27FC236}">
+                  <a16:creationId xmlns:a16="http://schemas.microsoft.com/office/drawing/2014/main" id="{03247B54-DE92-933F-06F0-D67B8D559D82}"/>
+                </a:ext>
+              </a:extLst>
+            </p:cNvPr>
+            <p:cNvSpPr/>
+            <p:nvPr/>
+          </p:nvSpPr>
+          <p:spPr>
+            <a:xfrm>
+              <a:off x="4517408" y="3215073"/>
+              <a:ext cx="156950" cy="156950"/>
+            </a:xfrm>
+            <a:prstGeom prst="ellipse">
+              <a:avLst/>
+            </a:prstGeom>
+            <a:solidFill>
+              <a:schemeClr val="bg1"/>
+            </a:solidFill>
+            <a:ln>
+              <a:solidFill>
+                <a:schemeClr val="tx1"/>
+              </a:solidFill>
+            </a:ln>
+          </p:spPr>
+          <p:style>
+            <a:lnRef idx="2">
+              <a:schemeClr val="accent1">
+                <a:shade val="15000"/>
+              </a:schemeClr>
+            </a:lnRef>
+            <a:fillRef idx="1">
+              <a:schemeClr val="accent1"/>
+            </a:fillRef>
+            <a:effectRef idx="0">
+              <a:schemeClr val="accent1"/>
+            </a:effectRef>
+            <a:fontRef idx="minor">
+              <a:schemeClr val="lt1"/>
+            </a:fontRef>
+          </p:style>
+          <p:txBody>
+            <a:bodyPr rtlCol="0" anchor="ctr"/>
+            <a:lstStyle/>
+            <a:p>
+              <a:pPr algn="ctr"/>
+              <a:endParaRPr lang="en-US"/>
+            </a:p>
+          </p:txBody>
+        </p:sp>
+      </p:grpSp>
+      <p:cxnSp>
+        <p:nvCxnSpPr>
+          <p:cNvPr id="26" name="Straight Connector 25">
+            <a:extLst>
+              <a:ext uri="{FF2B5EF4-FFF2-40B4-BE49-F238E27FC236}">
+                <a16:creationId xmlns:a16="http://schemas.microsoft.com/office/drawing/2014/main" id="{8C3C52FA-D756-4868-0F25-1CD24788F133}"/>
+              </a:ext>
+            </a:extLst>
+          </p:cNvPr>
+          <p:cNvCxnSpPr>
+            <a:cxnSpLocks/>
+          </p:cNvCxnSpPr>
+          <p:nvPr/>
+        </p:nvCxnSpPr>
+        <p:spPr>
+          <a:xfrm>
+            <a:off x="5556840" y="3287328"/>
+            <a:ext cx="1078320" cy="0"/>
+          </a:xfrm>
+          <a:prstGeom prst="line">
+            <a:avLst/>
+          </a:prstGeom>
+        </p:spPr>
+        <p:style>
+          <a:lnRef idx="3">
+            <a:schemeClr val="dk1"/>
+          </a:lnRef>
+          <a:fillRef idx="0">
+            <a:schemeClr val="dk1"/>
+          </a:fillRef>
+          <a:effectRef idx="2">
+            <a:schemeClr val="dk1"/>
+          </a:effectRef>
+          <a:fontRef idx="minor">
+            <a:schemeClr val="tx1"/>
+          </a:fontRef>
+        </p:style>
+      </p:cxnSp>
+      <p:cxnSp>
+        <p:nvCxnSpPr>
+          <p:cNvPr id="30" name="Straight Connector 29">
+            <a:extLst>
+              <a:ext uri="{FF2B5EF4-FFF2-40B4-BE49-F238E27FC236}">
+                <a16:creationId xmlns:a16="http://schemas.microsoft.com/office/drawing/2014/main" id="{C2E4C1A5-46DB-D404-C6E7-29A37C7A0443}"/>
+              </a:ext>
+            </a:extLst>
+          </p:cNvPr>
+          <p:cNvCxnSpPr>
+            <a:cxnSpLocks/>
+          </p:cNvCxnSpPr>
+          <p:nvPr/>
+        </p:nvCxnSpPr>
+        <p:spPr>
+          <a:xfrm>
+            <a:off x="5681285" y="3176129"/>
+            <a:ext cx="0" cy="235424"/>
+          </a:xfrm>
+          <a:prstGeom prst="line">
+            <a:avLst/>
+          </a:prstGeom>
+        </p:spPr>
+        <p:style>
+          <a:lnRef idx="3">
+            <a:schemeClr val="dk1"/>
+          </a:lnRef>
+          <a:fillRef idx="0">
+            <a:schemeClr val="dk1"/>
+          </a:fillRef>
+          <a:effectRef idx="2">
+            <a:schemeClr val="dk1"/>
+          </a:effectRef>
+          <a:fontRef idx="minor">
+            <a:schemeClr val="tx1"/>
+          </a:fontRef>
+        </p:style>
+      </p:cxnSp>
+      <p:grpSp>
+        <p:nvGrpSpPr>
+          <p:cNvPr id="36" name="Group 35">
+            <a:extLst>
+              <a:ext uri="{FF2B5EF4-FFF2-40B4-BE49-F238E27FC236}">
+                <a16:creationId xmlns:a16="http://schemas.microsoft.com/office/drawing/2014/main" id="{9AF5600D-8E35-0A67-086C-5CA21FD32F81}"/>
+              </a:ext>
+            </a:extLst>
+          </p:cNvPr>
+          <p:cNvGrpSpPr/>
+          <p:nvPr/>
+        </p:nvGrpSpPr>
+        <p:grpSpPr>
+          <a:xfrm>
+            <a:off x="6351262" y="3176129"/>
+            <a:ext cx="283898" cy="235424"/>
+            <a:chOff x="6351262" y="3176129"/>
+            <a:chExt cx="283898" cy="235424"/>
+          </a:xfrm>
+        </p:grpSpPr>
+        <p:grpSp>
+          <p:nvGrpSpPr>
+            <p:cNvPr id="31" name="Group 30">
+              <a:extLst>
+                <a:ext uri="{FF2B5EF4-FFF2-40B4-BE49-F238E27FC236}">
+                  <a16:creationId xmlns:a16="http://schemas.microsoft.com/office/drawing/2014/main" id="{400EDB9A-6A30-515E-025A-B320E9CE84C1}"/>
+                </a:ext>
+              </a:extLst>
+            </p:cNvPr>
+            <p:cNvGrpSpPr/>
+            <p:nvPr/>
+          </p:nvGrpSpPr>
+          <p:grpSpPr>
+            <a:xfrm>
+              <a:off x="6351262" y="3182862"/>
+              <a:ext cx="283898" cy="218252"/>
+              <a:chOff x="4653887" y="3179928"/>
+              <a:chExt cx="283898" cy="218252"/>
+            </a:xfrm>
+          </p:grpSpPr>
+          <p:cxnSp>
+            <p:nvCxnSpPr>
+              <p:cNvPr id="32" name="Straight Connector 31">
+                <a:extLst>
+                  <a:ext uri="{FF2B5EF4-FFF2-40B4-BE49-F238E27FC236}">
+                    <a16:creationId xmlns:a16="http://schemas.microsoft.com/office/drawing/2014/main" id="{789441D5-52F4-5432-3C1D-1DB7CC9C2670}"/>
+                  </a:ext>
+                </a:extLst>
+              </p:cNvPr>
+              <p:cNvCxnSpPr/>
+              <p:nvPr/>
+            </p:nvCxnSpPr>
+            <p:spPr>
+              <a:xfrm flipV="1">
+                <a:off x="4653887" y="3179928"/>
+                <a:ext cx="281626" cy="106796"/>
+              </a:xfrm>
+              <a:prstGeom prst="line">
+                <a:avLst/>
+              </a:prstGeom>
+            </p:spPr>
+            <p:style>
+              <a:lnRef idx="3">
+                <a:schemeClr val="dk1"/>
+              </a:lnRef>
+              <a:fillRef idx="0">
+                <a:schemeClr val="dk1"/>
+              </a:fillRef>
+              <a:effectRef idx="2">
+                <a:schemeClr val="dk1"/>
+              </a:effectRef>
+              <a:fontRef idx="minor">
+                <a:schemeClr val="tx1"/>
+              </a:fontRef>
+            </p:style>
+          </p:cxnSp>
+          <p:cxnSp>
+            <p:nvCxnSpPr>
+              <p:cNvPr id="33" name="Straight Connector 32">
+                <a:extLst>
+                  <a:ext uri="{FF2B5EF4-FFF2-40B4-BE49-F238E27FC236}">
+                    <a16:creationId xmlns:a16="http://schemas.microsoft.com/office/drawing/2014/main" id="{6ECAAB99-D429-EB7B-5B18-D2F1BB7E415C}"/>
+                  </a:ext>
+                </a:extLst>
+              </p:cNvPr>
+              <p:cNvCxnSpPr>
+                <a:cxnSpLocks/>
+              </p:cNvCxnSpPr>
+              <p:nvPr/>
+            </p:nvCxnSpPr>
+            <p:spPr>
+              <a:xfrm>
+                <a:off x="4656159" y="3291384"/>
+                <a:ext cx="281626" cy="106796"/>
+              </a:xfrm>
+              <a:prstGeom prst="line">
+                <a:avLst/>
+              </a:prstGeom>
+            </p:spPr>
+            <p:style>
+              <a:lnRef idx="3">
+                <a:schemeClr val="dk1"/>
+              </a:lnRef>
+              <a:fillRef idx="0">
+                <a:schemeClr val="dk1"/>
+              </a:fillRef>
+              <a:effectRef idx="2">
+                <a:schemeClr val="dk1"/>
+              </a:effectRef>
+              <a:fontRef idx="minor">
+                <a:schemeClr val="tx1"/>
+              </a:fontRef>
+            </p:style>
+          </p:cxnSp>
+        </p:grpSp>
+        <p:cxnSp>
+          <p:nvCxnSpPr>
+            <p:cNvPr id="35" name="Straight Connector 34">
+              <a:extLst>
+                <a:ext uri="{FF2B5EF4-FFF2-40B4-BE49-F238E27FC236}">
+                  <a16:creationId xmlns:a16="http://schemas.microsoft.com/office/drawing/2014/main" id="{33516A98-46E4-CCCD-2E48-8BB42BD09327}"/>
+                </a:ext>
+              </a:extLst>
+            </p:cNvPr>
+            <p:cNvCxnSpPr>
+              <a:cxnSpLocks/>
+            </p:cNvCxnSpPr>
+            <p:nvPr/>
+          </p:nvCxnSpPr>
+          <p:spPr>
+            <a:xfrm>
+              <a:off x="6351262" y="3176129"/>
+              <a:ext cx="0" cy="235424"/>
+            </a:xfrm>
+            <a:prstGeom prst="line">
+              <a:avLst/>
+            </a:prstGeom>
+          </p:spPr>
+          <p:style>
+            <a:lnRef idx="3">
+              <a:schemeClr val="dk1"/>
+            </a:lnRef>
+            <a:fillRef idx="0">
+              <a:schemeClr val="dk1"/>
+            </a:fillRef>
+            <a:effectRef idx="2">
+              <a:schemeClr val="dk1"/>
+            </a:effectRef>
+            <a:fontRef idx="minor">
+              <a:schemeClr val="tx1"/>
+            </a:fontRef>
+          </p:style>
+        </p:cxnSp>
+      </p:grpSp>
+      <p:cxnSp>
+        <p:nvCxnSpPr>
+          <p:cNvPr id="38" name="Connector: Elbow 37">
+            <a:extLst>
+              <a:ext uri="{FF2B5EF4-FFF2-40B4-BE49-F238E27FC236}">
+                <a16:creationId xmlns:a16="http://schemas.microsoft.com/office/drawing/2014/main" id="{D55458A1-B209-D18E-6ADB-B528AF528E7C}"/>
+              </a:ext>
+            </a:extLst>
+          </p:cNvPr>
+          <p:cNvCxnSpPr/>
+          <p:nvPr/>
+        </p:nvCxnSpPr>
+        <p:spPr>
+          <a:xfrm flipV="1">
+            <a:off x="8455320" y="3287328"/>
+            <a:ext cx="1078320" cy="374212"/>
+          </a:xfrm>
+          <a:prstGeom prst="bentConnector3">
+            <a:avLst/>
+          </a:prstGeom>
+        </p:spPr>
+        <p:style>
+          <a:lnRef idx="3">
+            <a:schemeClr val="dk1"/>
+          </a:lnRef>
+          <a:fillRef idx="0">
+            <a:schemeClr val="dk1"/>
+          </a:fillRef>
+          <a:effectRef idx="2">
+            <a:schemeClr val="dk1"/>
+          </a:effectRef>
+          <a:fontRef idx="minor">
+            <a:schemeClr val="tx1"/>
+          </a:fontRef>
+        </p:style>
+      </p:cxnSp>
+      <p:grpSp>
+        <p:nvGrpSpPr>
+          <p:cNvPr id="39" name="Group 38">
+            <a:extLst>
+              <a:ext uri="{FF2B5EF4-FFF2-40B4-BE49-F238E27FC236}">
+                <a16:creationId xmlns:a16="http://schemas.microsoft.com/office/drawing/2014/main" id="{59286771-4D4F-A34A-61EB-3B9911933778}"/>
+              </a:ext>
+            </a:extLst>
+          </p:cNvPr>
+          <p:cNvGrpSpPr/>
+          <p:nvPr/>
+        </p:nvGrpSpPr>
+        <p:grpSpPr>
+          <a:xfrm flipH="1">
+            <a:off x="8448496" y="3552414"/>
+            <a:ext cx="420377" cy="218252"/>
+            <a:chOff x="4517408" y="3179928"/>
+            <a:chExt cx="420377" cy="218252"/>
+          </a:xfrm>
+        </p:grpSpPr>
+        <p:cxnSp>
+          <p:nvCxnSpPr>
+            <p:cNvPr id="40" name="Straight Connector 39">
+              <a:extLst>
+                <a:ext uri="{FF2B5EF4-FFF2-40B4-BE49-F238E27FC236}">
+                  <a16:creationId xmlns:a16="http://schemas.microsoft.com/office/drawing/2014/main" id="{2D266EC7-2AC6-C322-832E-191BACF42758}"/>
+                </a:ext>
+              </a:extLst>
+            </p:cNvPr>
+            <p:cNvCxnSpPr/>
+            <p:nvPr/>
+          </p:nvCxnSpPr>
+          <p:spPr>
+            <a:xfrm flipV="1">
+              <a:off x="4653887" y="3179928"/>
+              <a:ext cx="281626" cy="106796"/>
+            </a:xfrm>
+            <a:prstGeom prst="line">
+              <a:avLst/>
+            </a:prstGeom>
+          </p:spPr>
+          <p:style>
+            <a:lnRef idx="3">
+              <a:schemeClr val="dk1"/>
+            </a:lnRef>
+            <a:fillRef idx="0">
+              <a:schemeClr val="dk1"/>
+            </a:fillRef>
+            <a:effectRef idx="2">
+              <a:schemeClr val="dk1"/>
+            </a:effectRef>
+            <a:fontRef idx="minor">
+              <a:schemeClr val="tx1"/>
+            </a:fontRef>
+          </p:style>
+        </p:cxnSp>
+        <p:cxnSp>
+          <p:nvCxnSpPr>
+            <p:cNvPr id="41" name="Straight Connector 40">
+              <a:extLst>
+                <a:ext uri="{FF2B5EF4-FFF2-40B4-BE49-F238E27FC236}">
+                  <a16:creationId xmlns:a16="http://schemas.microsoft.com/office/drawing/2014/main" id="{BD832632-265B-E57C-0066-5E1431E7CC94}"/>
+                </a:ext>
+              </a:extLst>
+            </p:cNvPr>
+            <p:cNvCxnSpPr>
+              <a:cxnSpLocks/>
+            </p:cNvCxnSpPr>
+            <p:nvPr/>
+          </p:nvCxnSpPr>
+          <p:spPr>
+            <a:xfrm>
+              <a:off x="4656159" y="3291384"/>
+              <a:ext cx="281626" cy="106796"/>
+            </a:xfrm>
+            <a:prstGeom prst="line">
+              <a:avLst/>
+            </a:prstGeom>
+          </p:spPr>
+          <p:style>
+            <a:lnRef idx="3">
+              <a:schemeClr val="dk1"/>
+            </a:lnRef>
+            <a:fillRef idx="0">
+              <a:schemeClr val="dk1"/>
+            </a:fillRef>
+            <a:effectRef idx="2">
+              <a:schemeClr val="dk1"/>
+            </a:effectRef>
+            <a:fontRef idx="minor">
+              <a:schemeClr val="tx1"/>
+            </a:fontRef>
+          </p:style>
+        </p:cxnSp>
+        <p:sp>
+          <p:nvSpPr>
+            <p:cNvPr id="42" name="Oval 41">
+              <a:extLst>
+                <a:ext uri="{FF2B5EF4-FFF2-40B4-BE49-F238E27FC236}">
+                  <a16:creationId xmlns:a16="http://schemas.microsoft.com/office/drawing/2014/main" id="{B25974B9-1C75-99A0-7579-1FE6582F9498}"/>
+                </a:ext>
+              </a:extLst>
+            </p:cNvPr>
+            <p:cNvSpPr/>
+            <p:nvPr/>
+          </p:nvSpPr>
+          <p:spPr>
+            <a:xfrm>
+              <a:off x="4517408" y="3215073"/>
+              <a:ext cx="156950" cy="156950"/>
+            </a:xfrm>
+            <a:prstGeom prst="ellipse">
+              <a:avLst/>
+            </a:prstGeom>
+            <a:solidFill>
+              <a:schemeClr val="bg1"/>
+            </a:solidFill>
+            <a:ln>
+              <a:solidFill>
+                <a:schemeClr val="tx1"/>
+              </a:solidFill>
+            </a:ln>
+          </p:spPr>
+          <p:style>
+            <a:lnRef idx="2">
+              <a:schemeClr val="accent1">
+                <a:shade val="15000"/>
+              </a:schemeClr>
+            </a:lnRef>
+            <a:fillRef idx="1">
+              <a:schemeClr val="accent1"/>
+            </a:fillRef>
+            <a:effectRef idx="0">
+              <a:schemeClr val="accent1"/>
+            </a:effectRef>
+            <a:fontRef idx="minor">
+              <a:schemeClr val="lt1"/>
+            </a:fontRef>
+          </p:style>
+          <p:txBody>
+            <a:bodyPr rtlCol="0" anchor="ctr"/>
+            <a:lstStyle/>
+            <a:p>
+              <a:pPr algn="ctr"/>
+              <a:endParaRPr lang="en-US"/>
+            </a:p>
+          </p:txBody>
+        </p:sp>
+      </p:grpSp>
+      <p:cxnSp>
+        <p:nvCxnSpPr>
+          <p:cNvPr id="43" name="Straight Connector 42">
+            <a:extLst>
+              <a:ext uri="{FF2B5EF4-FFF2-40B4-BE49-F238E27FC236}">
+                <a16:creationId xmlns:a16="http://schemas.microsoft.com/office/drawing/2014/main" id="{BEFB49EB-AC1E-BB12-F712-09743CF3961E}"/>
+              </a:ext>
+            </a:extLst>
+          </p:cNvPr>
+          <p:cNvCxnSpPr>
+            <a:cxnSpLocks/>
+          </p:cNvCxnSpPr>
+          <p:nvPr/>
+        </p:nvCxnSpPr>
+        <p:spPr>
+          <a:xfrm>
+            <a:off x="9409398" y="3176622"/>
+            <a:ext cx="0" cy="235424"/>
+          </a:xfrm>
+          <a:prstGeom prst="line">
+            <a:avLst/>
+          </a:prstGeom>
+        </p:spPr>
+        <p:style>
+          <a:lnRef idx="3">
+            <a:schemeClr val="dk1"/>
+          </a:lnRef>
+          <a:fillRef idx="0">
+            <a:schemeClr val="dk1"/>
+          </a:fillRef>
+          <a:effectRef idx="2">
+            <a:schemeClr val="dk1"/>
+          </a:effectRef>
+          <a:fontRef idx="minor">
+            <a:schemeClr val="tx1"/>
+          </a:fontRef>
+        </p:style>
+      </p:cxnSp>
+    </p:spTree>
+    <p:extLst>
+      <p:ext uri="{BB962C8B-B14F-4D97-AF65-F5344CB8AC3E}">
+        <p14:creationId xmlns:p14="http://schemas.microsoft.com/office/powerpoint/2010/main" val="3652839961"/>
+      </p:ext>
+    </p:extLst>
+  </p:cSld>
+  <p:clrMapOvr>
+    <a:masterClrMapping/>
+  </p:clrMapOvr>
+</p:sld>
+</file>
+
+<file path=ppt/slides/slide28.xml><?xml version="1.0" encoding="utf-8"?>
+<p:sld xmlns:a="http://schemas.openxmlformats.org/drawingml/2006/main" xmlns:r="http://schemas.openxmlformats.org/officeDocument/2006/relationships" xmlns:p="http://schemas.openxmlformats.org/presentationml/2006/main">
+  <p:cSld>
+    <p:spTree>
+      <p:nvGrpSpPr>
         <p:cNvPr id="1" name=""/>
         <p:cNvGrpSpPr/>
         <p:nvPr/>
@@ -18794,7 +21672,7 @@
 </p:sld>
 </file>
 
-<file path=ppt/slides/slide27.xml><?xml version="1.0" encoding="utf-8"?>
+<file path=ppt/slides/slide29.xml><?xml version="1.0" encoding="utf-8"?>
 <p:sld xmlns:a="http://schemas.openxmlformats.org/drawingml/2006/main" xmlns:r="http://schemas.openxmlformats.org/officeDocument/2006/relationships" xmlns:p="http://schemas.openxmlformats.org/presentationml/2006/main">
   <p:cSld>
     <p:spTree>
@@ -18979,7 +21857,92 @@
 </p:sld>
 </file>
 
-<file path=ppt/slides/slide28.xml><?xml version="1.0" encoding="utf-8"?>
+<file path=ppt/slides/slide3.xml><?xml version="1.0" encoding="utf-8"?>
+<p:sld xmlns:a="http://schemas.openxmlformats.org/drawingml/2006/main" xmlns:r="http://schemas.openxmlformats.org/officeDocument/2006/relationships" xmlns:p="http://schemas.openxmlformats.org/presentationml/2006/main">
+  <p:cSld>
+    <p:spTree>
+      <p:nvGrpSpPr>
+        <p:cNvPr id="1" name=""/>
+        <p:cNvGrpSpPr/>
+        <p:nvPr/>
+      </p:nvGrpSpPr>
+      <p:grpSpPr>
+        <a:xfrm>
+          <a:off x="0" y="0"/>
+          <a:ext cx="0" cy="0"/>
+          <a:chOff x="0" y="0"/>
+          <a:chExt cx="0" cy="0"/>
+        </a:xfrm>
+      </p:grpSpPr>
+      <p:sp>
+        <p:nvSpPr>
+          <p:cNvPr id="4" name="Title 3">
+            <a:extLst>
+              <a:ext uri="{FF2B5EF4-FFF2-40B4-BE49-F238E27FC236}">
+                <a16:creationId xmlns:a16="http://schemas.microsoft.com/office/drawing/2014/main" id="{B021A23A-264E-4F48-8D91-52361A48531C}"/>
+              </a:ext>
+            </a:extLst>
+          </p:cNvPr>
+          <p:cNvSpPr>
+            <a:spLocks noGrp="1"/>
+          </p:cNvSpPr>
+          <p:nvPr>
+            <p:ph type="title"/>
+          </p:nvPr>
+        </p:nvSpPr>
+        <p:spPr/>
+        <p:txBody>
+          <a:bodyPr>
+            <a:normAutofit/>
+          </a:bodyPr>
+          <a:lstStyle/>
+          <a:p>
+            <a:r>
+              <a:rPr lang="nl-NL" sz="4400" noProof="0" dirty="0"/>
+              <a:t>Structuur en normalisatie</a:t>
+            </a:r>
+          </a:p>
+        </p:txBody>
+      </p:sp>
+      <p:sp>
+        <p:nvSpPr>
+          <p:cNvPr id="5" name="Text Placeholder 4">
+            <a:extLst>
+              <a:ext uri="{FF2B5EF4-FFF2-40B4-BE49-F238E27FC236}">
+                <a16:creationId xmlns:a16="http://schemas.microsoft.com/office/drawing/2014/main" id="{8B343CC5-EAA5-4394-8782-3BBA201EEC8C}"/>
+              </a:ext>
+            </a:extLst>
+          </p:cNvPr>
+          <p:cNvSpPr>
+            <a:spLocks noGrp="1"/>
+          </p:cNvSpPr>
+          <p:nvPr>
+            <p:ph type="body" idx="1"/>
+          </p:nvPr>
+        </p:nvSpPr>
+        <p:spPr/>
+        <p:txBody>
+          <a:bodyPr/>
+          <a:lstStyle/>
+          <a:p>
+            <a:endParaRPr lang="nl-NL" noProof="0" dirty="0"/>
+          </a:p>
+        </p:txBody>
+      </p:sp>
+    </p:spTree>
+    <p:extLst>
+      <p:ext uri="{BB962C8B-B14F-4D97-AF65-F5344CB8AC3E}">
+        <p14:creationId xmlns:p14="http://schemas.microsoft.com/office/powerpoint/2010/main" val="2754617916"/>
+      </p:ext>
+    </p:extLst>
+  </p:cSld>
+  <p:clrMapOvr>
+    <a:masterClrMapping/>
+  </p:clrMapOvr>
+</p:sld>
+</file>
+
+<file path=ppt/slides/slide30.xml><?xml version="1.0" encoding="utf-8"?>
 <p:sld xmlns:a="http://schemas.openxmlformats.org/drawingml/2006/main" xmlns:r="http://schemas.openxmlformats.org/officeDocument/2006/relationships" xmlns:p="http://schemas.openxmlformats.org/presentationml/2006/main">
   <p:cSld>
     <p:spTree>
@@ -19485,7 +22448,7 @@
 </p:sld>
 </file>
 
-<file path=ppt/slides/slide29.xml><?xml version="1.0" encoding="utf-8"?>
+<file path=ppt/slides/slide31.xml><?xml version="1.0" encoding="utf-8"?>
 <p:sld xmlns:a="http://schemas.openxmlformats.org/drawingml/2006/main" xmlns:r="http://schemas.openxmlformats.org/officeDocument/2006/relationships" xmlns:p="http://schemas.openxmlformats.org/presentationml/2006/main">
   <p:cSld>
     <p:spTree>
@@ -19551,7 +22514,7 @@
 </p:sld>
 </file>
 
-<file path=ppt/slides/slide3.xml><?xml version="1.0" encoding="utf-8"?>
+<file path=ppt/slides/slide32.xml><?xml version="1.0" encoding="utf-8"?>
 <p:sld xmlns:a="http://schemas.openxmlformats.org/drawingml/2006/main" xmlns:r="http://schemas.openxmlformats.org/officeDocument/2006/relationships" xmlns:p="http://schemas.openxmlformats.org/presentationml/2006/main">
   <p:cSld>
     <p:spTree>
@@ -19593,7 +22556,7 @@
           <a:p>
             <a:r>
               <a:rPr lang="nl-NL" sz="4400" noProof="0" dirty="0"/>
-              <a:t>Structuur en normalisatie</a:t>
+              <a:t>Tabellen en relaties in SQL</a:t>
             </a:r>
           </a:p>
         </p:txBody>
@@ -19626,91 +22589,6 @@
     </p:spTree>
     <p:extLst>
       <p:ext uri="{BB962C8B-B14F-4D97-AF65-F5344CB8AC3E}">
-        <p14:creationId xmlns:p14="http://schemas.microsoft.com/office/powerpoint/2010/main" val="2754617916"/>
-      </p:ext>
-    </p:extLst>
-  </p:cSld>
-  <p:clrMapOvr>
-    <a:masterClrMapping/>
-  </p:clrMapOvr>
-</p:sld>
-</file>
-
-<file path=ppt/slides/slide30.xml><?xml version="1.0" encoding="utf-8"?>
-<p:sld xmlns:a="http://schemas.openxmlformats.org/drawingml/2006/main" xmlns:r="http://schemas.openxmlformats.org/officeDocument/2006/relationships" xmlns:p="http://schemas.openxmlformats.org/presentationml/2006/main">
-  <p:cSld>
-    <p:spTree>
-      <p:nvGrpSpPr>
-        <p:cNvPr id="1" name=""/>
-        <p:cNvGrpSpPr/>
-        <p:nvPr/>
-      </p:nvGrpSpPr>
-      <p:grpSpPr>
-        <a:xfrm>
-          <a:off x="0" y="0"/>
-          <a:ext cx="0" cy="0"/>
-          <a:chOff x="0" y="0"/>
-          <a:chExt cx="0" cy="0"/>
-        </a:xfrm>
-      </p:grpSpPr>
-      <p:sp>
-        <p:nvSpPr>
-          <p:cNvPr id="4" name="Title 3">
-            <a:extLst>
-              <a:ext uri="{FF2B5EF4-FFF2-40B4-BE49-F238E27FC236}">
-                <a16:creationId xmlns:a16="http://schemas.microsoft.com/office/drawing/2014/main" id="{B021A23A-264E-4F48-8D91-52361A48531C}"/>
-              </a:ext>
-            </a:extLst>
-          </p:cNvPr>
-          <p:cNvSpPr>
-            <a:spLocks noGrp="1"/>
-          </p:cNvSpPr>
-          <p:nvPr>
-            <p:ph type="title"/>
-          </p:nvPr>
-        </p:nvSpPr>
-        <p:spPr/>
-        <p:txBody>
-          <a:bodyPr>
-            <a:normAutofit/>
-          </a:bodyPr>
-          <a:lstStyle/>
-          <a:p>
-            <a:r>
-              <a:rPr lang="nl-NL" sz="4400" noProof="0" dirty="0"/>
-              <a:t>Tabellen en relaties in SQL</a:t>
-            </a:r>
-          </a:p>
-        </p:txBody>
-      </p:sp>
-      <p:sp>
-        <p:nvSpPr>
-          <p:cNvPr id="5" name="Text Placeholder 4">
-            <a:extLst>
-              <a:ext uri="{FF2B5EF4-FFF2-40B4-BE49-F238E27FC236}">
-                <a16:creationId xmlns:a16="http://schemas.microsoft.com/office/drawing/2014/main" id="{8B343CC5-EAA5-4394-8782-3BBA201EEC8C}"/>
-              </a:ext>
-            </a:extLst>
-          </p:cNvPr>
-          <p:cNvSpPr>
-            <a:spLocks noGrp="1"/>
-          </p:cNvSpPr>
-          <p:nvPr>
-            <p:ph type="body" idx="1"/>
-          </p:nvPr>
-        </p:nvSpPr>
-        <p:spPr/>
-        <p:txBody>
-          <a:bodyPr/>
-          <a:lstStyle/>
-          <a:p>
-            <a:endParaRPr lang="nl-NL" noProof="0" dirty="0"/>
-          </a:p>
-        </p:txBody>
-      </p:sp>
-    </p:spTree>
-    <p:extLst>
-      <p:ext uri="{BB962C8B-B14F-4D97-AF65-F5344CB8AC3E}">
         <p14:creationId xmlns:p14="http://schemas.microsoft.com/office/powerpoint/2010/main" val="2875298684"/>
       </p:ext>
     </p:extLst>
@@ -19721,7 +22599,7 @@
 </p:sld>
 </file>
 
-<file path=ppt/slides/slide31.xml><?xml version="1.0" encoding="utf-8"?>
+<file path=ppt/slides/slide33.xml><?xml version="1.0" encoding="utf-8"?>
 <p:sld xmlns:a="http://schemas.openxmlformats.org/drawingml/2006/main" xmlns:r="http://schemas.openxmlformats.org/officeDocument/2006/relationships" xmlns:p="http://schemas.openxmlformats.org/presentationml/2006/main">
   <p:cSld>
     <p:spTree>
@@ -20221,7 +23099,7 @@
 </p:sld>
 </file>
 
-<file path=ppt/slides/slide32.xml><?xml version="1.0" encoding="utf-8"?>
+<file path=ppt/slides/slide34.xml><?xml version="1.0" encoding="utf-8"?>
 <p:sld xmlns:a="http://schemas.openxmlformats.org/drawingml/2006/main" xmlns:r="http://schemas.openxmlformats.org/officeDocument/2006/relationships" xmlns:p="http://schemas.openxmlformats.org/presentationml/2006/main">
   <p:cSld>
     <p:spTree>
@@ -20586,7 +23464,7 @@
 </p:sld>
 </file>
 
-<file path=ppt/slides/slide33.xml><?xml version="1.0" encoding="utf-8"?>
+<file path=ppt/slides/slide35.xml><?xml version="1.0" encoding="utf-8"?>
 <p:sld xmlns:a="http://schemas.openxmlformats.org/drawingml/2006/main" xmlns:r="http://schemas.openxmlformats.org/officeDocument/2006/relationships" xmlns:p="http://schemas.openxmlformats.org/presentationml/2006/main">
   <p:cSld>
     <p:spTree>
@@ -21259,7 +24137,7 @@
 </p:sld>
 </file>
 
-<file path=ppt/slides/slide34.xml><?xml version="1.0" encoding="utf-8"?>
+<file path=ppt/slides/slide36.xml><?xml version="1.0" encoding="utf-8"?>
 <p:sld xmlns:a="http://schemas.openxmlformats.org/drawingml/2006/main" xmlns:r="http://schemas.openxmlformats.org/officeDocument/2006/relationships" xmlns:p="http://schemas.openxmlformats.org/presentationml/2006/main">
   <p:cSld>
     <p:spTree>
@@ -21818,7 +24696,7 @@
 </p:sld>
 </file>
 
-<file path=ppt/slides/slide35.xml><?xml version="1.0" encoding="utf-8"?>
+<file path=ppt/slides/slide37.xml><?xml version="1.0" encoding="utf-8"?>
 <p:sld xmlns:a="http://schemas.openxmlformats.org/drawingml/2006/main" xmlns:r="http://schemas.openxmlformats.org/officeDocument/2006/relationships" xmlns:p="http://schemas.openxmlformats.org/presentationml/2006/main">
   <p:cSld>
     <p:spTree>
@@ -22436,7 +25314,7 @@
 </p:sld>
 </file>
 
-<file path=ppt/slides/slide36.xml><?xml version="1.0" encoding="utf-8"?>
+<file path=ppt/slides/slide38.xml><?xml version="1.0" encoding="utf-8"?>
 <p:sld xmlns:a="http://schemas.openxmlformats.org/drawingml/2006/main" xmlns:r="http://schemas.openxmlformats.org/officeDocument/2006/relationships" xmlns:p="http://schemas.openxmlformats.org/presentationml/2006/main">
   <p:cSld>
     <p:spTree>
@@ -23219,7 +26097,7 @@
 </p:sld>
 </file>
 
-<file path=ppt/slides/slide37.xml><?xml version="1.0" encoding="utf-8"?>
+<file path=ppt/slides/slide39.xml><?xml version="1.0" encoding="utf-8"?>
 <p:sld xmlns:a="http://schemas.openxmlformats.org/drawingml/2006/main" xmlns:r="http://schemas.openxmlformats.org/officeDocument/2006/relationships" xmlns:p="http://schemas.openxmlformats.org/presentationml/2006/main">
   <p:cSld>
     <p:spTree>
@@ -23727,7 +26605,551 @@
 </p:sld>
 </file>
 
-<file path=ppt/slides/slide38.xml><?xml version="1.0" encoding="utf-8"?>
+<file path=ppt/slides/slide4.xml><?xml version="1.0" encoding="utf-8"?>
+<p:sld xmlns:a="http://schemas.openxmlformats.org/drawingml/2006/main" xmlns:r="http://schemas.openxmlformats.org/officeDocument/2006/relationships" xmlns:p="http://schemas.openxmlformats.org/presentationml/2006/main">
+  <p:cSld>
+    <p:spTree>
+      <p:nvGrpSpPr>
+        <p:cNvPr id="1" name=""/>
+        <p:cNvGrpSpPr/>
+        <p:nvPr/>
+      </p:nvGrpSpPr>
+      <p:grpSpPr>
+        <a:xfrm>
+          <a:off x="0" y="0"/>
+          <a:ext cx="0" cy="0"/>
+          <a:chOff x="0" y="0"/>
+          <a:chExt cx="0" cy="0"/>
+        </a:xfrm>
+      </p:grpSpPr>
+      <p:sp>
+        <p:nvSpPr>
+          <p:cNvPr id="2" name="Title 1">
+            <a:extLst>
+              <a:ext uri="{FF2B5EF4-FFF2-40B4-BE49-F238E27FC236}">
+                <a16:creationId xmlns:a16="http://schemas.microsoft.com/office/drawing/2014/main" id="{9BDFD261-0D2C-41B9-9E28-43DF575D40E0}"/>
+              </a:ext>
+            </a:extLst>
+          </p:cNvPr>
+          <p:cNvSpPr>
+            <a:spLocks noGrp="1"/>
+          </p:cNvSpPr>
+          <p:nvPr>
+            <p:ph type="title"/>
+          </p:nvPr>
+        </p:nvSpPr>
+        <p:spPr/>
+        <p:txBody>
+          <a:bodyPr>
+            <a:normAutofit/>
+          </a:bodyPr>
+          <a:lstStyle/>
+          <a:p>
+            <a:r>
+              <a:rPr lang="nl-NL" sz="3600" noProof="0" dirty="0"/>
+              <a:t>Entiteiten in tabellen</a:t>
+            </a:r>
+          </a:p>
+        </p:txBody>
+      </p:sp>
+      <p:sp>
+        <p:nvSpPr>
+          <p:cNvPr id="3" name="Content Placeholder 2">
+            <a:extLst>
+              <a:ext uri="{FF2B5EF4-FFF2-40B4-BE49-F238E27FC236}">
+                <a16:creationId xmlns:a16="http://schemas.microsoft.com/office/drawing/2014/main" id="{7844B503-C44F-453E-9465-D42E4557DE0C}"/>
+              </a:ext>
+            </a:extLst>
+          </p:cNvPr>
+          <p:cNvSpPr>
+            <a:spLocks noGrp="1"/>
+          </p:cNvSpPr>
+          <p:nvPr>
+            <p:ph idx="1"/>
+          </p:nvPr>
+        </p:nvSpPr>
+        <p:spPr>
+          <a:xfrm>
+            <a:off x="838199" y="1825625"/>
+            <a:ext cx="10442825" cy="4351338"/>
+          </a:xfrm>
+        </p:spPr>
+        <p:txBody>
+          <a:bodyPr>
+            <a:normAutofit/>
+          </a:bodyPr>
+          <a:lstStyle/>
+          <a:p>
+            <a:pPr marL="0" indent="0">
+              <a:buNone/>
+            </a:pPr>
+            <a:r>
+              <a:rPr lang="nl-NL" sz="2000" noProof="0" dirty="0"/>
+              <a:t>Entiteiten en hun attributen slaan we op in tabellen:</a:t>
+            </a:r>
+          </a:p>
+          <a:p>
+            <a:pPr marL="0" indent="0">
+              <a:buNone/>
+            </a:pPr>
+            <a:endParaRPr lang="nl-NL" sz="2000" noProof="0" dirty="0"/>
+          </a:p>
+          <a:p>
+            <a:pPr marL="0" indent="0">
+              <a:buNone/>
+            </a:pPr>
+            <a:endParaRPr lang="nl-NL" sz="2000" noProof="0" dirty="0"/>
+          </a:p>
+        </p:txBody>
+      </p:sp>
+      <p:graphicFrame>
+        <p:nvGraphicFramePr>
+          <p:cNvPr id="4" name="Table 5">
+            <a:extLst>
+              <a:ext uri="{FF2B5EF4-FFF2-40B4-BE49-F238E27FC236}">
+                <a16:creationId xmlns:a16="http://schemas.microsoft.com/office/drawing/2014/main" id="{62CA46F3-D9D4-4F4A-856A-A943EE0F0F0C}"/>
+              </a:ext>
+            </a:extLst>
+          </p:cNvPr>
+          <p:cNvGraphicFramePr>
+            <a:graphicFrameLocks noGrp="1"/>
+          </p:cNvGraphicFramePr>
+          <p:nvPr>
+            <p:extLst>
+              <p:ext uri="{D42A27DB-BD31-4B8C-83A1-F6EECF244321}">
+                <p14:modId xmlns:p14="http://schemas.microsoft.com/office/powerpoint/2010/main" val="798112305"/>
+              </p:ext>
+            </p:extLst>
+          </p:nvPr>
+        </p:nvGraphicFramePr>
+        <p:xfrm>
+          <a:off x="989028" y="2928721"/>
+          <a:ext cx="1820160" cy="1849120"/>
+        </p:xfrm>
+        <a:graphic>
+          <a:graphicData uri="http://schemas.openxmlformats.org/drawingml/2006/table">
+            <a:tbl>
+              <a:tblPr firstRow="1" bandRow="1">
+                <a:tableStyleId>{5C22544A-7EE6-4342-B048-85BDC9FD1C3A}</a:tableStyleId>
+              </a:tblPr>
+              <a:tblGrid>
+                <a:gridCol w="1820160">
+                  <a:extLst>
+                    <a:ext uri="{9D8B030D-6E8A-4147-A177-3AD203B41FA5}">
+                      <a16:colId xmlns:a16="http://schemas.microsoft.com/office/drawing/2014/main" val="2508677333"/>
+                    </a:ext>
+                  </a:extLst>
+                </a:gridCol>
+              </a:tblGrid>
+              <a:tr h="0">
+                <a:tc>
+                  <a:txBody>
+                    <a:bodyPr/>
+                    <a:lstStyle/>
+                    <a:p>
+                      <a:r>
+                        <a:rPr lang="nl-NL" noProof="0" dirty="0"/>
+                        <a:t>Klanten</a:t>
+                      </a:r>
+                    </a:p>
+                  </a:txBody>
+                  <a:tcPr/>
+                </a:tc>
+                <a:extLst>
+                  <a:ext uri="{0D108BD9-81ED-4DB2-BD59-A6C34878D82A}">
+                    <a16:rowId xmlns:a16="http://schemas.microsoft.com/office/drawing/2014/main" val="858791041"/>
+                  </a:ext>
+                </a:extLst>
+              </a:tr>
+              <a:tr h="370840">
+                <a:tc>
+                  <a:txBody>
+                    <a:bodyPr/>
+                    <a:lstStyle/>
+                    <a:p>
+                      <a:r>
+                        <a:rPr lang="nl-NL" b="0" noProof="0" dirty="0" err="1"/>
+                        <a:t>KlantID</a:t>
+                      </a:r>
+                      <a:endParaRPr lang="nl-NL" b="0" noProof="0" dirty="0"/>
+                    </a:p>
+                  </a:txBody>
+                  <a:tcPr/>
+                </a:tc>
+                <a:extLst>
+                  <a:ext uri="{0D108BD9-81ED-4DB2-BD59-A6C34878D82A}">
+                    <a16:rowId xmlns:a16="http://schemas.microsoft.com/office/drawing/2014/main" val="1538811982"/>
+                  </a:ext>
+                </a:extLst>
+              </a:tr>
+              <a:tr h="370840">
+                <a:tc>
+                  <a:txBody>
+                    <a:bodyPr/>
+                    <a:lstStyle/>
+                    <a:p>
+                      <a:r>
+                        <a:rPr lang="nl-NL" noProof="0" dirty="0"/>
+                        <a:t>Voornaam</a:t>
+                      </a:r>
+                    </a:p>
+                  </a:txBody>
+                  <a:tcPr/>
+                </a:tc>
+                <a:extLst>
+                  <a:ext uri="{0D108BD9-81ED-4DB2-BD59-A6C34878D82A}">
+                    <a16:rowId xmlns:a16="http://schemas.microsoft.com/office/drawing/2014/main" val="3674785774"/>
+                  </a:ext>
+                </a:extLst>
+              </a:tr>
+              <a:tr h="370840">
+                <a:tc>
+                  <a:txBody>
+                    <a:bodyPr/>
+                    <a:lstStyle/>
+                    <a:p>
+                      <a:r>
+                        <a:rPr lang="nl-NL" noProof="0" dirty="0"/>
+                        <a:t>Achternaam</a:t>
+                      </a:r>
+                    </a:p>
+                  </a:txBody>
+                  <a:tcPr/>
+                </a:tc>
+                <a:extLst>
+                  <a:ext uri="{0D108BD9-81ED-4DB2-BD59-A6C34878D82A}">
+                    <a16:rowId xmlns:a16="http://schemas.microsoft.com/office/drawing/2014/main" val="2335262126"/>
+                  </a:ext>
+                </a:extLst>
+              </a:tr>
+              <a:tr h="370840">
+                <a:tc>
+                  <a:txBody>
+                    <a:bodyPr/>
+                    <a:lstStyle/>
+                    <a:p>
+                      <a:r>
+                        <a:rPr lang="nl-NL" noProof="0" dirty="0"/>
+                        <a:t>…</a:t>
+                      </a:r>
+                    </a:p>
+                  </a:txBody>
+                  <a:tcPr/>
+                </a:tc>
+                <a:extLst>
+                  <a:ext uri="{0D108BD9-81ED-4DB2-BD59-A6C34878D82A}">
+                    <a16:rowId xmlns:a16="http://schemas.microsoft.com/office/drawing/2014/main" val="2163937255"/>
+                  </a:ext>
+                </a:extLst>
+              </a:tr>
+            </a:tbl>
+          </a:graphicData>
+        </a:graphic>
+      </p:graphicFrame>
+      <p:graphicFrame>
+        <p:nvGraphicFramePr>
+          <p:cNvPr id="5" name="Table 5">
+            <a:extLst>
+              <a:ext uri="{FF2B5EF4-FFF2-40B4-BE49-F238E27FC236}">
+                <a16:creationId xmlns:a16="http://schemas.microsoft.com/office/drawing/2014/main" id="{2F81CE1D-F9ED-02C0-0A6D-49B2EC941B4F}"/>
+              </a:ext>
+            </a:extLst>
+          </p:cNvPr>
+          <p:cNvGraphicFramePr>
+            <a:graphicFrameLocks noGrp="1"/>
+          </p:cNvGraphicFramePr>
+          <p:nvPr>
+            <p:extLst>
+              <p:ext uri="{D42A27DB-BD31-4B8C-83A1-F6EECF244321}">
+                <p14:modId xmlns:p14="http://schemas.microsoft.com/office/powerpoint/2010/main" val="3882633084"/>
+              </p:ext>
+            </p:extLst>
+          </p:nvPr>
+        </p:nvGraphicFramePr>
+        <p:xfrm>
+          <a:off x="4275840" y="2928721"/>
+          <a:ext cx="1820160" cy="1849120"/>
+        </p:xfrm>
+        <a:graphic>
+          <a:graphicData uri="http://schemas.openxmlformats.org/drawingml/2006/table">
+            <a:tbl>
+              <a:tblPr firstRow="1" bandRow="1">
+                <a:tableStyleId>{5C22544A-7EE6-4342-B048-85BDC9FD1C3A}</a:tableStyleId>
+              </a:tblPr>
+              <a:tblGrid>
+                <a:gridCol w="1820160">
+                  <a:extLst>
+                    <a:ext uri="{9D8B030D-6E8A-4147-A177-3AD203B41FA5}">
+                      <a16:colId xmlns:a16="http://schemas.microsoft.com/office/drawing/2014/main" val="2508677333"/>
+                    </a:ext>
+                  </a:extLst>
+                </a:gridCol>
+              </a:tblGrid>
+              <a:tr h="0">
+                <a:tc>
+                  <a:txBody>
+                    <a:bodyPr/>
+                    <a:lstStyle/>
+                    <a:p>
+                      <a:r>
+                        <a:rPr lang="nl-NL" noProof="0" dirty="0"/>
+                        <a:t>Transacties</a:t>
+                      </a:r>
+                    </a:p>
+                  </a:txBody>
+                  <a:tcPr/>
+                </a:tc>
+                <a:extLst>
+                  <a:ext uri="{0D108BD9-81ED-4DB2-BD59-A6C34878D82A}">
+                    <a16:rowId xmlns:a16="http://schemas.microsoft.com/office/drawing/2014/main" val="858791041"/>
+                  </a:ext>
+                </a:extLst>
+              </a:tr>
+              <a:tr h="370840">
+                <a:tc>
+                  <a:txBody>
+                    <a:bodyPr/>
+                    <a:lstStyle/>
+                    <a:p>
+                      <a:r>
+                        <a:rPr lang="nl-NL" b="0" noProof="0" dirty="0" err="1"/>
+                        <a:t>KlantID</a:t>
+                      </a:r>
+                      <a:endParaRPr lang="nl-NL" b="0" noProof="0" dirty="0"/>
+                    </a:p>
+                  </a:txBody>
+                  <a:tcPr/>
+                </a:tc>
+                <a:extLst>
+                  <a:ext uri="{0D108BD9-81ED-4DB2-BD59-A6C34878D82A}">
+                    <a16:rowId xmlns:a16="http://schemas.microsoft.com/office/drawing/2014/main" val="1538811982"/>
+                  </a:ext>
+                </a:extLst>
+              </a:tr>
+              <a:tr h="370840">
+                <a:tc>
+                  <a:txBody>
+                    <a:bodyPr/>
+                    <a:lstStyle/>
+                    <a:p>
+                      <a:r>
+                        <a:rPr lang="nl-NL" b="0" noProof="0" dirty="0" err="1"/>
+                        <a:t>ProductID</a:t>
+                      </a:r>
+                      <a:endParaRPr lang="nl-NL" b="0" noProof="0" dirty="0"/>
+                    </a:p>
+                  </a:txBody>
+                  <a:tcPr/>
+                </a:tc>
+                <a:extLst>
+                  <a:ext uri="{0D108BD9-81ED-4DB2-BD59-A6C34878D82A}">
+                    <a16:rowId xmlns:a16="http://schemas.microsoft.com/office/drawing/2014/main" val="3674785774"/>
+                  </a:ext>
+                </a:extLst>
+              </a:tr>
+              <a:tr h="370840">
+                <a:tc>
+                  <a:txBody>
+                    <a:bodyPr/>
+                    <a:lstStyle/>
+                    <a:p>
+                      <a:r>
+                        <a:rPr lang="nl-NL" noProof="0" dirty="0" err="1"/>
+                        <a:t>DatumTijd</a:t>
+                      </a:r>
+                      <a:endParaRPr lang="nl-NL" noProof="0" dirty="0"/>
+                    </a:p>
+                  </a:txBody>
+                  <a:tcPr/>
+                </a:tc>
+                <a:extLst>
+                  <a:ext uri="{0D108BD9-81ED-4DB2-BD59-A6C34878D82A}">
+                    <a16:rowId xmlns:a16="http://schemas.microsoft.com/office/drawing/2014/main" val="2335262126"/>
+                  </a:ext>
+                </a:extLst>
+              </a:tr>
+              <a:tr h="370840">
+                <a:tc>
+                  <a:txBody>
+                    <a:bodyPr/>
+                    <a:lstStyle/>
+                    <a:p>
+                      <a:r>
+                        <a:rPr lang="nl-NL" noProof="0" dirty="0"/>
+                        <a:t>…</a:t>
+                      </a:r>
+                    </a:p>
+                  </a:txBody>
+                  <a:tcPr/>
+                </a:tc>
+                <a:extLst>
+                  <a:ext uri="{0D108BD9-81ED-4DB2-BD59-A6C34878D82A}">
+                    <a16:rowId xmlns:a16="http://schemas.microsoft.com/office/drawing/2014/main" val="2163937255"/>
+                  </a:ext>
+                </a:extLst>
+              </a:tr>
+            </a:tbl>
+          </a:graphicData>
+        </a:graphic>
+      </p:graphicFrame>
+      <p:graphicFrame>
+        <p:nvGraphicFramePr>
+          <p:cNvPr id="8" name="Table 5">
+            <a:extLst>
+              <a:ext uri="{FF2B5EF4-FFF2-40B4-BE49-F238E27FC236}">
+                <a16:creationId xmlns:a16="http://schemas.microsoft.com/office/drawing/2014/main" id="{F4917DC8-4826-215A-40A2-62AE8EF1EFDB}"/>
+              </a:ext>
+            </a:extLst>
+          </p:cNvPr>
+          <p:cNvGraphicFramePr>
+            <a:graphicFrameLocks noGrp="1"/>
+          </p:cNvGraphicFramePr>
+          <p:nvPr>
+            <p:extLst>
+              <p:ext uri="{D42A27DB-BD31-4B8C-83A1-F6EECF244321}">
+                <p14:modId xmlns:p14="http://schemas.microsoft.com/office/powerpoint/2010/main" val="2944981733"/>
+              </p:ext>
+            </p:extLst>
+          </p:nvPr>
+        </p:nvGraphicFramePr>
+        <p:xfrm>
+          <a:off x="7562652" y="2928721"/>
+          <a:ext cx="1820160" cy="1849120"/>
+        </p:xfrm>
+        <a:graphic>
+          <a:graphicData uri="http://schemas.openxmlformats.org/drawingml/2006/table">
+            <a:tbl>
+              <a:tblPr firstRow="1" bandRow="1">
+                <a:tableStyleId>{5C22544A-7EE6-4342-B048-85BDC9FD1C3A}</a:tableStyleId>
+              </a:tblPr>
+              <a:tblGrid>
+                <a:gridCol w="1820160">
+                  <a:extLst>
+                    <a:ext uri="{9D8B030D-6E8A-4147-A177-3AD203B41FA5}">
+                      <a16:colId xmlns:a16="http://schemas.microsoft.com/office/drawing/2014/main" val="2508677333"/>
+                    </a:ext>
+                  </a:extLst>
+                </a:gridCol>
+              </a:tblGrid>
+              <a:tr h="0">
+                <a:tc>
+                  <a:txBody>
+                    <a:bodyPr/>
+                    <a:lstStyle/>
+                    <a:p>
+                      <a:r>
+                        <a:rPr lang="nl-NL" noProof="0" dirty="0"/>
+                        <a:t>Producten</a:t>
+                      </a:r>
+                    </a:p>
+                  </a:txBody>
+                  <a:tcPr/>
+                </a:tc>
+                <a:extLst>
+                  <a:ext uri="{0D108BD9-81ED-4DB2-BD59-A6C34878D82A}">
+                    <a16:rowId xmlns:a16="http://schemas.microsoft.com/office/drawing/2014/main" val="858791041"/>
+                  </a:ext>
+                </a:extLst>
+              </a:tr>
+              <a:tr h="370840">
+                <a:tc>
+                  <a:txBody>
+                    <a:bodyPr/>
+                    <a:lstStyle/>
+                    <a:p>
+                      <a:r>
+                        <a:rPr lang="nl-NL" b="0" noProof="0" dirty="0" err="1"/>
+                        <a:t>ProductID</a:t>
+                      </a:r>
+                      <a:endParaRPr lang="nl-NL" b="0" noProof="0" dirty="0"/>
+                    </a:p>
+                  </a:txBody>
+                  <a:tcPr/>
+                </a:tc>
+                <a:extLst>
+                  <a:ext uri="{0D108BD9-81ED-4DB2-BD59-A6C34878D82A}">
+                    <a16:rowId xmlns:a16="http://schemas.microsoft.com/office/drawing/2014/main" val="1538811982"/>
+                  </a:ext>
+                </a:extLst>
+              </a:tr>
+              <a:tr h="370840">
+                <a:tc>
+                  <a:txBody>
+                    <a:bodyPr/>
+                    <a:lstStyle/>
+                    <a:p>
+                      <a:r>
+                        <a:rPr lang="nl-NL" noProof="0" dirty="0"/>
+                        <a:t>Naam</a:t>
+                      </a:r>
+                    </a:p>
+                  </a:txBody>
+                  <a:tcPr/>
+                </a:tc>
+                <a:extLst>
+                  <a:ext uri="{0D108BD9-81ED-4DB2-BD59-A6C34878D82A}">
+                    <a16:rowId xmlns:a16="http://schemas.microsoft.com/office/drawing/2014/main" val="3674785774"/>
+                  </a:ext>
+                </a:extLst>
+              </a:tr>
+              <a:tr h="370840">
+                <a:tc>
+                  <a:txBody>
+                    <a:bodyPr/>
+                    <a:lstStyle/>
+                    <a:p>
+                      <a:r>
+                        <a:rPr lang="nl-NL" noProof="0" dirty="0"/>
+                        <a:t>Omschrijving</a:t>
+                      </a:r>
+                    </a:p>
+                  </a:txBody>
+                  <a:tcPr/>
+                </a:tc>
+                <a:extLst>
+                  <a:ext uri="{0D108BD9-81ED-4DB2-BD59-A6C34878D82A}">
+                    <a16:rowId xmlns:a16="http://schemas.microsoft.com/office/drawing/2014/main" val="2335262126"/>
+                  </a:ext>
+                </a:extLst>
+              </a:tr>
+              <a:tr h="370840">
+                <a:tc>
+                  <a:txBody>
+                    <a:bodyPr/>
+                    <a:lstStyle/>
+                    <a:p>
+                      <a:r>
+                        <a:rPr lang="nl-NL" noProof="0" dirty="0"/>
+                        <a:t>…</a:t>
+                      </a:r>
+                    </a:p>
+                  </a:txBody>
+                  <a:tcPr/>
+                </a:tc>
+                <a:extLst>
+                  <a:ext uri="{0D108BD9-81ED-4DB2-BD59-A6C34878D82A}">
+                    <a16:rowId xmlns:a16="http://schemas.microsoft.com/office/drawing/2014/main" val="2163937255"/>
+                  </a:ext>
+                </a:extLst>
+              </a:tr>
+            </a:tbl>
+          </a:graphicData>
+        </a:graphic>
+      </p:graphicFrame>
+    </p:spTree>
+    <p:extLst>
+      <p:ext uri="{BB962C8B-B14F-4D97-AF65-F5344CB8AC3E}">
+        <p14:creationId xmlns:p14="http://schemas.microsoft.com/office/powerpoint/2010/main" val="2320990652"/>
+      </p:ext>
+    </p:extLst>
+  </p:cSld>
+  <p:clrMapOvr>
+    <a:masterClrMapping/>
+  </p:clrMapOvr>
+</p:sld>
+</file>
+
+<file path=ppt/slides/slide40.xml><?xml version="1.0" encoding="utf-8"?>
 <p:sld xmlns:a="http://schemas.openxmlformats.org/drawingml/2006/main" xmlns:r="http://schemas.openxmlformats.org/officeDocument/2006/relationships" xmlns:p="http://schemas.openxmlformats.org/presentationml/2006/main">
   <p:cSld>
     <p:spTree>
@@ -24268,7 +27690,7 @@
 </p:sld>
 </file>
 
-<file path=ppt/slides/slide39.xml><?xml version="1.0" encoding="utf-8"?>
+<file path=ppt/slides/slide41.xml><?xml version="1.0" encoding="utf-8"?>
 <p:sld xmlns:a="http://schemas.openxmlformats.org/drawingml/2006/main" xmlns:r="http://schemas.openxmlformats.org/officeDocument/2006/relationships" xmlns:p="http://schemas.openxmlformats.org/presentationml/2006/main">
   <p:cSld>
     <p:spTree>
@@ -24875,550 +28297,7 @@
 </p:sld>
 </file>
 
-<file path=ppt/slides/slide4.xml><?xml version="1.0" encoding="utf-8"?>
-<p:sld xmlns:a="http://schemas.openxmlformats.org/drawingml/2006/main" xmlns:r="http://schemas.openxmlformats.org/officeDocument/2006/relationships" xmlns:p="http://schemas.openxmlformats.org/presentationml/2006/main">
-  <p:cSld>
-    <p:spTree>
-      <p:nvGrpSpPr>
-        <p:cNvPr id="1" name=""/>
-        <p:cNvGrpSpPr/>
-        <p:nvPr/>
-      </p:nvGrpSpPr>
-      <p:grpSpPr>
-        <a:xfrm>
-          <a:off x="0" y="0"/>
-          <a:ext cx="0" cy="0"/>
-          <a:chOff x="0" y="0"/>
-          <a:chExt cx="0" cy="0"/>
-        </a:xfrm>
-      </p:grpSpPr>
-      <p:sp>
-        <p:nvSpPr>
-          <p:cNvPr id="2" name="Title 1">
-            <a:extLst>
-              <a:ext uri="{FF2B5EF4-FFF2-40B4-BE49-F238E27FC236}">
-                <a16:creationId xmlns:a16="http://schemas.microsoft.com/office/drawing/2014/main" id="{9BDFD261-0D2C-41B9-9E28-43DF575D40E0}"/>
-              </a:ext>
-            </a:extLst>
-          </p:cNvPr>
-          <p:cNvSpPr>
-            <a:spLocks noGrp="1"/>
-          </p:cNvSpPr>
-          <p:nvPr>
-            <p:ph type="title"/>
-          </p:nvPr>
-        </p:nvSpPr>
-        <p:spPr/>
-        <p:txBody>
-          <a:bodyPr>
-            <a:normAutofit/>
-          </a:bodyPr>
-          <a:lstStyle/>
-          <a:p>
-            <a:r>
-              <a:rPr lang="nl-NL" sz="3600" noProof="0" dirty="0"/>
-              <a:t>Entiteiten in tabellen</a:t>
-            </a:r>
-          </a:p>
-        </p:txBody>
-      </p:sp>
-      <p:sp>
-        <p:nvSpPr>
-          <p:cNvPr id="3" name="Content Placeholder 2">
-            <a:extLst>
-              <a:ext uri="{FF2B5EF4-FFF2-40B4-BE49-F238E27FC236}">
-                <a16:creationId xmlns:a16="http://schemas.microsoft.com/office/drawing/2014/main" id="{7844B503-C44F-453E-9465-D42E4557DE0C}"/>
-              </a:ext>
-            </a:extLst>
-          </p:cNvPr>
-          <p:cNvSpPr>
-            <a:spLocks noGrp="1"/>
-          </p:cNvSpPr>
-          <p:nvPr>
-            <p:ph idx="1"/>
-          </p:nvPr>
-        </p:nvSpPr>
-        <p:spPr>
-          <a:xfrm>
-            <a:off x="838199" y="1825625"/>
-            <a:ext cx="10442825" cy="4351338"/>
-          </a:xfrm>
-        </p:spPr>
-        <p:txBody>
-          <a:bodyPr>
-            <a:normAutofit/>
-          </a:bodyPr>
-          <a:lstStyle/>
-          <a:p>
-            <a:pPr marL="0" indent="0">
-              <a:buNone/>
-            </a:pPr>
-            <a:r>
-              <a:rPr lang="nl-NL" sz="2000" noProof="0" dirty="0"/>
-              <a:t>Entiteiten en hun attributen slaan we op in tabellen:</a:t>
-            </a:r>
-          </a:p>
-          <a:p>
-            <a:pPr marL="0" indent="0">
-              <a:buNone/>
-            </a:pPr>
-            <a:endParaRPr lang="nl-NL" sz="2000" noProof="0" dirty="0"/>
-          </a:p>
-          <a:p>
-            <a:pPr marL="0" indent="0">
-              <a:buNone/>
-            </a:pPr>
-            <a:endParaRPr lang="nl-NL" sz="2000" noProof="0" dirty="0"/>
-          </a:p>
-        </p:txBody>
-      </p:sp>
-      <p:graphicFrame>
-        <p:nvGraphicFramePr>
-          <p:cNvPr id="4" name="Table 5">
-            <a:extLst>
-              <a:ext uri="{FF2B5EF4-FFF2-40B4-BE49-F238E27FC236}">
-                <a16:creationId xmlns:a16="http://schemas.microsoft.com/office/drawing/2014/main" id="{62CA46F3-D9D4-4F4A-856A-A943EE0F0F0C}"/>
-              </a:ext>
-            </a:extLst>
-          </p:cNvPr>
-          <p:cNvGraphicFramePr>
-            <a:graphicFrameLocks noGrp="1"/>
-          </p:cNvGraphicFramePr>
-          <p:nvPr>
-            <p:extLst>
-              <p:ext uri="{D42A27DB-BD31-4B8C-83A1-F6EECF244321}">
-                <p14:modId xmlns:p14="http://schemas.microsoft.com/office/powerpoint/2010/main" val="798112305"/>
-              </p:ext>
-            </p:extLst>
-          </p:nvPr>
-        </p:nvGraphicFramePr>
-        <p:xfrm>
-          <a:off x="989028" y="2928721"/>
-          <a:ext cx="1820160" cy="1849120"/>
-        </p:xfrm>
-        <a:graphic>
-          <a:graphicData uri="http://schemas.openxmlformats.org/drawingml/2006/table">
-            <a:tbl>
-              <a:tblPr firstRow="1" bandRow="1">
-                <a:tableStyleId>{5C22544A-7EE6-4342-B048-85BDC9FD1C3A}</a:tableStyleId>
-              </a:tblPr>
-              <a:tblGrid>
-                <a:gridCol w="1820160">
-                  <a:extLst>
-                    <a:ext uri="{9D8B030D-6E8A-4147-A177-3AD203B41FA5}">
-                      <a16:colId xmlns:a16="http://schemas.microsoft.com/office/drawing/2014/main" val="2508677333"/>
-                    </a:ext>
-                  </a:extLst>
-                </a:gridCol>
-              </a:tblGrid>
-              <a:tr h="0">
-                <a:tc>
-                  <a:txBody>
-                    <a:bodyPr/>
-                    <a:lstStyle/>
-                    <a:p>
-                      <a:r>
-                        <a:rPr lang="nl-NL" noProof="0" dirty="0"/>
-                        <a:t>Klanten</a:t>
-                      </a:r>
-                    </a:p>
-                  </a:txBody>
-                  <a:tcPr/>
-                </a:tc>
-                <a:extLst>
-                  <a:ext uri="{0D108BD9-81ED-4DB2-BD59-A6C34878D82A}">
-                    <a16:rowId xmlns:a16="http://schemas.microsoft.com/office/drawing/2014/main" val="858791041"/>
-                  </a:ext>
-                </a:extLst>
-              </a:tr>
-              <a:tr h="370840">
-                <a:tc>
-                  <a:txBody>
-                    <a:bodyPr/>
-                    <a:lstStyle/>
-                    <a:p>
-                      <a:r>
-                        <a:rPr lang="nl-NL" b="0" noProof="0" dirty="0" err="1"/>
-                        <a:t>KlantID</a:t>
-                      </a:r>
-                      <a:endParaRPr lang="nl-NL" b="0" noProof="0" dirty="0"/>
-                    </a:p>
-                  </a:txBody>
-                  <a:tcPr/>
-                </a:tc>
-                <a:extLst>
-                  <a:ext uri="{0D108BD9-81ED-4DB2-BD59-A6C34878D82A}">
-                    <a16:rowId xmlns:a16="http://schemas.microsoft.com/office/drawing/2014/main" val="1538811982"/>
-                  </a:ext>
-                </a:extLst>
-              </a:tr>
-              <a:tr h="370840">
-                <a:tc>
-                  <a:txBody>
-                    <a:bodyPr/>
-                    <a:lstStyle/>
-                    <a:p>
-                      <a:r>
-                        <a:rPr lang="nl-NL" noProof="0" dirty="0"/>
-                        <a:t>Voornaam</a:t>
-                      </a:r>
-                    </a:p>
-                  </a:txBody>
-                  <a:tcPr/>
-                </a:tc>
-                <a:extLst>
-                  <a:ext uri="{0D108BD9-81ED-4DB2-BD59-A6C34878D82A}">
-                    <a16:rowId xmlns:a16="http://schemas.microsoft.com/office/drawing/2014/main" val="3674785774"/>
-                  </a:ext>
-                </a:extLst>
-              </a:tr>
-              <a:tr h="370840">
-                <a:tc>
-                  <a:txBody>
-                    <a:bodyPr/>
-                    <a:lstStyle/>
-                    <a:p>
-                      <a:r>
-                        <a:rPr lang="nl-NL" noProof="0" dirty="0"/>
-                        <a:t>Achternaam</a:t>
-                      </a:r>
-                    </a:p>
-                  </a:txBody>
-                  <a:tcPr/>
-                </a:tc>
-                <a:extLst>
-                  <a:ext uri="{0D108BD9-81ED-4DB2-BD59-A6C34878D82A}">
-                    <a16:rowId xmlns:a16="http://schemas.microsoft.com/office/drawing/2014/main" val="2335262126"/>
-                  </a:ext>
-                </a:extLst>
-              </a:tr>
-              <a:tr h="370840">
-                <a:tc>
-                  <a:txBody>
-                    <a:bodyPr/>
-                    <a:lstStyle/>
-                    <a:p>
-                      <a:r>
-                        <a:rPr lang="nl-NL" noProof="0" dirty="0"/>
-                        <a:t>…</a:t>
-                      </a:r>
-                    </a:p>
-                  </a:txBody>
-                  <a:tcPr/>
-                </a:tc>
-                <a:extLst>
-                  <a:ext uri="{0D108BD9-81ED-4DB2-BD59-A6C34878D82A}">
-                    <a16:rowId xmlns:a16="http://schemas.microsoft.com/office/drawing/2014/main" val="2163937255"/>
-                  </a:ext>
-                </a:extLst>
-              </a:tr>
-            </a:tbl>
-          </a:graphicData>
-        </a:graphic>
-      </p:graphicFrame>
-      <p:graphicFrame>
-        <p:nvGraphicFramePr>
-          <p:cNvPr id="5" name="Table 5">
-            <a:extLst>
-              <a:ext uri="{FF2B5EF4-FFF2-40B4-BE49-F238E27FC236}">
-                <a16:creationId xmlns:a16="http://schemas.microsoft.com/office/drawing/2014/main" id="{2F81CE1D-F9ED-02C0-0A6D-49B2EC941B4F}"/>
-              </a:ext>
-            </a:extLst>
-          </p:cNvPr>
-          <p:cNvGraphicFramePr>
-            <a:graphicFrameLocks noGrp="1"/>
-          </p:cNvGraphicFramePr>
-          <p:nvPr>
-            <p:extLst>
-              <p:ext uri="{D42A27DB-BD31-4B8C-83A1-F6EECF244321}">
-                <p14:modId xmlns:p14="http://schemas.microsoft.com/office/powerpoint/2010/main" val="1399094275"/>
-              </p:ext>
-            </p:extLst>
-          </p:nvPr>
-        </p:nvGraphicFramePr>
-        <p:xfrm>
-          <a:off x="4275840" y="2928721"/>
-          <a:ext cx="1820160" cy="1849120"/>
-        </p:xfrm>
-        <a:graphic>
-          <a:graphicData uri="http://schemas.openxmlformats.org/drawingml/2006/table">
-            <a:tbl>
-              <a:tblPr firstRow="1" bandRow="1">
-                <a:tableStyleId>{5C22544A-7EE6-4342-B048-85BDC9FD1C3A}</a:tableStyleId>
-              </a:tblPr>
-              <a:tblGrid>
-                <a:gridCol w="1820160">
-                  <a:extLst>
-                    <a:ext uri="{9D8B030D-6E8A-4147-A177-3AD203B41FA5}">
-                      <a16:colId xmlns:a16="http://schemas.microsoft.com/office/drawing/2014/main" val="2508677333"/>
-                    </a:ext>
-                  </a:extLst>
-                </a:gridCol>
-              </a:tblGrid>
-              <a:tr h="0">
-                <a:tc>
-                  <a:txBody>
-                    <a:bodyPr/>
-                    <a:lstStyle/>
-                    <a:p>
-                      <a:r>
-                        <a:rPr lang="nl-NL" noProof="0" dirty="0"/>
-                        <a:t>Transacties</a:t>
-                      </a:r>
-                    </a:p>
-                  </a:txBody>
-                  <a:tcPr/>
-                </a:tc>
-                <a:extLst>
-                  <a:ext uri="{0D108BD9-81ED-4DB2-BD59-A6C34878D82A}">
-                    <a16:rowId xmlns:a16="http://schemas.microsoft.com/office/drawing/2014/main" val="858791041"/>
-                  </a:ext>
-                </a:extLst>
-              </a:tr>
-              <a:tr h="370840">
-                <a:tc>
-                  <a:txBody>
-                    <a:bodyPr/>
-                    <a:lstStyle/>
-                    <a:p>
-                      <a:r>
-                        <a:rPr lang="nl-NL" b="0" noProof="0" dirty="0" err="1"/>
-                        <a:t>KlantID</a:t>
-                      </a:r>
-                      <a:endParaRPr lang="nl-NL" b="0" noProof="0" dirty="0"/>
-                    </a:p>
-                  </a:txBody>
-                  <a:tcPr/>
-                </a:tc>
-                <a:extLst>
-                  <a:ext uri="{0D108BD9-81ED-4DB2-BD59-A6C34878D82A}">
-                    <a16:rowId xmlns:a16="http://schemas.microsoft.com/office/drawing/2014/main" val="1538811982"/>
-                  </a:ext>
-                </a:extLst>
-              </a:tr>
-              <a:tr h="370840">
-                <a:tc>
-                  <a:txBody>
-                    <a:bodyPr/>
-                    <a:lstStyle/>
-                    <a:p>
-                      <a:r>
-                        <a:rPr lang="nl-NL" b="0" noProof="0" dirty="0" err="1"/>
-                        <a:t>ProductID</a:t>
-                      </a:r>
-                      <a:endParaRPr lang="nl-NL" b="0" noProof="0" dirty="0"/>
-                    </a:p>
-                  </a:txBody>
-                  <a:tcPr/>
-                </a:tc>
-                <a:extLst>
-                  <a:ext uri="{0D108BD9-81ED-4DB2-BD59-A6C34878D82A}">
-                    <a16:rowId xmlns:a16="http://schemas.microsoft.com/office/drawing/2014/main" val="3674785774"/>
-                  </a:ext>
-                </a:extLst>
-              </a:tr>
-              <a:tr h="370840">
-                <a:tc>
-                  <a:txBody>
-                    <a:bodyPr/>
-                    <a:lstStyle/>
-                    <a:p>
-                      <a:r>
-                        <a:rPr lang="nl-NL" noProof="0" dirty="0"/>
-                        <a:t>Aantal</a:t>
-                      </a:r>
-                    </a:p>
-                  </a:txBody>
-                  <a:tcPr/>
-                </a:tc>
-                <a:extLst>
-                  <a:ext uri="{0D108BD9-81ED-4DB2-BD59-A6C34878D82A}">
-                    <a16:rowId xmlns:a16="http://schemas.microsoft.com/office/drawing/2014/main" val="2335262126"/>
-                  </a:ext>
-                </a:extLst>
-              </a:tr>
-              <a:tr h="370840">
-                <a:tc>
-                  <a:txBody>
-                    <a:bodyPr/>
-                    <a:lstStyle/>
-                    <a:p>
-                      <a:r>
-                        <a:rPr lang="nl-NL" noProof="0" dirty="0"/>
-                        <a:t>…</a:t>
-                      </a:r>
-                    </a:p>
-                  </a:txBody>
-                  <a:tcPr/>
-                </a:tc>
-                <a:extLst>
-                  <a:ext uri="{0D108BD9-81ED-4DB2-BD59-A6C34878D82A}">
-                    <a16:rowId xmlns:a16="http://schemas.microsoft.com/office/drawing/2014/main" val="2163937255"/>
-                  </a:ext>
-                </a:extLst>
-              </a:tr>
-            </a:tbl>
-          </a:graphicData>
-        </a:graphic>
-      </p:graphicFrame>
-      <p:graphicFrame>
-        <p:nvGraphicFramePr>
-          <p:cNvPr id="8" name="Table 5">
-            <a:extLst>
-              <a:ext uri="{FF2B5EF4-FFF2-40B4-BE49-F238E27FC236}">
-                <a16:creationId xmlns:a16="http://schemas.microsoft.com/office/drawing/2014/main" id="{F4917DC8-4826-215A-40A2-62AE8EF1EFDB}"/>
-              </a:ext>
-            </a:extLst>
-          </p:cNvPr>
-          <p:cNvGraphicFramePr>
-            <a:graphicFrameLocks noGrp="1"/>
-          </p:cNvGraphicFramePr>
-          <p:nvPr>
-            <p:extLst>
-              <p:ext uri="{D42A27DB-BD31-4B8C-83A1-F6EECF244321}">
-                <p14:modId xmlns:p14="http://schemas.microsoft.com/office/powerpoint/2010/main" val="2944981733"/>
-              </p:ext>
-            </p:extLst>
-          </p:nvPr>
-        </p:nvGraphicFramePr>
-        <p:xfrm>
-          <a:off x="7562652" y="2928721"/>
-          <a:ext cx="1820160" cy="1849120"/>
-        </p:xfrm>
-        <a:graphic>
-          <a:graphicData uri="http://schemas.openxmlformats.org/drawingml/2006/table">
-            <a:tbl>
-              <a:tblPr firstRow="1" bandRow="1">
-                <a:tableStyleId>{5C22544A-7EE6-4342-B048-85BDC9FD1C3A}</a:tableStyleId>
-              </a:tblPr>
-              <a:tblGrid>
-                <a:gridCol w="1820160">
-                  <a:extLst>
-                    <a:ext uri="{9D8B030D-6E8A-4147-A177-3AD203B41FA5}">
-                      <a16:colId xmlns:a16="http://schemas.microsoft.com/office/drawing/2014/main" val="2508677333"/>
-                    </a:ext>
-                  </a:extLst>
-                </a:gridCol>
-              </a:tblGrid>
-              <a:tr h="0">
-                <a:tc>
-                  <a:txBody>
-                    <a:bodyPr/>
-                    <a:lstStyle/>
-                    <a:p>
-                      <a:r>
-                        <a:rPr lang="nl-NL" noProof="0" dirty="0"/>
-                        <a:t>Producten</a:t>
-                      </a:r>
-                    </a:p>
-                  </a:txBody>
-                  <a:tcPr/>
-                </a:tc>
-                <a:extLst>
-                  <a:ext uri="{0D108BD9-81ED-4DB2-BD59-A6C34878D82A}">
-                    <a16:rowId xmlns:a16="http://schemas.microsoft.com/office/drawing/2014/main" val="858791041"/>
-                  </a:ext>
-                </a:extLst>
-              </a:tr>
-              <a:tr h="370840">
-                <a:tc>
-                  <a:txBody>
-                    <a:bodyPr/>
-                    <a:lstStyle/>
-                    <a:p>
-                      <a:r>
-                        <a:rPr lang="nl-NL" b="0" noProof="0" dirty="0" err="1"/>
-                        <a:t>ProductID</a:t>
-                      </a:r>
-                      <a:endParaRPr lang="nl-NL" b="0" noProof="0" dirty="0"/>
-                    </a:p>
-                  </a:txBody>
-                  <a:tcPr/>
-                </a:tc>
-                <a:extLst>
-                  <a:ext uri="{0D108BD9-81ED-4DB2-BD59-A6C34878D82A}">
-                    <a16:rowId xmlns:a16="http://schemas.microsoft.com/office/drawing/2014/main" val="1538811982"/>
-                  </a:ext>
-                </a:extLst>
-              </a:tr>
-              <a:tr h="370840">
-                <a:tc>
-                  <a:txBody>
-                    <a:bodyPr/>
-                    <a:lstStyle/>
-                    <a:p>
-                      <a:r>
-                        <a:rPr lang="nl-NL" noProof="0" dirty="0"/>
-                        <a:t>Naam</a:t>
-                      </a:r>
-                    </a:p>
-                  </a:txBody>
-                  <a:tcPr/>
-                </a:tc>
-                <a:extLst>
-                  <a:ext uri="{0D108BD9-81ED-4DB2-BD59-A6C34878D82A}">
-                    <a16:rowId xmlns:a16="http://schemas.microsoft.com/office/drawing/2014/main" val="3674785774"/>
-                  </a:ext>
-                </a:extLst>
-              </a:tr>
-              <a:tr h="370840">
-                <a:tc>
-                  <a:txBody>
-                    <a:bodyPr/>
-                    <a:lstStyle/>
-                    <a:p>
-                      <a:r>
-                        <a:rPr lang="nl-NL" noProof="0" dirty="0"/>
-                        <a:t>Omschrijving</a:t>
-                      </a:r>
-                    </a:p>
-                  </a:txBody>
-                  <a:tcPr/>
-                </a:tc>
-                <a:extLst>
-                  <a:ext uri="{0D108BD9-81ED-4DB2-BD59-A6C34878D82A}">
-                    <a16:rowId xmlns:a16="http://schemas.microsoft.com/office/drawing/2014/main" val="2335262126"/>
-                  </a:ext>
-                </a:extLst>
-              </a:tr>
-              <a:tr h="370840">
-                <a:tc>
-                  <a:txBody>
-                    <a:bodyPr/>
-                    <a:lstStyle/>
-                    <a:p>
-                      <a:r>
-                        <a:rPr lang="nl-NL" noProof="0" dirty="0"/>
-                        <a:t>…</a:t>
-                      </a:r>
-                    </a:p>
-                  </a:txBody>
-                  <a:tcPr/>
-                </a:tc>
-                <a:extLst>
-                  <a:ext uri="{0D108BD9-81ED-4DB2-BD59-A6C34878D82A}">
-                    <a16:rowId xmlns:a16="http://schemas.microsoft.com/office/drawing/2014/main" val="2163937255"/>
-                  </a:ext>
-                </a:extLst>
-              </a:tr>
-            </a:tbl>
-          </a:graphicData>
-        </a:graphic>
-      </p:graphicFrame>
-    </p:spTree>
-    <p:extLst>
-      <p:ext uri="{BB962C8B-B14F-4D97-AF65-F5344CB8AC3E}">
-        <p14:creationId xmlns:p14="http://schemas.microsoft.com/office/powerpoint/2010/main" val="2320990652"/>
-      </p:ext>
-    </p:extLst>
-  </p:cSld>
-  <p:clrMapOvr>
-    <a:masterClrMapping/>
-  </p:clrMapOvr>
-</p:sld>
-</file>
-
-<file path=ppt/slides/slide40.xml><?xml version="1.0" encoding="utf-8"?>
+<file path=ppt/slides/slide42.xml><?xml version="1.0" encoding="utf-8"?>
 <p:sld xmlns:a="http://schemas.openxmlformats.org/drawingml/2006/main" xmlns:r="http://schemas.openxmlformats.org/officeDocument/2006/relationships" xmlns:p="http://schemas.openxmlformats.org/presentationml/2006/main">
   <p:cSld>
     <p:spTree>
@@ -26184,7 +29063,7 @@
 </p:sld>
 </file>
 
-<file path=ppt/slides/slide41.xml><?xml version="1.0" encoding="utf-8"?>
+<file path=ppt/slides/slide43.xml><?xml version="1.0" encoding="utf-8"?>
 <p:sld xmlns:a="http://schemas.openxmlformats.org/drawingml/2006/main" xmlns:r="http://schemas.openxmlformats.org/officeDocument/2006/relationships" xmlns:p="http://schemas.openxmlformats.org/presentationml/2006/main">
   <p:cSld>
     <p:spTree>
@@ -26600,7 +29479,7 @@
 </p:sld>
 </file>
 
-<file path=ppt/slides/slide42.xml><?xml version="1.0" encoding="utf-8"?>
+<file path=ppt/slides/slide44.xml><?xml version="1.0" encoding="utf-8"?>
 <p:sld xmlns:a="http://schemas.openxmlformats.org/drawingml/2006/main" xmlns:r="http://schemas.openxmlformats.org/officeDocument/2006/relationships" xmlns:p="http://schemas.openxmlformats.org/presentationml/2006/main">
   <p:cSld>
     <p:spTree>
@@ -27126,7 +30005,7 @@
 </p:sld>
 </file>
 
-<file path=ppt/slides/slide43.xml><?xml version="1.0" encoding="utf-8"?>
+<file path=ppt/slides/slide45.xml><?xml version="1.0" encoding="utf-8"?>
 <p:sld xmlns:a="http://schemas.openxmlformats.org/drawingml/2006/main" xmlns:r="http://schemas.openxmlformats.org/officeDocument/2006/relationships" xmlns:p="http://schemas.openxmlformats.org/presentationml/2006/main">
   <p:cSld>
     <p:spTree>
@@ -27644,7 +30523,7 @@
 </p:sld>
 </file>
 
-<file path=ppt/slides/slide44.xml><?xml version="1.0" encoding="utf-8"?>
+<file path=ppt/slides/slide46.xml><?xml version="1.0" encoding="utf-8"?>
 <p:sld xmlns:a="http://schemas.openxmlformats.org/drawingml/2006/main" xmlns:r="http://schemas.openxmlformats.org/officeDocument/2006/relationships" xmlns:p="http://schemas.openxmlformats.org/presentationml/2006/main">
   <p:cSld>
     <p:spTree>
@@ -28149,7 +31028,7 @@
 </p:sld>
 </file>
 
-<file path=ppt/slides/slide45.xml><?xml version="1.0" encoding="utf-8"?>
+<file path=ppt/slides/slide47.xml><?xml version="1.0" encoding="utf-8"?>
 <p:sld xmlns:a="http://schemas.openxmlformats.org/drawingml/2006/main" xmlns:r="http://schemas.openxmlformats.org/officeDocument/2006/relationships" xmlns:p="http://schemas.openxmlformats.org/presentationml/2006/main">
   <p:cSld>
     <p:spTree>
@@ -28720,7 +31599,7 @@
 </p:sld>
 </file>
 
-<file path=ppt/slides/slide46.xml><?xml version="1.0" encoding="utf-8"?>
+<file path=ppt/slides/slide48.xml><?xml version="1.0" encoding="utf-8"?>
 <p:sld xmlns:a="http://schemas.openxmlformats.org/drawingml/2006/main" xmlns:r="http://schemas.openxmlformats.org/officeDocument/2006/relationships" xmlns:p="http://schemas.openxmlformats.org/presentationml/2006/main">
   <p:cSld>
     <p:spTree>
@@ -29298,7 +32177,7 @@
 </p:sld>
 </file>
 
-<file path=ppt/slides/slide47.xml><?xml version="1.0" encoding="utf-8"?>
+<file path=ppt/slides/slide49.xml><?xml version="1.0" encoding="utf-8"?>
 <p:sld xmlns:a="http://schemas.openxmlformats.org/drawingml/2006/main" xmlns:r="http://schemas.openxmlformats.org/officeDocument/2006/relationships" xmlns:p="http://schemas.openxmlformats.org/presentationml/2006/main">
   <p:cSld>
     <p:spTree>
@@ -29472,7 +32351,625 @@
 </p:sld>
 </file>
 
-<file path=ppt/slides/slide48.xml><?xml version="1.0" encoding="utf-8"?>
+<file path=ppt/slides/slide5.xml><?xml version="1.0" encoding="utf-8"?>
+<p:sld xmlns:a="http://schemas.openxmlformats.org/drawingml/2006/main" xmlns:r="http://schemas.openxmlformats.org/officeDocument/2006/relationships" xmlns:p="http://schemas.openxmlformats.org/presentationml/2006/main">
+  <p:cSld>
+    <p:spTree>
+      <p:nvGrpSpPr>
+        <p:cNvPr id="1" name="">
+          <a:extLst>
+            <a:ext uri="{FF2B5EF4-FFF2-40B4-BE49-F238E27FC236}">
+              <a16:creationId xmlns:a16="http://schemas.microsoft.com/office/drawing/2014/main" id="{BAC1D7E4-E4E1-DB28-2480-0E438C0A0045}"/>
+            </a:ext>
+          </a:extLst>
+        </p:cNvPr>
+        <p:cNvGrpSpPr/>
+        <p:nvPr/>
+      </p:nvGrpSpPr>
+      <p:grpSpPr>
+        <a:xfrm>
+          <a:off x="0" y="0"/>
+          <a:ext cx="0" cy="0"/>
+          <a:chOff x="0" y="0"/>
+          <a:chExt cx="0" cy="0"/>
+        </a:xfrm>
+      </p:grpSpPr>
+      <p:sp>
+        <p:nvSpPr>
+          <p:cNvPr id="2" name="Title 1">
+            <a:extLst>
+              <a:ext uri="{FF2B5EF4-FFF2-40B4-BE49-F238E27FC236}">
+                <a16:creationId xmlns:a16="http://schemas.microsoft.com/office/drawing/2014/main" id="{90E2A374-A371-A319-2249-C7A3160398CE}"/>
+              </a:ext>
+            </a:extLst>
+          </p:cNvPr>
+          <p:cNvSpPr>
+            <a:spLocks noGrp="1"/>
+          </p:cNvSpPr>
+          <p:nvPr>
+            <p:ph type="title"/>
+          </p:nvPr>
+        </p:nvSpPr>
+        <p:spPr/>
+        <p:txBody>
+          <a:bodyPr>
+            <a:normAutofit/>
+          </a:bodyPr>
+          <a:lstStyle/>
+          <a:p>
+            <a:r>
+              <a:rPr lang="nl-NL" sz="3600" noProof="0" dirty="0"/>
+              <a:t>Relaties tussen entiteiten</a:t>
+            </a:r>
+          </a:p>
+        </p:txBody>
+      </p:sp>
+      <p:sp>
+        <p:nvSpPr>
+          <p:cNvPr id="3" name="Content Placeholder 2">
+            <a:extLst>
+              <a:ext uri="{FF2B5EF4-FFF2-40B4-BE49-F238E27FC236}">
+                <a16:creationId xmlns:a16="http://schemas.microsoft.com/office/drawing/2014/main" id="{A318734E-B23B-45FD-7081-B7B9CBD0F0A0}"/>
+              </a:ext>
+            </a:extLst>
+          </p:cNvPr>
+          <p:cNvSpPr>
+            <a:spLocks noGrp="1"/>
+          </p:cNvSpPr>
+          <p:nvPr>
+            <p:ph idx="1"/>
+          </p:nvPr>
+        </p:nvSpPr>
+        <p:spPr>
+          <a:xfrm>
+            <a:off x="838199" y="1825625"/>
+            <a:ext cx="10442825" cy="4351338"/>
+          </a:xfrm>
+        </p:spPr>
+        <p:txBody>
+          <a:bodyPr>
+            <a:normAutofit/>
+          </a:bodyPr>
+          <a:lstStyle/>
+          <a:p>
+            <a:pPr marL="0" indent="0">
+              <a:buNone/>
+            </a:pPr>
+            <a:r>
+              <a:rPr lang="nl-NL" sz="2000" noProof="0" dirty="0"/>
+              <a:t>Entiteiten hebben vaak relaties met andere entiteiten:</a:t>
+            </a:r>
+          </a:p>
+          <a:p>
+            <a:pPr marL="0" indent="0">
+              <a:buNone/>
+            </a:pPr>
+            <a:endParaRPr lang="nl-NL" sz="2000" noProof="0" dirty="0"/>
+          </a:p>
+          <a:p>
+            <a:pPr marL="0" indent="0">
+              <a:buNone/>
+            </a:pPr>
+            <a:endParaRPr lang="nl-NL" sz="2000" noProof="0" dirty="0"/>
+          </a:p>
+        </p:txBody>
+      </p:sp>
+      <p:graphicFrame>
+        <p:nvGraphicFramePr>
+          <p:cNvPr id="4" name="Table 5">
+            <a:extLst>
+              <a:ext uri="{FF2B5EF4-FFF2-40B4-BE49-F238E27FC236}">
+                <a16:creationId xmlns:a16="http://schemas.microsoft.com/office/drawing/2014/main" id="{AB7E13FA-9F56-DA49-FDD8-3A0AC6314395}"/>
+              </a:ext>
+            </a:extLst>
+          </p:cNvPr>
+          <p:cNvGraphicFramePr>
+            <a:graphicFrameLocks noGrp="1"/>
+          </p:cNvGraphicFramePr>
+          <p:nvPr/>
+        </p:nvGraphicFramePr>
+        <p:xfrm>
+          <a:off x="989028" y="2928721"/>
+          <a:ext cx="1820160" cy="1849120"/>
+        </p:xfrm>
+        <a:graphic>
+          <a:graphicData uri="http://schemas.openxmlformats.org/drawingml/2006/table">
+            <a:tbl>
+              <a:tblPr firstRow="1" bandRow="1">
+                <a:tableStyleId>{5C22544A-7EE6-4342-B048-85BDC9FD1C3A}</a:tableStyleId>
+              </a:tblPr>
+              <a:tblGrid>
+                <a:gridCol w="1820160">
+                  <a:extLst>
+                    <a:ext uri="{9D8B030D-6E8A-4147-A177-3AD203B41FA5}">
+                      <a16:colId xmlns:a16="http://schemas.microsoft.com/office/drawing/2014/main" val="2508677333"/>
+                    </a:ext>
+                  </a:extLst>
+                </a:gridCol>
+              </a:tblGrid>
+              <a:tr h="0">
+                <a:tc>
+                  <a:txBody>
+                    <a:bodyPr/>
+                    <a:lstStyle/>
+                    <a:p>
+                      <a:r>
+                        <a:rPr lang="nl-NL" noProof="0" dirty="0"/>
+                        <a:t>Klanten</a:t>
+                      </a:r>
+                    </a:p>
+                  </a:txBody>
+                  <a:tcPr/>
+                </a:tc>
+                <a:extLst>
+                  <a:ext uri="{0D108BD9-81ED-4DB2-BD59-A6C34878D82A}">
+                    <a16:rowId xmlns:a16="http://schemas.microsoft.com/office/drawing/2014/main" val="858791041"/>
+                  </a:ext>
+                </a:extLst>
+              </a:tr>
+              <a:tr h="370840">
+                <a:tc>
+                  <a:txBody>
+                    <a:bodyPr/>
+                    <a:lstStyle/>
+                    <a:p>
+                      <a:r>
+                        <a:rPr lang="nl-NL" b="1" noProof="0" dirty="0" err="1"/>
+                        <a:t>KlantID</a:t>
+                      </a:r>
+                      <a:endParaRPr lang="nl-NL" b="1" noProof="0" dirty="0"/>
+                    </a:p>
+                  </a:txBody>
+                  <a:tcPr/>
+                </a:tc>
+                <a:extLst>
+                  <a:ext uri="{0D108BD9-81ED-4DB2-BD59-A6C34878D82A}">
+                    <a16:rowId xmlns:a16="http://schemas.microsoft.com/office/drawing/2014/main" val="1538811982"/>
+                  </a:ext>
+                </a:extLst>
+              </a:tr>
+              <a:tr h="370840">
+                <a:tc>
+                  <a:txBody>
+                    <a:bodyPr/>
+                    <a:lstStyle/>
+                    <a:p>
+                      <a:r>
+                        <a:rPr lang="nl-NL" noProof="0" dirty="0"/>
+                        <a:t>Voornaam</a:t>
+                      </a:r>
+                    </a:p>
+                  </a:txBody>
+                  <a:tcPr/>
+                </a:tc>
+                <a:extLst>
+                  <a:ext uri="{0D108BD9-81ED-4DB2-BD59-A6C34878D82A}">
+                    <a16:rowId xmlns:a16="http://schemas.microsoft.com/office/drawing/2014/main" val="3674785774"/>
+                  </a:ext>
+                </a:extLst>
+              </a:tr>
+              <a:tr h="370840">
+                <a:tc>
+                  <a:txBody>
+                    <a:bodyPr/>
+                    <a:lstStyle/>
+                    <a:p>
+                      <a:r>
+                        <a:rPr lang="nl-NL" noProof="0" dirty="0"/>
+                        <a:t>Achternaam</a:t>
+                      </a:r>
+                    </a:p>
+                  </a:txBody>
+                  <a:tcPr/>
+                </a:tc>
+                <a:extLst>
+                  <a:ext uri="{0D108BD9-81ED-4DB2-BD59-A6C34878D82A}">
+                    <a16:rowId xmlns:a16="http://schemas.microsoft.com/office/drawing/2014/main" val="2335262126"/>
+                  </a:ext>
+                </a:extLst>
+              </a:tr>
+              <a:tr h="370840">
+                <a:tc>
+                  <a:txBody>
+                    <a:bodyPr/>
+                    <a:lstStyle/>
+                    <a:p>
+                      <a:r>
+                        <a:rPr lang="nl-NL" noProof="0" dirty="0"/>
+                        <a:t>…</a:t>
+                      </a:r>
+                    </a:p>
+                  </a:txBody>
+                  <a:tcPr/>
+                </a:tc>
+                <a:extLst>
+                  <a:ext uri="{0D108BD9-81ED-4DB2-BD59-A6C34878D82A}">
+                    <a16:rowId xmlns:a16="http://schemas.microsoft.com/office/drawing/2014/main" val="2163937255"/>
+                  </a:ext>
+                </a:extLst>
+              </a:tr>
+            </a:tbl>
+          </a:graphicData>
+        </a:graphic>
+      </p:graphicFrame>
+      <p:graphicFrame>
+        <p:nvGraphicFramePr>
+          <p:cNvPr id="5" name="Table 5">
+            <a:extLst>
+              <a:ext uri="{FF2B5EF4-FFF2-40B4-BE49-F238E27FC236}">
+                <a16:creationId xmlns:a16="http://schemas.microsoft.com/office/drawing/2014/main" id="{8F6904AC-D45A-B8CF-D155-AF22C0A79376}"/>
+              </a:ext>
+            </a:extLst>
+          </p:cNvPr>
+          <p:cNvGraphicFramePr>
+            <a:graphicFrameLocks noGrp="1"/>
+          </p:cNvGraphicFramePr>
+          <p:nvPr>
+            <p:extLst>
+              <p:ext uri="{D42A27DB-BD31-4B8C-83A1-F6EECF244321}">
+                <p14:modId xmlns:p14="http://schemas.microsoft.com/office/powerpoint/2010/main" val="3092274245"/>
+              </p:ext>
+            </p:extLst>
+          </p:nvPr>
+        </p:nvGraphicFramePr>
+        <p:xfrm>
+          <a:off x="4275840" y="2928721"/>
+          <a:ext cx="1820160" cy="1849120"/>
+        </p:xfrm>
+        <a:graphic>
+          <a:graphicData uri="http://schemas.openxmlformats.org/drawingml/2006/table">
+            <a:tbl>
+              <a:tblPr firstRow="1" bandRow="1">
+                <a:tableStyleId>{5C22544A-7EE6-4342-B048-85BDC9FD1C3A}</a:tableStyleId>
+              </a:tblPr>
+              <a:tblGrid>
+                <a:gridCol w="1820160">
+                  <a:extLst>
+                    <a:ext uri="{9D8B030D-6E8A-4147-A177-3AD203B41FA5}">
+                      <a16:colId xmlns:a16="http://schemas.microsoft.com/office/drawing/2014/main" val="2508677333"/>
+                    </a:ext>
+                  </a:extLst>
+                </a:gridCol>
+              </a:tblGrid>
+              <a:tr h="0">
+                <a:tc>
+                  <a:txBody>
+                    <a:bodyPr/>
+                    <a:lstStyle/>
+                    <a:p>
+                      <a:r>
+                        <a:rPr lang="nl-NL" noProof="0" dirty="0"/>
+                        <a:t>Transacties</a:t>
+                      </a:r>
+                    </a:p>
+                  </a:txBody>
+                  <a:tcPr/>
+                </a:tc>
+                <a:extLst>
+                  <a:ext uri="{0D108BD9-81ED-4DB2-BD59-A6C34878D82A}">
+                    <a16:rowId xmlns:a16="http://schemas.microsoft.com/office/drawing/2014/main" val="858791041"/>
+                  </a:ext>
+                </a:extLst>
+              </a:tr>
+              <a:tr h="370840">
+                <a:tc>
+                  <a:txBody>
+                    <a:bodyPr/>
+                    <a:lstStyle/>
+                    <a:p>
+                      <a:r>
+                        <a:rPr lang="nl-NL" b="1" noProof="0" dirty="0" err="1"/>
+                        <a:t>KlantID</a:t>
+                      </a:r>
+                      <a:endParaRPr lang="nl-NL" b="1" noProof="0" dirty="0"/>
+                    </a:p>
+                  </a:txBody>
+                  <a:tcPr/>
+                </a:tc>
+                <a:extLst>
+                  <a:ext uri="{0D108BD9-81ED-4DB2-BD59-A6C34878D82A}">
+                    <a16:rowId xmlns:a16="http://schemas.microsoft.com/office/drawing/2014/main" val="1538811982"/>
+                  </a:ext>
+                </a:extLst>
+              </a:tr>
+              <a:tr h="370840">
+                <a:tc>
+                  <a:txBody>
+                    <a:bodyPr/>
+                    <a:lstStyle/>
+                    <a:p>
+                      <a:r>
+                        <a:rPr lang="nl-NL" b="1" noProof="0" dirty="0" err="1"/>
+                        <a:t>ProductID</a:t>
+                      </a:r>
+                      <a:endParaRPr lang="nl-NL" b="1" noProof="0" dirty="0"/>
+                    </a:p>
+                  </a:txBody>
+                  <a:tcPr/>
+                </a:tc>
+                <a:extLst>
+                  <a:ext uri="{0D108BD9-81ED-4DB2-BD59-A6C34878D82A}">
+                    <a16:rowId xmlns:a16="http://schemas.microsoft.com/office/drawing/2014/main" val="3674785774"/>
+                  </a:ext>
+                </a:extLst>
+              </a:tr>
+              <a:tr h="370840">
+                <a:tc>
+                  <a:txBody>
+                    <a:bodyPr/>
+                    <a:lstStyle/>
+                    <a:p>
+                      <a:r>
+                        <a:rPr lang="nl-NL" noProof="0" dirty="0" err="1"/>
+                        <a:t>DatumTijd</a:t>
+                      </a:r>
+                      <a:endParaRPr lang="nl-NL" noProof="0" dirty="0"/>
+                    </a:p>
+                  </a:txBody>
+                  <a:tcPr/>
+                </a:tc>
+                <a:extLst>
+                  <a:ext uri="{0D108BD9-81ED-4DB2-BD59-A6C34878D82A}">
+                    <a16:rowId xmlns:a16="http://schemas.microsoft.com/office/drawing/2014/main" val="2335262126"/>
+                  </a:ext>
+                </a:extLst>
+              </a:tr>
+              <a:tr h="370840">
+                <a:tc>
+                  <a:txBody>
+                    <a:bodyPr/>
+                    <a:lstStyle/>
+                    <a:p>
+                      <a:r>
+                        <a:rPr lang="nl-NL" noProof="0" dirty="0"/>
+                        <a:t>…</a:t>
+                      </a:r>
+                    </a:p>
+                  </a:txBody>
+                  <a:tcPr/>
+                </a:tc>
+                <a:extLst>
+                  <a:ext uri="{0D108BD9-81ED-4DB2-BD59-A6C34878D82A}">
+                    <a16:rowId xmlns:a16="http://schemas.microsoft.com/office/drawing/2014/main" val="2163937255"/>
+                  </a:ext>
+                </a:extLst>
+              </a:tr>
+            </a:tbl>
+          </a:graphicData>
+        </a:graphic>
+      </p:graphicFrame>
+      <p:graphicFrame>
+        <p:nvGraphicFramePr>
+          <p:cNvPr id="8" name="Table 5">
+            <a:extLst>
+              <a:ext uri="{FF2B5EF4-FFF2-40B4-BE49-F238E27FC236}">
+                <a16:creationId xmlns:a16="http://schemas.microsoft.com/office/drawing/2014/main" id="{72D15F22-FBB5-9119-44F4-975437D91939}"/>
+              </a:ext>
+            </a:extLst>
+          </p:cNvPr>
+          <p:cNvGraphicFramePr>
+            <a:graphicFrameLocks noGrp="1"/>
+          </p:cNvGraphicFramePr>
+          <p:nvPr/>
+        </p:nvGraphicFramePr>
+        <p:xfrm>
+          <a:off x="7562652" y="2928721"/>
+          <a:ext cx="1820160" cy="1849120"/>
+        </p:xfrm>
+        <a:graphic>
+          <a:graphicData uri="http://schemas.openxmlformats.org/drawingml/2006/table">
+            <a:tbl>
+              <a:tblPr firstRow="1" bandRow="1">
+                <a:tableStyleId>{5C22544A-7EE6-4342-B048-85BDC9FD1C3A}</a:tableStyleId>
+              </a:tblPr>
+              <a:tblGrid>
+                <a:gridCol w="1820160">
+                  <a:extLst>
+                    <a:ext uri="{9D8B030D-6E8A-4147-A177-3AD203B41FA5}">
+                      <a16:colId xmlns:a16="http://schemas.microsoft.com/office/drawing/2014/main" val="2508677333"/>
+                    </a:ext>
+                  </a:extLst>
+                </a:gridCol>
+              </a:tblGrid>
+              <a:tr h="0">
+                <a:tc>
+                  <a:txBody>
+                    <a:bodyPr/>
+                    <a:lstStyle/>
+                    <a:p>
+                      <a:r>
+                        <a:rPr lang="nl-NL" noProof="0" dirty="0"/>
+                        <a:t>Producten</a:t>
+                      </a:r>
+                    </a:p>
+                  </a:txBody>
+                  <a:tcPr/>
+                </a:tc>
+                <a:extLst>
+                  <a:ext uri="{0D108BD9-81ED-4DB2-BD59-A6C34878D82A}">
+                    <a16:rowId xmlns:a16="http://schemas.microsoft.com/office/drawing/2014/main" val="858791041"/>
+                  </a:ext>
+                </a:extLst>
+              </a:tr>
+              <a:tr h="370840">
+                <a:tc>
+                  <a:txBody>
+                    <a:bodyPr/>
+                    <a:lstStyle/>
+                    <a:p>
+                      <a:r>
+                        <a:rPr lang="nl-NL" b="1" noProof="0" dirty="0" err="1"/>
+                        <a:t>ProductID</a:t>
+                      </a:r>
+                      <a:endParaRPr lang="nl-NL" b="1" noProof="0" dirty="0"/>
+                    </a:p>
+                  </a:txBody>
+                  <a:tcPr/>
+                </a:tc>
+                <a:extLst>
+                  <a:ext uri="{0D108BD9-81ED-4DB2-BD59-A6C34878D82A}">
+                    <a16:rowId xmlns:a16="http://schemas.microsoft.com/office/drawing/2014/main" val="1538811982"/>
+                  </a:ext>
+                </a:extLst>
+              </a:tr>
+              <a:tr h="370840">
+                <a:tc>
+                  <a:txBody>
+                    <a:bodyPr/>
+                    <a:lstStyle/>
+                    <a:p>
+                      <a:r>
+                        <a:rPr lang="nl-NL" noProof="0" dirty="0"/>
+                        <a:t>Naam</a:t>
+                      </a:r>
+                    </a:p>
+                  </a:txBody>
+                  <a:tcPr/>
+                </a:tc>
+                <a:extLst>
+                  <a:ext uri="{0D108BD9-81ED-4DB2-BD59-A6C34878D82A}">
+                    <a16:rowId xmlns:a16="http://schemas.microsoft.com/office/drawing/2014/main" val="3674785774"/>
+                  </a:ext>
+                </a:extLst>
+              </a:tr>
+              <a:tr h="370840">
+                <a:tc>
+                  <a:txBody>
+                    <a:bodyPr/>
+                    <a:lstStyle/>
+                    <a:p>
+                      <a:r>
+                        <a:rPr lang="nl-NL" noProof="0" dirty="0"/>
+                        <a:t>Omschrijving</a:t>
+                      </a:r>
+                    </a:p>
+                  </a:txBody>
+                  <a:tcPr/>
+                </a:tc>
+                <a:extLst>
+                  <a:ext uri="{0D108BD9-81ED-4DB2-BD59-A6C34878D82A}">
+                    <a16:rowId xmlns:a16="http://schemas.microsoft.com/office/drawing/2014/main" val="2335262126"/>
+                  </a:ext>
+                </a:extLst>
+              </a:tr>
+              <a:tr h="370840">
+                <a:tc>
+                  <a:txBody>
+                    <a:bodyPr/>
+                    <a:lstStyle/>
+                    <a:p>
+                      <a:r>
+                        <a:rPr lang="nl-NL" noProof="0" dirty="0"/>
+                        <a:t>…</a:t>
+                      </a:r>
+                    </a:p>
+                  </a:txBody>
+                  <a:tcPr/>
+                </a:tc>
+                <a:extLst>
+                  <a:ext uri="{0D108BD9-81ED-4DB2-BD59-A6C34878D82A}">
+                    <a16:rowId xmlns:a16="http://schemas.microsoft.com/office/drawing/2014/main" val="2163937255"/>
+                  </a:ext>
+                </a:extLst>
+              </a:tr>
+            </a:tbl>
+          </a:graphicData>
+        </a:graphic>
+      </p:graphicFrame>
+      <p:cxnSp>
+        <p:nvCxnSpPr>
+          <p:cNvPr id="14" name="Straight Arrow Connector 13">
+            <a:extLst>
+              <a:ext uri="{FF2B5EF4-FFF2-40B4-BE49-F238E27FC236}">
+                <a16:creationId xmlns:a16="http://schemas.microsoft.com/office/drawing/2014/main" id="{8C5CE9CE-1036-311F-D491-F8E252E57D9B}"/>
+              </a:ext>
+            </a:extLst>
+          </p:cNvPr>
+          <p:cNvCxnSpPr/>
+          <p:nvPr/>
+        </p:nvCxnSpPr>
+        <p:spPr>
+          <a:xfrm>
+            <a:off x="2809188" y="3476135"/>
+            <a:ext cx="1466652" cy="0"/>
+          </a:xfrm>
+          <a:prstGeom prst="straightConnector1">
+            <a:avLst/>
+          </a:prstGeom>
+          <a:ln>
+            <a:headEnd type="triangle"/>
+            <a:tailEnd type="triangle"/>
+          </a:ln>
+        </p:spPr>
+        <p:style>
+          <a:lnRef idx="3">
+            <a:schemeClr val="dk1"/>
+          </a:lnRef>
+          <a:fillRef idx="0">
+            <a:schemeClr val="dk1"/>
+          </a:fillRef>
+          <a:effectRef idx="2">
+            <a:schemeClr val="dk1"/>
+          </a:effectRef>
+          <a:fontRef idx="minor">
+            <a:schemeClr val="tx1"/>
+          </a:fontRef>
+        </p:style>
+      </p:cxnSp>
+      <p:cxnSp>
+        <p:nvCxnSpPr>
+          <p:cNvPr id="17" name="Connector: Elbow 16">
+            <a:extLst>
+              <a:ext uri="{FF2B5EF4-FFF2-40B4-BE49-F238E27FC236}">
+                <a16:creationId xmlns:a16="http://schemas.microsoft.com/office/drawing/2014/main" id="{F4EEBDFA-2050-55B2-A4F3-A02F5C160EC2}"/>
+              </a:ext>
+            </a:extLst>
+          </p:cNvPr>
+          <p:cNvCxnSpPr/>
+          <p:nvPr/>
+        </p:nvCxnSpPr>
+        <p:spPr>
+          <a:xfrm flipV="1">
+            <a:off x="6096000" y="3476135"/>
+            <a:ext cx="1466652" cy="377146"/>
+          </a:xfrm>
+          <a:prstGeom prst="bentConnector3">
+            <a:avLst/>
+          </a:prstGeom>
+          <a:ln>
+            <a:headEnd type="triangle"/>
+            <a:tailEnd type="triangle"/>
+          </a:ln>
+        </p:spPr>
+        <p:style>
+          <a:lnRef idx="3">
+            <a:schemeClr val="dk1"/>
+          </a:lnRef>
+          <a:fillRef idx="0">
+            <a:schemeClr val="dk1"/>
+          </a:fillRef>
+          <a:effectRef idx="2">
+            <a:schemeClr val="dk1"/>
+          </a:effectRef>
+          <a:fontRef idx="minor">
+            <a:schemeClr val="tx1"/>
+          </a:fontRef>
+        </p:style>
+      </p:cxnSp>
+    </p:spTree>
+    <p:extLst>
+      <p:ext uri="{BB962C8B-B14F-4D97-AF65-F5344CB8AC3E}">
+        <p14:creationId xmlns:p14="http://schemas.microsoft.com/office/powerpoint/2010/main" val="1500158407"/>
+      </p:ext>
+    </p:extLst>
+  </p:cSld>
+  <p:clrMapOvr>
+    <a:masterClrMapping/>
+  </p:clrMapOvr>
+</p:sld>
+</file>
+
+<file path=ppt/slides/slide50.xml><?xml version="1.0" encoding="utf-8"?>
 <p:sld xmlns:a="http://schemas.openxmlformats.org/drawingml/2006/main" xmlns:r="http://schemas.openxmlformats.org/officeDocument/2006/relationships" xmlns:p="http://schemas.openxmlformats.org/presentationml/2006/main">
   <p:cSld>
     <p:spTree>
@@ -30837,7 +34334,7 @@
 </p:sld>
 </file>
 
-<file path=ppt/slides/slide49.xml><?xml version="1.0" encoding="utf-8"?>
+<file path=ppt/slides/slide51.xml><?xml version="1.0" encoding="utf-8"?>
 <p:sld xmlns:a="http://schemas.openxmlformats.org/drawingml/2006/main" xmlns:r="http://schemas.openxmlformats.org/officeDocument/2006/relationships" xmlns:p="http://schemas.openxmlformats.org/presentationml/2006/main">
   <p:cSld>
     <p:spTree>
@@ -31580,618 +35077,7 @@
 </p:sld>
 </file>
 
-<file path=ppt/slides/slide5.xml><?xml version="1.0" encoding="utf-8"?>
-<p:sld xmlns:a="http://schemas.openxmlformats.org/drawingml/2006/main" xmlns:r="http://schemas.openxmlformats.org/officeDocument/2006/relationships" xmlns:p="http://schemas.openxmlformats.org/presentationml/2006/main">
-  <p:cSld>
-    <p:spTree>
-      <p:nvGrpSpPr>
-        <p:cNvPr id="1" name="">
-          <a:extLst>
-            <a:ext uri="{FF2B5EF4-FFF2-40B4-BE49-F238E27FC236}">
-              <a16:creationId xmlns:a16="http://schemas.microsoft.com/office/drawing/2014/main" id="{BAC1D7E4-E4E1-DB28-2480-0E438C0A0045}"/>
-            </a:ext>
-          </a:extLst>
-        </p:cNvPr>
-        <p:cNvGrpSpPr/>
-        <p:nvPr/>
-      </p:nvGrpSpPr>
-      <p:grpSpPr>
-        <a:xfrm>
-          <a:off x="0" y="0"/>
-          <a:ext cx="0" cy="0"/>
-          <a:chOff x="0" y="0"/>
-          <a:chExt cx="0" cy="0"/>
-        </a:xfrm>
-      </p:grpSpPr>
-      <p:sp>
-        <p:nvSpPr>
-          <p:cNvPr id="2" name="Title 1">
-            <a:extLst>
-              <a:ext uri="{FF2B5EF4-FFF2-40B4-BE49-F238E27FC236}">
-                <a16:creationId xmlns:a16="http://schemas.microsoft.com/office/drawing/2014/main" id="{90E2A374-A371-A319-2249-C7A3160398CE}"/>
-              </a:ext>
-            </a:extLst>
-          </p:cNvPr>
-          <p:cNvSpPr>
-            <a:spLocks noGrp="1"/>
-          </p:cNvSpPr>
-          <p:nvPr>
-            <p:ph type="title"/>
-          </p:nvPr>
-        </p:nvSpPr>
-        <p:spPr/>
-        <p:txBody>
-          <a:bodyPr>
-            <a:normAutofit/>
-          </a:bodyPr>
-          <a:lstStyle/>
-          <a:p>
-            <a:r>
-              <a:rPr lang="nl-NL" sz="3600" noProof="0" dirty="0"/>
-              <a:t>Relaties tussen entiteiten</a:t>
-            </a:r>
-          </a:p>
-        </p:txBody>
-      </p:sp>
-      <p:sp>
-        <p:nvSpPr>
-          <p:cNvPr id="3" name="Content Placeholder 2">
-            <a:extLst>
-              <a:ext uri="{FF2B5EF4-FFF2-40B4-BE49-F238E27FC236}">
-                <a16:creationId xmlns:a16="http://schemas.microsoft.com/office/drawing/2014/main" id="{A318734E-B23B-45FD-7081-B7B9CBD0F0A0}"/>
-              </a:ext>
-            </a:extLst>
-          </p:cNvPr>
-          <p:cNvSpPr>
-            <a:spLocks noGrp="1"/>
-          </p:cNvSpPr>
-          <p:nvPr>
-            <p:ph idx="1"/>
-          </p:nvPr>
-        </p:nvSpPr>
-        <p:spPr>
-          <a:xfrm>
-            <a:off x="838199" y="1825625"/>
-            <a:ext cx="10442825" cy="4351338"/>
-          </a:xfrm>
-        </p:spPr>
-        <p:txBody>
-          <a:bodyPr>
-            <a:normAutofit/>
-          </a:bodyPr>
-          <a:lstStyle/>
-          <a:p>
-            <a:pPr marL="0" indent="0">
-              <a:buNone/>
-            </a:pPr>
-            <a:r>
-              <a:rPr lang="nl-NL" sz="2000" noProof="0" dirty="0"/>
-              <a:t>Entiteiten hebben vaak relaties met andere entiteiten:</a:t>
-            </a:r>
-          </a:p>
-          <a:p>
-            <a:pPr marL="0" indent="0">
-              <a:buNone/>
-            </a:pPr>
-            <a:endParaRPr lang="nl-NL" sz="2000" noProof="0" dirty="0"/>
-          </a:p>
-          <a:p>
-            <a:pPr marL="0" indent="0">
-              <a:buNone/>
-            </a:pPr>
-            <a:endParaRPr lang="nl-NL" sz="2000" noProof="0" dirty="0"/>
-          </a:p>
-        </p:txBody>
-      </p:sp>
-      <p:graphicFrame>
-        <p:nvGraphicFramePr>
-          <p:cNvPr id="4" name="Table 5">
-            <a:extLst>
-              <a:ext uri="{FF2B5EF4-FFF2-40B4-BE49-F238E27FC236}">
-                <a16:creationId xmlns:a16="http://schemas.microsoft.com/office/drawing/2014/main" id="{AB7E13FA-9F56-DA49-FDD8-3A0AC6314395}"/>
-              </a:ext>
-            </a:extLst>
-          </p:cNvPr>
-          <p:cNvGraphicFramePr>
-            <a:graphicFrameLocks noGrp="1"/>
-          </p:cNvGraphicFramePr>
-          <p:nvPr/>
-        </p:nvGraphicFramePr>
-        <p:xfrm>
-          <a:off x="989028" y="2928721"/>
-          <a:ext cx="1820160" cy="1849120"/>
-        </p:xfrm>
-        <a:graphic>
-          <a:graphicData uri="http://schemas.openxmlformats.org/drawingml/2006/table">
-            <a:tbl>
-              <a:tblPr firstRow="1" bandRow="1">
-                <a:tableStyleId>{5C22544A-7EE6-4342-B048-85BDC9FD1C3A}</a:tableStyleId>
-              </a:tblPr>
-              <a:tblGrid>
-                <a:gridCol w="1820160">
-                  <a:extLst>
-                    <a:ext uri="{9D8B030D-6E8A-4147-A177-3AD203B41FA5}">
-                      <a16:colId xmlns:a16="http://schemas.microsoft.com/office/drawing/2014/main" val="2508677333"/>
-                    </a:ext>
-                  </a:extLst>
-                </a:gridCol>
-              </a:tblGrid>
-              <a:tr h="0">
-                <a:tc>
-                  <a:txBody>
-                    <a:bodyPr/>
-                    <a:lstStyle/>
-                    <a:p>
-                      <a:r>
-                        <a:rPr lang="nl-NL" noProof="0" dirty="0"/>
-                        <a:t>Klanten</a:t>
-                      </a:r>
-                    </a:p>
-                  </a:txBody>
-                  <a:tcPr/>
-                </a:tc>
-                <a:extLst>
-                  <a:ext uri="{0D108BD9-81ED-4DB2-BD59-A6C34878D82A}">
-                    <a16:rowId xmlns:a16="http://schemas.microsoft.com/office/drawing/2014/main" val="858791041"/>
-                  </a:ext>
-                </a:extLst>
-              </a:tr>
-              <a:tr h="370840">
-                <a:tc>
-                  <a:txBody>
-                    <a:bodyPr/>
-                    <a:lstStyle/>
-                    <a:p>
-                      <a:r>
-                        <a:rPr lang="nl-NL" b="1" noProof="0" dirty="0" err="1"/>
-                        <a:t>KlantID</a:t>
-                      </a:r>
-                      <a:endParaRPr lang="nl-NL" b="1" noProof="0" dirty="0"/>
-                    </a:p>
-                  </a:txBody>
-                  <a:tcPr/>
-                </a:tc>
-                <a:extLst>
-                  <a:ext uri="{0D108BD9-81ED-4DB2-BD59-A6C34878D82A}">
-                    <a16:rowId xmlns:a16="http://schemas.microsoft.com/office/drawing/2014/main" val="1538811982"/>
-                  </a:ext>
-                </a:extLst>
-              </a:tr>
-              <a:tr h="370840">
-                <a:tc>
-                  <a:txBody>
-                    <a:bodyPr/>
-                    <a:lstStyle/>
-                    <a:p>
-                      <a:r>
-                        <a:rPr lang="nl-NL" noProof="0" dirty="0"/>
-                        <a:t>Voornaam</a:t>
-                      </a:r>
-                    </a:p>
-                  </a:txBody>
-                  <a:tcPr/>
-                </a:tc>
-                <a:extLst>
-                  <a:ext uri="{0D108BD9-81ED-4DB2-BD59-A6C34878D82A}">
-                    <a16:rowId xmlns:a16="http://schemas.microsoft.com/office/drawing/2014/main" val="3674785774"/>
-                  </a:ext>
-                </a:extLst>
-              </a:tr>
-              <a:tr h="370840">
-                <a:tc>
-                  <a:txBody>
-                    <a:bodyPr/>
-                    <a:lstStyle/>
-                    <a:p>
-                      <a:r>
-                        <a:rPr lang="nl-NL" noProof="0" dirty="0"/>
-                        <a:t>Achternaam</a:t>
-                      </a:r>
-                    </a:p>
-                  </a:txBody>
-                  <a:tcPr/>
-                </a:tc>
-                <a:extLst>
-                  <a:ext uri="{0D108BD9-81ED-4DB2-BD59-A6C34878D82A}">
-                    <a16:rowId xmlns:a16="http://schemas.microsoft.com/office/drawing/2014/main" val="2335262126"/>
-                  </a:ext>
-                </a:extLst>
-              </a:tr>
-              <a:tr h="370840">
-                <a:tc>
-                  <a:txBody>
-                    <a:bodyPr/>
-                    <a:lstStyle/>
-                    <a:p>
-                      <a:r>
-                        <a:rPr lang="nl-NL" noProof="0" dirty="0"/>
-                        <a:t>…</a:t>
-                      </a:r>
-                    </a:p>
-                  </a:txBody>
-                  <a:tcPr/>
-                </a:tc>
-                <a:extLst>
-                  <a:ext uri="{0D108BD9-81ED-4DB2-BD59-A6C34878D82A}">
-                    <a16:rowId xmlns:a16="http://schemas.microsoft.com/office/drawing/2014/main" val="2163937255"/>
-                  </a:ext>
-                </a:extLst>
-              </a:tr>
-            </a:tbl>
-          </a:graphicData>
-        </a:graphic>
-      </p:graphicFrame>
-      <p:graphicFrame>
-        <p:nvGraphicFramePr>
-          <p:cNvPr id="5" name="Table 5">
-            <a:extLst>
-              <a:ext uri="{FF2B5EF4-FFF2-40B4-BE49-F238E27FC236}">
-                <a16:creationId xmlns:a16="http://schemas.microsoft.com/office/drawing/2014/main" id="{8F6904AC-D45A-B8CF-D155-AF22C0A79376}"/>
-              </a:ext>
-            </a:extLst>
-          </p:cNvPr>
-          <p:cNvGraphicFramePr>
-            <a:graphicFrameLocks noGrp="1"/>
-          </p:cNvGraphicFramePr>
-          <p:nvPr/>
-        </p:nvGraphicFramePr>
-        <p:xfrm>
-          <a:off x="4275840" y="2928721"/>
-          <a:ext cx="1820160" cy="1849120"/>
-        </p:xfrm>
-        <a:graphic>
-          <a:graphicData uri="http://schemas.openxmlformats.org/drawingml/2006/table">
-            <a:tbl>
-              <a:tblPr firstRow="1" bandRow="1">
-                <a:tableStyleId>{5C22544A-7EE6-4342-B048-85BDC9FD1C3A}</a:tableStyleId>
-              </a:tblPr>
-              <a:tblGrid>
-                <a:gridCol w="1820160">
-                  <a:extLst>
-                    <a:ext uri="{9D8B030D-6E8A-4147-A177-3AD203B41FA5}">
-                      <a16:colId xmlns:a16="http://schemas.microsoft.com/office/drawing/2014/main" val="2508677333"/>
-                    </a:ext>
-                  </a:extLst>
-                </a:gridCol>
-              </a:tblGrid>
-              <a:tr h="0">
-                <a:tc>
-                  <a:txBody>
-                    <a:bodyPr/>
-                    <a:lstStyle/>
-                    <a:p>
-                      <a:r>
-                        <a:rPr lang="nl-NL" noProof="0" dirty="0"/>
-                        <a:t>Transacties</a:t>
-                      </a:r>
-                    </a:p>
-                  </a:txBody>
-                  <a:tcPr/>
-                </a:tc>
-                <a:extLst>
-                  <a:ext uri="{0D108BD9-81ED-4DB2-BD59-A6C34878D82A}">
-                    <a16:rowId xmlns:a16="http://schemas.microsoft.com/office/drawing/2014/main" val="858791041"/>
-                  </a:ext>
-                </a:extLst>
-              </a:tr>
-              <a:tr h="370840">
-                <a:tc>
-                  <a:txBody>
-                    <a:bodyPr/>
-                    <a:lstStyle/>
-                    <a:p>
-                      <a:r>
-                        <a:rPr lang="nl-NL" b="1" noProof="0" dirty="0" err="1"/>
-                        <a:t>KlantID</a:t>
-                      </a:r>
-                      <a:endParaRPr lang="nl-NL" b="1" noProof="0" dirty="0"/>
-                    </a:p>
-                  </a:txBody>
-                  <a:tcPr/>
-                </a:tc>
-                <a:extLst>
-                  <a:ext uri="{0D108BD9-81ED-4DB2-BD59-A6C34878D82A}">
-                    <a16:rowId xmlns:a16="http://schemas.microsoft.com/office/drawing/2014/main" val="1538811982"/>
-                  </a:ext>
-                </a:extLst>
-              </a:tr>
-              <a:tr h="370840">
-                <a:tc>
-                  <a:txBody>
-                    <a:bodyPr/>
-                    <a:lstStyle/>
-                    <a:p>
-                      <a:r>
-                        <a:rPr lang="nl-NL" b="1" noProof="0" dirty="0" err="1"/>
-                        <a:t>ProductID</a:t>
-                      </a:r>
-                      <a:endParaRPr lang="nl-NL" b="1" noProof="0" dirty="0"/>
-                    </a:p>
-                  </a:txBody>
-                  <a:tcPr/>
-                </a:tc>
-                <a:extLst>
-                  <a:ext uri="{0D108BD9-81ED-4DB2-BD59-A6C34878D82A}">
-                    <a16:rowId xmlns:a16="http://schemas.microsoft.com/office/drawing/2014/main" val="3674785774"/>
-                  </a:ext>
-                </a:extLst>
-              </a:tr>
-              <a:tr h="370840">
-                <a:tc>
-                  <a:txBody>
-                    <a:bodyPr/>
-                    <a:lstStyle/>
-                    <a:p>
-                      <a:r>
-                        <a:rPr lang="nl-NL" noProof="0" dirty="0"/>
-                        <a:t>Aantal</a:t>
-                      </a:r>
-                    </a:p>
-                  </a:txBody>
-                  <a:tcPr/>
-                </a:tc>
-                <a:extLst>
-                  <a:ext uri="{0D108BD9-81ED-4DB2-BD59-A6C34878D82A}">
-                    <a16:rowId xmlns:a16="http://schemas.microsoft.com/office/drawing/2014/main" val="2335262126"/>
-                  </a:ext>
-                </a:extLst>
-              </a:tr>
-              <a:tr h="370840">
-                <a:tc>
-                  <a:txBody>
-                    <a:bodyPr/>
-                    <a:lstStyle/>
-                    <a:p>
-                      <a:r>
-                        <a:rPr lang="nl-NL" noProof="0" dirty="0"/>
-                        <a:t>…</a:t>
-                      </a:r>
-                    </a:p>
-                  </a:txBody>
-                  <a:tcPr/>
-                </a:tc>
-                <a:extLst>
-                  <a:ext uri="{0D108BD9-81ED-4DB2-BD59-A6C34878D82A}">
-                    <a16:rowId xmlns:a16="http://schemas.microsoft.com/office/drawing/2014/main" val="2163937255"/>
-                  </a:ext>
-                </a:extLst>
-              </a:tr>
-            </a:tbl>
-          </a:graphicData>
-        </a:graphic>
-      </p:graphicFrame>
-      <p:graphicFrame>
-        <p:nvGraphicFramePr>
-          <p:cNvPr id="8" name="Table 5">
-            <a:extLst>
-              <a:ext uri="{FF2B5EF4-FFF2-40B4-BE49-F238E27FC236}">
-                <a16:creationId xmlns:a16="http://schemas.microsoft.com/office/drawing/2014/main" id="{72D15F22-FBB5-9119-44F4-975437D91939}"/>
-              </a:ext>
-            </a:extLst>
-          </p:cNvPr>
-          <p:cNvGraphicFramePr>
-            <a:graphicFrameLocks noGrp="1"/>
-          </p:cNvGraphicFramePr>
-          <p:nvPr/>
-        </p:nvGraphicFramePr>
-        <p:xfrm>
-          <a:off x="7562652" y="2928721"/>
-          <a:ext cx="1820160" cy="1849120"/>
-        </p:xfrm>
-        <a:graphic>
-          <a:graphicData uri="http://schemas.openxmlformats.org/drawingml/2006/table">
-            <a:tbl>
-              <a:tblPr firstRow="1" bandRow="1">
-                <a:tableStyleId>{5C22544A-7EE6-4342-B048-85BDC9FD1C3A}</a:tableStyleId>
-              </a:tblPr>
-              <a:tblGrid>
-                <a:gridCol w="1820160">
-                  <a:extLst>
-                    <a:ext uri="{9D8B030D-6E8A-4147-A177-3AD203B41FA5}">
-                      <a16:colId xmlns:a16="http://schemas.microsoft.com/office/drawing/2014/main" val="2508677333"/>
-                    </a:ext>
-                  </a:extLst>
-                </a:gridCol>
-              </a:tblGrid>
-              <a:tr h="0">
-                <a:tc>
-                  <a:txBody>
-                    <a:bodyPr/>
-                    <a:lstStyle/>
-                    <a:p>
-                      <a:r>
-                        <a:rPr lang="nl-NL" noProof="0" dirty="0"/>
-                        <a:t>Producten</a:t>
-                      </a:r>
-                    </a:p>
-                  </a:txBody>
-                  <a:tcPr/>
-                </a:tc>
-                <a:extLst>
-                  <a:ext uri="{0D108BD9-81ED-4DB2-BD59-A6C34878D82A}">
-                    <a16:rowId xmlns:a16="http://schemas.microsoft.com/office/drawing/2014/main" val="858791041"/>
-                  </a:ext>
-                </a:extLst>
-              </a:tr>
-              <a:tr h="370840">
-                <a:tc>
-                  <a:txBody>
-                    <a:bodyPr/>
-                    <a:lstStyle/>
-                    <a:p>
-                      <a:r>
-                        <a:rPr lang="nl-NL" b="1" noProof="0" dirty="0" err="1"/>
-                        <a:t>ProductID</a:t>
-                      </a:r>
-                      <a:endParaRPr lang="nl-NL" b="1" noProof="0" dirty="0"/>
-                    </a:p>
-                  </a:txBody>
-                  <a:tcPr/>
-                </a:tc>
-                <a:extLst>
-                  <a:ext uri="{0D108BD9-81ED-4DB2-BD59-A6C34878D82A}">
-                    <a16:rowId xmlns:a16="http://schemas.microsoft.com/office/drawing/2014/main" val="1538811982"/>
-                  </a:ext>
-                </a:extLst>
-              </a:tr>
-              <a:tr h="370840">
-                <a:tc>
-                  <a:txBody>
-                    <a:bodyPr/>
-                    <a:lstStyle/>
-                    <a:p>
-                      <a:r>
-                        <a:rPr lang="nl-NL" noProof="0" dirty="0"/>
-                        <a:t>Naam</a:t>
-                      </a:r>
-                    </a:p>
-                  </a:txBody>
-                  <a:tcPr/>
-                </a:tc>
-                <a:extLst>
-                  <a:ext uri="{0D108BD9-81ED-4DB2-BD59-A6C34878D82A}">
-                    <a16:rowId xmlns:a16="http://schemas.microsoft.com/office/drawing/2014/main" val="3674785774"/>
-                  </a:ext>
-                </a:extLst>
-              </a:tr>
-              <a:tr h="370840">
-                <a:tc>
-                  <a:txBody>
-                    <a:bodyPr/>
-                    <a:lstStyle/>
-                    <a:p>
-                      <a:r>
-                        <a:rPr lang="nl-NL" noProof="0" dirty="0"/>
-                        <a:t>Omschrijving</a:t>
-                      </a:r>
-                    </a:p>
-                  </a:txBody>
-                  <a:tcPr/>
-                </a:tc>
-                <a:extLst>
-                  <a:ext uri="{0D108BD9-81ED-4DB2-BD59-A6C34878D82A}">
-                    <a16:rowId xmlns:a16="http://schemas.microsoft.com/office/drawing/2014/main" val="2335262126"/>
-                  </a:ext>
-                </a:extLst>
-              </a:tr>
-              <a:tr h="370840">
-                <a:tc>
-                  <a:txBody>
-                    <a:bodyPr/>
-                    <a:lstStyle/>
-                    <a:p>
-                      <a:r>
-                        <a:rPr lang="nl-NL" noProof="0" dirty="0"/>
-                        <a:t>…</a:t>
-                      </a:r>
-                    </a:p>
-                  </a:txBody>
-                  <a:tcPr/>
-                </a:tc>
-                <a:extLst>
-                  <a:ext uri="{0D108BD9-81ED-4DB2-BD59-A6C34878D82A}">
-                    <a16:rowId xmlns:a16="http://schemas.microsoft.com/office/drawing/2014/main" val="2163937255"/>
-                  </a:ext>
-                </a:extLst>
-              </a:tr>
-            </a:tbl>
-          </a:graphicData>
-        </a:graphic>
-      </p:graphicFrame>
-      <p:cxnSp>
-        <p:nvCxnSpPr>
-          <p:cNvPr id="14" name="Straight Arrow Connector 13">
-            <a:extLst>
-              <a:ext uri="{FF2B5EF4-FFF2-40B4-BE49-F238E27FC236}">
-                <a16:creationId xmlns:a16="http://schemas.microsoft.com/office/drawing/2014/main" id="{8C5CE9CE-1036-311F-D491-F8E252E57D9B}"/>
-              </a:ext>
-            </a:extLst>
-          </p:cNvPr>
-          <p:cNvCxnSpPr/>
-          <p:nvPr/>
-        </p:nvCxnSpPr>
-        <p:spPr>
-          <a:xfrm>
-            <a:off x="2809188" y="3476135"/>
-            <a:ext cx="1466652" cy="0"/>
-          </a:xfrm>
-          <a:prstGeom prst="straightConnector1">
-            <a:avLst/>
-          </a:prstGeom>
-          <a:ln>
-            <a:headEnd type="triangle"/>
-            <a:tailEnd type="triangle"/>
-          </a:ln>
-        </p:spPr>
-        <p:style>
-          <a:lnRef idx="3">
-            <a:schemeClr val="dk1"/>
-          </a:lnRef>
-          <a:fillRef idx="0">
-            <a:schemeClr val="dk1"/>
-          </a:fillRef>
-          <a:effectRef idx="2">
-            <a:schemeClr val="dk1"/>
-          </a:effectRef>
-          <a:fontRef idx="minor">
-            <a:schemeClr val="tx1"/>
-          </a:fontRef>
-        </p:style>
-      </p:cxnSp>
-      <p:cxnSp>
-        <p:nvCxnSpPr>
-          <p:cNvPr id="17" name="Connector: Elbow 16">
-            <a:extLst>
-              <a:ext uri="{FF2B5EF4-FFF2-40B4-BE49-F238E27FC236}">
-                <a16:creationId xmlns:a16="http://schemas.microsoft.com/office/drawing/2014/main" id="{F4EEBDFA-2050-55B2-A4F3-A02F5C160EC2}"/>
-              </a:ext>
-            </a:extLst>
-          </p:cNvPr>
-          <p:cNvCxnSpPr/>
-          <p:nvPr/>
-        </p:nvCxnSpPr>
-        <p:spPr>
-          <a:xfrm flipV="1">
-            <a:off x="6096000" y="3476135"/>
-            <a:ext cx="1466652" cy="377146"/>
-          </a:xfrm>
-          <a:prstGeom prst="bentConnector3">
-            <a:avLst/>
-          </a:prstGeom>
-          <a:ln>
-            <a:headEnd type="triangle"/>
-            <a:tailEnd type="triangle"/>
-          </a:ln>
-        </p:spPr>
-        <p:style>
-          <a:lnRef idx="3">
-            <a:schemeClr val="dk1"/>
-          </a:lnRef>
-          <a:fillRef idx="0">
-            <a:schemeClr val="dk1"/>
-          </a:fillRef>
-          <a:effectRef idx="2">
-            <a:schemeClr val="dk1"/>
-          </a:effectRef>
-          <a:fontRef idx="minor">
-            <a:schemeClr val="tx1"/>
-          </a:fontRef>
-        </p:style>
-      </p:cxnSp>
-    </p:spTree>
-    <p:extLst>
-      <p:ext uri="{BB962C8B-B14F-4D97-AF65-F5344CB8AC3E}">
-        <p14:creationId xmlns:p14="http://schemas.microsoft.com/office/powerpoint/2010/main" val="1500158407"/>
-      </p:ext>
-    </p:extLst>
-  </p:cSld>
-  <p:clrMapOvr>
-    <a:masterClrMapping/>
-  </p:clrMapOvr>
-</p:sld>
-</file>
-
-<file path=ppt/slides/slide50.xml><?xml version="1.0" encoding="utf-8"?>
+<file path=ppt/slides/slide52.xml><?xml version="1.0" encoding="utf-8"?>
 <p:sld xmlns:a="http://schemas.openxmlformats.org/drawingml/2006/main" xmlns:r="http://schemas.openxmlformats.org/officeDocument/2006/relationships" xmlns:p="http://schemas.openxmlformats.org/presentationml/2006/main">
   <p:cSld>
     <p:spTree>
@@ -32635,7 +35521,7 @@
 </p:sld>
 </file>
 
-<file path=ppt/slides/slide51.xml><?xml version="1.0" encoding="utf-8"?>
+<file path=ppt/slides/slide53.xml><?xml version="1.0" encoding="utf-8"?>
 <p:sld xmlns:a="http://schemas.openxmlformats.org/drawingml/2006/main" xmlns:r="http://schemas.openxmlformats.org/officeDocument/2006/relationships" xmlns:p="http://schemas.openxmlformats.org/presentationml/2006/main">
   <p:cSld>
     <p:spTree>
@@ -32860,7 +35746,7 @@
 </p:sld>
 </file>
 
-<file path=ppt/slides/slide52.xml><?xml version="1.0" encoding="utf-8"?>
+<file path=ppt/slides/slide54.xml><?xml version="1.0" encoding="utf-8"?>
 <p:sld xmlns:a="http://schemas.openxmlformats.org/drawingml/2006/main" xmlns:r="http://schemas.openxmlformats.org/officeDocument/2006/relationships" xmlns:p="http://schemas.openxmlformats.org/presentationml/2006/main">
   <p:cSld>
     <p:spTree>
@@ -32951,7 +35837,7 @@
 </p:sld>
 </file>
 
-<file path=ppt/slides/slide53.xml><?xml version="1.0" encoding="utf-8"?>
+<file path=ppt/slides/slide55.xml><?xml version="1.0" encoding="utf-8"?>
 <p:sld xmlns:a="http://schemas.openxmlformats.org/drawingml/2006/main" xmlns:r="http://schemas.openxmlformats.org/officeDocument/2006/relationships" xmlns:p="http://schemas.openxmlformats.org/presentationml/2006/main">
   <p:cSld>
     <p:spTree>
@@ -33992,7 +36878,7 @@
 </p:sld>
 </file>
 
-<file path=ppt/slides/slide54.xml><?xml version="1.0" encoding="utf-8"?>
+<file path=ppt/slides/slide56.xml><?xml version="1.0" encoding="utf-8"?>
 <p:sld xmlns:a="http://schemas.openxmlformats.org/drawingml/2006/main" xmlns:r="http://schemas.openxmlformats.org/officeDocument/2006/relationships" xmlns:p="http://schemas.openxmlformats.org/presentationml/2006/main">
   <p:cSld>
     <p:spTree>
@@ -35008,7 +37894,7 @@
 </p:sld>
 </file>
 
-<file path=ppt/slides/slide55.xml><?xml version="1.0" encoding="utf-8"?>
+<file path=ppt/slides/slide57.xml><?xml version="1.0" encoding="utf-8"?>
 <p:sld xmlns:a="http://schemas.openxmlformats.org/drawingml/2006/main" xmlns:r="http://schemas.openxmlformats.org/officeDocument/2006/relationships" xmlns:p="http://schemas.openxmlformats.org/presentationml/2006/main">
   <p:cSld>
     <p:spTree>
@@ -36831,7 +39717,7 @@
 </p:sld>
 </file>
 
-<file path=ppt/slides/slide56.xml><?xml version="1.0" encoding="utf-8"?>
+<file path=ppt/slides/slide58.xml><?xml version="1.0" encoding="utf-8"?>
 <p:sld xmlns:a="http://schemas.openxmlformats.org/drawingml/2006/main" xmlns:r="http://schemas.openxmlformats.org/officeDocument/2006/relationships" xmlns:p="http://schemas.openxmlformats.org/presentationml/2006/main">
   <p:cSld>
     <p:spTree>
@@ -38834,7 +41720,7 @@
 </p:sld>
 </file>
 
-<file path=ppt/slides/slide57.xml><?xml version="1.0" encoding="utf-8"?>
+<file path=ppt/slides/slide59.xml><?xml version="1.0" encoding="utf-8"?>
 <p:sld xmlns:a="http://schemas.openxmlformats.org/drawingml/2006/main" xmlns:r="http://schemas.openxmlformats.org/officeDocument/2006/relationships" xmlns:p="http://schemas.openxmlformats.org/presentationml/2006/main">
   <p:cSld>
     <p:spTree>
@@ -39237,7 +42123,242 @@
 </p:sld>
 </file>
 
-<file path=ppt/slides/slide58.xml><?xml version="1.0" encoding="utf-8"?>
+<file path=ppt/slides/slide6.xml><?xml version="1.0" encoding="utf-8"?>
+<p:sld xmlns:a="http://schemas.openxmlformats.org/drawingml/2006/main" xmlns:r="http://schemas.openxmlformats.org/officeDocument/2006/relationships" xmlns:p="http://schemas.openxmlformats.org/presentationml/2006/main">
+  <p:cSld>
+    <p:spTree>
+      <p:nvGrpSpPr>
+        <p:cNvPr id="1" name=""/>
+        <p:cNvGrpSpPr/>
+        <p:nvPr/>
+      </p:nvGrpSpPr>
+      <p:grpSpPr>
+        <a:xfrm>
+          <a:off x="0" y="0"/>
+          <a:ext cx="0" cy="0"/>
+          <a:chOff x="0" y="0"/>
+          <a:chExt cx="0" cy="0"/>
+        </a:xfrm>
+      </p:grpSpPr>
+      <p:sp>
+        <p:nvSpPr>
+          <p:cNvPr id="2" name="Title 1">
+            <a:extLst>
+              <a:ext uri="{FF2B5EF4-FFF2-40B4-BE49-F238E27FC236}">
+                <a16:creationId xmlns:a16="http://schemas.microsoft.com/office/drawing/2014/main" id="{9BDFD261-0D2C-41B9-9E28-43DF575D40E0}"/>
+              </a:ext>
+            </a:extLst>
+          </p:cNvPr>
+          <p:cNvSpPr>
+            <a:spLocks noGrp="1"/>
+          </p:cNvSpPr>
+          <p:nvPr>
+            <p:ph type="title"/>
+          </p:nvPr>
+        </p:nvSpPr>
+        <p:spPr/>
+        <p:txBody>
+          <a:bodyPr>
+            <a:normAutofit/>
+          </a:bodyPr>
+          <a:lstStyle/>
+          <a:p>
+            <a:r>
+              <a:rPr lang="nl-NL" sz="3600" noProof="0" dirty="0"/>
+              <a:t>Drie soorten relaties</a:t>
+            </a:r>
+          </a:p>
+        </p:txBody>
+      </p:sp>
+      <p:graphicFrame>
+        <p:nvGraphicFramePr>
+          <p:cNvPr id="4" name="Table 6">
+            <a:extLst>
+              <a:ext uri="{FF2B5EF4-FFF2-40B4-BE49-F238E27FC236}">
+                <a16:creationId xmlns:a16="http://schemas.microsoft.com/office/drawing/2014/main" id="{03C5159B-CC96-B768-65C5-6D3F2D193877}"/>
+              </a:ext>
+            </a:extLst>
+          </p:cNvPr>
+          <p:cNvGraphicFramePr>
+            <a:graphicFrameLocks noGrp="1"/>
+          </p:cNvGraphicFramePr>
+          <p:nvPr>
+            <p:extLst>
+              <p:ext uri="{D42A27DB-BD31-4B8C-83A1-F6EECF244321}">
+                <p14:modId xmlns:p14="http://schemas.microsoft.com/office/powerpoint/2010/main" val="2438666545"/>
+              </p:ext>
+            </p:extLst>
+          </p:nvPr>
+        </p:nvGraphicFramePr>
+        <p:xfrm>
+          <a:off x="838200" y="1635709"/>
+          <a:ext cx="10442826" cy="1735556"/>
+        </p:xfrm>
+        <a:graphic>
+          <a:graphicData uri="http://schemas.openxmlformats.org/drawingml/2006/table">
+            <a:tbl>
+              <a:tblPr firstRow="1" bandRow="1">
+                <a:tableStyleId>{5C22544A-7EE6-4342-B048-85BDC9FD1C3A}</a:tableStyleId>
+              </a:tblPr>
+              <a:tblGrid>
+                <a:gridCol w="1461868">
+                  <a:extLst>
+                    <a:ext uri="{9D8B030D-6E8A-4147-A177-3AD203B41FA5}">
+                      <a16:colId xmlns:a16="http://schemas.microsoft.com/office/drawing/2014/main" val="2462131715"/>
+                    </a:ext>
+                  </a:extLst>
+                </a:gridCol>
+                <a:gridCol w="4424290">
+                  <a:extLst>
+                    <a:ext uri="{9D8B030D-6E8A-4147-A177-3AD203B41FA5}">
+                      <a16:colId xmlns:a16="http://schemas.microsoft.com/office/drawing/2014/main" val="2197458734"/>
+                    </a:ext>
+                  </a:extLst>
+                </a:gridCol>
+                <a:gridCol w="4556668">
+                  <a:extLst>
+                    <a:ext uri="{9D8B030D-6E8A-4147-A177-3AD203B41FA5}">
+                      <a16:colId xmlns:a16="http://schemas.microsoft.com/office/drawing/2014/main" val="1150342863"/>
+                    </a:ext>
+                  </a:extLst>
+                </a:gridCol>
+              </a:tblGrid>
+              <a:tr h="456205">
+                <a:tc>
+                  <a:txBody>
+                    <a:bodyPr/>
+                    <a:lstStyle/>
+                    <a:p>
+                      <a:r>
+                        <a:rPr lang="nl-NL" noProof="0" dirty="0"/>
+                        <a:t>Soort relatie</a:t>
+                      </a:r>
+                    </a:p>
+                  </a:txBody>
+                  <a:tcPr anchor="ctr"/>
+                </a:tc>
+                <a:tc>
+                  <a:txBody>
+                    <a:bodyPr/>
+                    <a:lstStyle/>
+                    <a:p>
+                      <a:r>
+                        <a:rPr lang="nl-NL" noProof="0" dirty="0"/>
+                        <a:t>Voorbeeld</a:t>
+                      </a:r>
+                    </a:p>
+                  </a:txBody>
+                  <a:tcPr anchor="ctr"/>
+                </a:tc>
+                <a:tc>
+                  <a:txBody>
+                    <a:bodyPr/>
+                    <a:lstStyle/>
+                    <a:p>
+                      <a:r>
+                        <a:rPr lang="nl-NL" noProof="0" dirty="0"/>
+                        <a:t>Structuur</a:t>
+                      </a:r>
+                    </a:p>
+                  </a:txBody>
+                  <a:tcPr anchor="ctr"/>
+                </a:tc>
+                <a:extLst>
+                  <a:ext uri="{0D108BD9-81ED-4DB2-BD59-A6C34878D82A}">
+                    <a16:rowId xmlns:a16="http://schemas.microsoft.com/office/drawing/2014/main" val="58239531"/>
+                  </a:ext>
+                </a:extLst>
+              </a:tr>
+              <a:tr h="1279351">
+                <a:tc>
+                  <a:txBody>
+                    <a:bodyPr/>
+                    <a:lstStyle/>
+                    <a:p>
+                      <a:r>
+                        <a:rPr lang="nl-NL" noProof="0" dirty="0"/>
+                        <a:t>één op één</a:t>
+                      </a:r>
+                    </a:p>
+                  </a:txBody>
+                  <a:tcPr anchor="ctr"/>
+                </a:tc>
+                <a:tc>
+                  <a:txBody>
+                    <a:bodyPr/>
+                    <a:lstStyle/>
+                    <a:p>
+                      <a:r>
+                        <a:rPr lang="nl-NL" noProof="0" dirty="0"/>
+                        <a:t>Een klant heeft één BSN.</a:t>
+                      </a:r>
+                    </a:p>
+                    <a:p>
+                      <a:endParaRPr lang="nl-NL" noProof="0" dirty="0"/>
+                    </a:p>
+                    <a:p>
+                      <a:r>
+                        <a:rPr lang="nl-NL" noProof="0" dirty="0"/>
+                        <a:t>Een BSN hoort bij één klant.</a:t>
+                      </a:r>
+                    </a:p>
+                  </a:txBody>
+                  <a:tcPr anchor="ctr"/>
+                </a:tc>
+                <a:tc>
+                  <a:txBody>
+                    <a:bodyPr/>
+                    <a:lstStyle/>
+                    <a:p>
+                      <a:r>
+                        <a:rPr lang="nl-NL" noProof="0" dirty="0"/>
+                        <a:t>Opnemen als attribuut in de tabel.</a:t>
+                      </a:r>
+                    </a:p>
+                    <a:p>
+                      <a:r>
+                        <a:rPr lang="nl-NL" noProof="0" dirty="0"/>
+                        <a:t>(</a:t>
+                      </a:r>
+                      <a:r>
+                        <a:rPr lang="nl-NL" noProof="0" dirty="0">
+                          <a:latin typeface="Courier New" panose="02070309020205020404" pitchFamily="49" charset="0"/>
+                          <a:cs typeface="Courier New" panose="02070309020205020404" pitchFamily="49" charset="0"/>
+                        </a:rPr>
+                        <a:t>Klanten</a:t>
+                      </a:r>
+                      <a:r>
+                        <a:rPr lang="nl-NL" noProof="0" dirty="0"/>
+                        <a:t>)</a:t>
+                      </a:r>
+                    </a:p>
+                  </a:txBody>
+                  <a:tcPr anchor="ctr"/>
+                </a:tc>
+                <a:extLst>
+                  <a:ext uri="{0D108BD9-81ED-4DB2-BD59-A6C34878D82A}">
+                    <a16:rowId xmlns:a16="http://schemas.microsoft.com/office/drawing/2014/main" val="2768827451"/>
+                  </a:ext>
+                </a:extLst>
+              </a:tr>
+            </a:tbl>
+          </a:graphicData>
+        </a:graphic>
+      </p:graphicFrame>
+    </p:spTree>
+    <p:extLst>
+      <p:ext uri="{BB962C8B-B14F-4D97-AF65-F5344CB8AC3E}">
+        <p14:creationId xmlns:p14="http://schemas.microsoft.com/office/powerpoint/2010/main" val="1796087029"/>
+      </p:ext>
+    </p:extLst>
+  </p:cSld>
+  <p:clrMapOvr>
+    <a:masterClrMapping/>
+  </p:clrMapOvr>
+</p:sld>
+</file>
+
+<file path=ppt/slides/slide60.xml><?xml version="1.0" encoding="utf-8"?>
 <p:sld xmlns:a="http://schemas.openxmlformats.org/drawingml/2006/main" xmlns:r="http://schemas.openxmlformats.org/officeDocument/2006/relationships" xmlns:p="http://schemas.openxmlformats.org/presentationml/2006/main">
   <p:cSld>
     <p:spTree>
@@ -39763,7 +42884,7 @@
 </p:sld>
 </file>
 
-<file path=ppt/slides/slide59.xml><?xml version="1.0" encoding="utf-8"?>
+<file path=ppt/slides/slide61.xml><?xml version="1.0" encoding="utf-8"?>
 <p:sld xmlns:a="http://schemas.openxmlformats.org/drawingml/2006/main" xmlns:r="http://schemas.openxmlformats.org/officeDocument/2006/relationships" xmlns:p="http://schemas.openxmlformats.org/presentationml/2006/main">
   <p:cSld>
     <p:spTree>
@@ -40394,242 +43515,7 @@
 </p:sld>
 </file>
 
-<file path=ppt/slides/slide6.xml><?xml version="1.0" encoding="utf-8"?>
-<p:sld xmlns:a="http://schemas.openxmlformats.org/drawingml/2006/main" xmlns:r="http://schemas.openxmlformats.org/officeDocument/2006/relationships" xmlns:p="http://schemas.openxmlformats.org/presentationml/2006/main">
-  <p:cSld>
-    <p:spTree>
-      <p:nvGrpSpPr>
-        <p:cNvPr id="1" name=""/>
-        <p:cNvGrpSpPr/>
-        <p:nvPr/>
-      </p:nvGrpSpPr>
-      <p:grpSpPr>
-        <a:xfrm>
-          <a:off x="0" y="0"/>
-          <a:ext cx="0" cy="0"/>
-          <a:chOff x="0" y="0"/>
-          <a:chExt cx="0" cy="0"/>
-        </a:xfrm>
-      </p:grpSpPr>
-      <p:sp>
-        <p:nvSpPr>
-          <p:cNvPr id="2" name="Title 1">
-            <a:extLst>
-              <a:ext uri="{FF2B5EF4-FFF2-40B4-BE49-F238E27FC236}">
-                <a16:creationId xmlns:a16="http://schemas.microsoft.com/office/drawing/2014/main" id="{9BDFD261-0D2C-41B9-9E28-43DF575D40E0}"/>
-              </a:ext>
-            </a:extLst>
-          </p:cNvPr>
-          <p:cNvSpPr>
-            <a:spLocks noGrp="1"/>
-          </p:cNvSpPr>
-          <p:nvPr>
-            <p:ph type="title"/>
-          </p:nvPr>
-        </p:nvSpPr>
-        <p:spPr/>
-        <p:txBody>
-          <a:bodyPr>
-            <a:normAutofit/>
-          </a:bodyPr>
-          <a:lstStyle/>
-          <a:p>
-            <a:r>
-              <a:rPr lang="nl-NL" sz="3600" noProof="0" dirty="0"/>
-              <a:t>Drie soorten relaties</a:t>
-            </a:r>
-          </a:p>
-        </p:txBody>
-      </p:sp>
-      <p:graphicFrame>
-        <p:nvGraphicFramePr>
-          <p:cNvPr id="4" name="Table 6">
-            <a:extLst>
-              <a:ext uri="{FF2B5EF4-FFF2-40B4-BE49-F238E27FC236}">
-                <a16:creationId xmlns:a16="http://schemas.microsoft.com/office/drawing/2014/main" id="{03C5159B-CC96-B768-65C5-6D3F2D193877}"/>
-              </a:ext>
-            </a:extLst>
-          </p:cNvPr>
-          <p:cNvGraphicFramePr>
-            <a:graphicFrameLocks noGrp="1"/>
-          </p:cNvGraphicFramePr>
-          <p:nvPr>
-            <p:extLst>
-              <p:ext uri="{D42A27DB-BD31-4B8C-83A1-F6EECF244321}">
-                <p14:modId xmlns:p14="http://schemas.microsoft.com/office/powerpoint/2010/main" val="2438666545"/>
-              </p:ext>
-            </p:extLst>
-          </p:nvPr>
-        </p:nvGraphicFramePr>
-        <p:xfrm>
-          <a:off x="838200" y="1635709"/>
-          <a:ext cx="10442826" cy="1735556"/>
-        </p:xfrm>
-        <a:graphic>
-          <a:graphicData uri="http://schemas.openxmlformats.org/drawingml/2006/table">
-            <a:tbl>
-              <a:tblPr firstRow="1" bandRow="1">
-                <a:tableStyleId>{5C22544A-7EE6-4342-B048-85BDC9FD1C3A}</a:tableStyleId>
-              </a:tblPr>
-              <a:tblGrid>
-                <a:gridCol w="1461868">
-                  <a:extLst>
-                    <a:ext uri="{9D8B030D-6E8A-4147-A177-3AD203B41FA5}">
-                      <a16:colId xmlns:a16="http://schemas.microsoft.com/office/drawing/2014/main" val="2462131715"/>
-                    </a:ext>
-                  </a:extLst>
-                </a:gridCol>
-                <a:gridCol w="4424290">
-                  <a:extLst>
-                    <a:ext uri="{9D8B030D-6E8A-4147-A177-3AD203B41FA5}">
-                      <a16:colId xmlns:a16="http://schemas.microsoft.com/office/drawing/2014/main" val="2197458734"/>
-                    </a:ext>
-                  </a:extLst>
-                </a:gridCol>
-                <a:gridCol w="4556668">
-                  <a:extLst>
-                    <a:ext uri="{9D8B030D-6E8A-4147-A177-3AD203B41FA5}">
-                      <a16:colId xmlns:a16="http://schemas.microsoft.com/office/drawing/2014/main" val="1150342863"/>
-                    </a:ext>
-                  </a:extLst>
-                </a:gridCol>
-              </a:tblGrid>
-              <a:tr h="456205">
-                <a:tc>
-                  <a:txBody>
-                    <a:bodyPr/>
-                    <a:lstStyle/>
-                    <a:p>
-                      <a:r>
-                        <a:rPr lang="nl-NL" noProof="0" dirty="0"/>
-                        <a:t>Soort relatie</a:t>
-                      </a:r>
-                    </a:p>
-                  </a:txBody>
-                  <a:tcPr anchor="ctr"/>
-                </a:tc>
-                <a:tc>
-                  <a:txBody>
-                    <a:bodyPr/>
-                    <a:lstStyle/>
-                    <a:p>
-                      <a:r>
-                        <a:rPr lang="nl-NL" noProof="0" dirty="0"/>
-                        <a:t>Voorbeeld</a:t>
-                      </a:r>
-                    </a:p>
-                  </a:txBody>
-                  <a:tcPr anchor="ctr"/>
-                </a:tc>
-                <a:tc>
-                  <a:txBody>
-                    <a:bodyPr/>
-                    <a:lstStyle/>
-                    <a:p>
-                      <a:r>
-                        <a:rPr lang="nl-NL" noProof="0" dirty="0"/>
-                        <a:t>Structuur</a:t>
-                      </a:r>
-                    </a:p>
-                  </a:txBody>
-                  <a:tcPr anchor="ctr"/>
-                </a:tc>
-                <a:extLst>
-                  <a:ext uri="{0D108BD9-81ED-4DB2-BD59-A6C34878D82A}">
-                    <a16:rowId xmlns:a16="http://schemas.microsoft.com/office/drawing/2014/main" val="58239531"/>
-                  </a:ext>
-                </a:extLst>
-              </a:tr>
-              <a:tr h="1279351">
-                <a:tc>
-                  <a:txBody>
-                    <a:bodyPr/>
-                    <a:lstStyle/>
-                    <a:p>
-                      <a:r>
-                        <a:rPr lang="nl-NL" noProof="0" dirty="0"/>
-                        <a:t>één op één</a:t>
-                      </a:r>
-                    </a:p>
-                  </a:txBody>
-                  <a:tcPr anchor="ctr"/>
-                </a:tc>
-                <a:tc>
-                  <a:txBody>
-                    <a:bodyPr/>
-                    <a:lstStyle/>
-                    <a:p>
-                      <a:r>
-                        <a:rPr lang="nl-NL" noProof="0" dirty="0"/>
-                        <a:t>Een klant heeft één BSN.</a:t>
-                      </a:r>
-                    </a:p>
-                    <a:p>
-                      <a:endParaRPr lang="nl-NL" noProof="0" dirty="0"/>
-                    </a:p>
-                    <a:p>
-                      <a:r>
-                        <a:rPr lang="nl-NL" noProof="0" dirty="0"/>
-                        <a:t>Een BSN hoort bij één klant.</a:t>
-                      </a:r>
-                    </a:p>
-                  </a:txBody>
-                  <a:tcPr anchor="ctr"/>
-                </a:tc>
-                <a:tc>
-                  <a:txBody>
-                    <a:bodyPr/>
-                    <a:lstStyle/>
-                    <a:p>
-                      <a:r>
-                        <a:rPr lang="nl-NL" noProof="0" dirty="0"/>
-                        <a:t>Opnemen als attribuut in de tabel.</a:t>
-                      </a:r>
-                    </a:p>
-                    <a:p>
-                      <a:r>
-                        <a:rPr lang="nl-NL" noProof="0" dirty="0"/>
-                        <a:t>(</a:t>
-                      </a:r>
-                      <a:r>
-                        <a:rPr lang="nl-NL" noProof="0" dirty="0">
-                          <a:latin typeface="Courier New" panose="02070309020205020404" pitchFamily="49" charset="0"/>
-                          <a:cs typeface="Courier New" panose="02070309020205020404" pitchFamily="49" charset="0"/>
-                        </a:rPr>
-                        <a:t>Klanten</a:t>
-                      </a:r>
-                      <a:r>
-                        <a:rPr lang="nl-NL" noProof="0" dirty="0"/>
-                        <a:t>)</a:t>
-                      </a:r>
-                    </a:p>
-                  </a:txBody>
-                  <a:tcPr anchor="ctr"/>
-                </a:tc>
-                <a:extLst>
-                  <a:ext uri="{0D108BD9-81ED-4DB2-BD59-A6C34878D82A}">
-                    <a16:rowId xmlns:a16="http://schemas.microsoft.com/office/drawing/2014/main" val="2768827451"/>
-                  </a:ext>
-                </a:extLst>
-              </a:tr>
-            </a:tbl>
-          </a:graphicData>
-        </a:graphic>
-      </p:graphicFrame>
-    </p:spTree>
-    <p:extLst>
-      <p:ext uri="{BB962C8B-B14F-4D97-AF65-F5344CB8AC3E}">
-        <p14:creationId xmlns:p14="http://schemas.microsoft.com/office/powerpoint/2010/main" val="1796087029"/>
-      </p:ext>
-    </p:extLst>
-  </p:cSld>
-  <p:clrMapOvr>
-    <a:masterClrMapping/>
-  </p:clrMapOvr>
-</p:sld>
-</file>
-
-<file path=ppt/slides/slide60.xml><?xml version="1.0" encoding="utf-8"?>
+<file path=ppt/slides/slide62.xml><?xml version="1.0" encoding="utf-8"?>
 <p:sld xmlns:a="http://schemas.openxmlformats.org/drawingml/2006/main" xmlns:r="http://schemas.openxmlformats.org/officeDocument/2006/relationships" xmlns:p="http://schemas.openxmlformats.org/presentationml/2006/main">
   <p:cSld>
     <p:spTree>
@@ -41237,7 +44123,7 @@
 </p:sld>
 </file>
 
-<file path=ppt/slides/slide61.xml><?xml version="1.0" encoding="utf-8"?>
+<file path=ppt/slides/slide63.xml><?xml version="1.0" encoding="utf-8"?>
 <p:sld xmlns:a="http://schemas.openxmlformats.org/drawingml/2006/main" xmlns:r="http://schemas.openxmlformats.org/officeDocument/2006/relationships" xmlns:p="http://schemas.openxmlformats.org/presentationml/2006/main">
   <p:cSld>
     <p:spTree>
